--- a/presentation/Feastly-DataCollection-to-AEP.pptx
+++ b/presentation/Feastly-DataCollection-to-AEP.pptx
@@ -2815,7 +2815,7 @@
     <p:bg>
       <p:bgPr>
         <a:solidFill>
-          <a:srgbClr val="2B2320"/>
+          <a:srgbClr val="1F1F1F"/>
         </a:solidFill>
       </p:bgPr>
     </p:bg>
@@ -2848,11 +2848,11 @@
             <a:avLst/>
           </a:prstGeom>
           <a:solidFill>
-            <a:srgbClr val="FF5722"/>
+            <a:srgbClr val="EB1000"/>
           </a:solidFill>
           <a:ln w="12700">
             <a:solidFill>
-              <a:srgbClr val="FF5722"/>
+              <a:srgbClr val="EB1000"/>
             </a:solidFill>
             <a:prstDash val="solid"/>
           </a:ln>
@@ -2873,11 +2873,11 @@
             <a:avLst/>
           </a:prstGeom>
           <a:solidFill>
-            <a:srgbClr val="FFB300"/>
+            <a:srgbClr val="FFA311"/>
           </a:solidFill>
           <a:ln w="12700">
             <a:solidFill>
-              <a:srgbClr val="FFB300"/>
+              <a:srgbClr val="FFA311"/>
             </a:solidFill>
             <a:prstDash val="solid"/>
           </a:ln>
@@ -2946,11 +2946,11 @@
             <a:r>
               <a:rPr lang="en-US" sz="3000" b="1" dirty="0">
                 <a:solidFill>
-                  <a:srgbClr val="FFB300"/>
-                </a:solidFill>
-                <a:latin typeface="Cambria" pitchFamily="34" charset="0"/>
-                <a:ea typeface="Cambria" pitchFamily="34" charset="-122"/>
-                <a:cs typeface="Cambria" pitchFamily="34" charset="-120"/>
+                  <a:srgbClr val="FFA311"/>
+                </a:solidFill>
+                <a:latin typeface="Adobe Clean" pitchFamily="34" charset="0"/>
+                <a:ea typeface="Adobe Clean" pitchFamily="34" charset="-122"/>
+                <a:cs typeface="Adobe Clean" pitchFamily="34" charset="-120"/>
               </a:rPr>
               <a:t>Feastly</a:t>
             </a:r>
@@ -2987,9 +2987,9 @@
                 <a:solidFill>
                   <a:srgbClr val="FFFFFF"/>
                 </a:solidFill>
-                <a:latin typeface="Cambria" pitchFamily="34" charset="0"/>
-                <a:ea typeface="Cambria" pitchFamily="34" charset="-122"/>
-                <a:cs typeface="Cambria" pitchFamily="34" charset="-120"/>
+                <a:latin typeface="Adobe Clean" pitchFamily="34" charset="0"/>
+                <a:ea typeface="Adobe Clean" pitchFamily="34" charset="-122"/>
+                <a:cs typeface="Adobe Clean" pitchFamily="34" charset="-120"/>
               </a:rPr>
               <a:t>Understanding Data Collection → AEP</a:t>
             </a:r>
@@ -3026,9 +3026,9 @@
                 <a:solidFill>
                   <a:srgbClr val="CADCFC"/>
                 </a:solidFill>
-                <a:latin typeface="Calibri" pitchFamily="34" charset="0"/>
-                <a:ea typeface="Calibri" pitchFamily="34" charset="-122"/>
-                <a:cs typeface="Calibri" pitchFamily="34" charset="-120"/>
+                <a:latin typeface="Adobe Clean" pitchFamily="34" charset="0"/>
+                <a:ea typeface="Adobe Clean" pitchFamily="34" charset="-122"/>
+                <a:cs typeface="Adobe Clean" pitchFamily="34" charset="-120"/>
               </a:rPr>
               <a:t>How a website sends streaming events, profile attributes and identity into Adobe Experience Platform — the simple, standard way.</a:t>
             </a:r>
@@ -3063,11 +3063,11 @@
             <a:r>
               <a:rPr lang="en-US" sz="1300" i="1" dirty="0">
                 <a:solidFill>
-                  <a:srgbClr val="A89B94"/>
-                </a:solidFill>
-                <a:latin typeface="Calibri" pitchFamily="34" charset="0"/>
-                <a:ea typeface="Calibri" pitchFamily="34" charset="-122"/>
-                <a:cs typeface="Calibri" pitchFamily="34" charset="-120"/>
+                  <a:srgbClr val="9B9B9B"/>
+                </a:solidFill>
+                <a:latin typeface="Adobe Clean" pitchFamily="34" charset="0"/>
+                <a:ea typeface="Adobe Clean" pitchFamily="34" charset="-122"/>
+                <a:cs typeface="Adobe Clean" pitchFamily="34" charset="-120"/>
               </a:rPr>
               <a:t>A hands-on demo for the AEP Support team</a:t>
             </a:r>
@@ -3134,11 +3134,11 @@
             <a:r>
               <a:rPr lang="en-US" sz="1250" b="1" spc="200" kern="0" dirty="0">
                 <a:solidFill>
-                  <a:srgbClr val="FF5722"/>
-                </a:solidFill>
-                <a:latin typeface="Calibri" pitchFamily="34" charset="0"/>
-                <a:ea typeface="Calibri" pitchFamily="34" charset="-122"/>
-                <a:cs typeface="Calibri" pitchFamily="34" charset="-120"/>
+                  <a:srgbClr val="EB1000"/>
+                </a:solidFill>
+                <a:latin typeface="Adobe Clean" pitchFamily="34" charset="0"/>
+                <a:ea typeface="Adobe Clean" pitchFamily="34" charset="-122"/>
+                <a:cs typeface="Adobe Clean" pitchFamily="34" charset="-120"/>
               </a:rPr>
               <a:t>FOUNDATIONS · 5</a:t>
             </a:r>
@@ -3173,11 +3173,11 @@
             <a:r>
               <a:rPr lang="en-US" sz="3200" b="1" dirty="0">
                 <a:solidFill>
-                  <a:srgbClr val="2B2320"/>
-                </a:solidFill>
-                <a:latin typeface="Cambria" pitchFamily="34" charset="0"/>
-                <a:ea typeface="Cambria" pitchFamily="34" charset="-122"/>
-                <a:cs typeface="Cambria" pitchFamily="34" charset="-120"/>
+                  <a:srgbClr val="1F1F1F"/>
+                </a:solidFill>
+                <a:latin typeface="Adobe Clean" pitchFamily="34" charset="0"/>
+                <a:ea typeface="Adobe Clean" pitchFamily="34" charset="-122"/>
+                <a:cs typeface="Adobe Clean" pitchFamily="34" charset="-120"/>
               </a:rPr>
               <a:t>Publishing Flow &amp; Libraries</a:t>
             </a:r>
@@ -3212,11 +3212,11 @@
             <a:r>
               <a:rPr lang="en-US" sz="1500" dirty="0">
                 <a:solidFill>
-                  <a:srgbClr val="7D726C"/>
-                </a:solidFill>
-                <a:latin typeface="Calibri" pitchFamily="34" charset="0"/>
-                <a:ea typeface="Calibri" pitchFamily="34" charset="-122"/>
-                <a:cs typeface="Calibri" pitchFamily="34" charset="-120"/>
+                  <a:srgbClr val="6B6B6B"/>
+                </a:solidFill>
+                <a:latin typeface="Adobe Clean" pitchFamily="34" charset="0"/>
+                <a:ea typeface="Adobe Clean" pitchFamily="34" charset="-122"/>
+                <a:cs typeface="Adobe Clean" pitchFamily="34" charset="-120"/>
               </a:rPr>
               <a:t>A Library bundles your changes; you Build it, then promote it through environments.</a:t>
             </a:r>
@@ -3241,7 +3241,7 @@
             </a:avLst>
           </a:prstGeom>
           <a:solidFill>
-            <a:srgbClr val="F4EEEA"/>
+            <a:srgbClr val="F2F2F2"/>
           </a:solidFill>
           <a:ln/>
         </p:spPr>
@@ -3309,11 +3309,11 @@
             <a:r>
               <a:rPr lang="en-US" sz="1450" b="1" dirty="0">
                 <a:solidFill>
-                  <a:srgbClr val="2B2320"/>
-                </a:solidFill>
-                <a:latin typeface="Calibri" pitchFamily="34" charset="0"/>
-                <a:ea typeface="Calibri" pitchFamily="34" charset="-122"/>
-                <a:cs typeface="Calibri" pitchFamily="34" charset="-120"/>
+                  <a:srgbClr val="1F1F1F"/>
+                </a:solidFill>
+                <a:latin typeface="Adobe Clean" pitchFamily="34" charset="0"/>
+                <a:ea typeface="Adobe Clean" pitchFamily="34" charset="-122"/>
+                <a:cs typeface="Adobe Clean" pitchFamily="34" charset="-120"/>
               </a:rPr>
               <a:t>Changes</a:t>
             </a:r>
@@ -3348,11 +3348,11 @@
             <a:r>
               <a:rPr lang="en-US" sz="1150" dirty="0">
                 <a:solidFill>
-                  <a:srgbClr val="7D726C"/>
-                </a:solidFill>
-                <a:latin typeface="Calibri" pitchFamily="34" charset="0"/>
-                <a:ea typeface="Calibri" pitchFamily="34" charset="-122"/>
-                <a:cs typeface="Calibri" pitchFamily="34" charset="-120"/>
+                  <a:srgbClr val="6B6B6B"/>
+                </a:solidFill>
+                <a:latin typeface="Adobe Clean" pitchFamily="34" charset="0"/>
+                <a:ea typeface="Adobe Clean" pitchFamily="34" charset="-122"/>
+                <a:cs typeface="Adobe Clean" pitchFamily="34" charset="-120"/>
               </a:rPr>
               <a:t>Edit data</a:t>
             </a:r>
@@ -3365,11 +3365,11 @@
             <a:r>
               <a:rPr lang="en-US" sz="1150" dirty="0">
                 <a:solidFill>
-                  <a:srgbClr val="7D726C"/>
-                </a:solidFill>
-                <a:latin typeface="Calibri" pitchFamily="34" charset="0"/>
-                <a:ea typeface="Calibri" pitchFamily="34" charset="-122"/>
-                <a:cs typeface="Calibri" pitchFamily="34" charset="-120"/>
+                  <a:srgbClr val="6B6B6B"/>
+                </a:solidFill>
+                <a:latin typeface="Adobe Clean" pitchFamily="34" charset="0"/>
+                <a:ea typeface="Adobe Clean" pitchFamily="34" charset="-122"/>
+                <a:cs typeface="Adobe Clean" pitchFamily="34" charset="-120"/>
               </a:rPr>
               <a:t>elements &amp; rules</a:t>
             </a:r>
@@ -3404,7 +3404,7 @@
             <a:r>
               <a:rPr lang="en-US" sz="1500" b="1" dirty="0">
                 <a:solidFill>
-                  <a:srgbClr val="FF5722"/>
+                  <a:srgbClr val="EB1000"/>
                 </a:solidFill>
               </a:rPr>
               <a:t>▸</a:t>
@@ -3430,7 +3430,7 @@
             </a:avLst>
           </a:prstGeom>
           <a:solidFill>
-            <a:srgbClr val="F4EEEA"/>
+            <a:srgbClr val="F2F2F2"/>
           </a:solidFill>
           <a:ln/>
         </p:spPr>
@@ -3498,11 +3498,11 @@
             <a:r>
               <a:rPr lang="en-US" sz="1450" b="1" dirty="0">
                 <a:solidFill>
-                  <a:srgbClr val="2B2320"/>
-                </a:solidFill>
-                <a:latin typeface="Calibri" pitchFamily="34" charset="0"/>
-                <a:ea typeface="Calibri" pitchFamily="34" charset="-122"/>
-                <a:cs typeface="Calibri" pitchFamily="34" charset="-120"/>
+                  <a:srgbClr val="1F1F1F"/>
+                </a:solidFill>
+                <a:latin typeface="Adobe Clean" pitchFamily="34" charset="0"/>
+                <a:ea typeface="Adobe Clean" pitchFamily="34" charset="-122"/>
+                <a:cs typeface="Adobe Clean" pitchFamily="34" charset="-120"/>
               </a:rPr>
               <a:t>Library</a:t>
             </a:r>
@@ -3537,11 +3537,11 @@
             <a:r>
               <a:rPr lang="en-US" sz="1150" dirty="0">
                 <a:solidFill>
-                  <a:srgbClr val="7D726C"/>
-                </a:solidFill>
-                <a:latin typeface="Calibri" pitchFamily="34" charset="0"/>
-                <a:ea typeface="Calibri" pitchFamily="34" charset="-122"/>
-                <a:cs typeface="Calibri" pitchFamily="34" charset="-120"/>
+                  <a:srgbClr val="6B6B6B"/>
+                </a:solidFill>
+                <a:latin typeface="Adobe Clean" pitchFamily="34" charset="0"/>
+                <a:ea typeface="Adobe Clean" pitchFamily="34" charset="-122"/>
+                <a:cs typeface="Adobe Clean" pitchFamily="34" charset="-120"/>
               </a:rPr>
               <a:t>Bundle the</a:t>
             </a:r>
@@ -3554,11 +3554,11 @@
             <a:r>
               <a:rPr lang="en-US" sz="1150" dirty="0">
                 <a:solidFill>
-                  <a:srgbClr val="7D726C"/>
-                </a:solidFill>
-                <a:latin typeface="Calibri" pitchFamily="34" charset="0"/>
-                <a:ea typeface="Calibri" pitchFamily="34" charset="-122"/>
-                <a:cs typeface="Calibri" pitchFamily="34" charset="-120"/>
+                  <a:srgbClr val="6B6B6B"/>
+                </a:solidFill>
+                <a:latin typeface="Adobe Clean" pitchFamily="34" charset="0"/>
+                <a:ea typeface="Adobe Clean" pitchFamily="34" charset="-122"/>
+                <a:cs typeface="Adobe Clean" pitchFamily="34" charset="-120"/>
               </a:rPr>
               <a:t>changes</a:t>
             </a:r>
@@ -3593,7 +3593,7 @@
             <a:r>
               <a:rPr lang="en-US" sz="1500" b="1" dirty="0">
                 <a:solidFill>
-                  <a:srgbClr val="FF5722"/>
+                  <a:srgbClr val="EB1000"/>
                 </a:solidFill>
               </a:rPr>
               <a:t>▸</a:t>
@@ -3619,7 +3619,7 @@
             </a:avLst>
           </a:prstGeom>
           <a:solidFill>
-            <a:srgbClr val="F4EEEA"/>
+            <a:srgbClr val="F2F2F2"/>
           </a:solidFill>
           <a:ln/>
         </p:spPr>
@@ -3687,11 +3687,11 @@
             <a:r>
               <a:rPr lang="en-US" sz="1450" b="1" dirty="0">
                 <a:solidFill>
-                  <a:srgbClr val="2B2320"/>
-                </a:solidFill>
-                <a:latin typeface="Calibri" pitchFamily="34" charset="0"/>
-                <a:ea typeface="Calibri" pitchFamily="34" charset="-122"/>
-                <a:cs typeface="Calibri" pitchFamily="34" charset="-120"/>
+                  <a:srgbClr val="1F1F1F"/>
+                </a:solidFill>
+                <a:latin typeface="Adobe Clean" pitchFamily="34" charset="0"/>
+                <a:ea typeface="Adobe Clean" pitchFamily="34" charset="-122"/>
+                <a:cs typeface="Adobe Clean" pitchFamily="34" charset="-120"/>
               </a:rPr>
               <a:t>Build</a:t>
             </a:r>
@@ -3726,11 +3726,11 @@
             <a:r>
               <a:rPr lang="en-US" sz="1150" dirty="0">
                 <a:solidFill>
-                  <a:srgbClr val="7D726C"/>
-                </a:solidFill>
-                <a:latin typeface="Calibri" pitchFamily="34" charset="0"/>
-                <a:ea typeface="Calibri" pitchFamily="34" charset="-122"/>
-                <a:cs typeface="Calibri" pitchFamily="34" charset="-120"/>
+                  <a:srgbClr val="6B6B6B"/>
+                </a:solidFill>
+                <a:latin typeface="Adobe Clean" pitchFamily="34" charset="0"/>
+                <a:ea typeface="Adobe Clean" pitchFamily="34" charset="-122"/>
+                <a:cs typeface="Adobe Clean" pitchFamily="34" charset="-120"/>
               </a:rPr>
               <a:t>Compile to a</a:t>
             </a:r>
@@ -3743,11 +3743,11 @@
             <a:r>
               <a:rPr lang="en-US" sz="1150" dirty="0">
                 <a:solidFill>
-                  <a:srgbClr val="7D726C"/>
-                </a:solidFill>
-                <a:latin typeface="Calibri" pitchFamily="34" charset="0"/>
-                <a:ea typeface="Calibri" pitchFamily="34" charset="-122"/>
-                <a:cs typeface="Calibri" pitchFamily="34" charset="-120"/>
+                  <a:srgbClr val="6B6B6B"/>
+                </a:solidFill>
+                <a:latin typeface="Adobe Clean" pitchFamily="34" charset="0"/>
+                <a:ea typeface="Adobe Clean" pitchFamily="34" charset="-122"/>
+                <a:cs typeface="Adobe Clean" pitchFamily="34" charset="-120"/>
               </a:rPr>
               <a:t>script file</a:t>
             </a:r>
@@ -3782,7 +3782,7 @@
             <a:r>
               <a:rPr lang="en-US" sz="1500" b="1" dirty="0">
                 <a:solidFill>
-                  <a:srgbClr val="FF5722"/>
+                  <a:srgbClr val="EB1000"/>
                 </a:solidFill>
               </a:rPr>
               <a:t>▸</a:t>
@@ -3808,7 +3808,7 @@
             </a:avLst>
           </a:prstGeom>
           <a:solidFill>
-            <a:srgbClr val="FFF3EE"/>
+            <a:srgbClr val="FDECEA"/>
           </a:solidFill>
           <a:ln/>
         </p:spPr>
@@ -3876,11 +3876,11 @@
             <a:r>
               <a:rPr lang="en-US" sz="1450" b="1" dirty="0">
                 <a:solidFill>
-                  <a:srgbClr val="2B2320"/>
-                </a:solidFill>
-                <a:latin typeface="Calibri" pitchFamily="34" charset="0"/>
-                <a:ea typeface="Calibri" pitchFamily="34" charset="-122"/>
-                <a:cs typeface="Calibri" pitchFamily="34" charset="-120"/>
+                  <a:srgbClr val="1F1F1F"/>
+                </a:solidFill>
+                <a:latin typeface="Adobe Clean" pitchFamily="34" charset="0"/>
+                <a:ea typeface="Adobe Clean" pitchFamily="34" charset="-122"/>
+                <a:cs typeface="Adobe Clean" pitchFamily="34" charset="-120"/>
               </a:rPr>
               <a:t>Development</a:t>
             </a:r>
@@ -3915,11 +3915,11 @@
             <a:r>
               <a:rPr lang="en-US" sz="1150" dirty="0">
                 <a:solidFill>
-                  <a:srgbClr val="7D726C"/>
-                </a:solidFill>
-                <a:latin typeface="Calibri" pitchFamily="34" charset="0"/>
-                <a:ea typeface="Calibri" pitchFamily="34" charset="-122"/>
-                <a:cs typeface="Calibri" pitchFamily="34" charset="-120"/>
+                  <a:srgbClr val="6B6B6B"/>
+                </a:solidFill>
+                <a:latin typeface="Adobe Clean" pitchFamily="34" charset="0"/>
+                <a:ea typeface="Adobe Clean" pitchFamily="34" charset="-122"/>
+                <a:cs typeface="Adobe Clean" pitchFamily="34" charset="-120"/>
               </a:rPr>
               <a:t>Test on the</a:t>
             </a:r>
@@ -3932,11 +3932,11 @@
             <a:r>
               <a:rPr lang="en-US" sz="1150" dirty="0">
                 <a:solidFill>
-                  <a:srgbClr val="7D726C"/>
-                </a:solidFill>
-                <a:latin typeface="Calibri" pitchFamily="34" charset="0"/>
-                <a:ea typeface="Calibri" pitchFamily="34" charset="-122"/>
-                <a:cs typeface="Calibri" pitchFamily="34" charset="-120"/>
+                  <a:srgbClr val="6B6B6B"/>
+                </a:solidFill>
+                <a:latin typeface="Adobe Clean" pitchFamily="34" charset="0"/>
+                <a:ea typeface="Adobe Clean" pitchFamily="34" charset="-122"/>
+                <a:cs typeface="Adobe Clean" pitchFamily="34" charset="-120"/>
               </a:rPr>
               <a:t>dev site</a:t>
             </a:r>
@@ -3971,7 +3971,7 @@
             <a:r>
               <a:rPr lang="en-US" sz="1500" b="1" dirty="0">
                 <a:solidFill>
-                  <a:srgbClr val="FF5722"/>
+                  <a:srgbClr val="EB1000"/>
                 </a:solidFill>
               </a:rPr>
               <a:t>▸</a:t>
@@ -3997,7 +3997,7 @@
             </a:avLst>
           </a:prstGeom>
           <a:solidFill>
-            <a:srgbClr val="FFF3EE"/>
+            <a:srgbClr val="FDECEA"/>
           </a:solidFill>
           <a:ln/>
         </p:spPr>
@@ -4065,11 +4065,11 @@
             <a:r>
               <a:rPr lang="en-US" sz="1450" b="1" dirty="0">
                 <a:solidFill>
-                  <a:srgbClr val="2B2320"/>
-                </a:solidFill>
-                <a:latin typeface="Calibri" pitchFamily="34" charset="0"/>
-                <a:ea typeface="Calibri" pitchFamily="34" charset="-122"/>
-                <a:cs typeface="Calibri" pitchFamily="34" charset="-120"/>
+                  <a:srgbClr val="1F1F1F"/>
+                </a:solidFill>
+                <a:latin typeface="Adobe Clean" pitchFamily="34" charset="0"/>
+                <a:ea typeface="Adobe Clean" pitchFamily="34" charset="-122"/>
+                <a:cs typeface="Adobe Clean" pitchFamily="34" charset="-120"/>
               </a:rPr>
               <a:t>Staging</a:t>
             </a:r>
@@ -4104,11 +4104,11 @@
             <a:r>
               <a:rPr lang="en-US" sz="1150" dirty="0">
                 <a:solidFill>
-                  <a:srgbClr val="7D726C"/>
-                </a:solidFill>
-                <a:latin typeface="Calibri" pitchFamily="34" charset="0"/>
-                <a:ea typeface="Calibri" pitchFamily="34" charset="-122"/>
-                <a:cs typeface="Calibri" pitchFamily="34" charset="-120"/>
+                  <a:srgbClr val="6B6B6B"/>
+                </a:solidFill>
+                <a:latin typeface="Adobe Clean" pitchFamily="34" charset="0"/>
+                <a:ea typeface="Adobe Clean" pitchFamily="34" charset="-122"/>
+                <a:cs typeface="Adobe Clean" pitchFamily="34" charset="-120"/>
               </a:rPr>
               <a:t>QA / approval</a:t>
             </a:r>
@@ -4143,7 +4143,7 @@
             <a:r>
               <a:rPr lang="en-US" sz="1500" b="1" dirty="0">
                 <a:solidFill>
-                  <a:srgbClr val="FF5722"/>
+                  <a:srgbClr val="EB1000"/>
                 </a:solidFill>
               </a:rPr>
               <a:t>▸</a:t>
@@ -4169,7 +4169,7 @@
             </a:avLst>
           </a:prstGeom>
           <a:solidFill>
-            <a:srgbClr val="FFF3EE"/>
+            <a:srgbClr val="FDECEA"/>
           </a:solidFill>
           <a:ln/>
         </p:spPr>
@@ -4237,11 +4237,11 @@
             <a:r>
               <a:rPr lang="en-US" sz="1450" b="1" dirty="0">
                 <a:solidFill>
-                  <a:srgbClr val="2B2320"/>
-                </a:solidFill>
-                <a:latin typeface="Calibri" pitchFamily="34" charset="0"/>
-                <a:ea typeface="Calibri" pitchFamily="34" charset="-122"/>
-                <a:cs typeface="Calibri" pitchFamily="34" charset="-120"/>
+                  <a:srgbClr val="1F1F1F"/>
+                </a:solidFill>
+                <a:latin typeface="Adobe Clean" pitchFamily="34" charset="0"/>
+                <a:ea typeface="Adobe Clean" pitchFamily="34" charset="-122"/>
+                <a:cs typeface="Adobe Clean" pitchFamily="34" charset="-120"/>
               </a:rPr>
               <a:t>Production</a:t>
             </a:r>
@@ -4276,11 +4276,11 @@
             <a:r>
               <a:rPr lang="en-US" sz="1150" dirty="0">
                 <a:solidFill>
-                  <a:srgbClr val="7D726C"/>
-                </a:solidFill>
-                <a:latin typeface="Calibri" pitchFamily="34" charset="0"/>
-                <a:ea typeface="Calibri" pitchFamily="34" charset="-122"/>
-                <a:cs typeface="Calibri" pitchFamily="34" charset="-120"/>
+                  <a:srgbClr val="6B6B6B"/>
+                </a:solidFill>
+                <a:latin typeface="Adobe Clean" pitchFamily="34" charset="0"/>
+                <a:ea typeface="Adobe Clean" pitchFamily="34" charset="-122"/>
+                <a:cs typeface="Adobe Clean" pitchFamily="34" charset="-120"/>
               </a:rPr>
               <a:t>Live to users</a:t>
             </a:r>
@@ -4315,11 +4315,11 @@
             <a:r>
               <a:rPr lang="en-US" sz="1400" i="1" dirty="0">
                 <a:solidFill>
-                  <a:srgbClr val="7D726C"/>
-                </a:solidFill>
-                <a:latin typeface="Calibri" pitchFamily="34" charset="0"/>
-                <a:ea typeface="Calibri" pitchFamily="34" charset="-122"/>
-                <a:cs typeface="Calibri" pitchFamily="34" charset="-120"/>
+                  <a:srgbClr val="6B6B6B"/>
+                </a:solidFill>
+                <a:latin typeface="Adobe Clean" pitchFamily="34" charset="0"/>
+                <a:ea typeface="Adobe Clean" pitchFamily="34" charset="-122"/>
+                <a:cs typeface="Adobe Clean" pitchFamily="34" charset="-120"/>
               </a:rPr>
               <a:t>For this demo we build to Development and embed that script — the same flow scales to Staging → Production.</a:t>
             </a:r>
@@ -4341,7 +4341,7 @@
     <p:bg>
       <p:bgPr>
         <a:solidFill>
-          <a:srgbClr val="2B2320"/>
+          <a:srgbClr val="1F1F1F"/>
         </a:solidFill>
       </p:bgPr>
     </p:bg>
@@ -4386,11 +4386,11 @@
             <a:r>
               <a:rPr lang="en-US" sz="1250" b="1" spc="200" kern="0" dirty="0">
                 <a:solidFill>
-                  <a:srgbClr val="FFB300"/>
-                </a:solidFill>
-                <a:latin typeface="Calibri" pitchFamily="34" charset="0"/>
-                <a:ea typeface="Calibri" pitchFamily="34" charset="-122"/>
-                <a:cs typeface="Calibri" pitchFamily="34" charset="-120"/>
+                  <a:srgbClr val="FFA311"/>
+                </a:solidFill>
+                <a:latin typeface="Adobe Clean" pitchFamily="34" charset="0"/>
+                <a:ea typeface="Adobe Clean" pitchFamily="34" charset="-122"/>
+                <a:cs typeface="Adobe Clean" pitchFamily="34" charset="-120"/>
               </a:rPr>
               <a:t>FOUNDATIONS · 6</a:t>
             </a:r>
@@ -4427,9 +4427,9 @@
                 <a:solidFill>
                   <a:srgbClr val="FFFFFF"/>
                 </a:solidFill>
-                <a:latin typeface="Cambria" pitchFamily="34" charset="0"/>
-                <a:ea typeface="Cambria" pitchFamily="34" charset="-122"/>
-                <a:cs typeface="Cambria" pitchFamily="34" charset="-120"/>
+                <a:latin typeface="Adobe Clean" pitchFamily="34" charset="0"/>
+                <a:ea typeface="Adobe Clean" pitchFamily="34" charset="-122"/>
+                <a:cs typeface="Adobe Clean" pitchFamily="34" charset="-120"/>
               </a:rPr>
               <a:t>The Datastream pipeline</a:t>
             </a:r>
@@ -4466,9 +4466,9 @@
                 <a:solidFill>
                   <a:srgbClr val="CADCFC"/>
                 </a:solidFill>
-                <a:latin typeface="Calibri" pitchFamily="34" charset="0"/>
-                <a:ea typeface="Calibri" pitchFamily="34" charset="-122"/>
-                <a:cs typeface="Calibri" pitchFamily="34" charset="-120"/>
+                <a:latin typeface="Adobe Clean" pitchFamily="34" charset="0"/>
+                <a:ea typeface="Adobe Clean" pitchFamily="34" charset="-122"/>
+                <a:cs typeface="Adobe Clean" pitchFamily="34" charset="-120"/>
               </a:rPr>
               <a:t>The Web SDK sends ONE event to the Edge. The datastream decides which Adobe apps receive it — server-side.</a:t>
             </a:r>
@@ -4493,11 +4493,11 @@
             </a:avLst>
           </a:prstGeom>
           <a:solidFill>
-            <a:srgbClr val="3A302B"/>
+            <a:srgbClr val="2C2C2C"/>
           </a:solidFill>
           <a:ln w="15875">
             <a:solidFill>
-              <a:srgbClr val="FF5722"/>
+              <a:srgbClr val="EB1000"/>
             </a:solidFill>
             <a:prstDash val="solid"/>
           </a:ln>
@@ -4532,9 +4532,9 @@
                 <a:solidFill>
                   <a:srgbClr val="FFFFFF"/>
                 </a:solidFill>
-                <a:latin typeface="Calibri" pitchFamily="34" charset="0"/>
-                <a:ea typeface="Calibri" pitchFamily="34" charset="-122"/>
-                <a:cs typeface="Calibri" pitchFamily="34" charset="-120"/>
+                <a:latin typeface="Adobe Clean" pitchFamily="34" charset="0"/>
+                <a:ea typeface="Adobe Clean" pitchFamily="34" charset="-122"/>
+                <a:cs typeface="Adobe Clean" pitchFamily="34" charset="-120"/>
               </a:rPr>
               <a:t>🖥️ Browser</a:t>
             </a:r>
@@ -4549,9 +4549,9 @@
                 <a:solidFill>
                   <a:srgbClr val="FFFFFF"/>
                 </a:solidFill>
-                <a:latin typeface="Calibri" pitchFamily="34" charset="0"/>
-                <a:ea typeface="Calibri" pitchFamily="34" charset="-122"/>
-                <a:cs typeface="Calibri" pitchFamily="34" charset="-120"/>
+                <a:latin typeface="Adobe Clean" pitchFamily="34" charset="0"/>
+                <a:ea typeface="Adobe Clean" pitchFamily="34" charset="-122"/>
+                <a:cs typeface="Adobe Clean" pitchFamily="34" charset="-120"/>
               </a:rPr>
               <a:t>Web SDK</a:t>
             </a:r>
@@ -4586,7 +4586,7 @@
             <a:r>
               <a:rPr lang="en-US" sz="2200" b="1" dirty="0">
                 <a:solidFill>
-                  <a:srgbClr val="FF5722"/>
+                  <a:srgbClr val="EB1000"/>
                 </a:solidFill>
               </a:rPr>
               <a:t>▸</a:t>
@@ -4612,11 +4612,11 @@
             </a:avLst>
           </a:prstGeom>
           <a:solidFill>
-            <a:srgbClr val="3A302B"/>
+            <a:srgbClr val="2C2C2C"/>
           </a:solidFill>
           <a:ln w="15875">
             <a:solidFill>
-              <a:srgbClr val="FF5722"/>
+              <a:srgbClr val="EB1000"/>
             </a:solidFill>
             <a:prstDash val="solid"/>
           </a:ln>
@@ -4651,9 +4651,9 @@
                 <a:solidFill>
                   <a:srgbClr val="FFFFFF"/>
                 </a:solidFill>
-                <a:latin typeface="Calibri" pitchFamily="34" charset="0"/>
-                <a:ea typeface="Calibri" pitchFamily="34" charset="-122"/>
-                <a:cs typeface="Calibri" pitchFamily="34" charset="-120"/>
+                <a:latin typeface="Adobe Clean" pitchFamily="34" charset="0"/>
+                <a:ea typeface="Adobe Clean" pitchFamily="34" charset="-122"/>
+                <a:cs typeface="Adobe Clean" pitchFamily="34" charset="-120"/>
               </a:rPr>
               <a:t>🔀 Edge Network</a:t>
             </a:r>
@@ -4668,9 +4668,9 @@
                 <a:solidFill>
                   <a:srgbClr val="FFFFFF"/>
                 </a:solidFill>
-                <a:latin typeface="Calibri" pitchFamily="34" charset="0"/>
-                <a:ea typeface="Calibri" pitchFamily="34" charset="-122"/>
-                <a:cs typeface="Calibri" pitchFamily="34" charset="-120"/>
+                <a:latin typeface="Adobe Clean" pitchFamily="34" charset="0"/>
+                <a:ea typeface="Adobe Clean" pitchFamily="34" charset="-122"/>
+                <a:cs typeface="Adobe Clean" pitchFamily="34" charset="-120"/>
               </a:rPr>
               <a:t>+ Datastream</a:t>
             </a:r>
@@ -4705,7 +4705,7 @@
             <a:r>
               <a:rPr lang="en-US" sz="1800" b="1" dirty="0">
                 <a:solidFill>
-                  <a:srgbClr val="FF5722"/>
+                  <a:srgbClr val="EB1000"/>
                 </a:solidFill>
               </a:rPr>
               <a:t>▸</a:t>
@@ -4731,11 +4731,11 @@
             </a:avLst>
           </a:prstGeom>
           <a:solidFill>
-            <a:srgbClr val="FF5722"/>
+            <a:srgbClr val="EB1000"/>
           </a:solidFill>
           <a:ln w="12700">
             <a:solidFill>
-              <a:srgbClr val="FF5722"/>
+              <a:srgbClr val="EB1000"/>
             </a:solidFill>
             <a:prstDash val="solid"/>
           </a:ln>
@@ -4770,9 +4770,9 @@
                 <a:solidFill>
                   <a:srgbClr val="FFFFFF"/>
                 </a:solidFill>
-                <a:latin typeface="Calibri" pitchFamily="34" charset="0"/>
-                <a:ea typeface="Calibri" pitchFamily="34" charset="-122"/>
-                <a:cs typeface="Calibri" pitchFamily="34" charset="-120"/>
+                <a:latin typeface="Adobe Clean" pitchFamily="34" charset="0"/>
+                <a:ea typeface="Adobe Clean" pitchFamily="34" charset="-122"/>
+                <a:cs typeface="Adobe Clean" pitchFamily="34" charset="-120"/>
               </a:rPr>
               <a:t>☁️ AEP</a:t>
             </a:r>
@@ -4807,11 +4807,11 @@
             <a:r>
               <a:rPr lang="en-US" sz="1200" dirty="0">
                 <a:solidFill>
-                  <a:srgbClr val="D9CFC9"/>
-                </a:solidFill>
-                <a:latin typeface="Calibri" pitchFamily="34" charset="0"/>
-                <a:ea typeface="Calibri" pitchFamily="34" charset="-122"/>
-                <a:cs typeface="Calibri" pitchFamily="34" charset="-120"/>
+                  <a:srgbClr val="CFCFCF"/>
+                </a:solidFill>
+                <a:latin typeface="Adobe Clean" pitchFamily="34" charset="0"/>
+                <a:ea typeface="Adobe Clean" pitchFamily="34" charset="-122"/>
+                <a:cs typeface="Adobe Clean" pitchFamily="34" charset="-120"/>
               </a:rPr>
               <a:t>Profiles + datasets</a:t>
             </a:r>
@@ -4846,7 +4846,7 @@
             <a:r>
               <a:rPr lang="en-US" sz="1800" b="1" dirty="0">
                 <a:solidFill>
-                  <a:srgbClr val="FF5722"/>
+                  <a:srgbClr val="EB1000"/>
                 </a:solidFill>
               </a:rPr>
               <a:t>▸</a:t>
@@ -4872,11 +4872,11 @@
             </a:avLst>
           </a:prstGeom>
           <a:solidFill>
-            <a:srgbClr val="3A302B"/>
+            <a:srgbClr val="2C2C2C"/>
           </a:solidFill>
           <a:ln w="12700">
             <a:solidFill>
-              <a:srgbClr val="5A4E48"/>
+              <a:srgbClr val="4A4A4A"/>
             </a:solidFill>
             <a:prstDash val="solid"/>
           </a:ln>
@@ -4911,9 +4911,9 @@
                 <a:solidFill>
                   <a:srgbClr val="FFFFFF"/>
                 </a:solidFill>
-                <a:latin typeface="Calibri" pitchFamily="34" charset="0"/>
-                <a:ea typeface="Calibri" pitchFamily="34" charset="-122"/>
-                <a:cs typeface="Calibri" pitchFamily="34" charset="-120"/>
+                <a:latin typeface="Adobe Clean" pitchFamily="34" charset="0"/>
+                <a:ea typeface="Adobe Clean" pitchFamily="34" charset="-122"/>
+                <a:cs typeface="Adobe Clean" pitchFamily="34" charset="-120"/>
               </a:rPr>
               <a:t>📊 Analytics</a:t>
             </a:r>
@@ -4948,11 +4948,11 @@
             <a:r>
               <a:rPr lang="en-US" sz="1200" dirty="0">
                 <a:solidFill>
-                  <a:srgbClr val="D9CFC9"/>
-                </a:solidFill>
-                <a:latin typeface="Calibri" pitchFamily="34" charset="0"/>
-                <a:ea typeface="Calibri" pitchFamily="34" charset="-122"/>
-                <a:cs typeface="Calibri" pitchFamily="34" charset="-120"/>
+                  <a:srgbClr val="CFCFCF"/>
+                </a:solidFill>
+                <a:latin typeface="Adobe Clean" pitchFamily="34" charset="0"/>
+                <a:ea typeface="Adobe Clean" pitchFamily="34" charset="-122"/>
+                <a:cs typeface="Adobe Clean" pitchFamily="34" charset="-120"/>
               </a:rPr>
               <a:t>Reports (optional)</a:t>
             </a:r>
@@ -4987,7 +4987,7 @@
             <a:r>
               <a:rPr lang="en-US" sz="1800" b="1" dirty="0">
                 <a:solidFill>
-                  <a:srgbClr val="FF5722"/>
+                  <a:srgbClr val="EB1000"/>
                 </a:solidFill>
               </a:rPr>
               <a:t>▸</a:t>
@@ -5013,11 +5013,11 @@
             </a:avLst>
           </a:prstGeom>
           <a:solidFill>
-            <a:srgbClr val="3A302B"/>
+            <a:srgbClr val="2C2C2C"/>
           </a:solidFill>
           <a:ln w="12700">
             <a:solidFill>
-              <a:srgbClr val="5A4E48"/>
+              <a:srgbClr val="4A4A4A"/>
             </a:solidFill>
             <a:prstDash val="solid"/>
           </a:ln>
@@ -5052,9 +5052,9 @@
                 <a:solidFill>
                   <a:srgbClr val="FFFFFF"/>
                 </a:solidFill>
-                <a:latin typeface="Calibri" pitchFamily="34" charset="0"/>
-                <a:ea typeface="Calibri" pitchFamily="34" charset="-122"/>
-                <a:cs typeface="Calibri" pitchFamily="34" charset="-120"/>
+                <a:latin typeface="Adobe Clean" pitchFamily="34" charset="0"/>
+                <a:ea typeface="Adobe Clean" pitchFamily="34" charset="-122"/>
+                <a:cs typeface="Adobe Clean" pitchFamily="34" charset="-120"/>
               </a:rPr>
               <a:t>🎯 Target</a:t>
             </a:r>
@@ -5089,11 +5089,11 @@
             <a:r>
               <a:rPr lang="en-US" sz="1200" dirty="0">
                 <a:solidFill>
-                  <a:srgbClr val="D9CFC9"/>
-                </a:solidFill>
-                <a:latin typeface="Calibri" pitchFamily="34" charset="0"/>
-                <a:ea typeface="Calibri" pitchFamily="34" charset="-122"/>
-                <a:cs typeface="Calibri" pitchFamily="34" charset="-120"/>
+                  <a:srgbClr val="CFCFCF"/>
+                </a:solidFill>
+                <a:latin typeface="Adobe Clean" pitchFamily="34" charset="0"/>
+                <a:ea typeface="Adobe Clean" pitchFamily="34" charset="-122"/>
+                <a:cs typeface="Adobe Clean" pitchFamily="34" charset="-120"/>
               </a:rPr>
               <a:t>Personalization (optional)</a:t>
             </a:r>
@@ -5130,9 +5130,9 @@
                 <a:solidFill>
                   <a:srgbClr val="CADCFC"/>
                 </a:solidFill>
-                <a:latin typeface="Calibri" pitchFamily="34" charset="0"/>
-                <a:ea typeface="Calibri" pitchFamily="34" charset="-122"/>
-                <a:cs typeface="Calibri" pitchFamily="34" charset="-120"/>
+                <a:latin typeface="Adobe Clean" pitchFamily="34" charset="0"/>
+                <a:ea typeface="Adobe Clean" pitchFamily="34" charset="-122"/>
+                <a:cs typeface="Adobe Clean" pitchFamily="34" charset="-120"/>
               </a:rPr>
               <a:t>Feastly enables only AEP — but the same event could feed all three without touching the website.</a:t>
             </a:r>
@@ -5199,11 +5199,11 @@
             <a:r>
               <a:rPr lang="en-US" sz="1250" b="1" spc="200" kern="0" dirty="0">
                 <a:solidFill>
-                  <a:srgbClr val="FF5722"/>
-                </a:solidFill>
-                <a:latin typeface="Calibri" pitchFamily="34" charset="0"/>
-                <a:ea typeface="Calibri" pitchFamily="34" charset="-122"/>
-                <a:cs typeface="Calibri" pitchFamily="34" charset="-120"/>
+                  <a:srgbClr val="EB1000"/>
+                </a:solidFill>
+                <a:latin typeface="Adobe Clean" pitchFamily="34" charset="0"/>
+                <a:ea typeface="Adobe Clean" pitchFamily="34" charset="-122"/>
+                <a:cs typeface="Adobe Clean" pitchFamily="34" charset="-120"/>
               </a:rPr>
               <a:t>COMPONENT 1 · AEP</a:t>
             </a:r>
@@ -5238,11 +5238,11 @@
             <a:r>
               <a:rPr lang="en-US" sz="3200" b="1" dirty="0">
                 <a:solidFill>
-                  <a:srgbClr val="2B2320"/>
-                </a:solidFill>
-                <a:latin typeface="Cambria" pitchFamily="34" charset="0"/>
-                <a:ea typeface="Cambria" pitchFamily="34" charset="-122"/>
-                <a:cs typeface="Cambria" pitchFamily="34" charset="-120"/>
+                  <a:srgbClr val="1F1F1F"/>
+                </a:solidFill>
+                <a:latin typeface="Adobe Clean" pitchFamily="34" charset="0"/>
+                <a:ea typeface="Adobe Clean" pitchFamily="34" charset="-122"/>
+                <a:cs typeface="Adobe Clean" pitchFamily="34" charset="-120"/>
               </a:rPr>
               <a:t>XDM Schema — the shape of the data</a:t>
             </a:r>
@@ -5265,7 +5265,7 @@
             <a:avLst/>
           </a:prstGeom>
           <a:solidFill>
-            <a:srgbClr val="FF5722"/>
+            <a:srgbClr val="EB1000"/>
           </a:solidFill>
           <a:ln/>
         </p:spPr>
@@ -5299,9 +5299,9 @@
                 <a:solidFill>
                   <a:srgbClr val="FFFFFF"/>
                 </a:solidFill>
-                <a:latin typeface="Calibri" pitchFamily="34" charset="0"/>
-                <a:ea typeface="Calibri" pitchFamily="34" charset="-122"/>
-                <a:cs typeface="Calibri" pitchFamily="34" charset="-120"/>
+                <a:latin typeface="Adobe Clean" pitchFamily="34" charset="0"/>
+                <a:ea typeface="Adobe Clean" pitchFamily="34" charset="-122"/>
+                <a:cs typeface="Adobe Clean" pitchFamily="34" charset="-120"/>
               </a:rPr>
               <a:t>1</a:t>
             </a:r>
@@ -5336,11 +5336,11 @@
             <a:r>
               <a:rPr lang="en-US" sz="1550" b="1" dirty="0">
                 <a:solidFill>
-                  <a:srgbClr val="2B2320"/>
-                </a:solidFill>
-                <a:latin typeface="Calibri" pitchFamily="34" charset="0"/>
-                <a:ea typeface="Calibri" pitchFamily="34" charset="-122"/>
-                <a:cs typeface="Calibri" pitchFamily="34" charset="-120"/>
+                  <a:srgbClr val="1F1F1F"/>
+                </a:solidFill>
+                <a:latin typeface="Adobe Clean" pitchFamily="34" charset="0"/>
+                <a:ea typeface="Adobe Clean" pitchFamily="34" charset="-122"/>
+                <a:cs typeface="Adobe Clean" pitchFamily="34" charset="-120"/>
               </a:rPr>
               <a:t>Class: ExperienceEvent</a:t>
             </a:r>
@@ -5375,11 +5375,11 @@
             <a:r>
               <a:rPr lang="en-US" sz="1250" dirty="0">
                 <a:solidFill>
-                  <a:srgbClr val="7D726C"/>
-                </a:solidFill>
-                <a:latin typeface="Calibri" pitchFamily="34" charset="0"/>
-                <a:ea typeface="Calibri" pitchFamily="34" charset="-122"/>
-                <a:cs typeface="Calibri" pitchFamily="34" charset="-120"/>
+                  <a:srgbClr val="6B6B6B"/>
+                </a:solidFill>
+                <a:latin typeface="Adobe Clean" pitchFamily="34" charset="0"/>
+                <a:ea typeface="Adobe Clean" pitchFamily="34" charset="-122"/>
+                <a:cs typeface="Adobe Clean" pitchFamily="34" charset="-120"/>
               </a:rPr>
               <a:t>The type of record — a time-stamped event.</a:t>
             </a:r>
@@ -5402,7 +5402,7 @@
             <a:avLst/>
           </a:prstGeom>
           <a:solidFill>
-            <a:srgbClr val="FF5722"/>
+            <a:srgbClr val="EB1000"/>
           </a:solidFill>
           <a:ln/>
         </p:spPr>
@@ -5436,9 +5436,9 @@
                 <a:solidFill>
                   <a:srgbClr val="FFFFFF"/>
                 </a:solidFill>
-                <a:latin typeface="Calibri" pitchFamily="34" charset="0"/>
-                <a:ea typeface="Calibri" pitchFamily="34" charset="-122"/>
-                <a:cs typeface="Calibri" pitchFamily="34" charset="-120"/>
+                <a:latin typeface="Adobe Clean" pitchFamily="34" charset="0"/>
+                <a:ea typeface="Adobe Clean" pitchFamily="34" charset="-122"/>
+                <a:cs typeface="Adobe Clean" pitchFamily="34" charset="-120"/>
               </a:rPr>
               <a:t>2</a:t>
             </a:r>
@@ -5473,11 +5473,11 @@
             <a:r>
               <a:rPr lang="en-US" sz="1550" b="1" dirty="0">
                 <a:solidFill>
-                  <a:srgbClr val="2B2320"/>
-                </a:solidFill>
-                <a:latin typeface="Calibri" pitchFamily="34" charset="0"/>
-                <a:ea typeface="Calibri" pitchFamily="34" charset="-122"/>
-                <a:cs typeface="Calibri" pitchFamily="34" charset="-120"/>
+                  <a:srgbClr val="1F1F1F"/>
+                </a:solidFill>
+                <a:latin typeface="Adobe Clean" pitchFamily="34" charset="0"/>
+                <a:ea typeface="Adobe Clean" pitchFamily="34" charset="-122"/>
+                <a:cs typeface="Adobe Clean" pitchFamily="34" charset="-120"/>
               </a:rPr>
               <a:t>Field groups</a:t>
             </a:r>
@@ -5512,11 +5512,11 @@
             <a:r>
               <a:rPr lang="en-US" sz="1250" dirty="0">
                 <a:solidFill>
-                  <a:srgbClr val="7D726C"/>
-                </a:solidFill>
-                <a:latin typeface="Calibri" pitchFamily="34" charset="0"/>
-                <a:ea typeface="Calibri" pitchFamily="34" charset="-122"/>
-                <a:cs typeface="Calibri" pitchFamily="34" charset="-120"/>
+                  <a:srgbClr val="6B6B6B"/>
+                </a:solidFill>
+                <a:latin typeface="Adobe Clean" pitchFamily="34" charset="0"/>
+                <a:ea typeface="Adobe Clean" pitchFamily="34" charset="-122"/>
+                <a:cs typeface="Adobe Clean" pitchFamily="34" charset="-120"/>
               </a:rPr>
               <a:t>Web SDK EE + Commerce + custom "Feastly Details".</a:t>
             </a:r>
@@ -5539,7 +5539,7 @@
             <a:avLst/>
           </a:prstGeom>
           <a:solidFill>
-            <a:srgbClr val="FF5722"/>
+            <a:srgbClr val="EB1000"/>
           </a:solidFill>
           <a:ln/>
         </p:spPr>
@@ -5573,9 +5573,9 @@
                 <a:solidFill>
                   <a:srgbClr val="FFFFFF"/>
                 </a:solidFill>
-                <a:latin typeface="Calibri" pitchFamily="34" charset="0"/>
-                <a:ea typeface="Calibri" pitchFamily="34" charset="-122"/>
-                <a:cs typeface="Calibri" pitchFamily="34" charset="-120"/>
+                <a:latin typeface="Adobe Clean" pitchFamily="34" charset="0"/>
+                <a:ea typeface="Adobe Clean" pitchFamily="34" charset="-122"/>
+                <a:cs typeface="Adobe Clean" pitchFamily="34" charset="-120"/>
               </a:rPr>
               <a:t>3</a:t>
             </a:r>
@@ -5610,11 +5610,11 @@
             <a:r>
               <a:rPr lang="en-US" sz="1550" b="1" dirty="0">
                 <a:solidFill>
-                  <a:srgbClr val="2B2320"/>
-                </a:solidFill>
-                <a:latin typeface="Calibri" pitchFamily="34" charset="0"/>
-                <a:ea typeface="Calibri" pitchFamily="34" charset="-122"/>
-                <a:cs typeface="Calibri" pitchFamily="34" charset="-120"/>
+                  <a:srgbClr val="1F1F1F"/>
+                </a:solidFill>
+                <a:latin typeface="Adobe Clean" pitchFamily="34" charset="0"/>
+                <a:ea typeface="Adobe Clean" pitchFamily="34" charset="-122"/>
+                <a:cs typeface="Adobe Clean" pitchFamily="34" charset="-120"/>
               </a:rPr>
               <a:t>Identity: Email</a:t>
             </a:r>
@@ -5649,11 +5649,11 @@
             <a:r>
               <a:rPr lang="en-US" sz="1250" dirty="0">
                 <a:solidFill>
-                  <a:srgbClr val="7D726C"/>
-                </a:solidFill>
-                <a:latin typeface="Calibri" pitchFamily="34" charset="0"/>
-                <a:ea typeface="Calibri" pitchFamily="34" charset="-122"/>
-                <a:cs typeface="Calibri" pitchFamily="34" charset="-120"/>
+                  <a:srgbClr val="6B6B6B"/>
+                </a:solidFill>
+                <a:latin typeface="Adobe Clean" pitchFamily="34" charset="0"/>
+                <a:ea typeface="Adobe Clean" pitchFamily="34" charset="-122"/>
+                <a:cs typeface="Adobe Clean" pitchFamily="34" charset="-120"/>
               </a:rPr>
               <a:t>Marked as an identity so AEP can stitch people.</a:t>
             </a:r>
@@ -5676,7 +5676,7 @@
             <a:avLst/>
           </a:prstGeom>
           <a:solidFill>
-            <a:srgbClr val="FF5722"/>
+            <a:srgbClr val="EB1000"/>
           </a:solidFill>
           <a:ln/>
         </p:spPr>
@@ -5710,9 +5710,9 @@
                 <a:solidFill>
                   <a:srgbClr val="FFFFFF"/>
                 </a:solidFill>
-                <a:latin typeface="Calibri" pitchFamily="34" charset="0"/>
-                <a:ea typeface="Calibri" pitchFamily="34" charset="-122"/>
-                <a:cs typeface="Calibri" pitchFamily="34" charset="-120"/>
+                <a:latin typeface="Adobe Clean" pitchFamily="34" charset="0"/>
+                <a:ea typeface="Adobe Clean" pitchFamily="34" charset="-122"/>
+                <a:cs typeface="Adobe Clean" pitchFamily="34" charset="-120"/>
               </a:rPr>
               <a:t>4</a:t>
             </a:r>
@@ -5747,11 +5747,11 @@
             <a:r>
               <a:rPr lang="en-US" sz="1550" b="1" dirty="0">
                 <a:solidFill>
-                  <a:srgbClr val="2B2320"/>
-                </a:solidFill>
-                <a:latin typeface="Calibri" pitchFamily="34" charset="0"/>
-                <a:ea typeface="Calibri" pitchFamily="34" charset="-122"/>
-                <a:cs typeface="Calibri" pitchFamily="34" charset="-120"/>
+                  <a:srgbClr val="1F1F1F"/>
+                </a:solidFill>
+                <a:latin typeface="Adobe Clean" pitchFamily="34" charset="0"/>
+                <a:ea typeface="Adobe Clean" pitchFamily="34" charset="-122"/>
+                <a:cs typeface="Adobe Clean" pitchFamily="34" charset="-120"/>
               </a:rPr>
               <a:t>Dataset → Profile</a:t>
             </a:r>
@@ -5786,11 +5786,11 @@
             <a:r>
               <a:rPr lang="en-US" sz="1250" dirty="0">
                 <a:solidFill>
-                  <a:srgbClr val="7D726C"/>
-                </a:solidFill>
-                <a:latin typeface="Calibri" pitchFamily="34" charset="0"/>
-                <a:ea typeface="Calibri" pitchFamily="34" charset="-122"/>
-                <a:cs typeface="Calibri" pitchFamily="34" charset="-120"/>
+                  <a:srgbClr val="6B6B6B"/>
+                </a:solidFill>
+                <a:latin typeface="Adobe Clean" pitchFamily="34" charset="0"/>
+                <a:ea typeface="Adobe Clean" pitchFamily="34" charset="-122"/>
+                <a:cs typeface="Adobe Clean" pitchFamily="34" charset="-120"/>
               </a:rPr>
               <a:t>Enabled for Profile so events build real-time profiles.</a:t>
             </a:r>
@@ -5815,11 +5815,11 @@
             </a:avLst>
           </a:prstGeom>
           <a:solidFill>
-            <a:srgbClr val="F4EEEA"/>
+            <a:srgbClr val="F2F2F2"/>
           </a:solidFill>
           <a:ln w="15875">
             <a:solidFill>
-              <a:srgbClr val="FF5722"/>
+              <a:srgbClr val="EB1000"/>
             </a:solidFill>
             <a:prstDash val="dash"/>
           </a:ln>
@@ -5863,7 +5863,7 @@
             <a:r>
               <a:rPr lang="en-US" sz="1300" b="1" dirty="0">
                 <a:solidFill>
-                  <a:srgbClr val="E64A19"/>
+                  <a:srgbClr val="B10C00"/>
                 </a:solidFill>
               </a:rPr>
               <a:t>SCREENSHOT</a:t>
@@ -5899,11 +5899,11 @@
             <a:r>
               <a:rPr lang="en-US" sz="1200" i="1" dirty="0">
                 <a:solidFill>
-                  <a:srgbClr val="7D726C"/>
-                </a:solidFill>
-                <a:latin typeface="Calibri" pitchFamily="34" charset="0"/>
-                <a:ea typeface="Calibri" pitchFamily="34" charset="-122"/>
-                <a:cs typeface="Calibri" pitchFamily="34" charset="-120"/>
+                  <a:srgbClr val="6B6B6B"/>
+                </a:solidFill>
+                <a:latin typeface="Adobe Clean" pitchFamily="34" charset="0"/>
+                <a:ea typeface="Adobe Clean" pitchFamily="34" charset="-122"/>
+                <a:cs typeface="Adobe Clean" pitchFamily="34" charset="-120"/>
               </a:rPr>
               <a:t>Schema "Feastly Order Event" — show the field tree (_yourtenant.food / attributes / rating, commerce, identityMap).</a:t>
             </a:r>
@@ -5970,11 +5970,11 @@
             <a:r>
               <a:rPr lang="en-US" sz="1250" b="1" spc="200" kern="0" dirty="0">
                 <a:solidFill>
-                  <a:srgbClr val="FF5722"/>
-                </a:solidFill>
-                <a:latin typeface="Calibri" pitchFamily="34" charset="0"/>
-                <a:ea typeface="Calibri" pitchFamily="34" charset="-122"/>
-                <a:cs typeface="Calibri" pitchFamily="34" charset="-120"/>
+                  <a:srgbClr val="EB1000"/>
+                </a:solidFill>
+                <a:latin typeface="Adobe Clean" pitchFamily="34" charset="0"/>
+                <a:ea typeface="Adobe Clean" pitchFamily="34" charset="-122"/>
+                <a:cs typeface="Adobe Clean" pitchFamily="34" charset="-120"/>
               </a:rPr>
               <a:t>COMPONENT 2 · DATA COLLECTION</a:t>
             </a:r>
@@ -6009,11 +6009,11 @@
             <a:r>
               <a:rPr lang="en-US" sz="3200" b="1" dirty="0">
                 <a:solidFill>
-                  <a:srgbClr val="2B2320"/>
-                </a:solidFill>
-                <a:latin typeface="Cambria" pitchFamily="34" charset="0"/>
-                <a:ea typeface="Cambria" pitchFamily="34" charset="-122"/>
-                <a:cs typeface="Cambria" pitchFamily="34" charset="-120"/>
+                  <a:srgbClr val="1F1F1F"/>
+                </a:solidFill>
+                <a:latin typeface="Adobe Clean" pitchFamily="34" charset="0"/>
+                <a:ea typeface="Adobe Clean" pitchFamily="34" charset="-122"/>
+                <a:cs typeface="Adobe Clean" pitchFamily="34" charset="-120"/>
               </a:rPr>
               <a:t>Datastream — the routing switchboard</a:t>
             </a:r>
@@ -6036,7 +6036,7 @@
             <a:avLst/>
           </a:prstGeom>
           <a:solidFill>
-            <a:srgbClr val="FF5722"/>
+            <a:srgbClr val="EB1000"/>
           </a:solidFill>
           <a:ln/>
         </p:spPr>
@@ -6070,9 +6070,9 @@
                 <a:solidFill>
                   <a:srgbClr val="FFFFFF"/>
                 </a:solidFill>
-                <a:latin typeface="Calibri" pitchFamily="34" charset="0"/>
-                <a:ea typeface="Calibri" pitchFamily="34" charset="-122"/>
-                <a:cs typeface="Calibri" pitchFamily="34" charset="-120"/>
+                <a:latin typeface="Adobe Clean" pitchFamily="34" charset="0"/>
+                <a:ea typeface="Adobe Clean" pitchFamily="34" charset="-122"/>
+                <a:cs typeface="Adobe Clean" pitchFamily="34" charset="-120"/>
               </a:rPr>
               <a:t>1</a:t>
             </a:r>
@@ -6107,11 +6107,11 @@
             <a:r>
               <a:rPr lang="en-US" sz="1550" b="1" dirty="0">
                 <a:solidFill>
-                  <a:srgbClr val="2B2320"/>
-                </a:solidFill>
-                <a:latin typeface="Calibri" pitchFamily="34" charset="0"/>
-                <a:ea typeface="Calibri" pitchFamily="34" charset="-122"/>
-                <a:cs typeface="Calibri" pitchFamily="34" charset="-120"/>
+                  <a:srgbClr val="1F1F1F"/>
+                </a:solidFill>
+                <a:latin typeface="Adobe Clean" pitchFamily="34" charset="0"/>
+                <a:ea typeface="Adobe Clean" pitchFamily="34" charset="-122"/>
+                <a:cs typeface="Adobe Clean" pitchFamily="34" charset="-120"/>
               </a:rPr>
               <a:t>One datastream</a:t>
             </a:r>
@@ -6146,11 +6146,11 @@
             <a:r>
               <a:rPr lang="en-US" sz="1250" dirty="0">
                 <a:solidFill>
-                  <a:srgbClr val="7D726C"/>
-                </a:solidFill>
-                <a:latin typeface="Calibri" pitchFamily="34" charset="0"/>
-                <a:ea typeface="Calibri" pitchFamily="34" charset="-122"/>
-                <a:cs typeface="Calibri" pitchFamily="34" charset="-120"/>
+                  <a:srgbClr val="6B6B6B"/>
+                </a:solidFill>
+                <a:latin typeface="Adobe Clean" pitchFamily="34" charset="0"/>
+                <a:ea typeface="Adobe Clean" pitchFamily="34" charset="-122"/>
+                <a:cs typeface="Adobe Clean" pitchFamily="34" charset="-120"/>
               </a:rPr>
               <a:t>"Feastly Web SDK" — the server-side config.</a:t>
             </a:r>
@@ -6173,7 +6173,7 @@
             <a:avLst/>
           </a:prstGeom>
           <a:solidFill>
-            <a:srgbClr val="FF5722"/>
+            <a:srgbClr val="EB1000"/>
           </a:solidFill>
           <a:ln/>
         </p:spPr>
@@ -6207,9 +6207,9 @@
                 <a:solidFill>
                   <a:srgbClr val="FFFFFF"/>
                 </a:solidFill>
-                <a:latin typeface="Calibri" pitchFamily="34" charset="0"/>
-                <a:ea typeface="Calibri" pitchFamily="34" charset="-122"/>
-                <a:cs typeface="Calibri" pitchFamily="34" charset="-120"/>
+                <a:latin typeface="Adobe Clean" pitchFamily="34" charset="0"/>
+                <a:ea typeface="Adobe Clean" pitchFamily="34" charset="-122"/>
+                <a:cs typeface="Adobe Clean" pitchFamily="34" charset="-120"/>
               </a:rPr>
               <a:t>2</a:t>
             </a:r>
@@ -6244,11 +6244,11 @@
             <a:r>
               <a:rPr lang="en-US" sz="1550" b="1" dirty="0">
                 <a:solidFill>
-                  <a:srgbClr val="2B2320"/>
-                </a:solidFill>
-                <a:latin typeface="Calibri" pitchFamily="34" charset="0"/>
-                <a:ea typeface="Calibri" pitchFamily="34" charset="-122"/>
-                <a:cs typeface="Calibri" pitchFamily="34" charset="-120"/>
+                  <a:srgbClr val="1F1F1F"/>
+                </a:solidFill>
+                <a:latin typeface="Adobe Clean" pitchFamily="34" charset="0"/>
+                <a:ea typeface="Adobe Clean" pitchFamily="34" charset="-122"/>
+                <a:cs typeface="Adobe Clean" pitchFamily="34" charset="-120"/>
               </a:rPr>
               <a:t>Adobe Experience Platform service</a:t>
             </a:r>
@@ -6283,11 +6283,11 @@
             <a:r>
               <a:rPr lang="en-US" sz="1250" dirty="0">
                 <a:solidFill>
-                  <a:srgbClr val="7D726C"/>
-                </a:solidFill>
-                <a:latin typeface="Calibri" pitchFamily="34" charset="0"/>
-                <a:ea typeface="Calibri" pitchFamily="34" charset="-122"/>
-                <a:cs typeface="Calibri" pitchFamily="34" charset="-120"/>
+                  <a:srgbClr val="6B6B6B"/>
+                </a:solidFill>
+                <a:latin typeface="Adobe Clean" pitchFamily="34" charset="0"/>
+                <a:ea typeface="Adobe Clean" pitchFamily="34" charset="-122"/>
+                <a:cs typeface="Adobe Clean" pitchFamily="34" charset="-120"/>
               </a:rPr>
               <a:t>Added and pointed at the Feastly dataset.</a:t>
             </a:r>
@@ -6310,7 +6310,7 @@
             <a:avLst/>
           </a:prstGeom>
           <a:solidFill>
-            <a:srgbClr val="FF5722"/>
+            <a:srgbClr val="EB1000"/>
           </a:solidFill>
           <a:ln/>
         </p:spPr>
@@ -6344,9 +6344,9 @@
                 <a:solidFill>
                   <a:srgbClr val="FFFFFF"/>
                 </a:solidFill>
-                <a:latin typeface="Calibri" pitchFamily="34" charset="0"/>
-                <a:ea typeface="Calibri" pitchFamily="34" charset="-122"/>
-                <a:cs typeface="Calibri" pitchFamily="34" charset="-120"/>
+                <a:latin typeface="Adobe Clean" pitchFamily="34" charset="0"/>
+                <a:ea typeface="Adobe Clean" pitchFamily="34" charset="-122"/>
+                <a:cs typeface="Adobe Clean" pitchFamily="34" charset="-120"/>
               </a:rPr>
               <a:t>3</a:t>
             </a:r>
@@ -6381,11 +6381,11 @@
             <a:r>
               <a:rPr lang="en-US" sz="1550" b="1" dirty="0">
                 <a:solidFill>
-                  <a:srgbClr val="2B2320"/>
-                </a:solidFill>
-                <a:latin typeface="Calibri" pitchFamily="34" charset="0"/>
-                <a:ea typeface="Calibri" pitchFamily="34" charset="-122"/>
-                <a:cs typeface="Calibri" pitchFamily="34" charset="-120"/>
+                  <a:srgbClr val="1F1F1F"/>
+                </a:solidFill>
+                <a:latin typeface="Adobe Clean" pitchFamily="34" charset="0"/>
+                <a:ea typeface="Adobe Clean" pitchFamily="34" charset="-122"/>
+                <a:cs typeface="Adobe Clean" pitchFamily="34" charset="-120"/>
               </a:rPr>
               <a:t>Datastream ID</a:t>
             </a:r>
@@ -6420,11 +6420,11 @@
             <a:r>
               <a:rPr lang="en-US" sz="1250" dirty="0">
                 <a:solidFill>
-                  <a:srgbClr val="7D726C"/>
-                </a:solidFill>
-                <a:latin typeface="Calibri" pitchFamily="34" charset="0"/>
-                <a:ea typeface="Calibri" pitchFamily="34" charset="-122"/>
-                <a:cs typeface="Calibri" pitchFamily="34" charset="-120"/>
+                  <a:srgbClr val="6B6B6B"/>
+                </a:solidFill>
+                <a:latin typeface="Adobe Clean" pitchFamily="34" charset="0"/>
+                <a:ea typeface="Adobe Clean" pitchFamily="34" charset="-122"/>
+                <a:cs typeface="Adobe Clean" pitchFamily="34" charset="-120"/>
               </a:rPr>
               <a:t>The Web SDK sends to this ID at the Edge.</a:t>
             </a:r>
@@ -6447,7 +6447,7 @@
             <a:avLst/>
           </a:prstGeom>
           <a:solidFill>
-            <a:srgbClr val="FF5722"/>
+            <a:srgbClr val="EB1000"/>
           </a:solidFill>
           <a:ln/>
         </p:spPr>
@@ -6481,9 +6481,9 @@
                 <a:solidFill>
                   <a:srgbClr val="FFFFFF"/>
                 </a:solidFill>
-                <a:latin typeface="Calibri" pitchFamily="34" charset="0"/>
-                <a:ea typeface="Calibri" pitchFamily="34" charset="-122"/>
-                <a:cs typeface="Calibri" pitchFamily="34" charset="-120"/>
+                <a:latin typeface="Adobe Clean" pitchFamily="34" charset="0"/>
+                <a:ea typeface="Adobe Clean" pitchFamily="34" charset="-122"/>
+                <a:cs typeface="Adobe Clean" pitchFamily="34" charset="-120"/>
               </a:rPr>
               <a:t>4</a:t>
             </a:r>
@@ -6518,11 +6518,11 @@
             <a:r>
               <a:rPr lang="en-US" sz="1550" b="1" dirty="0">
                 <a:solidFill>
-                  <a:srgbClr val="2B2320"/>
-                </a:solidFill>
-                <a:latin typeface="Calibri" pitchFamily="34" charset="0"/>
-                <a:ea typeface="Calibri" pitchFamily="34" charset="-122"/>
-                <a:cs typeface="Calibri" pitchFamily="34" charset="-120"/>
+                  <a:srgbClr val="1F1F1F"/>
+                </a:solidFill>
+                <a:latin typeface="Adobe Clean" pitchFamily="34" charset="0"/>
+                <a:ea typeface="Adobe Clean" pitchFamily="34" charset="-122"/>
+                <a:cs typeface="Adobe Clean" pitchFamily="34" charset="-120"/>
               </a:rPr>
               <a:t>Extensible</a:t>
             </a:r>
@@ -6557,11 +6557,11 @@
             <a:r>
               <a:rPr lang="en-US" sz="1250" dirty="0">
                 <a:solidFill>
-                  <a:srgbClr val="7D726C"/>
-                </a:solidFill>
-                <a:latin typeface="Calibri" pitchFamily="34" charset="0"/>
-                <a:ea typeface="Calibri" pitchFamily="34" charset="-122"/>
-                <a:cs typeface="Calibri" pitchFamily="34" charset="-120"/>
+                  <a:srgbClr val="6B6B6B"/>
+                </a:solidFill>
+                <a:latin typeface="Adobe Clean" pitchFamily="34" charset="0"/>
+                <a:ea typeface="Adobe Clean" pitchFamily="34" charset="-122"/>
+                <a:cs typeface="Adobe Clean" pitchFamily="34" charset="-120"/>
               </a:rPr>
               <a:t>Same event can also go to Analytics, Target, etc.</a:t>
             </a:r>
@@ -6586,11 +6586,11 @@
             </a:avLst>
           </a:prstGeom>
           <a:solidFill>
-            <a:srgbClr val="F4EEEA"/>
+            <a:srgbClr val="F2F2F2"/>
           </a:solidFill>
           <a:ln w="15875">
             <a:solidFill>
-              <a:srgbClr val="FF5722"/>
+              <a:srgbClr val="EB1000"/>
             </a:solidFill>
             <a:prstDash val="dash"/>
           </a:ln>
@@ -6634,7 +6634,7 @@
             <a:r>
               <a:rPr lang="en-US" sz="1300" b="1" dirty="0">
                 <a:solidFill>
-                  <a:srgbClr val="E64A19"/>
+                  <a:srgbClr val="B10C00"/>
                 </a:solidFill>
               </a:rPr>
               <a:t>SCREENSHOT</a:t>
@@ -6670,11 +6670,11 @@
             <a:r>
               <a:rPr lang="en-US" sz="1200" i="1" dirty="0">
                 <a:solidFill>
-                  <a:srgbClr val="7D726C"/>
-                </a:solidFill>
-                <a:latin typeface="Calibri" pitchFamily="34" charset="0"/>
-                <a:ea typeface="Calibri" pitchFamily="34" charset="-122"/>
-                <a:cs typeface="Calibri" pitchFamily="34" charset="-120"/>
+                  <a:srgbClr val="6B6B6B"/>
+                </a:solidFill>
+                <a:latin typeface="Adobe Clean" pitchFamily="34" charset="0"/>
+                <a:ea typeface="Adobe Clean" pitchFamily="34" charset="-122"/>
+                <a:cs typeface="Adobe Clean" pitchFamily="34" charset="-120"/>
               </a:rPr>
               <a:t>Datastream "Feastly Web SDK" — show the AEP service added + the Datastream ID.</a:t>
             </a:r>
@@ -6741,11 +6741,11 @@
             <a:r>
               <a:rPr lang="en-US" sz="1250" b="1" spc="200" kern="0" dirty="0">
                 <a:solidFill>
-                  <a:srgbClr val="FF5722"/>
-                </a:solidFill>
-                <a:latin typeface="Calibri" pitchFamily="34" charset="0"/>
-                <a:ea typeface="Calibri" pitchFamily="34" charset="-122"/>
-                <a:cs typeface="Calibri" pitchFamily="34" charset="-120"/>
+                  <a:srgbClr val="EB1000"/>
+                </a:solidFill>
+                <a:latin typeface="Adobe Clean" pitchFamily="34" charset="0"/>
+                <a:ea typeface="Adobe Clean" pitchFamily="34" charset="-122"/>
+                <a:cs typeface="Adobe Clean" pitchFamily="34" charset="-120"/>
               </a:rPr>
               <a:t>COMPONENT 3 · DATA COLLECTION</a:t>
             </a:r>
@@ -6780,11 +6780,11 @@
             <a:r>
               <a:rPr lang="en-US" sz="3200" b="1" dirty="0">
                 <a:solidFill>
-                  <a:srgbClr val="2B2320"/>
-                </a:solidFill>
-                <a:latin typeface="Cambria" pitchFamily="34" charset="0"/>
-                <a:ea typeface="Cambria" pitchFamily="34" charset="-122"/>
-                <a:cs typeface="Cambria" pitchFamily="34" charset="-120"/>
+                  <a:srgbClr val="1F1F1F"/>
+                </a:solidFill>
+                <a:latin typeface="Adobe Clean" pitchFamily="34" charset="0"/>
+                <a:ea typeface="Adobe Clean" pitchFamily="34" charset="-122"/>
+                <a:cs typeface="Adobe Clean" pitchFamily="34" charset="-120"/>
               </a:rPr>
               <a:t>Tag (Launch) property + extensions</a:t>
             </a:r>
@@ -6807,7 +6807,7 @@
             <a:avLst/>
           </a:prstGeom>
           <a:solidFill>
-            <a:srgbClr val="FF5722"/>
+            <a:srgbClr val="EB1000"/>
           </a:solidFill>
           <a:ln/>
         </p:spPr>
@@ -6841,9 +6841,9 @@
                 <a:solidFill>
                   <a:srgbClr val="FFFFFF"/>
                 </a:solidFill>
-                <a:latin typeface="Calibri" pitchFamily="34" charset="0"/>
-                <a:ea typeface="Calibri" pitchFamily="34" charset="-122"/>
-                <a:cs typeface="Calibri" pitchFamily="34" charset="-120"/>
+                <a:latin typeface="Adobe Clean" pitchFamily="34" charset="0"/>
+                <a:ea typeface="Adobe Clean" pitchFamily="34" charset="-122"/>
+                <a:cs typeface="Adobe Clean" pitchFamily="34" charset="-120"/>
               </a:rPr>
               <a:t>1</a:t>
             </a:r>
@@ -6878,11 +6878,11 @@
             <a:r>
               <a:rPr lang="en-US" sz="1550" b="1" dirty="0">
                 <a:solidFill>
-                  <a:srgbClr val="2B2320"/>
-                </a:solidFill>
-                <a:latin typeface="Calibri" pitchFamily="34" charset="0"/>
-                <a:ea typeface="Calibri" pitchFamily="34" charset="-122"/>
-                <a:cs typeface="Calibri" pitchFamily="34" charset="-120"/>
+                  <a:srgbClr val="1F1F1F"/>
+                </a:solidFill>
+                <a:latin typeface="Adobe Clean" pitchFamily="34" charset="0"/>
+                <a:ea typeface="Adobe Clean" pitchFamily="34" charset="-122"/>
+                <a:cs typeface="Adobe Clean" pitchFamily="34" charset="-120"/>
               </a:rPr>
               <a:t>Property "Feastly Web"</a:t>
             </a:r>
@@ -6917,11 +6917,11 @@
             <a:r>
               <a:rPr lang="en-US" sz="1250" dirty="0">
                 <a:solidFill>
-                  <a:srgbClr val="7D726C"/>
-                </a:solidFill>
-                <a:latin typeface="Calibri" pitchFamily="34" charset="0"/>
-                <a:ea typeface="Calibri" pitchFamily="34" charset="-122"/>
-                <a:cs typeface="Calibri" pitchFamily="34" charset="-120"/>
+                  <a:srgbClr val="6B6B6B"/>
+                </a:solidFill>
+                <a:latin typeface="Adobe Clean" pitchFamily="34" charset="0"/>
+                <a:ea typeface="Adobe Clean" pitchFamily="34" charset="-122"/>
+                <a:cs typeface="Adobe Clean" pitchFamily="34" charset="-120"/>
               </a:rPr>
               <a:t>The container for all collection logic.</a:t>
             </a:r>
@@ -6944,7 +6944,7 @@
             <a:avLst/>
           </a:prstGeom>
           <a:solidFill>
-            <a:srgbClr val="FF5722"/>
+            <a:srgbClr val="EB1000"/>
           </a:solidFill>
           <a:ln/>
         </p:spPr>
@@ -6978,9 +6978,9 @@
                 <a:solidFill>
                   <a:srgbClr val="FFFFFF"/>
                 </a:solidFill>
-                <a:latin typeface="Calibri" pitchFamily="34" charset="0"/>
-                <a:ea typeface="Calibri" pitchFamily="34" charset="-122"/>
-                <a:cs typeface="Calibri" pitchFamily="34" charset="-120"/>
+                <a:latin typeface="Adobe Clean" pitchFamily="34" charset="0"/>
+                <a:ea typeface="Adobe Clean" pitchFamily="34" charset="-122"/>
+                <a:cs typeface="Adobe Clean" pitchFamily="34" charset="-120"/>
               </a:rPr>
               <a:t>2</a:t>
             </a:r>
@@ -7015,11 +7015,11 @@
             <a:r>
               <a:rPr lang="en-US" sz="1550" b="1" dirty="0">
                 <a:solidFill>
-                  <a:srgbClr val="2B2320"/>
-                </a:solidFill>
-                <a:latin typeface="Calibri" pitchFamily="34" charset="0"/>
-                <a:ea typeface="Calibri" pitchFamily="34" charset="-122"/>
-                <a:cs typeface="Calibri" pitchFamily="34" charset="-120"/>
+                  <a:srgbClr val="1F1F1F"/>
+                </a:solidFill>
+                <a:latin typeface="Adobe Clean" pitchFamily="34" charset="0"/>
+                <a:ea typeface="Adobe Clean" pitchFamily="34" charset="-122"/>
+                <a:cs typeface="Adobe Clean" pitchFamily="34" charset="-120"/>
               </a:rPr>
               <a:t>AEP Web SDK extension</a:t>
             </a:r>
@@ -7054,11 +7054,11 @@
             <a:r>
               <a:rPr lang="en-US" sz="1250" dirty="0">
                 <a:solidFill>
-                  <a:srgbClr val="7D726C"/>
-                </a:solidFill>
-                <a:latin typeface="Calibri" pitchFamily="34" charset="0"/>
-                <a:ea typeface="Calibri" pitchFamily="34" charset="-122"/>
-                <a:cs typeface="Calibri" pitchFamily="34" charset="-120"/>
+                  <a:srgbClr val="6B6B6B"/>
+                </a:solidFill>
+                <a:latin typeface="Adobe Clean" pitchFamily="34" charset="0"/>
+                <a:ea typeface="Adobe Clean" pitchFamily="34" charset="-122"/>
+                <a:cs typeface="Adobe Clean" pitchFamily="34" charset="-120"/>
               </a:rPr>
               <a:t>Configured with the datastream + Org ID.</a:t>
             </a:r>
@@ -7081,7 +7081,7 @@
             <a:avLst/>
           </a:prstGeom>
           <a:solidFill>
-            <a:srgbClr val="FF5722"/>
+            <a:srgbClr val="EB1000"/>
           </a:solidFill>
           <a:ln/>
         </p:spPr>
@@ -7115,9 +7115,9 @@
                 <a:solidFill>
                   <a:srgbClr val="FFFFFF"/>
                 </a:solidFill>
-                <a:latin typeface="Calibri" pitchFamily="34" charset="0"/>
-                <a:ea typeface="Calibri" pitchFamily="34" charset="-122"/>
-                <a:cs typeface="Calibri" pitchFamily="34" charset="-120"/>
+                <a:latin typeface="Adobe Clean" pitchFamily="34" charset="0"/>
+                <a:ea typeface="Adobe Clean" pitchFamily="34" charset="-122"/>
+                <a:cs typeface="Adobe Clean" pitchFamily="34" charset="-120"/>
               </a:rPr>
               <a:t>3</a:t>
             </a:r>
@@ -7152,11 +7152,11 @@
             <a:r>
               <a:rPr lang="en-US" sz="1550" b="1" dirty="0">
                 <a:solidFill>
-                  <a:srgbClr val="2B2320"/>
-                </a:solidFill>
-                <a:latin typeface="Calibri" pitchFamily="34" charset="0"/>
-                <a:ea typeface="Calibri" pitchFamily="34" charset="-122"/>
-                <a:cs typeface="Calibri" pitchFamily="34" charset="-120"/>
+                  <a:srgbClr val="1F1F1F"/>
+                </a:solidFill>
+                <a:latin typeface="Adobe Clean" pitchFamily="34" charset="0"/>
+                <a:ea typeface="Adobe Clean" pitchFamily="34" charset="-122"/>
+                <a:cs typeface="Adobe Clean" pitchFamily="34" charset="-120"/>
               </a:rPr>
               <a:t>Adobe Client Data Layer</a:t>
             </a:r>
@@ -7191,11 +7191,11 @@
             <a:r>
               <a:rPr lang="en-US" sz="1250" dirty="0">
                 <a:solidFill>
-                  <a:srgbClr val="7D726C"/>
-                </a:solidFill>
-                <a:latin typeface="Calibri" pitchFamily="34" charset="0"/>
-                <a:ea typeface="Calibri" pitchFamily="34" charset="-122"/>
-                <a:cs typeface="Calibri" pitchFamily="34" charset="-120"/>
+                  <a:srgbClr val="6B6B6B"/>
+                </a:solidFill>
+                <a:latin typeface="Adobe Clean" pitchFamily="34" charset="0"/>
+                <a:ea typeface="Adobe Clean" pitchFamily="34" charset="-122"/>
+                <a:cs typeface="Adobe Clean" pitchFamily="34" charset="-120"/>
               </a:rPr>
               <a:t>Listens to adobeDataLayer pushes.</a:t>
             </a:r>
@@ -7218,7 +7218,7 @@
             <a:avLst/>
           </a:prstGeom>
           <a:solidFill>
-            <a:srgbClr val="FF5722"/>
+            <a:srgbClr val="EB1000"/>
           </a:solidFill>
           <a:ln/>
         </p:spPr>
@@ -7252,9 +7252,9 @@
                 <a:solidFill>
                   <a:srgbClr val="FFFFFF"/>
                 </a:solidFill>
-                <a:latin typeface="Calibri" pitchFamily="34" charset="0"/>
-                <a:ea typeface="Calibri" pitchFamily="34" charset="-122"/>
-                <a:cs typeface="Calibri" pitchFamily="34" charset="-120"/>
+                <a:latin typeface="Adobe Clean" pitchFamily="34" charset="0"/>
+                <a:ea typeface="Adobe Clean" pitchFamily="34" charset="-122"/>
+                <a:cs typeface="Adobe Clean" pitchFamily="34" charset="-120"/>
               </a:rPr>
               <a:t>4</a:t>
             </a:r>
@@ -7289,11 +7289,11 @@
             <a:r>
               <a:rPr lang="en-US" sz="1550" b="1" dirty="0">
                 <a:solidFill>
-                  <a:srgbClr val="2B2320"/>
-                </a:solidFill>
-                <a:latin typeface="Calibri" pitchFamily="34" charset="0"/>
-                <a:ea typeface="Calibri" pitchFamily="34" charset="-122"/>
-                <a:cs typeface="Calibri" pitchFamily="34" charset="-120"/>
+                  <a:srgbClr val="1F1F1F"/>
+                </a:solidFill>
+                <a:latin typeface="Adobe Clean" pitchFamily="34" charset="0"/>
+                <a:ea typeface="Adobe Clean" pitchFamily="34" charset="-122"/>
+                <a:cs typeface="Adobe Clean" pitchFamily="34" charset="-120"/>
               </a:rPr>
               <a:t>Publish → embed</a:t>
             </a:r>
@@ -7328,11 +7328,11 @@
             <a:r>
               <a:rPr lang="en-US" sz="1250" dirty="0">
                 <a:solidFill>
-                  <a:srgbClr val="7D726C"/>
-                </a:solidFill>
-                <a:latin typeface="Calibri" pitchFamily="34" charset="0"/>
-                <a:ea typeface="Calibri" pitchFamily="34" charset="-122"/>
-                <a:cs typeface="Calibri" pitchFamily="34" charset="-120"/>
+                  <a:srgbClr val="6B6B6B"/>
+                </a:solidFill>
+                <a:latin typeface="Adobe Clean" pitchFamily="34" charset="0"/>
+                <a:ea typeface="Adobe Clean" pitchFamily="34" charset="-122"/>
+                <a:cs typeface="Adobe Clean" pitchFamily="34" charset="-120"/>
               </a:rPr>
               <a:t>Build a library, embed the script on the site.</a:t>
             </a:r>
@@ -7357,11 +7357,11 @@
             </a:avLst>
           </a:prstGeom>
           <a:solidFill>
-            <a:srgbClr val="F4EEEA"/>
+            <a:srgbClr val="F2F2F2"/>
           </a:solidFill>
           <a:ln w="15875">
             <a:solidFill>
-              <a:srgbClr val="FF5722"/>
+              <a:srgbClr val="EB1000"/>
             </a:solidFill>
             <a:prstDash val="dash"/>
           </a:ln>
@@ -7405,7 +7405,7 @@
             <a:r>
               <a:rPr lang="en-US" sz="1300" b="1" dirty="0">
                 <a:solidFill>
-                  <a:srgbClr val="E64A19"/>
+                  <a:srgbClr val="B10C00"/>
                 </a:solidFill>
               </a:rPr>
               <a:t>SCREENSHOT</a:t>
@@ -7441,11 +7441,11 @@
             <a:r>
               <a:rPr lang="en-US" sz="1200" i="1" dirty="0">
                 <a:solidFill>
-                  <a:srgbClr val="7D726C"/>
-                </a:solidFill>
-                <a:latin typeface="Calibri" pitchFamily="34" charset="0"/>
-                <a:ea typeface="Calibri" pitchFamily="34" charset="-122"/>
-                <a:cs typeface="Calibri" pitchFamily="34" charset="-120"/>
+                  <a:srgbClr val="6B6B6B"/>
+                </a:solidFill>
+                <a:latin typeface="Adobe Clean" pitchFamily="34" charset="0"/>
+                <a:ea typeface="Adobe Clean" pitchFamily="34" charset="-122"/>
+                <a:cs typeface="Adobe Clean" pitchFamily="34" charset="-120"/>
               </a:rPr>
               <a:t>Tags property "Feastly Web" — show Extensions (Web SDK + Client Data Layer) installed.</a:t>
             </a:r>
@@ -7512,11 +7512,11 @@
             <a:r>
               <a:rPr lang="en-US" sz="1250" b="1" spc="200" kern="0" dirty="0">
                 <a:solidFill>
-                  <a:srgbClr val="FF5722"/>
-                </a:solidFill>
-                <a:latin typeface="Calibri" pitchFamily="34" charset="0"/>
-                <a:ea typeface="Calibri" pitchFamily="34" charset="-122"/>
-                <a:cs typeface="Calibri" pitchFamily="34" charset="-120"/>
+                  <a:srgbClr val="EB1000"/>
+                </a:solidFill>
+                <a:latin typeface="Adobe Clean" pitchFamily="34" charset="0"/>
+                <a:ea typeface="Adobe Clean" pitchFamily="34" charset="-122"/>
+                <a:cs typeface="Adobe Clean" pitchFamily="34" charset="-120"/>
               </a:rPr>
               <a:t>THE BUILDING BLOCKS</a:t>
             </a:r>
@@ -7551,11 +7551,11 @@
             <a:r>
               <a:rPr lang="en-US" sz="3200" b="1" dirty="0">
                 <a:solidFill>
-                  <a:srgbClr val="2B2320"/>
-                </a:solidFill>
-                <a:latin typeface="Cambria" pitchFamily="34" charset="0"/>
-                <a:ea typeface="Cambria" pitchFamily="34" charset="-122"/>
-                <a:cs typeface="Cambria" pitchFamily="34" charset="-120"/>
+                  <a:srgbClr val="1F1F1F"/>
+                </a:solidFill>
+                <a:latin typeface="Adobe Clean" pitchFamily="34" charset="0"/>
+                <a:ea typeface="Adobe Clean" pitchFamily="34" charset="-122"/>
+                <a:cs typeface="Adobe Clean" pitchFamily="34" charset="-120"/>
               </a:rPr>
               <a:t>Data Elements — reusable variables (11)</a:t>
             </a:r>
@@ -7590,11 +7590,11 @@
             <a:r>
               <a:rPr lang="en-US" sz="1400" dirty="0">
                 <a:solidFill>
-                  <a:srgbClr val="7D726C"/>
-                </a:solidFill>
-                <a:latin typeface="Calibri" pitchFamily="34" charset="0"/>
-                <a:ea typeface="Calibri" pitchFamily="34" charset="-122"/>
-                <a:cs typeface="Calibri" pitchFamily="34" charset="-120"/>
+                  <a:srgbClr val="6B6B6B"/>
+                </a:solidFill>
+                <a:latin typeface="Adobe Clean" pitchFamily="34" charset="0"/>
+                <a:ea typeface="Adobe Clean" pitchFamily="34" charset="-122"/>
+                <a:cs typeface="Adobe Clean" pitchFamily="34" charset="-120"/>
               </a:rPr>
               <a:t>Each reads one value from the data layer, so rules stay simple and consistent.</a:t>
             </a:r>
@@ -7619,7 +7619,7 @@
             </a:avLst>
           </a:prstGeom>
           <a:solidFill>
-            <a:srgbClr val="FFF3EE"/>
+            <a:srgbClr val="FDECEA"/>
           </a:solidFill>
           <a:ln/>
         </p:spPr>
@@ -7651,11 +7651,11 @@
             <a:r>
               <a:rPr lang="en-US" sz="1350" b="1" dirty="0">
                 <a:solidFill>
-                  <a:srgbClr val="2B2320"/>
-                </a:solidFill>
-                <a:latin typeface="Calibri" pitchFamily="34" charset="0"/>
-                <a:ea typeface="Calibri" pitchFamily="34" charset="-122"/>
-                <a:cs typeface="Calibri" pitchFamily="34" charset="-120"/>
+                  <a:srgbClr val="1F1F1F"/>
+                </a:solidFill>
+                <a:latin typeface="Adobe Clean" pitchFamily="34" charset="0"/>
+                <a:ea typeface="Adobe Clean" pitchFamily="34" charset="-122"/>
+                <a:cs typeface="Adobe Clean" pitchFamily="34" charset="-120"/>
               </a:rPr>
               <a:t>page name</a:t>
             </a:r>
@@ -7680,7 +7680,7 @@
             </a:avLst>
           </a:prstGeom>
           <a:solidFill>
-            <a:srgbClr val="FFF3EE"/>
+            <a:srgbClr val="FDECEA"/>
           </a:solidFill>
           <a:ln/>
         </p:spPr>
@@ -7712,11 +7712,11 @@
             <a:r>
               <a:rPr lang="en-US" sz="1350" b="1" dirty="0">
                 <a:solidFill>
-                  <a:srgbClr val="2B2320"/>
-                </a:solidFill>
-                <a:latin typeface="Calibri" pitchFamily="34" charset="0"/>
-                <a:ea typeface="Calibri" pitchFamily="34" charset="-122"/>
-                <a:cs typeface="Calibri" pitchFamily="34" charset="-120"/>
+                  <a:srgbClr val="1F1F1F"/>
+                </a:solidFill>
+                <a:latin typeface="Adobe Clean" pitchFamily="34" charset="0"/>
+                <a:ea typeface="Adobe Clean" pitchFamily="34" charset="-122"/>
+                <a:cs typeface="Adobe Clean" pitchFamily="34" charset="-120"/>
               </a:rPr>
               <a:t>commerce</a:t>
             </a:r>
@@ -7741,7 +7741,7 @@
             </a:avLst>
           </a:prstGeom>
           <a:solidFill>
-            <a:srgbClr val="FFF3EE"/>
+            <a:srgbClr val="FDECEA"/>
           </a:solidFill>
           <a:ln/>
         </p:spPr>
@@ -7773,11 +7773,11 @@
             <a:r>
               <a:rPr lang="en-US" sz="1350" b="1" dirty="0">
                 <a:solidFill>
-                  <a:srgbClr val="2B2320"/>
-                </a:solidFill>
-                <a:latin typeface="Calibri" pitchFamily="34" charset="0"/>
-                <a:ea typeface="Calibri" pitchFamily="34" charset="-122"/>
-                <a:cs typeface="Calibri" pitchFamily="34" charset="-120"/>
+                  <a:srgbClr val="1F1F1F"/>
+                </a:solidFill>
+                <a:latin typeface="Adobe Clean" pitchFamily="34" charset="0"/>
+                <a:ea typeface="Adobe Clean" pitchFamily="34" charset="-122"/>
+                <a:cs typeface="Adobe Clean" pitchFamily="34" charset="-120"/>
               </a:rPr>
               <a:t>product</a:t>
             </a:r>
@@ -7802,7 +7802,7 @@
             </a:avLst>
           </a:prstGeom>
           <a:solidFill>
-            <a:srgbClr val="FFF3EE"/>
+            <a:srgbClr val="FDECEA"/>
           </a:solidFill>
           <a:ln/>
         </p:spPr>
@@ -7834,11 +7834,11 @@
             <a:r>
               <a:rPr lang="en-US" sz="1350" b="1" dirty="0">
                 <a:solidFill>
-                  <a:srgbClr val="2B2320"/>
-                </a:solidFill>
-                <a:latin typeface="Calibri" pitchFamily="34" charset="0"/>
-                <a:ea typeface="Calibri" pitchFamily="34" charset="-122"/>
-                <a:cs typeface="Calibri" pitchFamily="34" charset="-120"/>
+                  <a:srgbClr val="1F1F1F"/>
+                </a:solidFill>
+                <a:latin typeface="Adobe Clean" pitchFamily="34" charset="0"/>
+                <a:ea typeface="Adobe Clean" pitchFamily="34" charset="-122"/>
+                <a:cs typeface="Adobe Clean" pitchFamily="34" charset="-120"/>
               </a:rPr>
               <a:t>order</a:t>
             </a:r>
@@ -7863,7 +7863,7 @@
             </a:avLst>
           </a:prstGeom>
           <a:solidFill>
-            <a:srgbClr val="FFF3EE"/>
+            <a:srgbClr val="FDECEA"/>
           </a:solidFill>
           <a:ln/>
         </p:spPr>
@@ -7895,11 +7895,11 @@
             <a:r>
               <a:rPr lang="en-US" sz="1350" b="1" dirty="0">
                 <a:solidFill>
-                  <a:srgbClr val="2B2320"/>
-                </a:solidFill>
-                <a:latin typeface="Calibri" pitchFamily="34" charset="0"/>
-                <a:ea typeface="Calibri" pitchFamily="34" charset="-122"/>
-                <a:cs typeface="Calibri" pitchFamily="34" charset="-120"/>
+                  <a:srgbClr val="1F1F1F"/>
+                </a:solidFill>
+                <a:latin typeface="Adobe Clean" pitchFamily="34" charset="0"/>
+                <a:ea typeface="Adobe Clean" pitchFamily="34" charset="-122"/>
+                <a:cs typeface="Adobe Clean" pitchFamily="34" charset="-120"/>
               </a:rPr>
               <a:t>food</a:t>
             </a:r>
@@ -7924,7 +7924,7 @@
             </a:avLst>
           </a:prstGeom>
           <a:solidFill>
-            <a:srgbClr val="FFF3EE"/>
+            <a:srgbClr val="FDECEA"/>
           </a:solidFill>
           <a:ln/>
         </p:spPr>
@@ -7956,11 +7956,11 @@
             <a:r>
               <a:rPr lang="en-US" sz="1350" b="1" dirty="0">
                 <a:solidFill>
-                  <a:srgbClr val="2B2320"/>
-                </a:solidFill>
-                <a:latin typeface="Calibri" pitchFamily="34" charset="0"/>
-                <a:ea typeface="Calibri" pitchFamily="34" charset="-122"/>
-                <a:cs typeface="Calibri" pitchFamily="34" charset="-120"/>
+                  <a:srgbClr val="1F1F1F"/>
+                </a:solidFill>
+                <a:latin typeface="Adobe Clean" pitchFamily="34" charset="0"/>
+                <a:ea typeface="Adobe Clean" pitchFamily="34" charset="-122"/>
+                <a:cs typeface="Adobe Clean" pitchFamily="34" charset="-120"/>
               </a:rPr>
               <a:t>search</a:t>
             </a:r>
@@ -7985,7 +7985,7 @@
             </a:avLst>
           </a:prstGeom>
           <a:solidFill>
-            <a:srgbClr val="FFF3EE"/>
+            <a:srgbClr val="FDECEA"/>
           </a:solidFill>
           <a:ln/>
         </p:spPr>
@@ -8017,11 +8017,11 @@
             <a:r>
               <a:rPr lang="en-US" sz="1350" b="1" dirty="0">
                 <a:solidFill>
-                  <a:srgbClr val="2B2320"/>
-                </a:solidFill>
-                <a:latin typeface="Calibri" pitchFamily="34" charset="0"/>
-                <a:ea typeface="Calibri" pitchFamily="34" charset="-122"/>
-                <a:cs typeface="Calibri" pitchFamily="34" charset="-120"/>
+                  <a:srgbClr val="1F1F1F"/>
+                </a:solidFill>
+                <a:latin typeface="Adobe Clean" pitchFamily="34" charset="0"/>
+                <a:ea typeface="Adobe Clean" pitchFamily="34" charset="-122"/>
+                <a:cs typeface="Adobe Clean" pitchFamily="34" charset="-120"/>
               </a:rPr>
               <a:t>rating</a:t>
             </a:r>
@@ -8046,7 +8046,7 @@
             </a:avLst>
           </a:prstGeom>
           <a:solidFill>
-            <a:srgbClr val="FFF3EE"/>
+            <a:srgbClr val="FDECEA"/>
           </a:solidFill>
           <a:ln/>
         </p:spPr>
@@ -8078,11 +8078,11 @@
             <a:r>
               <a:rPr lang="en-US" sz="1350" b="1" dirty="0">
                 <a:solidFill>
-                  <a:srgbClr val="2B2320"/>
-                </a:solidFill>
-                <a:latin typeface="Calibri" pitchFamily="34" charset="0"/>
-                <a:ea typeface="Calibri" pitchFamily="34" charset="-122"/>
-                <a:cs typeface="Calibri" pitchFamily="34" charset="-120"/>
+                  <a:srgbClr val="1F1F1F"/>
+                </a:solidFill>
+                <a:latin typeface="Adobe Clean" pitchFamily="34" charset="0"/>
+                <a:ea typeface="Adobe Clean" pitchFamily="34" charset="-122"/>
+                <a:cs typeface="Adobe Clean" pitchFamily="34" charset="-120"/>
               </a:rPr>
               <a:t>user</a:t>
             </a:r>
@@ -8107,7 +8107,7 @@
             </a:avLst>
           </a:prstGeom>
           <a:solidFill>
-            <a:srgbClr val="FFF3EE"/>
+            <a:srgbClr val="FDECEA"/>
           </a:solidFill>
           <a:ln/>
         </p:spPr>
@@ -8139,11 +8139,11 @@
             <a:r>
               <a:rPr lang="en-US" sz="1350" b="1" dirty="0">
                 <a:solidFill>
-                  <a:srgbClr val="2B2320"/>
-                </a:solidFill>
-                <a:latin typeface="Calibri" pitchFamily="34" charset="0"/>
-                <a:ea typeface="Calibri" pitchFamily="34" charset="-122"/>
-                <a:cs typeface="Calibri" pitchFamily="34" charset="-120"/>
+                  <a:srgbClr val="1F1F1F"/>
+                </a:solidFill>
+                <a:latin typeface="Adobe Clean" pitchFamily="34" charset="0"/>
+                <a:ea typeface="Adobe Clean" pitchFamily="34" charset="-122"/>
+                <a:cs typeface="Adobe Clean" pitchFamily="34" charset="-120"/>
               </a:rPr>
               <a:t>productListItems*</a:t>
             </a:r>
@@ -8168,7 +8168,7 @@
             </a:avLst>
           </a:prstGeom>
           <a:solidFill>
-            <a:srgbClr val="FFF3EE"/>
+            <a:srgbClr val="FDECEA"/>
           </a:solidFill>
           <a:ln/>
         </p:spPr>
@@ -8200,11 +8200,11 @@
             <a:r>
               <a:rPr lang="en-US" sz="1350" b="1" dirty="0">
                 <a:solidFill>
-                  <a:srgbClr val="2B2320"/>
-                </a:solidFill>
-                <a:latin typeface="Calibri" pitchFamily="34" charset="0"/>
-                <a:ea typeface="Calibri" pitchFamily="34" charset="-122"/>
-                <a:cs typeface="Calibri" pitchFamily="34" charset="-120"/>
+                  <a:srgbClr val="1F1F1F"/>
+                </a:solidFill>
+                <a:latin typeface="Adobe Clean" pitchFamily="34" charset="0"/>
+                <a:ea typeface="Adobe Clean" pitchFamily="34" charset="-122"/>
+                <a:cs typeface="Adobe Clean" pitchFamily="34" charset="-120"/>
               </a:rPr>
               <a:t>identityMap*</a:t>
             </a:r>
@@ -8229,7 +8229,7 @@
             </a:avLst>
           </a:prstGeom>
           <a:solidFill>
-            <a:srgbClr val="FFF3EE"/>
+            <a:srgbClr val="FDECEA"/>
           </a:solidFill>
           <a:ln/>
         </p:spPr>
@@ -8261,11 +8261,11 @@
             <a:r>
               <a:rPr lang="en-US" sz="1350" b="1" dirty="0">
                 <a:solidFill>
-                  <a:srgbClr val="2B2320"/>
-                </a:solidFill>
-                <a:latin typeface="Calibri" pitchFamily="34" charset="0"/>
-                <a:ea typeface="Calibri" pitchFamily="34" charset="-122"/>
-                <a:cs typeface="Calibri" pitchFamily="34" charset="-120"/>
+                  <a:srgbClr val="1F1F1F"/>
+                </a:solidFill>
+                <a:latin typeface="Adobe Clean" pitchFamily="34" charset="0"/>
+                <a:ea typeface="Adobe Clean" pitchFamily="34" charset="-122"/>
+                <a:cs typeface="Adobe Clean" pitchFamily="34" charset="-120"/>
               </a:rPr>
               <a:t>Feastly - XDM**</a:t>
             </a:r>
@@ -8290,11 +8290,11 @@
             </a:avLst>
           </a:prstGeom>
           <a:solidFill>
-            <a:srgbClr val="F4EEEA"/>
+            <a:srgbClr val="F2F2F2"/>
           </a:solidFill>
           <a:ln w="15875">
             <a:solidFill>
-              <a:srgbClr val="FF5722"/>
+              <a:srgbClr val="EB1000"/>
             </a:solidFill>
             <a:prstDash val="dash"/>
           </a:ln>
@@ -8338,7 +8338,7 @@
             <a:r>
               <a:rPr lang="en-US" sz="1300" b="1" dirty="0">
                 <a:solidFill>
-                  <a:srgbClr val="E64A19"/>
+                  <a:srgbClr val="B10C00"/>
                 </a:solidFill>
               </a:rPr>
               <a:t>SCREENSHOT</a:t>
@@ -8374,11 +8374,11 @@
             <a:r>
               <a:rPr lang="en-US" sz="1200" i="1" dirty="0">
                 <a:solidFill>
-                  <a:srgbClr val="7D726C"/>
-                </a:solidFill>
-                <a:latin typeface="Calibri" pitchFamily="34" charset="0"/>
-                <a:ea typeface="Calibri" pitchFamily="34" charset="-122"/>
-                <a:cs typeface="Calibri" pitchFamily="34" charset="-120"/>
+                  <a:srgbClr val="6B6B6B"/>
+                </a:solidFill>
+                <a:latin typeface="Adobe Clean" pitchFamily="34" charset="0"/>
+                <a:ea typeface="Adobe Clean" pitchFamily="34" charset="-122"/>
+                <a:cs typeface="Adobe Clean" pitchFamily="34" charset="-120"/>
               </a:rPr>
               <a:t>Data Elements list in Tags — show the 11 "Feastly - ..." elements.</a:t>
             </a:r>
@@ -8413,11 +8413,11 @@
             <a:r>
               <a:rPr lang="en-US" sz="1100" i="1" dirty="0">
                 <a:solidFill>
-                  <a:srgbClr val="7D726C"/>
-                </a:solidFill>
-                <a:latin typeface="Calibri" pitchFamily="34" charset="0"/>
-                <a:ea typeface="Calibri" pitchFamily="34" charset="-122"/>
-                <a:cs typeface="Calibri" pitchFamily="34" charset="-120"/>
+                  <a:srgbClr val="6B6B6B"/>
+                </a:solidFill>
+                <a:latin typeface="Adobe Clean" pitchFamily="34" charset="0"/>
+                <a:ea typeface="Adobe Clean" pitchFamily="34" charset="-122"/>
+                <a:cs typeface="Adobe Clean" pitchFamily="34" charset="-120"/>
               </a:rPr>
               <a:t>* Custom Code   ** XDM Object (builds the final payload)</a:t>
             </a:r>
@@ -8484,11 +8484,11 @@
             <a:r>
               <a:rPr lang="en-US" sz="1250" b="1" spc="200" kern="0" dirty="0">
                 <a:solidFill>
-                  <a:srgbClr val="FF5722"/>
-                </a:solidFill>
-                <a:latin typeface="Calibri" pitchFamily="34" charset="0"/>
-                <a:ea typeface="Calibri" pitchFamily="34" charset="-122"/>
-                <a:cs typeface="Calibri" pitchFamily="34" charset="-120"/>
+                  <a:srgbClr val="EB1000"/>
+                </a:solidFill>
+                <a:latin typeface="Adobe Clean" pitchFamily="34" charset="0"/>
+                <a:ea typeface="Adobe Clean" pitchFamily="34" charset="-122"/>
+                <a:cs typeface="Adobe Clean" pitchFamily="34" charset="-120"/>
               </a:rPr>
               <a:t>THE BUILDING BLOCKS</a:t>
             </a:r>
@@ -8523,11 +8523,11 @@
             <a:r>
               <a:rPr lang="en-US" sz="3200" b="1" dirty="0">
                 <a:solidFill>
-                  <a:srgbClr val="2B2320"/>
-                </a:solidFill>
-                <a:latin typeface="Cambria" pitchFamily="34" charset="0"/>
-                <a:ea typeface="Cambria" pitchFamily="34" charset="-122"/>
-                <a:cs typeface="Cambria" pitchFamily="34" charset="-120"/>
+                  <a:srgbClr val="1F1F1F"/>
+                </a:solidFill>
+                <a:latin typeface="Adobe Clean" pitchFamily="34" charset="0"/>
+                <a:ea typeface="Adobe Clean" pitchFamily="34" charset="-122"/>
+                <a:cs typeface="Adobe Clean" pitchFamily="34" charset="-120"/>
               </a:rPr>
               <a:t>Rules — one per event (13)</a:t>
             </a:r>
@@ -8562,11 +8562,11 @@
             <a:r>
               <a:rPr lang="en-US" sz="1400" dirty="0">
                 <a:solidFill>
-                  <a:srgbClr val="7D726C"/>
-                </a:solidFill>
-                <a:latin typeface="Calibri" pitchFamily="34" charset="0"/>
-                <a:ea typeface="Calibri" pitchFamily="34" charset="-122"/>
-                <a:cs typeface="Calibri" pitchFamily="34" charset="-120"/>
+                  <a:srgbClr val="6B6B6B"/>
+                </a:solidFill>
+                <a:latin typeface="Adobe Clean" pitchFamily="34" charset="0"/>
+                <a:ea typeface="Adobe Clean" pitchFamily="34" charset="-122"/>
+                <a:cs typeface="Adobe Clean" pitchFamily="34" charset="-120"/>
               </a:rPr>
               <a:t>Each rule: WHEN a data-layer event fires → SEND the XDM event to the Edge.</a:t>
             </a:r>
@@ -8595,7 +8595,7 @@
           </a:solidFill>
           <a:ln w="12700">
             <a:solidFill>
-              <a:srgbClr val="E7DED8"/>
+              <a:srgbClr val="E3E3E3"/>
             </a:solidFill>
             <a:prstDash val="solid"/>
           </a:ln>
@@ -8616,7 +8616,7 @@
             <a:avLst/>
           </a:prstGeom>
           <a:solidFill>
-            <a:srgbClr val="FFB300"/>
+            <a:srgbClr val="FFA311"/>
           </a:solidFill>
           <a:ln/>
         </p:spPr>
@@ -8648,11 +8648,11 @@
             <a:r>
               <a:rPr lang="en-US" sz="1400" b="1" dirty="0">
                 <a:solidFill>
-                  <a:srgbClr val="2B2320"/>
-                </a:solidFill>
-                <a:latin typeface="Calibri" pitchFamily="34" charset="0"/>
-                <a:ea typeface="Calibri" pitchFamily="34" charset="-122"/>
-                <a:cs typeface="Calibri" pitchFamily="34" charset="-120"/>
+                  <a:srgbClr val="1F1F1F"/>
+                </a:solidFill>
+                <a:latin typeface="Adobe Clean" pitchFamily="34" charset="0"/>
+                <a:ea typeface="Adobe Clean" pitchFamily="34" charset="-122"/>
+                <a:cs typeface="Adobe Clean" pitchFamily="34" charset="-120"/>
               </a:rPr>
               <a:t>1</a:t>
             </a:r>
@@ -8687,11 +8687,11 @@
             <a:r>
               <a:rPr lang="en-US" sz="1250" b="1" dirty="0">
                 <a:solidFill>
-                  <a:srgbClr val="2B2320"/>
-                </a:solidFill>
-                <a:latin typeface="Calibri" pitchFamily="34" charset="0"/>
-                <a:ea typeface="Calibri" pitchFamily="34" charset="-122"/>
-                <a:cs typeface="Calibri" pitchFamily="34" charset="-120"/>
+                  <a:srgbClr val="1F1F1F"/>
+                </a:solidFill>
+                <a:latin typeface="Adobe Clean" pitchFamily="34" charset="0"/>
+                <a:ea typeface="Adobe Clean" pitchFamily="34" charset="-122"/>
+                <a:cs typeface="Adobe Clean" pitchFamily="34" charset="-120"/>
               </a:rPr>
               <a:t>Page View</a:t>
             </a:r>
@@ -8720,7 +8720,7 @@
           </a:solidFill>
           <a:ln w="12700">
             <a:solidFill>
-              <a:srgbClr val="E7DED8"/>
+              <a:srgbClr val="E3E3E3"/>
             </a:solidFill>
             <a:prstDash val="solid"/>
           </a:ln>
@@ -8741,7 +8741,7 @@
             <a:avLst/>
           </a:prstGeom>
           <a:solidFill>
-            <a:srgbClr val="FFB300"/>
+            <a:srgbClr val="FFA311"/>
           </a:solidFill>
           <a:ln/>
         </p:spPr>
@@ -8773,11 +8773,11 @@
             <a:r>
               <a:rPr lang="en-US" sz="1400" b="1" dirty="0">
                 <a:solidFill>
-                  <a:srgbClr val="2B2320"/>
-                </a:solidFill>
-                <a:latin typeface="Calibri" pitchFamily="34" charset="0"/>
-                <a:ea typeface="Calibri" pitchFamily="34" charset="-122"/>
-                <a:cs typeface="Calibri" pitchFamily="34" charset="-120"/>
+                  <a:srgbClr val="1F1F1F"/>
+                </a:solidFill>
+                <a:latin typeface="Adobe Clean" pitchFamily="34" charset="0"/>
+                <a:ea typeface="Adobe Clean" pitchFamily="34" charset="-122"/>
+                <a:cs typeface="Adobe Clean" pitchFamily="34" charset="-120"/>
               </a:rPr>
               <a:t>2</a:t>
             </a:r>
@@ -8812,11 +8812,11 @@
             <a:r>
               <a:rPr lang="en-US" sz="1250" b="1" dirty="0">
                 <a:solidFill>
-                  <a:srgbClr val="2B2320"/>
-                </a:solidFill>
-                <a:latin typeface="Calibri" pitchFamily="34" charset="0"/>
-                <a:ea typeface="Calibri" pitchFamily="34" charset="-122"/>
-                <a:cs typeface="Calibri" pitchFamily="34" charset="-120"/>
+                  <a:srgbClr val="1F1F1F"/>
+                </a:solidFill>
+                <a:latin typeface="Adobe Clean" pitchFamily="34" charset="0"/>
+                <a:ea typeface="Adobe Clean" pitchFamily="34" charset="-122"/>
+                <a:cs typeface="Adobe Clean" pitchFamily="34" charset="-120"/>
               </a:rPr>
               <a:t>View Menu</a:t>
             </a:r>
@@ -8845,7 +8845,7 @@
           </a:solidFill>
           <a:ln w="12700">
             <a:solidFill>
-              <a:srgbClr val="E7DED8"/>
+              <a:srgbClr val="E3E3E3"/>
             </a:solidFill>
             <a:prstDash val="solid"/>
           </a:ln>
@@ -8866,7 +8866,7 @@
             <a:avLst/>
           </a:prstGeom>
           <a:solidFill>
-            <a:srgbClr val="FFB300"/>
+            <a:srgbClr val="FFA311"/>
           </a:solidFill>
           <a:ln/>
         </p:spPr>
@@ -8898,11 +8898,11 @@
             <a:r>
               <a:rPr lang="en-US" sz="1400" b="1" dirty="0">
                 <a:solidFill>
-                  <a:srgbClr val="2B2320"/>
-                </a:solidFill>
-                <a:latin typeface="Calibri" pitchFamily="34" charset="0"/>
-                <a:ea typeface="Calibri" pitchFamily="34" charset="-122"/>
-                <a:cs typeface="Calibri" pitchFamily="34" charset="-120"/>
+                  <a:srgbClr val="1F1F1F"/>
+                </a:solidFill>
+                <a:latin typeface="Adobe Clean" pitchFamily="34" charset="0"/>
+                <a:ea typeface="Adobe Clean" pitchFamily="34" charset="-122"/>
+                <a:cs typeface="Adobe Clean" pitchFamily="34" charset="-120"/>
               </a:rPr>
               <a:t>3</a:t>
             </a:r>
@@ -8937,11 +8937,11 @@
             <a:r>
               <a:rPr lang="en-US" sz="1250" b="1" dirty="0">
                 <a:solidFill>
-                  <a:srgbClr val="2B2320"/>
-                </a:solidFill>
-                <a:latin typeface="Calibri" pitchFamily="34" charset="0"/>
-                <a:ea typeface="Calibri" pitchFamily="34" charset="-122"/>
-                <a:cs typeface="Calibri" pitchFamily="34" charset="-120"/>
+                  <a:srgbClr val="1F1F1F"/>
+                </a:solidFill>
+                <a:latin typeface="Adobe Clean" pitchFamily="34" charset="0"/>
+                <a:ea typeface="Adobe Clean" pitchFamily="34" charset="-122"/>
+                <a:cs typeface="Adobe Clean" pitchFamily="34" charset="-120"/>
               </a:rPr>
               <a:t>Search</a:t>
             </a:r>
@@ -8970,7 +8970,7 @@
           </a:solidFill>
           <a:ln w="12700">
             <a:solidFill>
-              <a:srgbClr val="E7DED8"/>
+              <a:srgbClr val="E3E3E3"/>
             </a:solidFill>
             <a:prstDash val="solid"/>
           </a:ln>
@@ -8991,7 +8991,7 @@
             <a:avLst/>
           </a:prstGeom>
           <a:solidFill>
-            <a:srgbClr val="FFB300"/>
+            <a:srgbClr val="FFA311"/>
           </a:solidFill>
           <a:ln/>
         </p:spPr>
@@ -9023,11 +9023,11 @@
             <a:r>
               <a:rPr lang="en-US" sz="1400" b="1" dirty="0">
                 <a:solidFill>
-                  <a:srgbClr val="2B2320"/>
-                </a:solidFill>
-                <a:latin typeface="Calibri" pitchFamily="34" charset="0"/>
-                <a:ea typeface="Calibri" pitchFamily="34" charset="-122"/>
-                <a:cs typeface="Calibri" pitchFamily="34" charset="-120"/>
+                  <a:srgbClr val="1F1F1F"/>
+                </a:solidFill>
+                <a:latin typeface="Adobe Clean" pitchFamily="34" charset="0"/>
+                <a:ea typeface="Adobe Clean" pitchFamily="34" charset="-122"/>
+                <a:cs typeface="Adobe Clean" pitchFamily="34" charset="-120"/>
               </a:rPr>
               <a:t>4</a:t>
             </a:r>
@@ -9062,11 +9062,11 @@
             <a:r>
               <a:rPr lang="en-US" sz="1250" b="1" dirty="0">
                 <a:solidFill>
-                  <a:srgbClr val="2B2320"/>
-                </a:solidFill>
-                <a:latin typeface="Calibri" pitchFamily="34" charset="0"/>
-                <a:ea typeface="Calibri" pitchFamily="34" charset="-122"/>
-                <a:cs typeface="Calibri" pitchFamily="34" charset="-120"/>
+                  <a:srgbClr val="1F1F1F"/>
+                </a:solidFill>
+                <a:latin typeface="Adobe Clean" pitchFamily="34" charset="0"/>
+                <a:ea typeface="Adobe Clean" pitchFamily="34" charset="-122"/>
+                <a:cs typeface="Adobe Clean" pitchFamily="34" charset="-120"/>
               </a:rPr>
               <a:t>Dish View</a:t>
             </a:r>
@@ -9095,7 +9095,7 @@
           </a:solidFill>
           <a:ln w="12700">
             <a:solidFill>
-              <a:srgbClr val="E7DED8"/>
+              <a:srgbClr val="E3E3E3"/>
             </a:solidFill>
             <a:prstDash val="solid"/>
           </a:ln>
@@ -9116,7 +9116,7 @@
             <a:avLst/>
           </a:prstGeom>
           <a:solidFill>
-            <a:srgbClr val="FFB300"/>
+            <a:srgbClr val="FFA311"/>
           </a:solidFill>
           <a:ln/>
         </p:spPr>
@@ -9148,11 +9148,11 @@
             <a:r>
               <a:rPr lang="en-US" sz="1400" b="1" dirty="0">
                 <a:solidFill>
-                  <a:srgbClr val="2B2320"/>
-                </a:solidFill>
-                <a:latin typeface="Calibri" pitchFamily="34" charset="0"/>
-                <a:ea typeface="Calibri" pitchFamily="34" charset="-122"/>
-                <a:cs typeface="Calibri" pitchFamily="34" charset="-120"/>
+                  <a:srgbClr val="1F1F1F"/>
+                </a:solidFill>
+                <a:latin typeface="Adobe Clean" pitchFamily="34" charset="0"/>
+                <a:ea typeface="Adobe Clean" pitchFamily="34" charset="-122"/>
+                <a:cs typeface="Adobe Clean" pitchFamily="34" charset="-120"/>
               </a:rPr>
               <a:t>5</a:t>
             </a:r>
@@ -9187,11 +9187,11 @@
             <a:r>
               <a:rPr lang="en-US" sz="1250" b="1" dirty="0">
                 <a:solidFill>
-                  <a:srgbClr val="2B2320"/>
-                </a:solidFill>
-                <a:latin typeface="Calibri" pitchFamily="34" charset="0"/>
-                <a:ea typeface="Calibri" pitchFamily="34" charset="-122"/>
-                <a:cs typeface="Calibri" pitchFamily="34" charset="-120"/>
+                  <a:srgbClr val="1F1F1F"/>
+                </a:solidFill>
+                <a:latin typeface="Adobe Clean" pitchFamily="34" charset="0"/>
+                <a:ea typeface="Adobe Clean" pitchFamily="34" charset="-122"/>
+                <a:cs typeface="Adobe Clean" pitchFamily="34" charset="-120"/>
               </a:rPr>
               <a:t>Add To Cart</a:t>
             </a:r>
@@ -9220,7 +9220,7 @@
           </a:solidFill>
           <a:ln w="12700">
             <a:solidFill>
-              <a:srgbClr val="E7DED8"/>
+              <a:srgbClr val="E3E3E3"/>
             </a:solidFill>
             <a:prstDash val="solid"/>
           </a:ln>
@@ -9241,7 +9241,7 @@
             <a:avLst/>
           </a:prstGeom>
           <a:solidFill>
-            <a:srgbClr val="FFB300"/>
+            <a:srgbClr val="FFA311"/>
           </a:solidFill>
           <a:ln/>
         </p:spPr>
@@ -9273,11 +9273,11 @@
             <a:r>
               <a:rPr lang="en-US" sz="1400" b="1" dirty="0">
                 <a:solidFill>
-                  <a:srgbClr val="2B2320"/>
-                </a:solidFill>
-                <a:latin typeface="Calibri" pitchFamily="34" charset="0"/>
-                <a:ea typeface="Calibri" pitchFamily="34" charset="-122"/>
-                <a:cs typeface="Calibri" pitchFamily="34" charset="-120"/>
+                  <a:srgbClr val="1F1F1F"/>
+                </a:solidFill>
+                <a:latin typeface="Adobe Clean" pitchFamily="34" charset="0"/>
+                <a:ea typeface="Adobe Clean" pitchFamily="34" charset="-122"/>
+                <a:cs typeface="Adobe Clean" pitchFamily="34" charset="-120"/>
               </a:rPr>
               <a:t>6</a:t>
             </a:r>
@@ -9312,11 +9312,11 @@
             <a:r>
               <a:rPr lang="en-US" sz="1250" b="1" dirty="0">
                 <a:solidFill>
-                  <a:srgbClr val="2B2320"/>
-                </a:solidFill>
-                <a:latin typeface="Calibri" pitchFamily="34" charset="0"/>
-                <a:ea typeface="Calibri" pitchFamily="34" charset="-122"/>
-                <a:cs typeface="Calibri" pitchFamily="34" charset="-120"/>
+                  <a:srgbClr val="1F1F1F"/>
+                </a:solidFill>
+                <a:latin typeface="Adobe Clean" pitchFamily="34" charset="0"/>
+                <a:ea typeface="Adobe Clean" pitchFamily="34" charset="-122"/>
+                <a:cs typeface="Adobe Clean" pitchFamily="34" charset="-120"/>
               </a:rPr>
               <a:t>Remove From Cart</a:t>
             </a:r>
@@ -9345,7 +9345,7 @@
           </a:solidFill>
           <a:ln w="12700">
             <a:solidFill>
-              <a:srgbClr val="E7DED8"/>
+              <a:srgbClr val="E3E3E3"/>
             </a:solidFill>
             <a:prstDash val="solid"/>
           </a:ln>
@@ -9366,7 +9366,7 @@
             <a:avLst/>
           </a:prstGeom>
           <a:solidFill>
-            <a:srgbClr val="FFB300"/>
+            <a:srgbClr val="FFA311"/>
           </a:solidFill>
           <a:ln/>
         </p:spPr>
@@ -9398,11 +9398,11 @@
             <a:r>
               <a:rPr lang="en-US" sz="1400" b="1" dirty="0">
                 <a:solidFill>
-                  <a:srgbClr val="2B2320"/>
-                </a:solidFill>
-                <a:latin typeface="Calibri" pitchFamily="34" charset="0"/>
-                <a:ea typeface="Calibri" pitchFamily="34" charset="-122"/>
-                <a:cs typeface="Calibri" pitchFamily="34" charset="-120"/>
+                  <a:srgbClr val="1F1F1F"/>
+                </a:solidFill>
+                <a:latin typeface="Adobe Clean" pitchFamily="34" charset="0"/>
+                <a:ea typeface="Adobe Clean" pitchFamily="34" charset="-122"/>
+                <a:cs typeface="Adobe Clean" pitchFamily="34" charset="-120"/>
               </a:rPr>
               <a:t>7</a:t>
             </a:r>
@@ -9437,11 +9437,11 @@
             <a:r>
               <a:rPr lang="en-US" sz="1250" b="1" dirty="0">
                 <a:solidFill>
-                  <a:srgbClr val="2B2320"/>
-                </a:solidFill>
-                <a:latin typeface="Calibri" pitchFamily="34" charset="0"/>
-                <a:ea typeface="Calibri" pitchFamily="34" charset="-122"/>
-                <a:cs typeface="Calibri" pitchFamily="34" charset="-120"/>
+                  <a:srgbClr val="1F1F1F"/>
+                </a:solidFill>
+                <a:latin typeface="Adobe Clean" pitchFamily="34" charset="0"/>
+                <a:ea typeface="Adobe Clean" pitchFamily="34" charset="-122"/>
+                <a:cs typeface="Adobe Clean" pitchFamily="34" charset="-120"/>
               </a:rPr>
               <a:t>Checkout</a:t>
             </a:r>
@@ -9470,7 +9470,7 @@
           </a:solidFill>
           <a:ln w="12700">
             <a:solidFill>
-              <a:srgbClr val="E7DED8"/>
+              <a:srgbClr val="E3E3E3"/>
             </a:solidFill>
             <a:prstDash val="solid"/>
           </a:ln>
@@ -9491,7 +9491,7 @@
             <a:avLst/>
           </a:prstGeom>
           <a:solidFill>
-            <a:srgbClr val="FFB300"/>
+            <a:srgbClr val="FFA311"/>
           </a:solidFill>
           <a:ln/>
         </p:spPr>
@@ -9523,11 +9523,11 @@
             <a:r>
               <a:rPr lang="en-US" sz="1400" b="1" dirty="0">
                 <a:solidFill>
-                  <a:srgbClr val="2B2320"/>
-                </a:solidFill>
-                <a:latin typeface="Calibri" pitchFamily="34" charset="0"/>
-                <a:ea typeface="Calibri" pitchFamily="34" charset="-122"/>
-                <a:cs typeface="Calibri" pitchFamily="34" charset="-120"/>
+                  <a:srgbClr val="1F1F1F"/>
+                </a:solidFill>
+                <a:latin typeface="Adobe Clean" pitchFamily="34" charset="0"/>
+                <a:ea typeface="Adobe Clean" pitchFamily="34" charset="-122"/>
+                <a:cs typeface="Adobe Clean" pitchFamily="34" charset="-120"/>
               </a:rPr>
               <a:t>8</a:t>
             </a:r>
@@ -9562,11 +9562,11 @@
             <a:r>
               <a:rPr lang="en-US" sz="1250" b="1" dirty="0">
                 <a:solidFill>
-                  <a:srgbClr val="2B2320"/>
-                </a:solidFill>
-                <a:latin typeface="Calibri" pitchFamily="34" charset="0"/>
-                <a:ea typeface="Calibri" pitchFamily="34" charset="-122"/>
-                <a:cs typeface="Calibri" pitchFamily="34" charset="-120"/>
+                  <a:srgbClr val="1F1F1F"/>
+                </a:solidFill>
+                <a:latin typeface="Adobe Clean" pitchFamily="34" charset="0"/>
+                <a:ea typeface="Adobe Clean" pitchFamily="34" charset="-122"/>
+                <a:cs typeface="Adobe Clean" pitchFamily="34" charset="-120"/>
               </a:rPr>
               <a:t>Purchase</a:t>
             </a:r>
@@ -9595,7 +9595,7 @@
           </a:solidFill>
           <a:ln w="12700">
             <a:solidFill>
-              <a:srgbClr val="E7DED8"/>
+              <a:srgbClr val="E3E3E3"/>
             </a:solidFill>
             <a:prstDash val="solid"/>
           </a:ln>
@@ -9616,7 +9616,7 @@
             <a:avLst/>
           </a:prstGeom>
           <a:solidFill>
-            <a:srgbClr val="FFB300"/>
+            <a:srgbClr val="FFA311"/>
           </a:solidFill>
           <a:ln/>
         </p:spPr>
@@ -9648,11 +9648,11 @@
             <a:r>
               <a:rPr lang="en-US" sz="1400" b="1" dirty="0">
                 <a:solidFill>
-                  <a:srgbClr val="2B2320"/>
-                </a:solidFill>
-                <a:latin typeface="Calibri" pitchFamily="34" charset="0"/>
-                <a:ea typeface="Calibri" pitchFamily="34" charset="-122"/>
-                <a:cs typeface="Calibri" pitchFamily="34" charset="-120"/>
+                  <a:srgbClr val="1F1F1F"/>
+                </a:solidFill>
+                <a:latin typeface="Adobe Clean" pitchFamily="34" charset="0"/>
+                <a:ea typeface="Adobe Clean" pitchFamily="34" charset="-122"/>
+                <a:cs typeface="Adobe Clean" pitchFamily="34" charset="-120"/>
               </a:rPr>
               <a:t>9</a:t>
             </a:r>
@@ -9687,11 +9687,11 @@
             <a:r>
               <a:rPr lang="en-US" sz="1250" b="1" dirty="0">
                 <a:solidFill>
-                  <a:srgbClr val="2B2320"/>
-                </a:solidFill>
-                <a:latin typeface="Calibri" pitchFamily="34" charset="0"/>
-                <a:ea typeface="Calibri" pitchFamily="34" charset="-122"/>
-                <a:cs typeface="Calibri" pitchFamily="34" charset="-120"/>
+                  <a:srgbClr val="1F1F1F"/>
+                </a:solidFill>
+                <a:latin typeface="Adobe Clean" pitchFamily="34" charset="0"/>
+                <a:ea typeface="Adobe Clean" pitchFamily="34" charset="-122"/>
+                <a:cs typeface="Adobe Clean" pitchFamily="34" charset="-120"/>
               </a:rPr>
               <a:t>Order Rating</a:t>
             </a:r>
@@ -9720,7 +9720,7 @@
           </a:solidFill>
           <a:ln w="12700">
             <a:solidFill>
-              <a:srgbClr val="E7DED8"/>
+              <a:srgbClr val="E3E3E3"/>
             </a:solidFill>
             <a:prstDash val="solid"/>
           </a:ln>
@@ -9741,7 +9741,7 @@
             <a:avLst/>
           </a:prstGeom>
           <a:solidFill>
-            <a:srgbClr val="FFB300"/>
+            <a:srgbClr val="FFA311"/>
           </a:solidFill>
           <a:ln/>
         </p:spPr>
@@ -9773,11 +9773,11 @@
             <a:r>
               <a:rPr lang="en-US" sz="1400" b="1" dirty="0">
                 <a:solidFill>
-                  <a:srgbClr val="2B2320"/>
-                </a:solidFill>
-                <a:latin typeface="Calibri" pitchFamily="34" charset="0"/>
-                <a:ea typeface="Calibri" pitchFamily="34" charset="-122"/>
-                <a:cs typeface="Calibri" pitchFamily="34" charset="-120"/>
+                  <a:srgbClr val="1F1F1F"/>
+                </a:solidFill>
+                <a:latin typeface="Adobe Clean" pitchFamily="34" charset="0"/>
+                <a:ea typeface="Adobe Clean" pitchFamily="34" charset="-122"/>
+                <a:cs typeface="Adobe Clean" pitchFamily="34" charset="-120"/>
               </a:rPr>
               <a:t>10</a:t>
             </a:r>
@@ -9812,11 +9812,11 @@
             <a:r>
               <a:rPr lang="en-US" sz="1250" b="1" dirty="0">
                 <a:solidFill>
-                  <a:srgbClr val="2B2320"/>
-                </a:solidFill>
-                <a:latin typeface="Calibri" pitchFamily="34" charset="0"/>
-                <a:ea typeface="Calibri" pitchFamily="34" charset="-122"/>
-                <a:cs typeface="Calibri" pitchFamily="34" charset="-120"/>
+                  <a:srgbClr val="1F1F1F"/>
+                </a:solidFill>
+                <a:latin typeface="Adobe Clean" pitchFamily="34" charset="0"/>
+                <a:ea typeface="Adobe Clean" pitchFamily="34" charset="-122"/>
+                <a:cs typeface="Adobe Clean" pitchFamily="34" charset="-120"/>
               </a:rPr>
               <a:t>Login</a:t>
             </a:r>
@@ -9845,7 +9845,7 @@
           </a:solidFill>
           <a:ln w="12700">
             <a:solidFill>
-              <a:srgbClr val="E7DED8"/>
+              <a:srgbClr val="E3E3E3"/>
             </a:solidFill>
             <a:prstDash val="solid"/>
           </a:ln>
@@ -9866,7 +9866,7 @@
             <a:avLst/>
           </a:prstGeom>
           <a:solidFill>
-            <a:srgbClr val="FFB300"/>
+            <a:srgbClr val="FFA311"/>
           </a:solidFill>
           <a:ln/>
         </p:spPr>
@@ -9898,11 +9898,11 @@
             <a:r>
               <a:rPr lang="en-US" sz="1400" b="1" dirty="0">
                 <a:solidFill>
-                  <a:srgbClr val="2B2320"/>
-                </a:solidFill>
-                <a:latin typeface="Calibri" pitchFamily="34" charset="0"/>
-                <a:ea typeface="Calibri" pitchFamily="34" charset="-122"/>
-                <a:cs typeface="Calibri" pitchFamily="34" charset="-120"/>
+                  <a:srgbClr val="1F1F1F"/>
+                </a:solidFill>
+                <a:latin typeface="Adobe Clean" pitchFamily="34" charset="0"/>
+                <a:ea typeface="Adobe Clean" pitchFamily="34" charset="-122"/>
+                <a:cs typeface="Adobe Clean" pitchFamily="34" charset="-120"/>
               </a:rPr>
               <a:t>11</a:t>
             </a:r>
@@ -9937,11 +9937,11 @@
             <a:r>
               <a:rPr lang="en-US" sz="1250" b="1" dirty="0">
                 <a:solidFill>
-                  <a:srgbClr val="2B2320"/>
-                </a:solidFill>
-                <a:latin typeface="Calibri" pitchFamily="34" charset="0"/>
-                <a:ea typeface="Calibri" pitchFamily="34" charset="-122"/>
-                <a:cs typeface="Calibri" pitchFamily="34" charset="-120"/>
+                  <a:srgbClr val="1F1F1F"/>
+                </a:solidFill>
+                <a:latin typeface="Adobe Clean" pitchFamily="34" charset="0"/>
+                <a:ea typeface="Adobe Clean" pitchFamily="34" charset="-122"/>
+                <a:cs typeface="Adobe Clean" pitchFamily="34" charset="-120"/>
               </a:rPr>
               <a:t>Signup</a:t>
             </a:r>
@@ -9970,7 +9970,7 @@
           </a:solidFill>
           <a:ln w="12700">
             <a:solidFill>
-              <a:srgbClr val="E7DED8"/>
+              <a:srgbClr val="E3E3E3"/>
             </a:solidFill>
             <a:prstDash val="solid"/>
           </a:ln>
@@ -9991,7 +9991,7 @@
             <a:avLst/>
           </a:prstGeom>
           <a:solidFill>
-            <a:srgbClr val="FFB300"/>
+            <a:srgbClr val="FFA311"/>
           </a:solidFill>
           <a:ln/>
         </p:spPr>
@@ -10023,11 +10023,11 @@
             <a:r>
               <a:rPr lang="en-US" sz="1400" b="1" dirty="0">
                 <a:solidFill>
-                  <a:srgbClr val="2B2320"/>
-                </a:solidFill>
-                <a:latin typeface="Calibri" pitchFamily="34" charset="0"/>
-                <a:ea typeface="Calibri" pitchFamily="34" charset="-122"/>
-                <a:cs typeface="Calibri" pitchFamily="34" charset="-120"/>
+                  <a:srgbClr val="1F1F1F"/>
+                </a:solidFill>
+                <a:latin typeface="Adobe Clean" pitchFamily="34" charset="0"/>
+                <a:ea typeface="Adobe Clean" pitchFamily="34" charset="-122"/>
+                <a:cs typeface="Adobe Clean" pitchFamily="34" charset="-120"/>
               </a:rPr>
               <a:t>12</a:t>
             </a:r>
@@ -10062,11 +10062,11 @@
             <a:r>
               <a:rPr lang="en-US" sz="1250" b="1" dirty="0">
                 <a:solidFill>
-                  <a:srgbClr val="2B2320"/>
-                </a:solidFill>
-                <a:latin typeface="Calibri" pitchFamily="34" charset="0"/>
-                <a:ea typeface="Calibri" pitchFamily="34" charset="-122"/>
-                <a:cs typeface="Calibri" pitchFamily="34" charset="-120"/>
+                  <a:srgbClr val="1F1F1F"/>
+                </a:solidFill>
+                <a:latin typeface="Adobe Clean" pitchFamily="34" charset="0"/>
+                <a:ea typeface="Adobe Clean" pitchFamily="34" charset="-122"/>
+                <a:cs typeface="Adobe Clean" pitchFamily="34" charset="-120"/>
               </a:rPr>
               <a:t>Profile Update</a:t>
             </a:r>
@@ -10095,7 +10095,7 @@
           </a:solidFill>
           <a:ln w="12700">
             <a:solidFill>
-              <a:srgbClr val="E7DED8"/>
+              <a:srgbClr val="E3E3E3"/>
             </a:solidFill>
             <a:prstDash val="solid"/>
           </a:ln>
@@ -10116,7 +10116,7 @@
             <a:avLst/>
           </a:prstGeom>
           <a:solidFill>
-            <a:srgbClr val="FFB300"/>
+            <a:srgbClr val="FFA311"/>
           </a:solidFill>
           <a:ln/>
         </p:spPr>
@@ -10148,11 +10148,11 @@
             <a:r>
               <a:rPr lang="en-US" sz="1400" b="1" dirty="0">
                 <a:solidFill>
-                  <a:srgbClr val="2B2320"/>
-                </a:solidFill>
-                <a:latin typeface="Calibri" pitchFamily="34" charset="0"/>
-                <a:ea typeface="Calibri" pitchFamily="34" charset="-122"/>
-                <a:cs typeface="Calibri" pitchFamily="34" charset="-120"/>
+                  <a:srgbClr val="1F1F1F"/>
+                </a:solidFill>
+                <a:latin typeface="Adobe Clean" pitchFamily="34" charset="0"/>
+                <a:ea typeface="Adobe Clean" pitchFamily="34" charset="-122"/>
+                <a:cs typeface="Adobe Clean" pitchFamily="34" charset="-120"/>
               </a:rPr>
               <a:t>13</a:t>
             </a:r>
@@ -10187,11 +10187,11 @@
             <a:r>
               <a:rPr lang="en-US" sz="1250" b="1" dirty="0">
                 <a:solidFill>
-                  <a:srgbClr val="2B2320"/>
-                </a:solidFill>
-                <a:latin typeface="Calibri" pitchFamily="34" charset="0"/>
-                <a:ea typeface="Calibri" pitchFamily="34" charset="-122"/>
-                <a:cs typeface="Calibri" pitchFamily="34" charset="-120"/>
+                  <a:srgbClr val="1F1F1F"/>
+                </a:solidFill>
+                <a:latin typeface="Adobe Clean" pitchFamily="34" charset="0"/>
+                <a:ea typeface="Adobe Clean" pitchFamily="34" charset="-122"/>
+                <a:cs typeface="Adobe Clean" pitchFamily="34" charset="-120"/>
               </a:rPr>
               <a:t>Newsletter</a:t>
             </a:r>
@@ -10216,11 +10216,11 @@
             </a:avLst>
           </a:prstGeom>
           <a:solidFill>
-            <a:srgbClr val="F4EEEA"/>
+            <a:srgbClr val="F2F2F2"/>
           </a:solidFill>
           <a:ln w="15875">
             <a:solidFill>
-              <a:srgbClr val="FF5722"/>
+              <a:srgbClr val="EB1000"/>
             </a:solidFill>
             <a:prstDash val="dash"/>
           </a:ln>
@@ -10264,7 +10264,7 @@
             <a:r>
               <a:rPr lang="en-US" sz="1300" b="1" dirty="0">
                 <a:solidFill>
-                  <a:srgbClr val="E64A19"/>
+                  <a:srgbClr val="B10C00"/>
                 </a:solidFill>
               </a:rPr>
               <a:t>SCREENSHOT</a:t>
@@ -10300,11 +10300,11 @@
             <a:r>
               <a:rPr lang="en-US" sz="1200" i="1" dirty="0">
                 <a:solidFill>
-                  <a:srgbClr val="7D726C"/>
-                </a:solidFill>
-                <a:latin typeface="Calibri" pitchFamily="34" charset="0"/>
-                <a:ea typeface="Calibri" pitchFamily="34" charset="-122"/>
-                <a:cs typeface="Calibri" pitchFamily="34" charset="-120"/>
+                  <a:srgbClr val="6B6B6B"/>
+                </a:solidFill>
+                <a:latin typeface="Adobe Clean" pitchFamily="34" charset="0"/>
+                <a:ea typeface="Adobe Clean" pitchFamily="34" charset="-122"/>
+                <a:cs typeface="Adobe Clean" pitchFamily="34" charset="-120"/>
               </a:rPr>
               <a:t>A single rule (e.g. "Feastly - Purchase") — show its Event (listen for "purchase") + Action (Send event, type commerce.purchases).</a:t>
             </a:r>
@@ -10326,7 +10326,7 @@
     <p:bg>
       <p:bgPr>
         <a:solidFill>
-          <a:srgbClr val="2B2320"/>
+          <a:srgbClr val="1F1F1F"/>
         </a:solidFill>
       </p:bgPr>
     </p:bg>
@@ -10371,11 +10371,11 @@
             <a:r>
               <a:rPr lang="en-US" sz="1250" b="1" spc="200" kern="0" dirty="0">
                 <a:solidFill>
-                  <a:srgbClr val="FFB300"/>
-                </a:solidFill>
-                <a:latin typeface="Calibri" pitchFamily="34" charset="0"/>
-                <a:ea typeface="Calibri" pitchFamily="34" charset="-122"/>
-                <a:cs typeface="Calibri" pitchFamily="34" charset="-120"/>
+                  <a:srgbClr val="FFA311"/>
+                </a:solidFill>
+                <a:latin typeface="Adobe Clean" pitchFamily="34" charset="0"/>
+                <a:ea typeface="Adobe Clean" pitchFamily="34" charset="-122"/>
+                <a:cs typeface="Adobe Clean" pitchFamily="34" charset="-120"/>
               </a:rPr>
               <a:t>IDENTITY &amp; PROFILE</a:t>
             </a:r>
@@ -10412,9 +10412,9 @@
                 <a:solidFill>
                   <a:srgbClr val="FFFFFF"/>
                 </a:solidFill>
-                <a:latin typeface="Cambria" pitchFamily="34" charset="0"/>
-                <a:ea typeface="Cambria" pitchFamily="34" charset="-122"/>
-                <a:cs typeface="Cambria" pitchFamily="34" charset="-120"/>
+                <a:latin typeface="Adobe Clean" pitchFamily="34" charset="0"/>
+                <a:ea typeface="Adobe Clean" pitchFamily="34" charset="-122"/>
+                <a:cs typeface="Adobe Clean" pitchFamily="34" charset="-120"/>
               </a:rPr>
               <a:t>Anonymous → Known: how one profile forms</a:t>
             </a:r>
@@ -10439,11 +10439,11 @@
             </a:avLst>
           </a:prstGeom>
           <a:solidFill>
-            <a:srgbClr val="3A302B"/>
+            <a:srgbClr val="2C2C2C"/>
           </a:solidFill>
           <a:ln w="15875">
             <a:solidFill>
-              <a:srgbClr val="FF5722"/>
+              <a:srgbClr val="EB1000"/>
             </a:solidFill>
             <a:prstDash val="solid"/>
           </a:ln>
@@ -10478,9 +10478,9 @@
                 <a:solidFill>
                   <a:srgbClr val="FFFFFF"/>
                 </a:solidFill>
-                <a:latin typeface="Calibri" pitchFamily="34" charset="0"/>
-                <a:ea typeface="Calibri" pitchFamily="34" charset="-122"/>
-                <a:cs typeface="Calibri" pitchFamily="34" charset="-120"/>
+                <a:latin typeface="Adobe Clean" pitchFamily="34" charset="0"/>
+                <a:ea typeface="Adobe Clean" pitchFamily="34" charset="-122"/>
+                <a:cs typeface="Adobe Clean" pitchFamily="34" charset="-120"/>
               </a:rPr>
               <a:t>🕶️  Anonymous</a:t>
             </a:r>
@@ -10515,11 +10515,11 @@
             <a:r>
               <a:rPr lang="en-US" sz="1800" b="1" dirty="0">
                 <a:solidFill>
-                  <a:srgbClr val="FFB300"/>
-                </a:solidFill>
-                <a:latin typeface="Calibri" pitchFamily="34" charset="0"/>
-                <a:ea typeface="Calibri" pitchFamily="34" charset="-122"/>
-                <a:cs typeface="Calibri" pitchFamily="34" charset="-120"/>
+                  <a:srgbClr val="FFA311"/>
+                </a:solidFill>
+                <a:latin typeface="Adobe Clean" pitchFamily="34" charset="0"/>
+                <a:ea typeface="Adobe Clean" pitchFamily="34" charset="-122"/>
+                <a:cs typeface="Adobe Clean" pitchFamily="34" charset="-120"/>
               </a:rPr>
               <a:t>ECID</a:t>
             </a:r>
@@ -10554,11 +10554,11 @@
             <a:r>
               <a:rPr lang="en-US" sz="1100" dirty="0">
                 <a:solidFill>
-                  <a:srgbClr val="D9CFC9"/>
-                </a:solidFill>
-                <a:latin typeface="Calibri" pitchFamily="34" charset="0"/>
-                <a:ea typeface="Calibri" pitchFamily="34" charset="-122"/>
-                <a:cs typeface="Calibri" pitchFamily="34" charset="-120"/>
+                  <a:srgbClr val="CFCFCF"/>
+                </a:solidFill>
+                <a:latin typeface="Adobe Clean" pitchFamily="34" charset="0"/>
+                <a:ea typeface="Adobe Clean" pitchFamily="34" charset="-122"/>
+                <a:cs typeface="Adobe Clean" pitchFamily="34" charset="-120"/>
               </a:rPr>
               <a:t>set by the Web SDK</a:t>
             </a:r>
@@ -10583,11 +10583,11 @@
             </a:avLst>
           </a:prstGeom>
           <a:solidFill>
-            <a:srgbClr val="3A302B"/>
+            <a:srgbClr val="2C2C2C"/>
           </a:solidFill>
           <a:ln w="15875">
             <a:solidFill>
-              <a:srgbClr val="FF5722"/>
+              <a:srgbClr val="EB1000"/>
             </a:solidFill>
             <a:prstDash val="solid"/>
           </a:ln>
@@ -10622,9 +10622,9 @@
                 <a:solidFill>
                   <a:srgbClr val="FFFFFF"/>
                 </a:solidFill>
-                <a:latin typeface="Calibri" pitchFamily="34" charset="0"/>
-                <a:ea typeface="Calibri" pitchFamily="34" charset="-122"/>
-                <a:cs typeface="Calibri" pitchFamily="34" charset="-120"/>
+                <a:latin typeface="Adobe Clean" pitchFamily="34" charset="0"/>
+                <a:ea typeface="Adobe Clean" pitchFamily="34" charset="-122"/>
+                <a:cs typeface="Adobe Clean" pitchFamily="34" charset="-120"/>
               </a:rPr>
               <a:t>👤  Signed in</a:t>
             </a:r>
@@ -10659,11 +10659,11 @@
             <a:r>
               <a:rPr lang="en-US" sz="1800" b="1" dirty="0">
                 <a:solidFill>
-                  <a:srgbClr val="FFB300"/>
-                </a:solidFill>
-                <a:latin typeface="Calibri" pitchFamily="34" charset="0"/>
-                <a:ea typeface="Calibri" pitchFamily="34" charset="-122"/>
-                <a:cs typeface="Calibri" pitchFamily="34" charset="-120"/>
+                  <a:srgbClr val="FFA311"/>
+                </a:solidFill>
+                <a:latin typeface="Adobe Clean" pitchFamily="34" charset="0"/>
+                <a:ea typeface="Adobe Clean" pitchFamily="34" charset="-122"/>
+                <a:cs typeface="Adobe Clean" pitchFamily="34" charset="-120"/>
               </a:rPr>
               <a:t>Email identity</a:t>
             </a:r>
@@ -10698,11 +10698,11 @@
             <a:r>
               <a:rPr lang="en-US" sz="1100" dirty="0">
                 <a:solidFill>
-                  <a:srgbClr val="D9CFC9"/>
-                </a:solidFill>
-                <a:latin typeface="Calibri" pitchFamily="34" charset="0"/>
-                <a:ea typeface="Calibri" pitchFamily="34" charset="-122"/>
-                <a:cs typeface="Calibri" pitchFamily="34" charset="-120"/>
+                  <a:srgbClr val="CFCFCF"/>
+                </a:solidFill>
+                <a:latin typeface="Adobe Clean" pitchFamily="34" charset="0"/>
+                <a:ea typeface="Adobe Clean" pitchFamily="34" charset="-122"/>
+                <a:cs typeface="Adobe Clean" pitchFamily="34" charset="-120"/>
               </a:rPr>
               <a:t>added to identityMap</a:t>
             </a:r>
@@ -10737,7 +10737,7 @@
             <a:r>
               <a:rPr lang="en-US" sz="4000" b="1" dirty="0">
                 <a:solidFill>
-                  <a:srgbClr val="FF5722"/>
+                  <a:srgbClr val="EB1000"/>
                 </a:solidFill>
               </a:rPr>
               <a:t>▸</a:t>
@@ -10763,7 +10763,7 @@
             </a:avLst>
           </a:prstGeom>
           <a:solidFill>
-            <a:srgbClr val="FF5722"/>
+            <a:srgbClr val="EB1000"/>
           </a:solidFill>
           <a:ln/>
         </p:spPr>
@@ -10797,9 +10797,9 @@
                 <a:solidFill>
                   <a:srgbClr val="FFFFFF"/>
                 </a:solidFill>
-                <a:latin typeface="Calibri" pitchFamily="34" charset="0"/>
-                <a:ea typeface="Calibri" pitchFamily="34" charset="-122"/>
-                <a:cs typeface="Calibri" pitchFamily="34" charset="-120"/>
+                <a:latin typeface="Adobe Clean" pitchFamily="34" charset="0"/>
+                <a:ea typeface="Adobe Clean" pitchFamily="34" charset="-122"/>
+                <a:cs typeface="Adobe Clean" pitchFamily="34" charset="-120"/>
               </a:rPr>
               <a:t>🧑‍🤝‍🧑  One AEP Profile</a:t>
             </a:r>
@@ -10836,9 +10836,9 @@
                 <a:solidFill>
                   <a:srgbClr val="FFE9E0"/>
                 </a:solidFill>
-                <a:latin typeface="Calibri" pitchFamily="34" charset="0"/>
-                <a:ea typeface="Calibri" pitchFamily="34" charset="-122"/>
-                <a:cs typeface="Calibri" pitchFamily="34" charset="-120"/>
+                <a:latin typeface="Adobe Clean" pitchFamily="34" charset="0"/>
+                <a:ea typeface="Adobe Clean" pitchFamily="34" charset="-122"/>
+                <a:cs typeface="Adobe Clean" pitchFamily="34" charset="-120"/>
               </a:rPr>
               <a:t>Identity graph stitches ECID ↔ Email</a:t>
             </a:r>
@@ -10875,9 +10875,9 @@
                 <a:solidFill>
                   <a:srgbClr val="FFFFFF"/>
                 </a:solidFill>
-                <a:latin typeface="Calibri" pitchFamily="34" charset="0"/>
-                <a:ea typeface="Calibri" pitchFamily="34" charset="-122"/>
-                <a:cs typeface="Calibri" pitchFamily="34" charset="-120"/>
+                <a:latin typeface="Adobe Clean" pitchFamily="34" charset="0"/>
+                <a:ea typeface="Adobe Clean" pitchFamily="34" charset="-122"/>
+                <a:cs typeface="Adobe Clean" pitchFamily="34" charset="-120"/>
               </a:rPr>
               <a:t>+ attributes (loyalty, diet, cuisine, city)</a:t>
             </a:r>
@@ -10892,9 +10892,9 @@
                 <a:solidFill>
                   <a:srgbClr val="FFFFFF"/>
                 </a:solidFill>
-                <a:latin typeface="Calibri" pitchFamily="34" charset="0"/>
-                <a:ea typeface="Calibri" pitchFamily="34" charset="-122"/>
-                <a:cs typeface="Calibri" pitchFamily="34" charset="-120"/>
+                <a:latin typeface="Adobe Clean" pitchFamily="34" charset="0"/>
+                <a:ea typeface="Adobe Clean" pitchFamily="34" charset="-122"/>
+                <a:cs typeface="Adobe Clean" pitchFamily="34" charset="-120"/>
               </a:rPr>
               <a:t>+ full event history</a:t>
             </a:r>
@@ -10931,9 +10931,9 @@
                 <a:solidFill>
                   <a:srgbClr val="CADCFC"/>
                 </a:solidFill>
-                <a:latin typeface="Calibri" pitchFamily="34" charset="0"/>
-                <a:ea typeface="Calibri" pitchFamily="34" charset="-122"/>
-                <a:cs typeface="Calibri" pitchFamily="34" charset="-120"/>
+                <a:latin typeface="Adobe Clean" pitchFamily="34" charset="0"/>
+                <a:ea typeface="Adobe Clean" pitchFamily="34" charset="-122"/>
+                <a:cs typeface="Adobe Clean" pitchFamily="34" charset="-120"/>
               </a:rPr>
               <a:t>This stitching is exactly what support debugs when "two profiles should be one."</a:t>
             </a:r>
@@ -11000,11 +11000,11 @@
             <a:r>
               <a:rPr lang="en-US" sz="1250" b="1" spc="200" kern="0" dirty="0">
                 <a:solidFill>
-                  <a:srgbClr val="FF5722"/>
-                </a:solidFill>
-                <a:latin typeface="Calibri" pitchFamily="34" charset="0"/>
-                <a:ea typeface="Calibri" pitchFamily="34" charset="-122"/>
-                <a:cs typeface="Calibri" pitchFamily="34" charset="-120"/>
+                  <a:srgbClr val="EB1000"/>
+                </a:solidFill>
+                <a:latin typeface="Adobe Clean" pitchFamily="34" charset="0"/>
+                <a:ea typeface="Adobe Clean" pitchFamily="34" charset="-122"/>
+                <a:cs typeface="Adobe Clean" pitchFamily="34" charset="-120"/>
               </a:rPr>
               <a:t>SEE IT LIVE</a:t>
             </a:r>
@@ -11039,11 +11039,11 @@
             <a:r>
               <a:rPr lang="en-US" sz="3200" b="1" dirty="0">
                 <a:solidFill>
-                  <a:srgbClr val="2B2320"/>
-                </a:solidFill>
-                <a:latin typeface="Cambria" pitchFamily="34" charset="0"/>
-                <a:ea typeface="Cambria" pitchFamily="34" charset="-122"/>
-                <a:cs typeface="Cambria" pitchFamily="34" charset="-120"/>
+                  <a:srgbClr val="1F1F1F"/>
+                </a:solidFill>
+                <a:latin typeface="Adobe Clean" pitchFamily="34" charset="0"/>
+                <a:ea typeface="Adobe Clean" pitchFamily="34" charset="-122"/>
+                <a:cs typeface="Adobe Clean" pitchFamily="34" charset="-120"/>
               </a:rPr>
               <a:t>Every action becomes an event</a:t>
             </a:r>
@@ -11078,11 +11078,11 @@
             <a:r>
               <a:rPr lang="en-US" sz="1400" dirty="0">
                 <a:solidFill>
-                  <a:srgbClr val="7D726C"/>
-                </a:solidFill>
-                <a:latin typeface="Calibri" pitchFamily="34" charset="0"/>
-                <a:ea typeface="Calibri" pitchFamily="34" charset="-122"/>
-                <a:cs typeface="Calibri" pitchFamily="34" charset="-120"/>
+                  <a:srgbClr val="6B6B6B"/>
+                </a:solidFill>
+                <a:latin typeface="Adobe Clean" pitchFamily="34" charset="0"/>
+                <a:ea typeface="Adobe Clean" pitchFamily="34" charset="-122"/>
+                <a:cs typeface="Adobe Clean" pitchFamily="34" charset="-120"/>
               </a:rPr>
               <a:t>Browse → add to cart → checkout → purchase → rate. Each click pushes a clean event to the data layer, which the console prints.</a:t>
             </a:r>
@@ -11107,11 +11107,11 @@
             </a:avLst>
           </a:prstGeom>
           <a:solidFill>
-            <a:srgbClr val="F4EEEA"/>
+            <a:srgbClr val="F2F2F2"/>
           </a:solidFill>
           <a:ln w="15875">
             <a:solidFill>
-              <a:srgbClr val="FF5722"/>
+              <a:srgbClr val="EB1000"/>
             </a:solidFill>
             <a:prstDash val="dash"/>
           </a:ln>
@@ -11155,7 +11155,7 @@
             <a:r>
               <a:rPr lang="en-US" sz="1300" b="1" dirty="0">
                 <a:solidFill>
-                  <a:srgbClr val="E64A19"/>
+                  <a:srgbClr val="B10C00"/>
                 </a:solidFill>
               </a:rPr>
               <a:t>SCREENSHOT</a:t>
@@ -11191,11 +11191,11 @@
             <a:r>
               <a:rPr lang="en-US" sz="1200" i="1" dirty="0">
                 <a:solidFill>
-                  <a:srgbClr val="7D726C"/>
-                </a:solidFill>
-                <a:latin typeface="Calibri" pitchFamily="34" charset="0"/>
-                <a:ea typeface="Calibri" pitchFamily="34" charset="-122"/>
-                <a:cs typeface="Calibri" pitchFamily="34" charset="-120"/>
+                  <a:srgbClr val="6B6B6B"/>
+                </a:solidFill>
+                <a:latin typeface="Adobe Clean" pitchFamily="34" charset="0"/>
+                <a:ea typeface="Adobe Clean" pitchFamily="34" charset="-122"/>
+                <a:cs typeface="Adobe Clean" pitchFamily="34" charset="-120"/>
               </a:rPr>
               <a:t>Feastly site — the home/menu page (the running website).</a:t>
             </a:r>
@@ -11220,11 +11220,11 @@
             </a:avLst>
           </a:prstGeom>
           <a:solidFill>
-            <a:srgbClr val="F4EEEA"/>
+            <a:srgbClr val="F2F2F2"/>
           </a:solidFill>
           <a:ln w="15875">
             <a:solidFill>
-              <a:srgbClr val="FF5722"/>
+              <a:srgbClr val="EB1000"/>
             </a:solidFill>
             <a:prstDash val="dash"/>
           </a:ln>
@@ -11268,7 +11268,7 @@
             <a:r>
               <a:rPr lang="en-US" sz="1300" b="1" dirty="0">
                 <a:solidFill>
-                  <a:srgbClr val="E64A19"/>
+                  <a:srgbClr val="B10C00"/>
                 </a:solidFill>
               </a:rPr>
               <a:t>SCREENSHOT</a:t>
@@ -11304,11 +11304,11 @@
             <a:r>
               <a:rPr lang="en-US" sz="1200" i="1" dirty="0">
                 <a:solidFill>
-                  <a:srgbClr val="7D726C"/>
-                </a:solidFill>
-                <a:latin typeface="Calibri" pitchFamily="34" charset="0"/>
-                <a:ea typeface="Calibri" pitchFamily="34" charset="-122"/>
-                <a:cs typeface="Calibri" pitchFamily="34" charset="-120"/>
+                  <a:srgbClr val="6B6B6B"/>
+                </a:solidFill>
+                <a:latin typeface="Adobe Clean" pitchFamily="34" charset="0"/>
+                <a:ea typeface="Adobe Clean" pitchFamily="34" charset="-122"/>
+                <a:cs typeface="Adobe Clean" pitchFamily="34" charset="-120"/>
               </a:rPr>
               <a:t>Browser console — the "[Feastly][dataLayer] purchase" log with the payload expanded.</a:t>
             </a:r>
@@ -11375,11 +11375,11 @@
             <a:r>
               <a:rPr lang="en-US" sz="1250" b="1" spc="200" kern="0" dirty="0">
                 <a:solidFill>
-                  <a:srgbClr val="FF5722"/>
-                </a:solidFill>
-                <a:latin typeface="Calibri" pitchFamily="34" charset="0"/>
-                <a:ea typeface="Calibri" pitchFamily="34" charset="-122"/>
-                <a:cs typeface="Calibri" pitchFamily="34" charset="-120"/>
+                  <a:srgbClr val="EB1000"/>
+                </a:solidFill>
+                <a:latin typeface="Adobe Clean" pitchFamily="34" charset="0"/>
+                <a:ea typeface="Adobe Clean" pitchFamily="34" charset="-122"/>
+                <a:cs typeface="Adobe Clean" pitchFamily="34" charset="-120"/>
               </a:rPr>
               <a:t>VALIDATE</a:t>
             </a:r>
@@ -11414,11 +11414,11 @@
             <a:r>
               <a:rPr lang="en-US" sz="3200" b="1" dirty="0">
                 <a:solidFill>
-                  <a:srgbClr val="2B2320"/>
-                </a:solidFill>
-                <a:latin typeface="Cambria" pitchFamily="34" charset="0"/>
-                <a:ea typeface="Cambria" pitchFamily="34" charset="-122"/>
-                <a:cs typeface="Cambria" pitchFamily="34" charset="-120"/>
+                  <a:srgbClr val="1F1F1F"/>
+                </a:solidFill>
+                <a:latin typeface="Adobe Clean" pitchFamily="34" charset="0"/>
+                <a:ea typeface="Adobe Clean" pitchFamily="34" charset="-122"/>
+                <a:cs typeface="Adobe Clean" pitchFamily="34" charset="-120"/>
               </a:rPr>
               <a:t>Adobe Assurance — watch it flow</a:t>
             </a:r>
@@ -11441,7 +11441,7 @@
             <a:avLst/>
           </a:prstGeom>
           <a:solidFill>
-            <a:srgbClr val="FF5722"/>
+            <a:srgbClr val="EB1000"/>
           </a:solidFill>
           <a:ln/>
         </p:spPr>
@@ -11475,9 +11475,9 @@
                 <a:solidFill>
                   <a:srgbClr val="FFFFFF"/>
                 </a:solidFill>
-                <a:latin typeface="Calibri" pitchFamily="34" charset="0"/>
-                <a:ea typeface="Calibri" pitchFamily="34" charset="-122"/>
-                <a:cs typeface="Calibri" pitchFamily="34" charset="-120"/>
+                <a:latin typeface="Adobe Clean" pitchFamily="34" charset="0"/>
+                <a:ea typeface="Adobe Clean" pitchFamily="34" charset="-122"/>
+                <a:cs typeface="Adobe Clean" pitchFamily="34" charset="-120"/>
               </a:rPr>
               <a:t>1</a:t>
             </a:r>
@@ -11512,11 +11512,11 @@
             <a:r>
               <a:rPr lang="en-US" sz="1550" b="1" dirty="0">
                 <a:solidFill>
-                  <a:srgbClr val="2B2320"/>
-                </a:solidFill>
-                <a:latin typeface="Calibri" pitchFamily="34" charset="0"/>
-                <a:ea typeface="Calibri" pitchFamily="34" charset="-122"/>
-                <a:cs typeface="Calibri" pitchFamily="34" charset="-120"/>
+                  <a:srgbClr val="1F1F1F"/>
+                </a:solidFill>
+                <a:latin typeface="Adobe Clean" pitchFamily="34" charset="0"/>
+                <a:ea typeface="Adobe Clean" pitchFamily="34" charset="-122"/>
+                <a:cs typeface="Adobe Clean" pitchFamily="34" charset="-120"/>
               </a:rPr>
               <a:t>Connect a session</a:t>
             </a:r>
@@ -11551,11 +11551,11 @@
             <a:r>
               <a:rPr lang="en-US" sz="1250" dirty="0">
                 <a:solidFill>
-                  <a:srgbClr val="7D726C"/>
-                </a:solidFill>
-                <a:latin typeface="Calibri" pitchFamily="34" charset="0"/>
-                <a:ea typeface="Calibri" pitchFamily="34" charset="-122"/>
-                <a:cs typeface="Calibri" pitchFamily="34" charset="-120"/>
+                  <a:srgbClr val="6B6B6B"/>
+                </a:solidFill>
+                <a:latin typeface="Adobe Clean" pitchFamily="34" charset="0"/>
+                <a:ea typeface="Adobe Clean" pitchFamily="34" charset="-122"/>
+                <a:cs typeface="Adobe Clean" pitchFamily="34" charset="-120"/>
               </a:rPr>
               <a:t>Scan/enter the URL to attach the site.</a:t>
             </a:r>
@@ -11578,7 +11578,7 @@
             <a:avLst/>
           </a:prstGeom>
           <a:solidFill>
-            <a:srgbClr val="FF5722"/>
+            <a:srgbClr val="EB1000"/>
           </a:solidFill>
           <a:ln/>
         </p:spPr>
@@ -11612,9 +11612,9 @@
                 <a:solidFill>
                   <a:srgbClr val="FFFFFF"/>
                 </a:solidFill>
-                <a:latin typeface="Calibri" pitchFamily="34" charset="0"/>
-                <a:ea typeface="Calibri" pitchFamily="34" charset="-122"/>
-                <a:cs typeface="Calibri" pitchFamily="34" charset="-120"/>
+                <a:latin typeface="Adobe Clean" pitchFamily="34" charset="0"/>
+                <a:ea typeface="Adobe Clean" pitchFamily="34" charset="-122"/>
+                <a:cs typeface="Adobe Clean" pitchFamily="34" charset="-120"/>
               </a:rPr>
               <a:t>2</a:t>
             </a:r>
@@ -11649,11 +11649,11 @@
             <a:r>
               <a:rPr lang="en-US" sz="1550" b="1" dirty="0">
                 <a:solidFill>
-                  <a:srgbClr val="2B2320"/>
-                </a:solidFill>
-                <a:latin typeface="Calibri" pitchFamily="34" charset="0"/>
-                <a:ea typeface="Calibri" pitchFamily="34" charset="-122"/>
-                <a:cs typeface="Calibri" pitchFamily="34" charset="-120"/>
+                  <a:srgbClr val="1F1F1F"/>
+                </a:solidFill>
+                <a:latin typeface="Adobe Clean" pitchFamily="34" charset="0"/>
+                <a:ea typeface="Adobe Clean" pitchFamily="34" charset="-122"/>
+                <a:cs typeface="Adobe Clean" pitchFamily="34" charset="-120"/>
               </a:rPr>
               <a:t>See the chain</a:t>
             </a:r>
@@ -11688,11 +11688,11 @@
             <a:r>
               <a:rPr lang="en-US" sz="1250" dirty="0">
                 <a:solidFill>
-                  <a:srgbClr val="7D726C"/>
-                </a:solidFill>
-                <a:latin typeface="Calibri" pitchFamily="34" charset="0"/>
-                <a:ea typeface="Calibri" pitchFamily="34" charset="-122"/>
-                <a:cs typeface="Calibri" pitchFamily="34" charset="-120"/>
+                  <a:srgbClr val="6B6B6B"/>
+                </a:solidFill>
+                <a:latin typeface="Adobe Clean" pitchFamily="34" charset="0"/>
+                <a:ea typeface="Adobe Clean" pitchFamily="34" charset="-122"/>
+                <a:cs typeface="Adobe Clean" pitchFamily="34" charset="-120"/>
               </a:rPr>
               <a:t>Data layer event → rule fired → sendEvent.</a:t>
             </a:r>
@@ -11715,7 +11715,7 @@
             <a:avLst/>
           </a:prstGeom>
           <a:solidFill>
-            <a:srgbClr val="FF5722"/>
+            <a:srgbClr val="EB1000"/>
           </a:solidFill>
           <a:ln/>
         </p:spPr>
@@ -11749,9 +11749,9 @@
                 <a:solidFill>
                   <a:srgbClr val="FFFFFF"/>
                 </a:solidFill>
-                <a:latin typeface="Calibri" pitchFamily="34" charset="0"/>
-                <a:ea typeface="Calibri" pitchFamily="34" charset="-122"/>
-                <a:cs typeface="Calibri" pitchFamily="34" charset="-120"/>
+                <a:latin typeface="Adobe Clean" pitchFamily="34" charset="0"/>
+                <a:ea typeface="Adobe Clean" pitchFamily="34" charset="-122"/>
+                <a:cs typeface="Adobe Clean" pitchFamily="34" charset="-120"/>
               </a:rPr>
               <a:t>3</a:t>
             </a:r>
@@ -11786,11 +11786,11 @@
             <a:r>
               <a:rPr lang="en-US" sz="1550" b="1" dirty="0">
                 <a:solidFill>
-                  <a:srgbClr val="2B2320"/>
-                </a:solidFill>
-                <a:latin typeface="Calibri" pitchFamily="34" charset="0"/>
-                <a:ea typeface="Calibri" pitchFamily="34" charset="-122"/>
-                <a:cs typeface="Calibri" pitchFamily="34" charset="-120"/>
+                  <a:srgbClr val="1F1F1F"/>
+                </a:solidFill>
+                <a:latin typeface="Adobe Clean" pitchFamily="34" charset="0"/>
+                <a:ea typeface="Adobe Clean" pitchFamily="34" charset="-122"/>
+                <a:cs typeface="Adobe Clean" pitchFamily="34" charset="-120"/>
               </a:rPr>
               <a:t>Inspect the XDM</a:t>
             </a:r>
@@ -11825,11 +11825,11 @@
             <a:r>
               <a:rPr lang="en-US" sz="1250" dirty="0">
                 <a:solidFill>
-                  <a:srgbClr val="7D726C"/>
-                </a:solidFill>
-                <a:latin typeface="Calibri" pitchFamily="34" charset="0"/>
-                <a:ea typeface="Calibri" pitchFamily="34" charset="-122"/>
-                <a:cs typeface="Calibri" pitchFamily="34" charset="-120"/>
+                  <a:srgbClr val="6B6B6B"/>
+                </a:solidFill>
+                <a:latin typeface="Adobe Clean" pitchFamily="34" charset="0"/>
+                <a:ea typeface="Adobe Clean" pitchFamily="34" charset="-122"/>
+                <a:cs typeface="Adobe Clean" pitchFamily="34" charset="-120"/>
               </a:rPr>
               <a:t>Confirm the exact payload leaving the browser.</a:t>
             </a:r>
@@ -11852,7 +11852,7 @@
             <a:avLst/>
           </a:prstGeom>
           <a:solidFill>
-            <a:srgbClr val="FF5722"/>
+            <a:srgbClr val="EB1000"/>
           </a:solidFill>
           <a:ln/>
         </p:spPr>
@@ -11886,9 +11886,9 @@
                 <a:solidFill>
                   <a:srgbClr val="FFFFFF"/>
                 </a:solidFill>
-                <a:latin typeface="Calibri" pitchFamily="34" charset="0"/>
-                <a:ea typeface="Calibri" pitchFamily="34" charset="-122"/>
-                <a:cs typeface="Calibri" pitchFamily="34" charset="-120"/>
+                <a:latin typeface="Adobe Clean" pitchFamily="34" charset="0"/>
+                <a:ea typeface="Adobe Clean" pitchFamily="34" charset="-122"/>
+                <a:cs typeface="Adobe Clean" pitchFamily="34" charset="-120"/>
               </a:rPr>
               <a:t>4</a:t>
             </a:r>
@@ -11923,11 +11923,11 @@
             <a:r>
               <a:rPr lang="en-US" sz="1550" b="1" dirty="0">
                 <a:solidFill>
-                  <a:srgbClr val="2B2320"/>
-                </a:solidFill>
-                <a:latin typeface="Calibri" pitchFamily="34" charset="0"/>
-                <a:ea typeface="Calibri" pitchFamily="34" charset="-122"/>
-                <a:cs typeface="Calibri" pitchFamily="34" charset="-120"/>
+                  <a:srgbClr val="1F1F1F"/>
+                </a:solidFill>
+                <a:latin typeface="Adobe Clean" pitchFamily="34" charset="0"/>
+                <a:ea typeface="Adobe Clean" pitchFamily="34" charset="-122"/>
+                <a:cs typeface="Adobe Clean" pitchFamily="34" charset="-120"/>
               </a:rPr>
               <a:t>Edge response</a:t>
             </a:r>
@@ -11962,11 +11962,11 @@
             <a:r>
               <a:rPr lang="en-US" sz="1250" dirty="0">
                 <a:solidFill>
-                  <a:srgbClr val="7D726C"/>
-                </a:solidFill>
-                <a:latin typeface="Calibri" pitchFamily="34" charset="0"/>
-                <a:ea typeface="Calibri" pitchFamily="34" charset="-122"/>
-                <a:cs typeface="Calibri" pitchFamily="34" charset="-120"/>
+                  <a:srgbClr val="6B6B6B"/>
+                </a:solidFill>
+                <a:latin typeface="Adobe Clean" pitchFamily="34" charset="0"/>
+                <a:ea typeface="Adobe Clean" pitchFamily="34" charset="-122"/>
+                <a:cs typeface="Adobe Clean" pitchFamily="34" charset="-120"/>
               </a:rPr>
               <a:t>A 200 means the Edge accepted the event.</a:t>
             </a:r>
@@ -11991,11 +11991,11 @@
             </a:avLst>
           </a:prstGeom>
           <a:solidFill>
-            <a:srgbClr val="F4EEEA"/>
+            <a:srgbClr val="F2F2F2"/>
           </a:solidFill>
           <a:ln w="15875">
             <a:solidFill>
-              <a:srgbClr val="FF5722"/>
+              <a:srgbClr val="EB1000"/>
             </a:solidFill>
             <a:prstDash val="dash"/>
           </a:ln>
@@ -12039,7 +12039,7 @@
             <a:r>
               <a:rPr lang="en-US" sz="1300" b="1" dirty="0">
                 <a:solidFill>
-                  <a:srgbClr val="E64A19"/>
+                  <a:srgbClr val="B10C00"/>
                 </a:solidFill>
               </a:rPr>
               <a:t>SCREENSHOT</a:t>
@@ -12075,11 +12075,11 @@
             <a:r>
               <a:rPr lang="en-US" sz="1200" i="1" dirty="0">
                 <a:solidFill>
-                  <a:srgbClr val="7D726C"/>
-                </a:solidFill>
-                <a:latin typeface="Calibri" pitchFamily="34" charset="0"/>
-                <a:ea typeface="Calibri" pitchFamily="34" charset="-122"/>
-                <a:cs typeface="Calibri" pitchFamily="34" charset="-120"/>
+                  <a:srgbClr val="6B6B6B"/>
+                </a:solidFill>
+                <a:latin typeface="Adobe Clean" pitchFamily="34" charset="0"/>
+                <a:ea typeface="Adobe Clean" pitchFamily="34" charset="-122"/>
+                <a:cs typeface="Adobe Clean" pitchFamily="34" charset="-120"/>
               </a:rPr>
               <a:t>Assurance — the event list with a "purchase" selected, showing the XDM payload + Edge 200.</a:t>
             </a:r>
@@ -12146,11 +12146,11 @@
             <a:r>
               <a:rPr lang="en-US" sz="1250" b="1" spc="200" kern="0" dirty="0">
                 <a:solidFill>
-                  <a:srgbClr val="FF5722"/>
-                </a:solidFill>
-                <a:latin typeface="Calibri" pitchFamily="34" charset="0"/>
-                <a:ea typeface="Calibri" pitchFamily="34" charset="-122"/>
-                <a:cs typeface="Calibri" pitchFamily="34" charset="-120"/>
+                  <a:srgbClr val="EB1000"/>
+                </a:solidFill>
+                <a:latin typeface="Adobe Clean" pitchFamily="34" charset="0"/>
+                <a:ea typeface="Adobe Clean" pitchFamily="34" charset="-122"/>
+                <a:cs typeface="Adobe Clean" pitchFamily="34" charset="-120"/>
               </a:rPr>
               <a:t>WHY THIS SESSION</a:t>
             </a:r>
@@ -12185,11 +12185,11 @@
             <a:r>
               <a:rPr lang="en-US" sz="3200" b="1" dirty="0">
                 <a:solidFill>
-                  <a:srgbClr val="2B2320"/>
-                </a:solidFill>
-                <a:latin typeface="Cambria" pitchFamily="34" charset="0"/>
-                <a:ea typeface="Cambria" pitchFamily="34" charset="-122"/>
-                <a:cs typeface="Cambria" pitchFamily="34" charset="-120"/>
+                  <a:srgbClr val="1F1F1F"/>
+                </a:solidFill>
+                <a:latin typeface="Adobe Clean" pitchFamily="34" charset="0"/>
+                <a:ea typeface="Adobe Clean" pitchFamily="34" charset="-122"/>
+                <a:cs typeface="Adobe Clean" pitchFamily="34" charset="-120"/>
               </a:rPr>
               <a:t>We know AEP. Today we look one step upstream.</a:t>
             </a:r>
@@ -12214,7 +12214,7 @@
             </a:avLst>
           </a:prstGeom>
           <a:solidFill>
-            <a:srgbClr val="FFF3EE"/>
+            <a:srgbClr val="FDECEA"/>
           </a:solidFill>
           <a:ln/>
         </p:spPr>
@@ -12234,7 +12234,7 @@
             <a:avLst/>
           </a:prstGeom>
           <a:solidFill>
-            <a:srgbClr val="FF5722"/>
+            <a:srgbClr val="EB1000"/>
           </a:solidFill>
           <a:ln/>
         </p:spPr>
@@ -12302,11 +12302,11 @@
             <a:r>
               <a:rPr lang="en-US" sz="2000" b="1" dirty="0">
                 <a:solidFill>
-                  <a:srgbClr val="2B2320"/>
-                </a:solidFill>
-                <a:latin typeface="Cambria" pitchFamily="34" charset="0"/>
-                <a:ea typeface="Cambria" pitchFamily="34" charset="-122"/>
-                <a:cs typeface="Cambria" pitchFamily="34" charset="-120"/>
+                  <a:srgbClr val="1F1F1F"/>
+                </a:solidFill>
+                <a:latin typeface="Adobe Clean" pitchFamily="34" charset="0"/>
+                <a:ea typeface="Adobe Clean" pitchFamily="34" charset="-122"/>
+                <a:cs typeface="Adobe Clean" pitchFamily="34" charset="-120"/>
               </a:rPr>
               <a:t>The goal</a:t>
             </a:r>
@@ -12341,11 +12341,11 @@
             <a:r>
               <a:rPr lang="en-US" sz="1500" dirty="0">
                 <a:solidFill>
-                  <a:srgbClr val="7D726C"/>
-                </a:solidFill>
-                <a:latin typeface="Calibri" pitchFamily="34" charset="0"/>
-                <a:ea typeface="Calibri" pitchFamily="34" charset="-122"/>
-                <a:cs typeface="Calibri" pitchFamily="34" charset="-120"/>
+                  <a:srgbClr val="6B6B6B"/>
+                </a:solidFill>
+                <a:latin typeface="Adobe Clean" pitchFamily="34" charset="0"/>
+                <a:ea typeface="Adobe Clean" pitchFamily="34" charset="-122"/>
+                <a:cs typeface="Adobe Clean" pitchFamily="34" charset="-120"/>
               </a:rPr>
               <a:t>See how website data is collected and shaped before it ever reaches AEP.</a:t>
             </a:r>
@@ -12370,7 +12370,7 @@
             </a:avLst>
           </a:prstGeom>
           <a:solidFill>
-            <a:srgbClr val="FFF3EE"/>
+            <a:srgbClr val="FDECEA"/>
           </a:solidFill>
           <a:ln/>
         </p:spPr>
@@ -12390,7 +12390,7 @@
             <a:avLst/>
           </a:prstGeom>
           <a:solidFill>
-            <a:srgbClr val="FF5722"/>
+            <a:srgbClr val="EB1000"/>
           </a:solidFill>
           <a:ln/>
         </p:spPr>
@@ -12458,11 +12458,11 @@
             <a:r>
               <a:rPr lang="en-US" sz="2000" b="1" dirty="0">
                 <a:solidFill>
-                  <a:srgbClr val="2B2320"/>
-                </a:solidFill>
-                <a:latin typeface="Cambria" pitchFamily="34" charset="0"/>
-                <a:ea typeface="Cambria" pitchFamily="34" charset="-122"/>
-                <a:cs typeface="Cambria" pitchFamily="34" charset="-120"/>
+                  <a:srgbClr val="1F1F1F"/>
+                </a:solidFill>
+                <a:latin typeface="Adobe Clean" pitchFamily="34" charset="0"/>
+                <a:ea typeface="Adobe Clean" pitchFamily="34" charset="-122"/>
+                <a:cs typeface="Adobe Clean" pitchFamily="34" charset="-120"/>
               </a:rPr>
               <a:t>The gap</a:t>
             </a:r>
@@ -12497,11 +12497,11 @@
             <a:r>
               <a:rPr lang="en-US" sz="1500" dirty="0">
                 <a:solidFill>
-                  <a:srgbClr val="7D726C"/>
-                </a:solidFill>
-                <a:latin typeface="Calibri" pitchFamily="34" charset="0"/>
-                <a:ea typeface="Calibri" pitchFamily="34" charset="-122"/>
-                <a:cs typeface="Calibri" pitchFamily="34" charset="-120"/>
+                  <a:srgbClr val="6B6B6B"/>
+                </a:solidFill>
+                <a:latin typeface="Adobe Clean" pitchFamily="34" charset="0"/>
+                <a:ea typeface="Adobe Clean" pitchFamily="34" charset="-122"/>
+                <a:cs typeface="Adobe Clean" pitchFamily="34" charset="-120"/>
               </a:rPr>
               <a:t>Support lives in AEP, but most "data is missing" issues start in Data Collection.</a:t>
             </a:r>
@@ -12526,7 +12526,7 @@
             </a:avLst>
           </a:prstGeom>
           <a:solidFill>
-            <a:srgbClr val="FFF3EE"/>
+            <a:srgbClr val="FDECEA"/>
           </a:solidFill>
           <a:ln/>
         </p:spPr>
@@ -12546,7 +12546,7 @@
             <a:avLst/>
           </a:prstGeom>
           <a:solidFill>
-            <a:srgbClr val="FF5722"/>
+            <a:srgbClr val="EB1000"/>
           </a:solidFill>
           <a:ln/>
         </p:spPr>
@@ -12614,11 +12614,11 @@
             <a:r>
               <a:rPr lang="en-US" sz="2000" b="1" dirty="0">
                 <a:solidFill>
-                  <a:srgbClr val="2B2320"/>
-                </a:solidFill>
-                <a:latin typeface="Cambria" pitchFamily="34" charset="0"/>
-                <a:ea typeface="Cambria" pitchFamily="34" charset="-122"/>
-                <a:cs typeface="Cambria" pitchFamily="34" charset="-120"/>
+                  <a:srgbClr val="1F1F1F"/>
+                </a:solidFill>
+                <a:latin typeface="Adobe Clean" pitchFamily="34" charset="0"/>
+                <a:ea typeface="Adobe Clean" pitchFamily="34" charset="-122"/>
+                <a:cs typeface="Adobe Clean" pitchFamily="34" charset="-120"/>
               </a:rPr>
               <a:t>The payoff</a:t>
             </a:r>
@@ -12653,11 +12653,11 @@
             <a:r>
               <a:rPr lang="en-US" sz="1500" dirty="0">
                 <a:solidFill>
-                  <a:srgbClr val="7D726C"/>
-                </a:solidFill>
-                <a:latin typeface="Calibri" pitchFamily="34" charset="0"/>
-                <a:ea typeface="Calibri" pitchFamily="34" charset="-122"/>
-                <a:cs typeface="Calibri" pitchFamily="34" charset="-120"/>
+                  <a:srgbClr val="6B6B6B"/>
+                </a:solidFill>
+                <a:latin typeface="Adobe Clean" pitchFamily="34" charset="0"/>
+                <a:ea typeface="Adobe Clean" pitchFamily="34" charset="-122"/>
+                <a:cs typeface="Adobe Clean" pitchFamily="34" charset="-120"/>
               </a:rPr>
               <a:t>Know where to look — data layer, rules, data elements, datastream — when data is wrong or absent.</a:t>
             </a:r>
@@ -12724,11 +12724,11 @@
             <a:r>
               <a:rPr lang="en-US" sz="1250" b="1" spc="200" kern="0" dirty="0">
                 <a:solidFill>
-                  <a:srgbClr val="FF5722"/>
-                </a:solidFill>
-                <a:latin typeface="Calibri" pitchFamily="34" charset="0"/>
-                <a:ea typeface="Calibri" pitchFamily="34" charset="-122"/>
-                <a:cs typeface="Calibri" pitchFamily="34" charset="-120"/>
+                  <a:srgbClr val="EB1000"/>
+                </a:solidFill>
+                <a:latin typeface="Adobe Clean" pitchFamily="34" charset="0"/>
+                <a:ea typeface="Adobe Clean" pitchFamily="34" charset="-122"/>
+                <a:cs typeface="Adobe Clean" pitchFamily="34" charset="-120"/>
               </a:rPr>
               <a:t>VERIFY</a:t>
             </a:r>
@@ -12763,11 +12763,11 @@
             <a:r>
               <a:rPr lang="en-US" sz="3200" b="1" dirty="0">
                 <a:solidFill>
-                  <a:srgbClr val="2B2320"/>
-                </a:solidFill>
-                <a:latin typeface="Cambria" pitchFamily="34" charset="0"/>
-                <a:ea typeface="Cambria" pitchFamily="34" charset="-122"/>
-                <a:cs typeface="Cambria" pitchFamily="34" charset="-120"/>
+                  <a:srgbClr val="1F1F1F"/>
+                </a:solidFill>
+                <a:latin typeface="Adobe Clean" pitchFamily="34" charset="0"/>
+                <a:ea typeface="Adobe Clean" pitchFamily="34" charset="-122"/>
+                <a:cs typeface="Adobe Clean" pitchFamily="34" charset="-120"/>
               </a:rPr>
               <a:t>Confirm the data in AEP</a:t>
             </a:r>
@@ -12790,7 +12790,7 @@
             <a:avLst/>
           </a:prstGeom>
           <a:solidFill>
-            <a:srgbClr val="FF5722"/>
+            <a:srgbClr val="EB1000"/>
           </a:solidFill>
           <a:ln/>
         </p:spPr>
@@ -12824,9 +12824,9 @@
                 <a:solidFill>
                   <a:srgbClr val="FFFFFF"/>
                 </a:solidFill>
-                <a:latin typeface="Calibri" pitchFamily="34" charset="0"/>
-                <a:ea typeface="Calibri" pitchFamily="34" charset="-122"/>
-                <a:cs typeface="Calibri" pitchFamily="34" charset="-120"/>
+                <a:latin typeface="Adobe Clean" pitchFamily="34" charset="0"/>
+                <a:ea typeface="Adobe Clean" pitchFamily="34" charset="-122"/>
+                <a:cs typeface="Adobe Clean" pitchFamily="34" charset="-120"/>
               </a:rPr>
               <a:t>1</a:t>
             </a:r>
@@ -12861,11 +12861,11 @@
             <a:r>
               <a:rPr lang="en-US" sz="1550" b="1" dirty="0">
                 <a:solidFill>
-                  <a:srgbClr val="2B2320"/>
-                </a:solidFill>
-                <a:latin typeface="Calibri" pitchFamily="34" charset="0"/>
-                <a:ea typeface="Calibri" pitchFamily="34" charset="-122"/>
-                <a:cs typeface="Calibri" pitchFamily="34" charset="-120"/>
+                  <a:srgbClr val="1F1F1F"/>
+                </a:solidFill>
+                <a:latin typeface="Adobe Clean" pitchFamily="34" charset="0"/>
+                <a:ea typeface="Adobe Clean" pitchFamily="34" charset="-122"/>
+                <a:cs typeface="Adobe Clean" pitchFamily="34" charset="-120"/>
               </a:rPr>
               <a:t>Dataset → Preview</a:t>
             </a:r>
@@ -12900,11 +12900,11 @@
             <a:r>
               <a:rPr lang="en-US" sz="1250" dirty="0">
                 <a:solidFill>
-                  <a:srgbClr val="7D726C"/>
-                </a:solidFill>
-                <a:latin typeface="Calibri" pitchFamily="34" charset="0"/>
-                <a:ea typeface="Calibri" pitchFamily="34" charset="-122"/>
-                <a:cs typeface="Calibri" pitchFamily="34" charset="-120"/>
+                  <a:srgbClr val="6B6B6B"/>
+                </a:solidFill>
+                <a:latin typeface="Adobe Clean" pitchFamily="34" charset="0"/>
+                <a:ea typeface="Adobe Clean" pitchFamily="34" charset="-122"/>
+                <a:cs typeface="Adobe Clean" pitchFamily="34" charset="-120"/>
               </a:rPr>
               <a:t>See rows arriving in the Feastly dataset.</a:t>
             </a:r>
@@ -12927,7 +12927,7 @@
             <a:avLst/>
           </a:prstGeom>
           <a:solidFill>
-            <a:srgbClr val="FF5722"/>
+            <a:srgbClr val="EB1000"/>
           </a:solidFill>
           <a:ln/>
         </p:spPr>
@@ -12961,9 +12961,9 @@
                 <a:solidFill>
                   <a:srgbClr val="FFFFFF"/>
                 </a:solidFill>
-                <a:latin typeface="Calibri" pitchFamily="34" charset="0"/>
-                <a:ea typeface="Calibri" pitchFamily="34" charset="-122"/>
-                <a:cs typeface="Calibri" pitchFamily="34" charset="-120"/>
+                <a:latin typeface="Adobe Clean" pitchFamily="34" charset="0"/>
+                <a:ea typeface="Adobe Clean" pitchFamily="34" charset="-122"/>
+                <a:cs typeface="Adobe Clean" pitchFamily="34" charset="-120"/>
               </a:rPr>
               <a:t>2</a:t>
             </a:r>
@@ -12998,11 +12998,11 @@
             <a:r>
               <a:rPr lang="en-US" sz="1550" b="1" dirty="0">
                 <a:solidFill>
-                  <a:srgbClr val="2B2320"/>
-                </a:solidFill>
-                <a:latin typeface="Calibri" pitchFamily="34" charset="0"/>
-                <a:ea typeface="Calibri" pitchFamily="34" charset="-122"/>
-                <a:cs typeface="Calibri" pitchFamily="34" charset="-120"/>
+                  <a:srgbClr val="1F1F1F"/>
+                </a:solidFill>
+                <a:latin typeface="Adobe Clean" pitchFamily="34" charset="0"/>
+                <a:ea typeface="Adobe Clean" pitchFamily="34" charset="-122"/>
+                <a:cs typeface="Adobe Clean" pitchFamily="34" charset="-120"/>
               </a:rPr>
               <a:t>Monitoring</a:t>
             </a:r>
@@ -13037,11 +13037,11 @@
             <a:r>
               <a:rPr lang="en-US" sz="1250" dirty="0">
                 <a:solidFill>
-                  <a:srgbClr val="7D726C"/>
-                </a:solidFill>
-                <a:latin typeface="Calibri" pitchFamily="34" charset="0"/>
-                <a:ea typeface="Calibri" pitchFamily="34" charset="-122"/>
-                <a:cs typeface="Calibri" pitchFamily="34" charset="-120"/>
+                  <a:srgbClr val="6B6B6B"/>
+                </a:solidFill>
+                <a:latin typeface="Adobe Clean" pitchFamily="34" charset="0"/>
+                <a:ea typeface="Adobe Clean" pitchFamily="34" charset="-122"/>
+                <a:cs typeface="Adobe Clean" pitchFamily="34" charset="-120"/>
               </a:rPr>
               <a:t>Batch/streaming ingestion success or failures.</a:t>
             </a:r>
@@ -13064,7 +13064,7 @@
             <a:avLst/>
           </a:prstGeom>
           <a:solidFill>
-            <a:srgbClr val="FF5722"/>
+            <a:srgbClr val="EB1000"/>
           </a:solidFill>
           <a:ln/>
         </p:spPr>
@@ -13098,9 +13098,9 @@
                 <a:solidFill>
                   <a:srgbClr val="FFFFFF"/>
                 </a:solidFill>
-                <a:latin typeface="Calibri" pitchFamily="34" charset="0"/>
-                <a:ea typeface="Calibri" pitchFamily="34" charset="-122"/>
-                <a:cs typeface="Calibri" pitchFamily="34" charset="-120"/>
+                <a:latin typeface="Adobe Clean" pitchFamily="34" charset="0"/>
+                <a:ea typeface="Adobe Clean" pitchFamily="34" charset="-122"/>
+                <a:cs typeface="Adobe Clean" pitchFamily="34" charset="-120"/>
               </a:rPr>
               <a:t>3</a:t>
             </a:r>
@@ -13135,11 +13135,11 @@
             <a:r>
               <a:rPr lang="en-US" sz="1550" b="1" dirty="0">
                 <a:solidFill>
-                  <a:srgbClr val="2B2320"/>
-                </a:solidFill>
-                <a:latin typeface="Calibri" pitchFamily="34" charset="0"/>
-                <a:ea typeface="Calibri" pitchFamily="34" charset="-122"/>
-                <a:cs typeface="Calibri" pitchFamily="34" charset="-120"/>
+                  <a:srgbClr val="1F1F1F"/>
+                </a:solidFill>
+                <a:latin typeface="Adobe Clean" pitchFamily="34" charset="0"/>
+                <a:ea typeface="Adobe Clean" pitchFamily="34" charset="-122"/>
+                <a:cs typeface="Adobe Clean" pitchFamily="34" charset="-120"/>
               </a:rPr>
               <a:t>Profile → Lookup</a:t>
             </a:r>
@@ -13174,11 +13174,11 @@
             <a:r>
               <a:rPr lang="en-US" sz="1250" dirty="0">
                 <a:solidFill>
-                  <a:srgbClr val="7D726C"/>
-                </a:solidFill>
-                <a:latin typeface="Calibri" pitchFamily="34" charset="0"/>
-                <a:ea typeface="Calibri" pitchFamily="34" charset="-122"/>
-                <a:cs typeface="Calibri" pitchFamily="34" charset="-120"/>
+                  <a:srgbClr val="6B6B6B"/>
+                </a:solidFill>
+                <a:latin typeface="Adobe Clean" pitchFamily="34" charset="0"/>
+                <a:ea typeface="Adobe Clean" pitchFamily="34" charset="-122"/>
+                <a:cs typeface="Adobe Clean" pitchFamily="34" charset="-120"/>
               </a:rPr>
               <a:t>Find the person by Email or ECID.</a:t>
             </a:r>
@@ -13201,7 +13201,7 @@
             <a:avLst/>
           </a:prstGeom>
           <a:solidFill>
-            <a:srgbClr val="FF5722"/>
+            <a:srgbClr val="EB1000"/>
           </a:solidFill>
           <a:ln/>
         </p:spPr>
@@ -13235,9 +13235,9 @@
                 <a:solidFill>
                   <a:srgbClr val="FFFFFF"/>
                 </a:solidFill>
-                <a:latin typeface="Calibri" pitchFamily="34" charset="0"/>
-                <a:ea typeface="Calibri" pitchFamily="34" charset="-122"/>
-                <a:cs typeface="Calibri" pitchFamily="34" charset="-120"/>
+                <a:latin typeface="Adobe Clean" pitchFamily="34" charset="0"/>
+                <a:ea typeface="Adobe Clean" pitchFamily="34" charset="-122"/>
+                <a:cs typeface="Adobe Clean" pitchFamily="34" charset="-120"/>
               </a:rPr>
               <a:t>4</a:t>
             </a:r>
@@ -13272,11 +13272,11 @@
             <a:r>
               <a:rPr lang="en-US" sz="1550" b="1" dirty="0">
                 <a:solidFill>
-                  <a:srgbClr val="2B2320"/>
-                </a:solidFill>
-                <a:latin typeface="Calibri" pitchFamily="34" charset="0"/>
-                <a:ea typeface="Calibri" pitchFamily="34" charset="-122"/>
-                <a:cs typeface="Calibri" pitchFamily="34" charset="-120"/>
+                  <a:srgbClr val="1F1F1F"/>
+                </a:solidFill>
+                <a:latin typeface="Adobe Clean" pitchFamily="34" charset="0"/>
+                <a:ea typeface="Adobe Clean" pitchFamily="34" charset="-122"/>
+                <a:cs typeface="Adobe Clean" pitchFamily="34" charset="-120"/>
               </a:rPr>
               <a:t>Identity graph</a:t>
             </a:r>
@@ -13311,11 +13311,11 @@
             <a:r>
               <a:rPr lang="en-US" sz="1250" dirty="0">
                 <a:solidFill>
-                  <a:srgbClr val="7D726C"/>
-                </a:solidFill>
-                <a:latin typeface="Calibri" pitchFamily="34" charset="0"/>
-                <a:ea typeface="Calibri" pitchFamily="34" charset="-122"/>
-                <a:cs typeface="Calibri" pitchFamily="34" charset="-120"/>
+                  <a:srgbClr val="6B6B6B"/>
+                </a:solidFill>
+                <a:latin typeface="Adobe Clean" pitchFamily="34" charset="0"/>
+                <a:ea typeface="Adobe Clean" pitchFamily="34" charset="-122"/>
+                <a:cs typeface="Adobe Clean" pitchFamily="34" charset="-120"/>
               </a:rPr>
               <a:t>See ECID ↔ Email linked; events + attributes.</a:t>
             </a:r>
@@ -13340,11 +13340,11 @@
             </a:avLst>
           </a:prstGeom>
           <a:solidFill>
-            <a:srgbClr val="F4EEEA"/>
+            <a:srgbClr val="F2F2F2"/>
           </a:solidFill>
           <a:ln w="15875">
             <a:solidFill>
-              <a:srgbClr val="FF5722"/>
+              <a:srgbClr val="EB1000"/>
             </a:solidFill>
             <a:prstDash val="dash"/>
           </a:ln>
@@ -13388,7 +13388,7 @@
             <a:r>
               <a:rPr lang="en-US" sz="1300" b="1" dirty="0">
                 <a:solidFill>
-                  <a:srgbClr val="E64A19"/>
+                  <a:srgbClr val="B10C00"/>
                 </a:solidFill>
               </a:rPr>
               <a:t>SCREENSHOT</a:t>
@@ -13424,11 +13424,11 @@
             <a:r>
               <a:rPr lang="en-US" sz="1200" i="1" dirty="0">
                 <a:solidFill>
-                  <a:srgbClr val="7D726C"/>
-                </a:solidFill>
-                <a:latin typeface="Calibri" pitchFamily="34" charset="0"/>
-                <a:ea typeface="Calibri" pitchFamily="34" charset="-122"/>
-                <a:cs typeface="Calibri" pitchFamily="34" charset="-120"/>
+                  <a:srgbClr val="6B6B6B"/>
+                </a:solidFill>
+                <a:latin typeface="Adobe Clean" pitchFamily="34" charset="0"/>
+                <a:ea typeface="Adobe Clean" pitchFamily="34" charset="-122"/>
+                <a:cs typeface="Adobe Clean" pitchFamily="34" charset="-120"/>
               </a:rPr>
               <a:t>AEP — Profile lookup showing attributes + event timeline (and the identity graph tab).</a:t>
             </a:r>
@@ -13495,11 +13495,11 @@
             <a:r>
               <a:rPr lang="en-US" sz="1250" b="1" spc="200" kern="0" dirty="0">
                 <a:solidFill>
-                  <a:srgbClr val="FF5722"/>
-                </a:solidFill>
-                <a:latin typeface="Calibri" pitchFamily="34" charset="0"/>
-                <a:ea typeface="Calibri" pitchFamily="34" charset="-122"/>
-                <a:cs typeface="Calibri" pitchFamily="34" charset="-120"/>
+                  <a:srgbClr val="EB1000"/>
+                </a:solidFill>
+                <a:latin typeface="Adobe Clean" pitchFamily="34" charset="0"/>
+                <a:ea typeface="Adobe Clean" pitchFamily="34" charset="-122"/>
+                <a:cs typeface="Adobe Clean" pitchFamily="34" charset="-120"/>
               </a:rPr>
               <a:t>SUPPORT PLAYBOOK</a:t>
             </a:r>
@@ -13534,11 +13534,11 @@
             <a:r>
               <a:rPr lang="en-US" sz="3200" b="1" dirty="0">
                 <a:solidFill>
-                  <a:srgbClr val="2B2320"/>
-                </a:solidFill>
-                <a:latin typeface="Cambria" pitchFamily="34" charset="0"/>
-                <a:ea typeface="Cambria" pitchFamily="34" charset="-122"/>
-                <a:cs typeface="Cambria" pitchFamily="34" charset="-120"/>
+                  <a:srgbClr val="1F1F1F"/>
+                </a:solidFill>
+                <a:latin typeface="Adobe Clean" pitchFamily="34" charset="0"/>
+                <a:ea typeface="Adobe Clean" pitchFamily="34" charset="-122"/>
+                <a:cs typeface="Adobe Clean" pitchFamily="34" charset="-120"/>
               </a:rPr>
               <a:t>When data is missing — where to look</a:t>
             </a:r>
@@ -13563,7 +13563,7 @@
             </a:avLst>
           </a:prstGeom>
           <a:solidFill>
-            <a:srgbClr val="FFF3EE"/>
+            <a:srgbClr val="FDECEA"/>
           </a:solidFill>
           <a:ln/>
         </p:spPr>
@@ -13631,11 +13631,11 @@
             <a:r>
               <a:rPr lang="en-US" sz="1500" b="1" dirty="0">
                 <a:solidFill>
-                  <a:srgbClr val="E64A19"/>
-                </a:solidFill>
-                <a:latin typeface="Calibri" pitchFamily="34" charset="0"/>
-                <a:ea typeface="Calibri" pitchFamily="34" charset="-122"/>
-                <a:cs typeface="Calibri" pitchFamily="34" charset="-120"/>
+                  <a:srgbClr val="B10C00"/>
+                </a:solidFill>
+                <a:latin typeface="Adobe Clean" pitchFamily="34" charset="0"/>
+                <a:ea typeface="Adobe Clean" pitchFamily="34" charset="-122"/>
+                <a:cs typeface="Adobe Clean" pitchFamily="34" charset="-120"/>
               </a:rPr>
               <a:t>Rule not firing</a:t>
             </a:r>
@@ -13670,11 +13670,11 @@
             <a:r>
               <a:rPr lang="en-US" sz="1250" dirty="0">
                 <a:solidFill>
-                  <a:srgbClr val="2B2320"/>
-                </a:solidFill>
-                <a:latin typeface="Calibri" pitchFamily="34" charset="0"/>
-                <a:ea typeface="Calibri" pitchFamily="34" charset="-122"/>
-                <a:cs typeface="Calibri" pitchFamily="34" charset="-120"/>
+                  <a:srgbClr val="1F1F1F"/>
+                </a:solidFill>
+                <a:latin typeface="Adobe Clean" pitchFamily="34" charset="0"/>
+                <a:ea typeface="Adobe Clean" pitchFamily="34" charset="-122"/>
+                <a:cs typeface="Adobe Clean" pitchFamily="34" charset="-120"/>
               </a:rPr>
               <a:t>Event "listen for" ≠ the data-layer name (camelCase, no dots).</a:t>
             </a:r>
@@ -13699,7 +13699,7 @@
             </a:avLst>
           </a:prstGeom>
           <a:solidFill>
-            <a:srgbClr val="FFF3EE"/>
+            <a:srgbClr val="FDECEA"/>
           </a:solidFill>
           <a:ln/>
         </p:spPr>
@@ -13767,11 +13767,11 @@
             <a:r>
               <a:rPr lang="en-US" sz="1500" b="1" dirty="0">
                 <a:solidFill>
-                  <a:srgbClr val="E64A19"/>
-                </a:solidFill>
-                <a:latin typeface="Calibri" pitchFamily="34" charset="0"/>
-                <a:ea typeface="Calibri" pitchFamily="34" charset="-122"/>
-                <a:cs typeface="Calibri" pitchFamily="34" charset="-120"/>
+                  <a:srgbClr val="B10C00"/>
+                </a:solidFill>
+                <a:latin typeface="Adobe Clean" pitchFamily="34" charset="0"/>
+                <a:ea typeface="Adobe Clean" pitchFamily="34" charset="-122"/>
+                <a:cs typeface="Adobe Clean" pitchFamily="34" charset="-120"/>
               </a:rPr>
               <a:t>Empty / wrong XDM</a:t>
             </a:r>
@@ -13806,11 +13806,11 @@
             <a:r>
               <a:rPr lang="en-US" sz="1250" dirty="0">
                 <a:solidFill>
-                  <a:srgbClr val="2B2320"/>
-                </a:solidFill>
-                <a:latin typeface="Calibri" pitchFamily="34" charset="0"/>
-                <a:ea typeface="Calibri" pitchFamily="34" charset="-122"/>
-                <a:cs typeface="Calibri" pitchFamily="34" charset="-120"/>
+                  <a:srgbClr val="1F1F1F"/>
+                </a:solidFill>
+                <a:latin typeface="Adobe Clean" pitchFamily="34" charset="0"/>
+                <a:ea typeface="Adobe Clean" pitchFamily="34" charset="-122"/>
+                <a:cs typeface="Adobe Clean" pitchFamily="34" charset="-120"/>
               </a:rPr>
               <a:t>Data element path typo, or field not in the schema.</a:t>
             </a:r>
@@ -13835,7 +13835,7 @@
             </a:avLst>
           </a:prstGeom>
           <a:solidFill>
-            <a:srgbClr val="FFF3EE"/>
+            <a:srgbClr val="FDECEA"/>
           </a:solidFill>
           <a:ln/>
         </p:spPr>
@@ -13903,11 +13903,11 @@
             <a:r>
               <a:rPr lang="en-US" sz="1500" b="1" dirty="0">
                 <a:solidFill>
-                  <a:srgbClr val="E64A19"/>
-                </a:solidFill>
-                <a:latin typeface="Calibri" pitchFamily="34" charset="0"/>
-                <a:ea typeface="Calibri" pitchFamily="34" charset="-122"/>
-                <a:cs typeface="Calibri" pitchFamily="34" charset="-120"/>
+                  <a:srgbClr val="B10C00"/>
+                </a:solidFill>
+                <a:latin typeface="Adobe Clean" pitchFamily="34" charset="0"/>
+                <a:ea typeface="Adobe Clean" pitchFamily="34" charset="-122"/>
+                <a:cs typeface="Adobe Clean" pitchFamily="34" charset="-120"/>
               </a:rPr>
               <a:t>No data in AEP</a:t>
             </a:r>
@@ -13942,11 +13942,11 @@
             <a:r>
               <a:rPr lang="en-US" sz="1250" dirty="0">
                 <a:solidFill>
-                  <a:srgbClr val="2B2320"/>
-                </a:solidFill>
-                <a:latin typeface="Calibri" pitchFamily="34" charset="0"/>
-                <a:ea typeface="Calibri" pitchFamily="34" charset="-122"/>
-                <a:cs typeface="Calibri" pitchFamily="34" charset="-120"/>
+                  <a:srgbClr val="1F1F1F"/>
+                </a:solidFill>
+                <a:latin typeface="Adobe Clean" pitchFamily="34" charset="0"/>
+                <a:ea typeface="Adobe Clean" pitchFamily="34" charset="-122"/>
+                <a:cs typeface="Adobe Clean" pitchFamily="34" charset="-120"/>
               </a:rPr>
               <a:t>Datastream missing the AEP service, or wrong dataset.</a:t>
             </a:r>
@@ -13971,7 +13971,7 @@
             </a:avLst>
           </a:prstGeom>
           <a:solidFill>
-            <a:srgbClr val="FFF3EE"/>
+            <a:srgbClr val="FDECEA"/>
           </a:solidFill>
           <a:ln/>
         </p:spPr>
@@ -14039,11 +14039,11 @@
             <a:r>
               <a:rPr lang="en-US" sz="1500" b="1" dirty="0">
                 <a:solidFill>
-                  <a:srgbClr val="E64A19"/>
-                </a:solidFill>
-                <a:latin typeface="Calibri" pitchFamily="34" charset="0"/>
-                <a:ea typeface="Calibri" pitchFamily="34" charset="-122"/>
-                <a:cs typeface="Calibri" pitchFamily="34" charset="-120"/>
+                  <a:srgbClr val="B10C00"/>
+                </a:solidFill>
+                <a:latin typeface="Adobe Clean" pitchFamily="34" charset="0"/>
+                <a:ea typeface="Adobe Clean" pitchFamily="34" charset="-122"/>
+                <a:cs typeface="Adobe Clean" pitchFamily="34" charset="-120"/>
               </a:rPr>
               <a:t>Identity not stitching</a:t>
             </a:r>
@@ -14078,11 +14078,11 @@
             <a:r>
               <a:rPr lang="en-US" sz="1250" dirty="0">
                 <a:solidFill>
-                  <a:srgbClr val="2B2320"/>
-                </a:solidFill>
-                <a:latin typeface="Calibri" pitchFamily="34" charset="0"/>
-                <a:ea typeface="Calibri" pitchFamily="34" charset="-122"/>
-                <a:cs typeface="Calibri" pitchFamily="34" charset="-120"/>
+                  <a:srgbClr val="1F1F1F"/>
+                </a:solidFill>
+                <a:latin typeface="Adobe Clean" pitchFamily="34" charset="0"/>
+                <a:ea typeface="Adobe Clean" pitchFamily="34" charset="-122"/>
+                <a:cs typeface="Adobe Clean" pitchFamily="34" charset="-120"/>
               </a:rPr>
               <a:t>Email not marked as an identity, or not in identityMap.</a:t>
             </a:r>
@@ -14107,7 +14107,7 @@
             </a:avLst>
           </a:prstGeom>
           <a:solidFill>
-            <a:srgbClr val="FFF3EE"/>
+            <a:srgbClr val="FDECEA"/>
           </a:solidFill>
           <a:ln/>
         </p:spPr>
@@ -14175,11 +14175,11 @@
             <a:r>
               <a:rPr lang="en-US" sz="1500" b="1" dirty="0">
                 <a:solidFill>
-                  <a:srgbClr val="E64A19"/>
-                </a:solidFill>
-                <a:latin typeface="Calibri" pitchFamily="34" charset="0"/>
-                <a:ea typeface="Calibri" pitchFamily="34" charset="-122"/>
-                <a:cs typeface="Calibri" pitchFamily="34" charset="-120"/>
+                  <a:srgbClr val="B10C00"/>
+                </a:solidFill>
+                <a:latin typeface="Adobe Clean" pitchFamily="34" charset="0"/>
+                <a:ea typeface="Adobe Clean" pitchFamily="34" charset="-122"/>
+                <a:cs typeface="Adobe Clean" pitchFamily="34" charset="-120"/>
               </a:rPr>
               <a:t>Nothing at all</a:t>
             </a:r>
@@ -14214,11 +14214,11 @@
             <a:r>
               <a:rPr lang="en-US" sz="1250" dirty="0">
                 <a:solidFill>
-                  <a:srgbClr val="2B2320"/>
-                </a:solidFill>
-                <a:latin typeface="Calibri" pitchFamily="34" charset="0"/>
-                <a:ea typeface="Calibri" pitchFamily="34" charset="-122"/>
-                <a:cs typeface="Calibri" pitchFamily="34" charset="-120"/>
+                  <a:srgbClr val="1F1F1F"/>
+                </a:solidFill>
+                <a:latin typeface="Adobe Clean" pitchFamily="34" charset="0"/>
+                <a:ea typeface="Adobe Clean" pitchFamily="34" charset="-122"/>
+                <a:cs typeface="Adobe Clean" pitchFamily="34" charset="-120"/>
               </a:rPr>
               <a:t>Tags embed not on the page / wrong environment build.</a:t>
             </a:r>
@@ -14243,7 +14243,7 @@
             </a:avLst>
           </a:prstGeom>
           <a:solidFill>
-            <a:srgbClr val="FFF3EE"/>
+            <a:srgbClr val="FDECEA"/>
           </a:solidFill>
           <a:ln/>
         </p:spPr>
@@ -14311,11 +14311,11 @@
             <a:r>
               <a:rPr lang="en-US" sz="1500" b="1" dirty="0">
                 <a:solidFill>
-                  <a:srgbClr val="E64A19"/>
-                </a:solidFill>
-                <a:latin typeface="Calibri" pitchFamily="34" charset="0"/>
-                <a:ea typeface="Calibri" pitchFamily="34" charset="-122"/>
-                <a:cs typeface="Calibri" pitchFamily="34" charset="-120"/>
+                  <a:srgbClr val="B10C00"/>
+                </a:solidFill>
+                <a:latin typeface="Adobe Clean" pitchFamily="34" charset="0"/>
+                <a:ea typeface="Adobe Clean" pitchFamily="34" charset="-122"/>
+                <a:cs typeface="Adobe Clean" pitchFamily="34" charset="-120"/>
               </a:rPr>
               <a:t>Duplicated metrics</a:t>
             </a:r>
@@ -14350,11 +14350,11 @@
             <a:r>
               <a:rPr lang="en-US" sz="1250" dirty="0">
                 <a:solidFill>
-                  <a:srgbClr val="2B2320"/>
-                </a:solidFill>
-                <a:latin typeface="Calibri" pitchFamily="34" charset="0"/>
-                <a:ea typeface="Calibri" pitchFamily="34" charset="-122"/>
-                <a:cs typeface="Calibri" pitchFamily="34" charset="-120"/>
+                  <a:srgbClr val="1F1F1F"/>
+                </a:solidFill>
+                <a:latin typeface="Adobe Clean" pitchFamily="34" charset="0"/>
+                <a:ea typeface="Adobe Clean" pitchFamily="34" charset="-122"/>
+                <a:cs typeface="Adobe Clean" pitchFamily="34" charset="-120"/>
               </a:rPr>
               <a:t>Same event fired twice, or state bleeding between events.</a:t>
             </a:r>
@@ -14376,7 +14376,7 @@
     <p:bg>
       <p:bgPr>
         <a:solidFill>
-          <a:srgbClr val="2B2320"/>
+          <a:srgbClr val="1F1F1F"/>
         </a:solidFill>
       </p:bgPr>
     </p:bg>
@@ -14421,11 +14421,11 @@
             <a:r>
               <a:rPr lang="en-US" sz="1250" b="1" spc="200" kern="0" dirty="0">
                 <a:solidFill>
-                  <a:srgbClr val="FFB300"/>
-                </a:solidFill>
-                <a:latin typeface="Calibri" pitchFamily="34" charset="0"/>
-                <a:ea typeface="Calibri" pitchFamily="34" charset="-122"/>
-                <a:cs typeface="Calibri" pitchFamily="34" charset="-120"/>
+                  <a:srgbClr val="FFA311"/>
+                </a:solidFill>
+                <a:latin typeface="Adobe Clean" pitchFamily="34" charset="0"/>
+                <a:ea typeface="Adobe Clean" pitchFamily="34" charset="-122"/>
+                <a:cs typeface="Adobe Clean" pitchFamily="34" charset="-120"/>
               </a:rPr>
               <a:t>ONE MENTAL MODEL</a:t>
             </a:r>
@@ -14462,9 +14462,9 @@
                 <a:solidFill>
                   <a:srgbClr val="FFFFFF"/>
                 </a:solidFill>
-                <a:latin typeface="Cambria" pitchFamily="34" charset="0"/>
-                <a:ea typeface="Cambria" pitchFamily="34" charset="-122"/>
-                <a:cs typeface="Cambria" pitchFamily="34" charset="-120"/>
+                <a:latin typeface="Adobe Clean" pitchFamily="34" charset="0"/>
+                <a:ea typeface="Adobe Clean" pitchFamily="34" charset="-122"/>
+                <a:cs typeface="Adobe Clean" pitchFamily="34" charset="-120"/>
               </a:rPr>
               <a:t>If you remember one thing</a:t>
             </a:r>
@@ -14501,9 +14501,9 @@
                 <a:solidFill>
                   <a:srgbClr val="FFFFFF"/>
                 </a:solidFill>
-                <a:latin typeface="Cambria" pitchFamily="34" charset="0"/>
-                <a:ea typeface="Cambria" pitchFamily="34" charset="-122"/>
-                <a:cs typeface="Cambria" pitchFamily="34" charset="-120"/>
+                <a:latin typeface="Adobe Clean" pitchFamily="34" charset="0"/>
+                <a:ea typeface="Adobe Clean" pitchFamily="34" charset="-122"/>
+                <a:cs typeface="Adobe Clean" pitchFamily="34" charset="-120"/>
               </a:rPr>
               <a:t>“The website only speaks the data layer. Tags translates it to XDM, the Web SDK ships it to the datastream, and the datastream routes it to AEP.”</a:t>
             </a:r>
@@ -14528,11 +14528,11 @@
             </a:avLst>
           </a:prstGeom>
           <a:solidFill>
-            <a:srgbClr val="3A302B"/>
+            <a:srgbClr val="2C2C2C"/>
           </a:solidFill>
           <a:ln w="12700">
             <a:solidFill>
-              <a:srgbClr val="FF5722"/>
+              <a:srgbClr val="EB1000"/>
             </a:solidFill>
             <a:prstDash val="solid"/>
           </a:ln>
@@ -14567,9 +14567,9 @@
                 <a:solidFill>
                   <a:srgbClr val="FFFFFF"/>
                 </a:solidFill>
-                <a:latin typeface="Calibri" pitchFamily="34" charset="0"/>
-                <a:ea typeface="Calibri" pitchFamily="34" charset="-122"/>
-                <a:cs typeface="Calibri" pitchFamily="34" charset="-120"/>
+                <a:latin typeface="Adobe Clean" pitchFamily="34" charset="0"/>
+                <a:ea typeface="Adobe Clean" pitchFamily="34" charset="-122"/>
+                <a:cs typeface="Adobe Clean" pitchFamily="34" charset="-120"/>
               </a:rPr>
               <a:t>Data layer = what happened</a:t>
             </a:r>
@@ -14594,11 +14594,11 @@
             </a:avLst>
           </a:prstGeom>
           <a:solidFill>
-            <a:srgbClr val="3A302B"/>
+            <a:srgbClr val="2C2C2C"/>
           </a:solidFill>
           <a:ln w="12700">
             <a:solidFill>
-              <a:srgbClr val="FF5722"/>
+              <a:srgbClr val="EB1000"/>
             </a:solidFill>
             <a:prstDash val="solid"/>
           </a:ln>
@@ -14633,9 +14633,9 @@
                 <a:solidFill>
                   <a:srgbClr val="FFFFFF"/>
                 </a:solidFill>
-                <a:latin typeface="Calibri" pitchFamily="34" charset="0"/>
-                <a:ea typeface="Calibri" pitchFamily="34" charset="-122"/>
-                <a:cs typeface="Calibri" pitchFamily="34" charset="-120"/>
+                <a:latin typeface="Adobe Clean" pitchFamily="34" charset="0"/>
+                <a:ea typeface="Adobe Clean" pitchFamily="34" charset="-122"/>
+                <a:cs typeface="Adobe Clean" pitchFamily="34" charset="-120"/>
               </a:rPr>
               <a:t>Data elements = variables</a:t>
             </a:r>
@@ -14660,11 +14660,11 @@
             </a:avLst>
           </a:prstGeom>
           <a:solidFill>
-            <a:srgbClr val="3A302B"/>
+            <a:srgbClr val="2C2C2C"/>
           </a:solidFill>
           <a:ln w="12700">
             <a:solidFill>
-              <a:srgbClr val="FF5722"/>
+              <a:srgbClr val="EB1000"/>
             </a:solidFill>
             <a:prstDash val="solid"/>
           </a:ln>
@@ -14699,9 +14699,9 @@
                 <a:solidFill>
                   <a:srgbClr val="FFFFFF"/>
                 </a:solidFill>
-                <a:latin typeface="Calibri" pitchFamily="34" charset="0"/>
-                <a:ea typeface="Calibri" pitchFamily="34" charset="-122"/>
-                <a:cs typeface="Calibri" pitchFamily="34" charset="-120"/>
+                <a:latin typeface="Adobe Clean" pitchFamily="34" charset="0"/>
+                <a:ea typeface="Adobe Clean" pitchFamily="34" charset="-122"/>
+                <a:cs typeface="Adobe Clean" pitchFamily="34" charset="-120"/>
               </a:rPr>
               <a:t>Rules = when → send</a:t>
             </a:r>
@@ -14726,11 +14726,11 @@
             </a:avLst>
           </a:prstGeom>
           <a:solidFill>
-            <a:srgbClr val="3A302B"/>
+            <a:srgbClr val="2C2C2C"/>
           </a:solidFill>
           <a:ln w="12700">
             <a:solidFill>
-              <a:srgbClr val="FF5722"/>
+              <a:srgbClr val="EB1000"/>
             </a:solidFill>
             <a:prstDash val="solid"/>
           </a:ln>
@@ -14765,9 +14765,9 @@
                 <a:solidFill>
                   <a:srgbClr val="FFFFFF"/>
                 </a:solidFill>
-                <a:latin typeface="Calibri" pitchFamily="34" charset="0"/>
-                <a:ea typeface="Calibri" pitchFamily="34" charset="-122"/>
-                <a:cs typeface="Calibri" pitchFamily="34" charset="-120"/>
+                <a:latin typeface="Adobe Clean" pitchFamily="34" charset="0"/>
+                <a:ea typeface="Adobe Clean" pitchFamily="34" charset="-122"/>
+                <a:cs typeface="Adobe Clean" pitchFamily="34" charset="-120"/>
               </a:rPr>
               <a:t>Datastream = where it goes</a:t>
             </a:r>
@@ -14822,7 +14822,7 @@
             <a:avLst/>
           </a:prstGeom>
           <a:solidFill>
-            <a:srgbClr val="FFF3EE"/>
+            <a:srgbClr val="FDECEA"/>
           </a:solidFill>
           <a:ln/>
         </p:spPr>
@@ -14890,11 +14890,11 @@
             <a:r>
               <a:rPr lang="en-US" sz="4000" b="1" dirty="0">
                 <a:solidFill>
-                  <a:srgbClr val="2B2320"/>
-                </a:solidFill>
-                <a:latin typeface="Cambria" pitchFamily="34" charset="0"/>
-                <a:ea typeface="Cambria" pitchFamily="34" charset="-122"/>
-                <a:cs typeface="Cambria" pitchFamily="34" charset="-120"/>
+                  <a:srgbClr val="1F1F1F"/>
+                </a:solidFill>
+                <a:latin typeface="Adobe Clean" pitchFamily="34" charset="0"/>
+                <a:ea typeface="Adobe Clean" pitchFamily="34" charset="-122"/>
+                <a:cs typeface="Adobe Clean" pitchFamily="34" charset="-120"/>
               </a:rPr>
               <a:t>Try it yourself</a:t>
             </a:r>
@@ -14929,11 +14929,11 @@
             <a:r>
               <a:rPr lang="en-US" sz="1600" dirty="0">
                 <a:solidFill>
-                  <a:srgbClr val="7D726C"/>
-                </a:solidFill>
-                <a:latin typeface="Calibri" pitchFamily="34" charset="0"/>
-                <a:ea typeface="Calibri" pitchFamily="34" charset="-122"/>
-                <a:cs typeface="Calibri" pitchFamily="34" charset="-120"/>
+                  <a:srgbClr val="6B6B6B"/>
+                </a:solidFill>
+                <a:latin typeface="Adobe Clean" pitchFamily="34" charset="0"/>
+                <a:ea typeface="Adobe Clean" pitchFamily="34" charset="-122"/>
+                <a:cs typeface="Adobe Clean" pitchFamily="34" charset="-120"/>
               </a:rPr>
               <a:t>Clone the repo, run it, then point it at your own Adobe via the ⚙ Adobe Config panel.</a:t>
             </a:r>
@@ -14958,7 +14958,7 @@
             </a:avLst>
           </a:prstGeom>
           <a:solidFill>
-            <a:srgbClr val="2B2320"/>
+            <a:srgbClr val="1F1F1F"/>
           </a:solidFill>
           <a:ln/>
         </p:spPr>
@@ -14990,11 +14990,11 @@
             <a:r>
               <a:rPr lang="en-US" sz="1600" b="1" dirty="0">
                 <a:solidFill>
-                  <a:srgbClr val="FFB300"/>
-                </a:solidFill>
-                <a:latin typeface="Calibri" pitchFamily="34" charset="0"/>
-                <a:ea typeface="Calibri" pitchFamily="34" charset="-122"/>
-                <a:cs typeface="Calibri" pitchFamily="34" charset="-120"/>
+                  <a:srgbClr val="FFA311"/>
+                </a:solidFill>
+                <a:latin typeface="Adobe Clean" pitchFamily="34" charset="0"/>
+                <a:ea typeface="Adobe Clean" pitchFamily="34" charset="-122"/>
+                <a:cs typeface="Adobe Clean" pitchFamily="34" charset="-120"/>
               </a:rPr>
               <a:t>github.com/princeparvat80/aep-data-collection-food-demo</a:t>
             </a:r>
@@ -15029,11 +15029,11 @@
             <a:r>
               <a:rPr lang="en-US" sz="1400" i="1" dirty="0">
                 <a:solidFill>
-                  <a:srgbClr val="2B2320"/>
-                </a:solidFill>
-                <a:latin typeface="Calibri" pitchFamily="34" charset="0"/>
-                <a:ea typeface="Calibri" pitchFamily="34" charset="-122"/>
-                <a:cs typeface="Calibri" pitchFamily="34" charset="-120"/>
+                  <a:srgbClr val="1F1F1F"/>
+                </a:solidFill>
+                <a:latin typeface="Adobe Clean" pitchFamily="34" charset="0"/>
+                <a:ea typeface="Adobe Clean" pitchFamily="34" charset="-122"/>
+                <a:cs typeface="Adobe Clean" pitchFamily="34" charset="-120"/>
               </a:rPr>
               <a:t>Run:  npm install  →  npm run dev  →  http://localhost:5175</a:t>
             </a:r>
@@ -15068,11 +15068,11 @@
             <a:r>
               <a:rPr lang="en-US" sz="1300" dirty="0">
                 <a:solidFill>
-                  <a:srgbClr val="7D726C"/>
-                </a:solidFill>
-                <a:latin typeface="Calibri" pitchFamily="34" charset="0"/>
-                <a:ea typeface="Calibri" pitchFamily="34" charset="-122"/>
-                <a:cs typeface="Calibri" pitchFamily="34" charset="-120"/>
+                  <a:srgbClr val="6B6B6B"/>
+                </a:solidFill>
+                <a:latin typeface="Adobe Clean" pitchFamily="34" charset="0"/>
+                <a:ea typeface="Adobe Clean" pitchFamily="34" charset="-122"/>
+                <a:cs typeface="Adobe Clean" pitchFamily="34" charset="-120"/>
               </a:rPr>
               <a:t>Questions? Let's open the console and trace an event together.</a:t>
             </a:r>
@@ -15139,11 +15139,11 @@
             <a:r>
               <a:rPr lang="en-US" sz="1250" b="1" spc="200" kern="0" dirty="0">
                 <a:solidFill>
-                  <a:srgbClr val="FF5722"/>
-                </a:solidFill>
-                <a:latin typeface="Calibri" pitchFamily="34" charset="0"/>
-                <a:ea typeface="Calibri" pitchFamily="34" charset="-122"/>
-                <a:cs typeface="Calibri" pitchFamily="34" charset="-120"/>
+                  <a:srgbClr val="EB1000"/>
+                </a:solidFill>
+                <a:latin typeface="Adobe Clean" pitchFamily="34" charset="0"/>
+                <a:ea typeface="Adobe Clean" pitchFamily="34" charset="-122"/>
+                <a:cs typeface="Adobe Clean" pitchFamily="34" charset="-120"/>
               </a:rPr>
               <a:t>THE BIG PICTURE</a:t>
             </a:r>
@@ -15178,11 +15178,11 @@
             <a:r>
               <a:rPr lang="en-US" sz="3200" b="1" dirty="0">
                 <a:solidFill>
-                  <a:srgbClr val="2B2320"/>
-                </a:solidFill>
-                <a:latin typeface="Cambria" pitchFamily="34" charset="0"/>
-                <a:ea typeface="Cambria" pitchFamily="34" charset="-122"/>
-                <a:cs typeface="Cambria" pitchFamily="34" charset="-120"/>
+                  <a:srgbClr val="1F1F1F"/>
+                </a:solidFill>
+                <a:latin typeface="Adobe Clean" pitchFamily="34" charset="0"/>
+                <a:ea typeface="Adobe Clean" pitchFamily="34" charset="-122"/>
+                <a:cs typeface="Adobe Clean" pitchFamily="34" charset="-120"/>
               </a:rPr>
               <a:t>From a click to a profile in AEP</a:t>
             </a:r>
@@ -15207,7 +15207,7 @@
             </a:avLst>
           </a:prstGeom>
           <a:solidFill>
-            <a:srgbClr val="2B2320"/>
+            <a:srgbClr val="1F1F1F"/>
           </a:solidFill>
           <a:ln/>
         </p:spPr>
@@ -15277,9 +15277,9 @@
                 <a:solidFill>
                   <a:srgbClr val="FFFFFF"/>
                 </a:solidFill>
-                <a:latin typeface="Calibri" pitchFamily="34" charset="0"/>
-                <a:ea typeface="Calibri" pitchFamily="34" charset="-122"/>
-                <a:cs typeface="Calibri" pitchFamily="34" charset="-120"/>
+                <a:latin typeface="Adobe Clean" pitchFamily="34" charset="0"/>
+                <a:ea typeface="Adobe Clean" pitchFamily="34" charset="-122"/>
+                <a:cs typeface="Adobe Clean" pitchFamily="34" charset="-120"/>
               </a:rPr>
               <a:t>Website</a:t>
             </a:r>
@@ -15314,11 +15314,11 @@
             <a:r>
               <a:rPr lang="en-US" sz="1050" dirty="0">
                 <a:solidFill>
-                  <a:srgbClr val="D9CFC9"/>
-                </a:solidFill>
-                <a:latin typeface="Calibri" pitchFamily="34" charset="0"/>
-                <a:ea typeface="Calibri" pitchFamily="34" charset="-122"/>
-                <a:cs typeface="Calibri" pitchFamily="34" charset="-120"/>
+                  <a:srgbClr val="CFCFCF"/>
+                </a:solidFill>
+                <a:latin typeface="Adobe Clean" pitchFamily="34" charset="0"/>
+                <a:ea typeface="Adobe Clean" pitchFamily="34" charset="-122"/>
+                <a:cs typeface="Adobe Clean" pitchFamily="34" charset="-120"/>
               </a:rPr>
               <a:t>User clicks / views</a:t>
             </a:r>
@@ -15353,7 +15353,7 @@
             <a:r>
               <a:rPr lang="en-US" sz="1600" b="1" dirty="0">
                 <a:solidFill>
-                  <a:srgbClr val="FF5722"/>
+                  <a:srgbClr val="EB1000"/>
                 </a:solidFill>
               </a:rPr>
               <a:t>▸</a:t>
@@ -15379,7 +15379,7 @@
             </a:avLst>
           </a:prstGeom>
           <a:solidFill>
-            <a:srgbClr val="2B2320"/>
+            <a:srgbClr val="1F1F1F"/>
           </a:solidFill>
           <a:ln/>
         </p:spPr>
@@ -15449,9 +15449,9 @@
                 <a:solidFill>
                   <a:srgbClr val="FFFFFF"/>
                 </a:solidFill>
-                <a:latin typeface="Calibri" pitchFamily="34" charset="0"/>
-                <a:ea typeface="Calibri" pitchFamily="34" charset="-122"/>
-                <a:cs typeface="Calibri" pitchFamily="34" charset="-120"/>
+                <a:latin typeface="Adobe Clean" pitchFamily="34" charset="0"/>
+                <a:ea typeface="Adobe Clean" pitchFamily="34" charset="-122"/>
+                <a:cs typeface="Adobe Clean" pitchFamily="34" charset="-120"/>
               </a:rPr>
               <a:t>Data Layer</a:t>
             </a:r>
@@ -15486,11 +15486,11 @@
             <a:r>
               <a:rPr lang="en-US" sz="1050" dirty="0">
                 <a:solidFill>
-                  <a:srgbClr val="D9CFC9"/>
-                </a:solidFill>
-                <a:latin typeface="Calibri" pitchFamily="34" charset="0"/>
-                <a:ea typeface="Calibri" pitchFamily="34" charset="-122"/>
-                <a:cs typeface="Calibri" pitchFamily="34" charset="-120"/>
+                  <a:srgbClr val="CFCFCF"/>
+                </a:solidFill>
+                <a:latin typeface="Adobe Clean" pitchFamily="34" charset="0"/>
+                <a:ea typeface="Adobe Clean" pitchFamily="34" charset="-122"/>
+                <a:cs typeface="Adobe Clean" pitchFamily="34" charset="-120"/>
               </a:rPr>
               <a:t>adobeDataLayer.push</a:t>
             </a:r>
@@ -15525,7 +15525,7 @@
             <a:r>
               <a:rPr lang="en-US" sz="1600" b="1" dirty="0">
                 <a:solidFill>
-                  <a:srgbClr val="FF5722"/>
+                  <a:srgbClr val="EB1000"/>
                 </a:solidFill>
               </a:rPr>
               <a:t>▸</a:t>
@@ -15551,7 +15551,7 @@
             </a:avLst>
           </a:prstGeom>
           <a:solidFill>
-            <a:srgbClr val="2B2320"/>
+            <a:srgbClr val="1F1F1F"/>
           </a:solidFill>
           <a:ln/>
         </p:spPr>
@@ -15621,9 +15621,9 @@
                 <a:solidFill>
                   <a:srgbClr val="FFFFFF"/>
                 </a:solidFill>
-                <a:latin typeface="Calibri" pitchFamily="34" charset="0"/>
-                <a:ea typeface="Calibri" pitchFamily="34" charset="-122"/>
-                <a:cs typeface="Calibri" pitchFamily="34" charset="-120"/>
+                <a:latin typeface="Adobe Clean" pitchFamily="34" charset="0"/>
+                <a:ea typeface="Adobe Clean" pitchFamily="34" charset="-122"/>
+                <a:cs typeface="Adobe Clean" pitchFamily="34" charset="-120"/>
               </a:rPr>
               <a:t>Tags (Launch)</a:t>
             </a:r>
@@ -15658,11 +15658,11 @@
             <a:r>
               <a:rPr lang="en-US" sz="1050" dirty="0">
                 <a:solidFill>
-                  <a:srgbClr val="D9CFC9"/>
-                </a:solidFill>
-                <a:latin typeface="Calibri" pitchFamily="34" charset="0"/>
-                <a:ea typeface="Calibri" pitchFamily="34" charset="-122"/>
-                <a:cs typeface="Calibri" pitchFamily="34" charset="-120"/>
+                  <a:srgbClr val="CFCFCF"/>
+                </a:solidFill>
+                <a:latin typeface="Adobe Clean" pitchFamily="34" charset="0"/>
+                <a:ea typeface="Adobe Clean" pitchFamily="34" charset="-122"/>
+                <a:cs typeface="Adobe Clean" pitchFamily="34" charset="-120"/>
               </a:rPr>
               <a:t>Rules + Data Elements</a:t>
             </a:r>
@@ -15697,7 +15697,7 @@
             <a:r>
               <a:rPr lang="en-US" sz="1600" b="1" dirty="0">
                 <a:solidFill>
-                  <a:srgbClr val="FF5722"/>
+                  <a:srgbClr val="EB1000"/>
                 </a:solidFill>
               </a:rPr>
               <a:t>▸</a:t>
@@ -15723,7 +15723,7 @@
             </a:avLst>
           </a:prstGeom>
           <a:solidFill>
-            <a:srgbClr val="2B2320"/>
+            <a:srgbClr val="1F1F1F"/>
           </a:solidFill>
           <a:ln/>
         </p:spPr>
@@ -15793,9 +15793,9 @@
                 <a:solidFill>
                   <a:srgbClr val="FFFFFF"/>
                 </a:solidFill>
-                <a:latin typeface="Calibri" pitchFamily="34" charset="0"/>
-                <a:ea typeface="Calibri" pitchFamily="34" charset="-122"/>
-                <a:cs typeface="Calibri" pitchFamily="34" charset="-120"/>
+                <a:latin typeface="Adobe Clean" pitchFamily="34" charset="0"/>
+                <a:ea typeface="Adobe Clean" pitchFamily="34" charset="-122"/>
+                <a:cs typeface="Adobe Clean" pitchFamily="34" charset="-120"/>
               </a:rPr>
               <a:t>Web SDK</a:t>
             </a:r>
@@ -15830,11 +15830,11 @@
             <a:r>
               <a:rPr lang="en-US" sz="1050" dirty="0">
                 <a:solidFill>
-                  <a:srgbClr val="D9CFC9"/>
-                </a:solidFill>
-                <a:latin typeface="Calibri" pitchFamily="34" charset="0"/>
-                <a:ea typeface="Calibri" pitchFamily="34" charset="-122"/>
-                <a:cs typeface="Calibri" pitchFamily="34" charset="-120"/>
+                  <a:srgbClr val="CFCFCF"/>
+                </a:solidFill>
+                <a:latin typeface="Adobe Clean" pitchFamily="34" charset="0"/>
+                <a:ea typeface="Adobe Clean" pitchFamily="34" charset="-122"/>
+                <a:cs typeface="Adobe Clean" pitchFamily="34" charset="-120"/>
               </a:rPr>
               <a:t>sendEvent (XDM)</a:t>
             </a:r>
@@ -15869,7 +15869,7 @@
             <a:r>
               <a:rPr lang="en-US" sz="1600" b="1" dirty="0">
                 <a:solidFill>
-                  <a:srgbClr val="FF5722"/>
+                  <a:srgbClr val="EB1000"/>
                 </a:solidFill>
               </a:rPr>
               <a:t>▸</a:t>
@@ -15895,7 +15895,7 @@
             </a:avLst>
           </a:prstGeom>
           <a:solidFill>
-            <a:srgbClr val="2B2320"/>
+            <a:srgbClr val="1F1F1F"/>
           </a:solidFill>
           <a:ln/>
         </p:spPr>
@@ -15965,9 +15965,9 @@
                 <a:solidFill>
                   <a:srgbClr val="FFFFFF"/>
                 </a:solidFill>
-                <a:latin typeface="Calibri" pitchFamily="34" charset="0"/>
-                <a:ea typeface="Calibri" pitchFamily="34" charset="-122"/>
-                <a:cs typeface="Calibri" pitchFamily="34" charset="-120"/>
+                <a:latin typeface="Adobe Clean" pitchFamily="34" charset="0"/>
+                <a:ea typeface="Adobe Clean" pitchFamily="34" charset="-122"/>
+                <a:cs typeface="Adobe Clean" pitchFamily="34" charset="-120"/>
               </a:rPr>
               <a:t>Datastream</a:t>
             </a:r>
@@ -16002,11 +16002,11 @@
             <a:r>
               <a:rPr lang="en-US" sz="1050" dirty="0">
                 <a:solidFill>
-                  <a:srgbClr val="D9CFC9"/>
-                </a:solidFill>
-                <a:latin typeface="Calibri" pitchFamily="34" charset="0"/>
-                <a:ea typeface="Calibri" pitchFamily="34" charset="-122"/>
-                <a:cs typeface="Calibri" pitchFamily="34" charset="-120"/>
+                  <a:srgbClr val="CFCFCF"/>
+                </a:solidFill>
+                <a:latin typeface="Adobe Clean" pitchFamily="34" charset="0"/>
+                <a:ea typeface="Adobe Clean" pitchFamily="34" charset="-122"/>
+                <a:cs typeface="Adobe Clean" pitchFamily="34" charset="-120"/>
               </a:rPr>
               <a:t>Edge routing</a:t>
             </a:r>
@@ -16041,7 +16041,7 @@
             <a:r>
               <a:rPr lang="en-US" sz="1600" b="1" dirty="0">
                 <a:solidFill>
-                  <a:srgbClr val="FF5722"/>
+                  <a:srgbClr val="EB1000"/>
                 </a:solidFill>
               </a:rPr>
               <a:t>▸</a:t>
@@ -16067,7 +16067,7 @@
             </a:avLst>
           </a:prstGeom>
           <a:solidFill>
-            <a:srgbClr val="FF5722"/>
+            <a:srgbClr val="EB1000"/>
           </a:solidFill>
           <a:ln/>
         </p:spPr>
@@ -16137,9 +16137,9 @@
                 <a:solidFill>
                   <a:srgbClr val="FFFFFF"/>
                 </a:solidFill>
-                <a:latin typeface="Calibri" pitchFamily="34" charset="0"/>
-                <a:ea typeface="Calibri" pitchFamily="34" charset="-122"/>
-                <a:cs typeface="Calibri" pitchFamily="34" charset="-120"/>
+                <a:latin typeface="Adobe Clean" pitchFamily="34" charset="0"/>
+                <a:ea typeface="Adobe Clean" pitchFamily="34" charset="-122"/>
+                <a:cs typeface="Adobe Clean" pitchFamily="34" charset="-120"/>
               </a:rPr>
               <a:t>AEP</a:t>
             </a:r>
@@ -16174,11 +16174,11 @@
             <a:r>
               <a:rPr lang="en-US" sz="1050" dirty="0">
                 <a:solidFill>
-                  <a:srgbClr val="D9CFC9"/>
-                </a:solidFill>
-                <a:latin typeface="Calibri" pitchFamily="34" charset="0"/>
-                <a:ea typeface="Calibri" pitchFamily="34" charset="-122"/>
-                <a:cs typeface="Calibri" pitchFamily="34" charset="-120"/>
+                  <a:srgbClr val="CFCFCF"/>
+                </a:solidFill>
+                <a:latin typeface="Adobe Clean" pitchFamily="34" charset="0"/>
+                <a:ea typeface="Adobe Clean" pitchFamily="34" charset="-122"/>
+                <a:cs typeface="Adobe Clean" pitchFamily="34" charset="-120"/>
               </a:rPr>
               <a:t>Events + Profile</a:t>
             </a:r>
@@ -16213,11 +16213,11 @@
             <a:r>
               <a:rPr lang="en-US" sz="1500" i="1" dirty="0">
                 <a:solidFill>
-                  <a:srgbClr val="2B2320"/>
-                </a:solidFill>
-                <a:latin typeface="Calibri" pitchFamily="34" charset="0"/>
-                <a:ea typeface="Calibri" pitchFamily="34" charset="-122"/>
-                <a:cs typeface="Calibri" pitchFamily="34" charset="-120"/>
+                  <a:srgbClr val="1F1F1F"/>
+                </a:solidFill>
+                <a:latin typeface="Adobe Clean" pitchFamily="34" charset="0"/>
+                <a:ea typeface="Adobe Clean" pitchFamily="34" charset="-122"/>
+                <a:cs typeface="Adobe Clean" pitchFamily="34" charset="-120"/>
               </a:rPr>
               <a:t>The website only writes to the data layer. Everything downstream is configured in Adobe — no code changes to add or fix tracking.</a:t>
             </a:r>
@@ -16252,11 +16252,11 @@
             <a:r>
               <a:rPr lang="en-US" sz="1100" dirty="0">
                 <a:solidFill>
-                  <a:srgbClr val="7D726C"/>
-                </a:solidFill>
-                <a:latin typeface="Calibri" pitchFamily="34" charset="0"/>
-                <a:ea typeface="Calibri" pitchFamily="34" charset="-122"/>
-                <a:cs typeface="Calibri" pitchFamily="34" charset="-120"/>
+                  <a:srgbClr val="6B6B6B"/>
+                </a:solidFill>
+                <a:latin typeface="Adobe Clean" pitchFamily="34" charset="0"/>
+                <a:ea typeface="Adobe Clean" pitchFamily="34" charset="-122"/>
+                <a:cs typeface="Adobe Clean" pitchFamily="34" charset="-120"/>
               </a:rPr>
               <a:t>This is the single most important slide — keep coming back to it.</a:t>
             </a:r>
@@ -16323,11 +16323,11 @@
             <a:r>
               <a:rPr lang="en-US" sz="1250" b="1" spc="200" kern="0" dirty="0">
                 <a:solidFill>
-                  <a:srgbClr val="FF5722"/>
-                </a:solidFill>
-                <a:latin typeface="Calibri" pitchFamily="34" charset="0"/>
-                <a:ea typeface="Calibri" pitchFamily="34" charset="-122"/>
-                <a:cs typeface="Calibri" pitchFamily="34" charset="-120"/>
+                  <a:srgbClr val="EB1000"/>
+                </a:solidFill>
+                <a:latin typeface="Adobe Clean" pitchFamily="34" charset="0"/>
+                <a:ea typeface="Adobe Clean" pitchFamily="34" charset="-122"/>
+                <a:cs typeface="Adobe Clean" pitchFamily="34" charset="-120"/>
               </a:rPr>
               <a:t>KEY CONCEPTS</a:t>
             </a:r>
@@ -16362,11 +16362,11 @@
             <a:r>
               <a:rPr lang="en-US" sz="3200" b="1" dirty="0">
                 <a:solidFill>
-                  <a:srgbClr val="2B2320"/>
-                </a:solidFill>
-                <a:latin typeface="Cambria" pitchFamily="34" charset="0"/>
-                <a:ea typeface="Cambria" pitchFamily="34" charset="-122"/>
-                <a:cs typeface="Cambria" pitchFamily="34" charset="-120"/>
+                  <a:srgbClr val="1F1F1F"/>
+                </a:solidFill>
+                <a:latin typeface="Adobe Clean" pitchFamily="34" charset="0"/>
+                <a:ea typeface="Adobe Clean" pitchFamily="34" charset="-122"/>
+                <a:cs typeface="Adobe Clean" pitchFamily="34" charset="-120"/>
               </a:rPr>
               <a:t>The vocabulary in one place</a:t>
             </a:r>
@@ -16395,7 +16395,7 @@
           </a:solidFill>
           <a:ln w="12700">
             <a:solidFill>
-              <a:srgbClr val="E7DED8"/>
+              <a:srgbClr val="E3E3E3"/>
             </a:solidFill>
             <a:prstDash val="solid"/>
           </a:ln>
@@ -16403,14 +16403,34 @@
       </p:sp>
       <p:sp>
         <p:nvSpPr>
-          <p:cNvPr id="5" name="Text 3"/>
-          <p:cNvSpPr txBox="1"/>
-          <p:nvPr/>
-        </p:nvSpPr>
-        <p:spPr>
-          <a:xfrm>
-            <a:off x="777240" y="1810512"/>
-            <a:ext cx="4905756" cy="320040"/>
+          <p:cNvPr id="5" name="Shape 3"/>
+          <p:cNvSpPr/>
+          <p:nvPr/>
+        </p:nvSpPr>
+        <p:spPr>
+          <a:xfrm>
+            <a:off x="777240" y="1874520"/>
+            <a:ext cx="128016" cy="128016"/>
+          </a:xfrm>
+          <a:prstGeom prst="ellipse">
+            <a:avLst/>
+          </a:prstGeom>
+          <a:solidFill>
+            <a:srgbClr val="B10C00"/>
+          </a:solidFill>
+          <a:ln/>
+        </p:spPr>
+      </p:sp>
+      <p:sp>
+        <p:nvSpPr>
+          <p:cNvPr id="6" name="Text 4"/>
+          <p:cNvSpPr txBox="1"/>
+          <p:nvPr/>
+        </p:nvSpPr>
+        <p:spPr>
+          <a:xfrm>
+            <a:off x="1005840" y="1810512"/>
+            <a:ext cx="4722876" cy="320040"/>
           </a:xfrm>
           <a:prstGeom prst="rect">
             <a:avLst/>
@@ -16428,11 +16448,11 @@
             <a:r>
               <a:rPr lang="en-US" sz="1500" b="1" dirty="0">
                 <a:solidFill>
-                  <a:srgbClr val="E64A19"/>
-                </a:solidFill>
-                <a:latin typeface="Calibri" pitchFamily="34" charset="0"/>
-                <a:ea typeface="Calibri" pitchFamily="34" charset="-122"/>
-                <a:cs typeface="Calibri" pitchFamily="34" charset="-120"/>
+                  <a:srgbClr val="B10C00"/>
+                </a:solidFill>
+                <a:latin typeface="Adobe Clean" pitchFamily="34" charset="0"/>
+                <a:ea typeface="Adobe Clean" pitchFamily="34" charset="-122"/>
+                <a:cs typeface="Adobe Clean" pitchFamily="34" charset="-120"/>
               </a:rPr>
               <a:t>Data Layer</a:t>
             </a:r>
@@ -16442,7 +16462,7 @@
       </p:sp>
       <p:sp>
         <p:nvSpPr>
-          <p:cNvPr id="6" name="Text 4"/>
+          <p:cNvPr id="7" name="Text 5"/>
           <p:cNvSpPr txBox="1"/>
           <p:nvPr/>
         </p:nvSpPr>
@@ -16467,11 +16487,11 @@
             <a:r>
               <a:rPr lang="en-US" sz="1250" dirty="0">
                 <a:solidFill>
-                  <a:srgbClr val="7D726C"/>
-                </a:solidFill>
-                <a:latin typeface="Calibri" pitchFamily="34" charset="0"/>
-                <a:ea typeface="Calibri" pitchFamily="34" charset="-122"/>
-                <a:cs typeface="Calibri" pitchFamily="34" charset="-120"/>
+                  <a:srgbClr val="6B6B6B"/>
+                </a:solidFill>
+                <a:latin typeface="Adobe Clean" pitchFamily="34" charset="0"/>
+                <a:ea typeface="Adobe Clean" pitchFamily="34" charset="-122"/>
+                <a:cs typeface="Adobe Clean" pitchFamily="34" charset="-120"/>
               </a:rPr>
               <a:t>A JS object (adobeDataLayer) the site pushes events into.</a:t>
             </a:r>
@@ -16481,7 +16501,7 @@
       </p:sp>
       <p:sp>
         <p:nvSpPr>
-          <p:cNvPr id="7" name="Shape 5"/>
+          <p:cNvPr id="8" name="Shape 6"/>
           <p:cNvSpPr/>
           <p:nvPr/>
         </p:nvSpPr>
@@ -16500,7 +16520,7 @@
           </a:solidFill>
           <a:ln w="12700">
             <a:solidFill>
-              <a:srgbClr val="E7DED8"/>
+              <a:srgbClr val="E3E3E3"/>
             </a:solidFill>
             <a:prstDash val="solid"/>
           </a:ln>
@@ -16508,14 +16528,34 @@
       </p:sp>
       <p:sp>
         <p:nvSpPr>
-          <p:cNvPr id="8" name="Text 6"/>
-          <p:cNvSpPr txBox="1"/>
-          <p:nvPr/>
-        </p:nvSpPr>
-        <p:spPr>
-          <a:xfrm>
-            <a:off x="6505956" y="1810512"/>
-            <a:ext cx="4905756" cy="320040"/>
+          <p:cNvPr id="9" name="Shape 7"/>
+          <p:cNvSpPr/>
+          <p:nvPr/>
+        </p:nvSpPr>
+        <p:spPr>
+          <a:xfrm>
+            <a:off x="6505956" y="1874520"/>
+            <a:ext cx="128016" cy="128016"/>
+          </a:xfrm>
+          <a:prstGeom prst="ellipse">
+            <a:avLst/>
+          </a:prstGeom>
+          <a:solidFill>
+            <a:srgbClr val="0AA35B"/>
+          </a:solidFill>
+          <a:ln/>
+        </p:spPr>
+      </p:sp>
+      <p:sp>
+        <p:nvSpPr>
+          <p:cNvPr id="10" name="Text 8"/>
+          <p:cNvSpPr txBox="1"/>
+          <p:nvPr/>
+        </p:nvSpPr>
+        <p:spPr>
+          <a:xfrm>
+            <a:off x="6734556" y="1810512"/>
+            <a:ext cx="4722876" cy="320040"/>
           </a:xfrm>
           <a:prstGeom prst="rect">
             <a:avLst/>
@@ -16533,11 +16573,11 @@
             <a:r>
               <a:rPr lang="en-US" sz="1500" b="1" dirty="0">
                 <a:solidFill>
-                  <a:srgbClr val="E64A19"/>
-                </a:solidFill>
-                <a:latin typeface="Calibri" pitchFamily="34" charset="0"/>
-                <a:ea typeface="Calibri" pitchFamily="34" charset="-122"/>
-                <a:cs typeface="Calibri" pitchFamily="34" charset="-120"/>
+                  <a:srgbClr val="0AA35B"/>
+                </a:solidFill>
+                <a:latin typeface="Adobe Clean" pitchFamily="34" charset="0"/>
+                <a:ea typeface="Adobe Clean" pitchFamily="34" charset="-122"/>
+                <a:cs typeface="Adobe Clean" pitchFamily="34" charset="-120"/>
               </a:rPr>
               <a:t>Extension</a:t>
             </a:r>
@@ -16547,7 +16587,7 @@
       </p:sp>
       <p:sp>
         <p:nvSpPr>
-          <p:cNvPr id="9" name="Text 7"/>
+          <p:cNvPr id="11" name="Text 9"/>
           <p:cNvSpPr txBox="1"/>
           <p:nvPr/>
         </p:nvSpPr>
@@ -16572,11 +16612,11 @@
             <a:r>
               <a:rPr lang="en-US" sz="1250" dirty="0">
                 <a:solidFill>
-                  <a:srgbClr val="7D726C"/>
-                </a:solidFill>
-                <a:latin typeface="Calibri" pitchFamily="34" charset="0"/>
-                <a:ea typeface="Calibri" pitchFamily="34" charset="-122"/>
-                <a:cs typeface="Calibri" pitchFamily="34" charset="-120"/>
+                  <a:srgbClr val="6B6B6B"/>
+                </a:solidFill>
+                <a:latin typeface="Adobe Clean" pitchFamily="34" charset="0"/>
+                <a:ea typeface="Adobe Clean" pitchFamily="34" charset="-122"/>
+                <a:cs typeface="Adobe Clean" pitchFamily="34" charset="-120"/>
               </a:rPr>
               <a:t>A plug-in in Tags (e.g. Web SDK, Client Data Layer).</a:t>
             </a:r>
@@ -16586,7 +16626,7 @@
       </p:sp>
       <p:sp>
         <p:nvSpPr>
-          <p:cNvPr id="10" name="Shape 8"/>
+          <p:cNvPr id="12" name="Shape 10"/>
           <p:cNvSpPr/>
           <p:nvPr/>
         </p:nvSpPr>
@@ -16605,7 +16645,7 @@
           </a:solidFill>
           <a:ln w="12700">
             <a:solidFill>
-              <a:srgbClr val="E7DED8"/>
+              <a:srgbClr val="E3E3E3"/>
             </a:solidFill>
             <a:prstDash val="solid"/>
           </a:ln>
@@ -16613,14 +16653,34 @@
       </p:sp>
       <p:sp>
         <p:nvSpPr>
-          <p:cNvPr id="11" name="Text 9"/>
-          <p:cNvSpPr txBox="1"/>
-          <p:nvPr/>
-        </p:nvSpPr>
-        <p:spPr>
-          <a:xfrm>
-            <a:off x="777240" y="2889504"/>
-            <a:ext cx="4905756" cy="320040"/>
+          <p:cNvPr id="13" name="Shape 11"/>
+          <p:cNvSpPr/>
+          <p:nvPr/>
+        </p:nvSpPr>
+        <p:spPr>
+          <a:xfrm>
+            <a:off x="777240" y="2953512"/>
+            <a:ext cx="128016" cy="128016"/>
+          </a:xfrm>
+          <a:prstGeom prst="ellipse">
+            <a:avLst/>
+          </a:prstGeom>
+          <a:solidFill>
+            <a:srgbClr val="3A63F9"/>
+          </a:solidFill>
+          <a:ln/>
+        </p:spPr>
+      </p:sp>
+      <p:sp>
+        <p:nvSpPr>
+          <p:cNvPr id="14" name="Text 12"/>
+          <p:cNvSpPr txBox="1"/>
+          <p:nvPr/>
+        </p:nvSpPr>
+        <p:spPr>
+          <a:xfrm>
+            <a:off x="1005840" y="2889504"/>
+            <a:ext cx="4722876" cy="320040"/>
           </a:xfrm>
           <a:prstGeom prst="rect">
             <a:avLst/>
@@ -16638,11 +16698,11 @@
             <a:r>
               <a:rPr lang="en-US" sz="1500" b="1" dirty="0">
                 <a:solidFill>
-                  <a:srgbClr val="E64A19"/>
-                </a:solidFill>
-                <a:latin typeface="Calibri" pitchFamily="34" charset="0"/>
-                <a:ea typeface="Calibri" pitchFamily="34" charset="-122"/>
-                <a:cs typeface="Calibri" pitchFamily="34" charset="-120"/>
+                  <a:srgbClr val="3A63F9"/>
+                </a:solidFill>
+                <a:latin typeface="Adobe Clean" pitchFamily="34" charset="0"/>
+                <a:ea typeface="Adobe Clean" pitchFamily="34" charset="-122"/>
+                <a:cs typeface="Adobe Clean" pitchFamily="34" charset="-120"/>
               </a:rPr>
               <a:t>Data Element</a:t>
             </a:r>
@@ -16652,7 +16712,7 @@
       </p:sp>
       <p:sp>
         <p:nvSpPr>
-          <p:cNvPr id="12" name="Text 10"/>
+          <p:cNvPr id="15" name="Text 13"/>
           <p:cNvSpPr txBox="1"/>
           <p:nvPr/>
         </p:nvSpPr>
@@ -16677,11 +16737,11 @@
             <a:r>
               <a:rPr lang="en-US" sz="1250" dirty="0">
                 <a:solidFill>
-                  <a:srgbClr val="7D726C"/>
-                </a:solidFill>
-                <a:latin typeface="Calibri" pitchFamily="34" charset="0"/>
-                <a:ea typeface="Calibri" pitchFamily="34" charset="-122"/>
-                <a:cs typeface="Calibri" pitchFamily="34" charset="-120"/>
+                  <a:srgbClr val="6B6B6B"/>
+                </a:solidFill>
+                <a:latin typeface="Adobe Clean" pitchFamily="34" charset="0"/>
+                <a:ea typeface="Adobe Clean" pitchFamily="34" charset="-122"/>
+                <a:cs typeface="Adobe Clean" pitchFamily="34" charset="-120"/>
               </a:rPr>
               <a:t>A reusable "variable" that reads a value (from the data layer).</a:t>
             </a:r>
@@ -16691,7 +16751,7 @@
       </p:sp>
       <p:sp>
         <p:nvSpPr>
-          <p:cNvPr id="13" name="Shape 11"/>
+          <p:cNvPr id="16" name="Shape 14"/>
           <p:cNvSpPr/>
           <p:nvPr/>
         </p:nvSpPr>
@@ -16710,7 +16770,7 @@
           </a:solidFill>
           <a:ln w="12700">
             <a:solidFill>
-              <a:srgbClr val="E7DED8"/>
+              <a:srgbClr val="E3E3E3"/>
             </a:solidFill>
             <a:prstDash val="solid"/>
           </a:ln>
@@ -16718,14 +16778,34 @@
       </p:sp>
       <p:sp>
         <p:nvSpPr>
-          <p:cNvPr id="14" name="Text 12"/>
-          <p:cNvSpPr txBox="1"/>
-          <p:nvPr/>
-        </p:nvSpPr>
-        <p:spPr>
-          <a:xfrm>
-            <a:off x="6505956" y="2889504"/>
-            <a:ext cx="4905756" cy="320040"/>
+          <p:cNvPr id="17" name="Shape 15"/>
+          <p:cNvSpPr/>
+          <p:nvPr/>
+        </p:nvSpPr>
+        <p:spPr>
+          <a:xfrm>
+            <a:off x="6505956" y="2953512"/>
+            <a:ext cx="128016" cy="128016"/>
+          </a:xfrm>
+          <a:prstGeom prst="ellipse">
+            <a:avLst/>
+          </a:prstGeom>
+          <a:solidFill>
+            <a:srgbClr val="C67F00"/>
+          </a:solidFill>
+          <a:ln/>
+        </p:spPr>
+      </p:sp>
+      <p:sp>
+        <p:nvSpPr>
+          <p:cNvPr id="18" name="Text 16"/>
+          <p:cNvSpPr txBox="1"/>
+          <p:nvPr/>
+        </p:nvSpPr>
+        <p:spPr>
+          <a:xfrm>
+            <a:off x="6734556" y="2889504"/>
+            <a:ext cx="4722876" cy="320040"/>
           </a:xfrm>
           <a:prstGeom prst="rect">
             <a:avLst/>
@@ -16743,11 +16823,11 @@
             <a:r>
               <a:rPr lang="en-US" sz="1500" b="1" dirty="0">
                 <a:solidFill>
-                  <a:srgbClr val="E64A19"/>
-                </a:solidFill>
-                <a:latin typeface="Calibri" pitchFamily="34" charset="0"/>
-                <a:ea typeface="Calibri" pitchFamily="34" charset="-122"/>
-                <a:cs typeface="Calibri" pitchFamily="34" charset="-120"/>
+                  <a:srgbClr val="C67F00"/>
+                </a:solidFill>
+                <a:latin typeface="Adobe Clean" pitchFamily="34" charset="0"/>
+                <a:ea typeface="Adobe Clean" pitchFamily="34" charset="-122"/>
+                <a:cs typeface="Adobe Clean" pitchFamily="34" charset="-120"/>
               </a:rPr>
               <a:t>Rule</a:t>
             </a:r>
@@ -16757,7 +16837,7 @@
       </p:sp>
       <p:sp>
         <p:nvSpPr>
-          <p:cNvPr id="15" name="Text 13"/>
+          <p:cNvPr id="19" name="Text 17"/>
           <p:cNvSpPr txBox="1"/>
           <p:nvPr/>
         </p:nvSpPr>
@@ -16782,11 +16862,11 @@
             <a:r>
               <a:rPr lang="en-US" sz="1250" dirty="0">
                 <a:solidFill>
-                  <a:srgbClr val="7D726C"/>
-                </a:solidFill>
-                <a:latin typeface="Calibri" pitchFamily="34" charset="0"/>
-                <a:ea typeface="Calibri" pitchFamily="34" charset="-122"/>
-                <a:cs typeface="Calibri" pitchFamily="34" charset="-120"/>
+                  <a:srgbClr val="6B6B6B"/>
+                </a:solidFill>
+                <a:latin typeface="Adobe Clean" pitchFamily="34" charset="0"/>
+                <a:ea typeface="Adobe Clean" pitchFamily="34" charset="-122"/>
+                <a:cs typeface="Adobe Clean" pitchFamily="34" charset="-120"/>
               </a:rPr>
               <a:t>When X happens → do Y (e.g. on "purchase" → send event).</a:t>
             </a:r>
@@ -16796,7 +16876,7 @@
       </p:sp>
       <p:sp>
         <p:nvSpPr>
-          <p:cNvPr id="16" name="Shape 14"/>
+          <p:cNvPr id="20" name="Shape 18"/>
           <p:cNvSpPr/>
           <p:nvPr/>
         </p:nvSpPr>
@@ -16815,7 +16895,7 @@
           </a:solidFill>
           <a:ln w="12700">
             <a:solidFill>
-              <a:srgbClr val="E7DED8"/>
+              <a:srgbClr val="E3E3E3"/>
             </a:solidFill>
             <a:prstDash val="solid"/>
           </a:ln>
@@ -16823,14 +16903,34 @@
       </p:sp>
       <p:sp>
         <p:nvSpPr>
-          <p:cNvPr id="17" name="Text 15"/>
-          <p:cNvSpPr txBox="1"/>
-          <p:nvPr/>
-        </p:nvSpPr>
-        <p:spPr>
-          <a:xfrm>
-            <a:off x="777240" y="3968496"/>
-            <a:ext cx="4905756" cy="320040"/>
+          <p:cNvPr id="21" name="Shape 19"/>
+          <p:cNvSpPr/>
+          <p:nvPr/>
+        </p:nvSpPr>
+        <p:spPr>
+          <a:xfrm>
+            <a:off x="777240" y="4032504"/>
+            <a:ext cx="128016" cy="128016"/>
+          </a:xfrm>
+          <a:prstGeom prst="ellipse">
+            <a:avLst/>
+          </a:prstGeom>
+          <a:solidFill>
+            <a:srgbClr val="C2149B"/>
+          </a:solidFill>
+          <a:ln/>
+        </p:spPr>
+      </p:sp>
+      <p:sp>
+        <p:nvSpPr>
+          <p:cNvPr id="22" name="Text 20"/>
+          <p:cNvSpPr txBox="1"/>
+          <p:nvPr/>
+        </p:nvSpPr>
+        <p:spPr>
+          <a:xfrm>
+            <a:off x="1005840" y="3968496"/>
+            <a:ext cx="4722876" cy="320040"/>
           </a:xfrm>
           <a:prstGeom prst="rect">
             <a:avLst/>
@@ -16848,11 +16948,11 @@
             <a:r>
               <a:rPr lang="en-US" sz="1500" b="1" dirty="0">
                 <a:solidFill>
-                  <a:srgbClr val="E64A19"/>
-                </a:solidFill>
-                <a:latin typeface="Calibri" pitchFamily="34" charset="0"/>
-                <a:ea typeface="Calibri" pitchFamily="34" charset="-122"/>
-                <a:cs typeface="Calibri" pitchFamily="34" charset="-120"/>
+                  <a:srgbClr val="C2149B"/>
+                </a:solidFill>
+                <a:latin typeface="Adobe Clean" pitchFamily="34" charset="0"/>
+                <a:ea typeface="Adobe Clean" pitchFamily="34" charset="-122"/>
+                <a:cs typeface="Adobe Clean" pitchFamily="34" charset="-120"/>
               </a:rPr>
               <a:t>Schema (XDM)</a:t>
             </a:r>
@@ -16862,7 +16962,7 @@
       </p:sp>
       <p:sp>
         <p:nvSpPr>
-          <p:cNvPr id="18" name="Text 16"/>
+          <p:cNvPr id="23" name="Text 21"/>
           <p:cNvSpPr txBox="1"/>
           <p:nvPr/>
         </p:nvSpPr>
@@ -16887,11 +16987,11 @@
             <a:r>
               <a:rPr lang="en-US" sz="1250" dirty="0">
                 <a:solidFill>
-                  <a:srgbClr val="7D726C"/>
-                </a:solidFill>
-                <a:latin typeface="Calibri" pitchFamily="34" charset="0"/>
-                <a:ea typeface="Calibri" pitchFamily="34" charset="-122"/>
-                <a:cs typeface="Calibri" pitchFamily="34" charset="-120"/>
+                  <a:srgbClr val="6B6B6B"/>
+                </a:solidFill>
+                <a:latin typeface="Adobe Clean" pitchFamily="34" charset="0"/>
+                <a:ea typeface="Adobe Clean" pitchFamily="34" charset="-122"/>
+                <a:cs typeface="Adobe Clean" pitchFamily="34" charset="-120"/>
               </a:rPr>
               <a:t>The agreed structure/shape of the data in AEP.</a:t>
             </a:r>
@@ -16901,7 +17001,7 @@
       </p:sp>
       <p:sp>
         <p:nvSpPr>
-          <p:cNvPr id="19" name="Shape 17"/>
+          <p:cNvPr id="24" name="Shape 22"/>
           <p:cNvSpPr/>
           <p:nvPr/>
         </p:nvSpPr>
@@ -16920,7 +17020,7 @@
           </a:solidFill>
           <a:ln w="12700">
             <a:solidFill>
-              <a:srgbClr val="E7DED8"/>
+              <a:srgbClr val="E3E3E3"/>
             </a:solidFill>
             <a:prstDash val="solid"/>
           </a:ln>
@@ -16928,14 +17028,34 @@
       </p:sp>
       <p:sp>
         <p:nvSpPr>
-          <p:cNvPr id="20" name="Text 18"/>
-          <p:cNvSpPr txBox="1"/>
-          <p:nvPr/>
-        </p:nvSpPr>
-        <p:spPr>
-          <a:xfrm>
-            <a:off x="6505956" y="3968496"/>
-            <a:ext cx="4905756" cy="320040"/>
+          <p:cNvPr id="25" name="Shape 23"/>
+          <p:cNvSpPr/>
+          <p:nvPr/>
+        </p:nvSpPr>
+        <p:spPr>
+          <a:xfrm>
+            <a:off x="6505956" y="4032504"/>
+            <a:ext cx="128016" cy="128016"/>
+          </a:xfrm>
+          <a:prstGeom prst="ellipse">
+            <a:avLst/>
+          </a:prstGeom>
+          <a:solidFill>
+            <a:srgbClr val="0AA35B"/>
+          </a:solidFill>
+          <a:ln/>
+        </p:spPr>
+      </p:sp>
+      <p:sp>
+        <p:nvSpPr>
+          <p:cNvPr id="26" name="Text 24"/>
+          <p:cNvSpPr txBox="1"/>
+          <p:nvPr/>
+        </p:nvSpPr>
+        <p:spPr>
+          <a:xfrm>
+            <a:off x="6734556" y="3968496"/>
+            <a:ext cx="4722876" cy="320040"/>
           </a:xfrm>
           <a:prstGeom prst="rect">
             <a:avLst/>
@@ -16953,11 +17073,11 @@
             <a:r>
               <a:rPr lang="en-US" sz="1500" b="1" dirty="0">
                 <a:solidFill>
-                  <a:srgbClr val="E64A19"/>
-                </a:solidFill>
-                <a:latin typeface="Calibri" pitchFamily="34" charset="0"/>
-                <a:ea typeface="Calibri" pitchFamily="34" charset="-122"/>
-                <a:cs typeface="Calibri" pitchFamily="34" charset="-120"/>
+                  <a:srgbClr val="0AA35B"/>
+                </a:solidFill>
+                <a:latin typeface="Adobe Clean" pitchFamily="34" charset="0"/>
+                <a:ea typeface="Adobe Clean" pitchFamily="34" charset="-122"/>
+                <a:cs typeface="Adobe Clean" pitchFamily="34" charset="-120"/>
               </a:rPr>
               <a:t>Datastream</a:t>
             </a:r>
@@ -16967,7 +17087,7 @@
       </p:sp>
       <p:sp>
         <p:nvSpPr>
-          <p:cNvPr id="21" name="Text 19"/>
+          <p:cNvPr id="27" name="Text 25"/>
           <p:cNvSpPr txBox="1"/>
           <p:nvPr/>
         </p:nvSpPr>
@@ -16992,11 +17112,11 @@
             <a:r>
               <a:rPr lang="en-US" sz="1250" dirty="0">
                 <a:solidFill>
-                  <a:srgbClr val="7D726C"/>
-                </a:solidFill>
-                <a:latin typeface="Calibri" pitchFamily="34" charset="0"/>
-                <a:ea typeface="Calibri" pitchFamily="34" charset="-122"/>
-                <a:cs typeface="Calibri" pitchFamily="34" charset="-120"/>
+                  <a:srgbClr val="6B6B6B"/>
+                </a:solidFill>
+                <a:latin typeface="Adobe Clean" pitchFamily="34" charset="0"/>
+                <a:ea typeface="Adobe Clean" pitchFamily="34" charset="-122"/>
+                <a:cs typeface="Adobe Clean" pitchFamily="34" charset="-120"/>
               </a:rPr>
               <a:t>Server-side config that routes Edge data to AEP (and others).</a:t>
             </a:r>
@@ -17006,7 +17126,7 @@
       </p:sp>
       <p:sp>
         <p:nvSpPr>
-          <p:cNvPr id="22" name="Shape 20"/>
+          <p:cNvPr id="28" name="Shape 26"/>
           <p:cNvSpPr/>
           <p:nvPr/>
         </p:nvSpPr>
@@ -17025,7 +17145,7 @@
           </a:solidFill>
           <a:ln w="12700">
             <a:solidFill>
-              <a:srgbClr val="E7DED8"/>
+              <a:srgbClr val="E3E3E3"/>
             </a:solidFill>
             <a:prstDash val="solid"/>
           </a:ln>
@@ -17033,14 +17153,34 @@
       </p:sp>
       <p:sp>
         <p:nvSpPr>
-          <p:cNvPr id="23" name="Text 21"/>
-          <p:cNvSpPr txBox="1"/>
-          <p:nvPr/>
-        </p:nvSpPr>
-        <p:spPr>
-          <a:xfrm>
-            <a:off x="777240" y="5047488"/>
-            <a:ext cx="4905756" cy="320040"/>
+          <p:cNvPr id="29" name="Shape 27"/>
+          <p:cNvSpPr/>
+          <p:nvPr/>
+        </p:nvSpPr>
+        <p:spPr>
+          <a:xfrm>
+            <a:off x="777240" y="5111496"/>
+            <a:ext cx="128016" cy="128016"/>
+          </a:xfrm>
+          <a:prstGeom prst="ellipse">
+            <a:avLst/>
+          </a:prstGeom>
+          <a:solidFill>
+            <a:srgbClr val="3A63F9"/>
+          </a:solidFill>
+          <a:ln/>
+        </p:spPr>
+      </p:sp>
+      <p:sp>
+        <p:nvSpPr>
+          <p:cNvPr id="30" name="Text 28"/>
+          <p:cNvSpPr txBox="1"/>
+          <p:nvPr/>
+        </p:nvSpPr>
+        <p:spPr>
+          <a:xfrm>
+            <a:off x="1005840" y="5047488"/>
+            <a:ext cx="4722876" cy="320040"/>
           </a:xfrm>
           <a:prstGeom prst="rect">
             <a:avLst/>
@@ -17058,11 +17198,11 @@
             <a:r>
               <a:rPr lang="en-US" sz="1500" b="1" dirty="0">
                 <a:solidFill>
-                  <a:srgbClr val="E64A19"/>
-                </a:solidFill>
-                <a:latin typeface="Calibri" pitchFamily="34" charset="0"/>
-                <a:ea typeface="Calibri" pitchFamily="34" charset="-122"/>
-                <a:cs typeface="Calibri" pitchFamily="34" charset="-120"/>
+                  <a:srgbClr val="3A63F9"/>
+                </a:solidFill>
+                <a:latin typeface="Adobe Clean" pitchFamily="34" charset="0"/>
+                <a:ea typeface="Adobe Clean" pitchFamily="34" charset="-122"/>
+                <a:cs typeface="Adobe Clean" pitchFamily="34" charset="-120"/>
               </a:rPr>
               <a:t>Identity</a:t>
             </a:r>
@@ -17072,7 +17212,7 @@
       </p:sp>
       <p:sp>
         <p:nvSpPr>
-          <p:cNvPr id="24" name="Text 22"/>
+          <p:cNvPr id="31" name="Text 29"/>
           <p:cNvSpPr txBox="1"/>
           <p:nvPr/>
         </p:nvSpPr>
@@ -17097,11 +17237,11 @@
             <a:r>
               <a:rPr lang="en-US" sz="1250" dirty="0">
                 <a:solidFill>
-                  <a:srgbClr val="7D726C"/>
-                </a:solidFill>
-                <a:latin typeface="Calibri" pitchFamily="34" charset="0"/>
-                <a:ea typeface="Calibri" pitchFamily="34" charset="-122"/>
-                <a:cs typeface="Calibri" pitchFamily="34" charset="-120"/>
+                  <a:srgbClr val="6B6B6B"/>
+                </a:solidFill>
+                <a:latin typeface="Adobe Clean" pitchFamily="34" charset="0"/>
+                <a:ea typeface="Adobe Clean" pitchFamily="34" charset="-122"/>
+                <a:cs typeface="Adobe Clean" pitchFamily="34" charset="-120"/>
               </a:rPr>
               <a:t>Who the user is — ECID (anon) + Email (known).</a:t>
             </a:r>
@@ -17111,7 +17251,7 @@
       </p:sp>
       <p:sp>
         <p:nvSpPr>
-          <p:cNvPr id="25" name="Shape 23"/>
+          <p:cNvPr id="32" name="Shape 30"/>
           <p:cNvSpPr/>
           <p:nvPr/>
         </p:nvSpPr>
@@ -17130,7 +17270,7 @@
           </a:solidFill>
           <a:ln w="12700">
             <a:solidFill>
-              <a:srgbClr val="E7DED8"/>
+              <a:srgbClr val="E3E3E3"/>
             </a:solidFill>
             <a:prstDash val="solid"/>
           </a:ln>
@@ -17138,14 +17278,34 @@
       </p:sp>
       <p:sp>
         <p:nvSpPr>
-          <p:cNvPr id="26" name="Text 24"/>
-          <p:cNvSpPr txBox="1"/>
-          <p:nvPr/>
-        </p:nvSpPr>
-        <p:spPr>
-          <a:xfrm>
-            <a:off x="6505956" y="5047488"/>
-            <a:ext cx="4905756" cy="320040"/>
+          <p:cNvPr id="33" name="Shape 31"/>
+          <p:cNvSpPr/>
+          <p:nvPr/>
+        </p:nvSpPr>
+        <p:spPr>
+          <a:xfrm>
+            <a:off x="6505956" y="5111496"/>
+            <a:ext cx="128016" cy="128016"/>
+          </a:xfrm>
+          <a:prstGeom prst="ellipse">
+            <a:avLst/>
+          </a:prstGeom>
+          <a:solidFill>
+            <a:srgbClr val="B10C00"/>
+          </a:solidFill>
+          <a:ln/>
+        </p:spPr>
+      </p:sp>
+      <p:sp>
+        <p:nvSpPr>
+          <p:cNvPr id="34" name="Text 32"/>
+          <p:cNvSpPr txBox="1"/>
+          <p:nvPr/>
+        </p:nvSpPr>
+        <p:spPr>
+          <a:xfrm>
+            <a:off x="6734556" y="5047488"/>
+            <a:ext cx="4722876" cy="320040"/>
           </a:xfrm>
           <a:prstGeom prst="rect">
             <a:avLst/>
@@ -17163,11 +17323,11 @@
             <a:r>
               <a:rPr lang="en-US" sz="1500" b="1" dirty="0">
                 <a:solidFill>
-                  <a:srgbClr val="E64A19"/>
-                </a:solidFill>
-                <a:latin typeface="Calibri" pitchFamily="34" charset="0"/>
-                <a:ea typeface="Calibri" pitchFamily="34" charset="-122"/>
-                <a:cs typeface="Calibri" pitchFamily="34" charset="-120"/>
+                  <a:srgbClr val="B10C00"/>
+                </a:solidFill>
+                <a:latin typeface="Adobe Clean" pitchFamily="34" charset="0"/>
+                <a:ea typeface="Adobe Clean" pitchFamily="34" charset="-122"/>
+                <a:cs typeface="Adobe Clean" pitchFamily="34" charset="-120"/>
               </a:rPr>
               <a:t>Profile</a:t>
             </a:r>
@@ -17177,7 +17337,7 @@
       </p:sp>
       <p:sp>
         <p:nvSpPr>
-          <p:cNvPr id="27" name="Text 25"/>
+          <p:cNvPr id="35" name="Text 33"/>
           <p:cNvSpPr txBox="1"/>
           <p:nvPr/>
         </p:nvSpPr>
@@ -17202,11 +17362,11 @@
             <a:r>
               <a:rPr lang="en-US" sz="1250" dirty="0">
                 <a:solidFill>
-                  <a:srgbClr val="7D726C"/>
-                </a:solidFill>
-                <a:latin typeface="Calibri" pitchFamily="34" charset="0"/>
-                <a:ea typeface="Calibri" pitchFamily="34" charset="-122"/>
-                <a:cs typeface="Calibri" pitchFamily="34" charset="-120"/>
+                  <a:srgbClr val="6B6B6B"/>
+                </a:solidFill>
+                <a:latin typeface="Adobe Clean" pitchFamily="34" charset="0"/>
+                <a:ea typeface="Adobe Clean" pitchFamily="34" charset="-122"/>
+                <a:cs typeface="Adobe Clean" pitchFamily="34" charset="-120"/>
               </a:rPr>
               <a:t>The unified person in AEP: identities + attributes + events.</a:t>
             </a:r>
@@ -17228,7 +17388,7 @@
     <p:bg>
       <p:bgPr>
         <a:solidFill>
-          <a:srgbClr val="2B2320"/>
+          <a:srgbClr val="1F1F1F"/>
         </a:solidFill>
       </p:bgPr>
     </p:bg>
@@ -17261,7 +17421,7 @@
             <a:avLst/>
           </a:prstGeom>
           <a:solidFill>
-            <a:srgbClr val="FF5722"/>
+            <a:srgbClr val="EB1000"/>
           </a:solidFill>
           <a:ln/>
         </p:spPr>
@@ -17281,7 +17441,7 @@
             <a:avLst/>
           </a:prstGeom>
           <a:solidFill>
-            <a:srgbClr val="FFB300"/>
+            <a:srgbClr val="FFA311"/>
           </a:solidFill>
           <a:ln/>
         </p:spPr>
@@ -17313,11 +17473,11 @@
             <a:r>
               <a:rPr lang="en-US" sz="1400" b="1" spc="300" kern="0" dirty="0">
                 <a:solidFill>
-                  <a:srgbClr val="FFB300"/>
-                </a:solidFill>
-                <a:latin typeface="Calibri" pitchFamily="34" charset="0"/>
-                <a:ea typeface="Calibri" pitchFamily="34" charset="-122"/>
-                <a:cs typeface="Calibri" pitchFamily="34" charset="-120"/>
+                  <a:srgbClr val="FFA311"/>
+                </a:solidFill>
+                <a:latin typeface="Adobe Clean" pitchFamily="34" charset="0"/>
+                <a:ea typeface="Adobe Clean" pitchFamily="34" charset="-122"/>
+                <a:cs typeface="Adobe Clean" pitchFamily="34" charset="-120"/>
               </a:rPr>
               <a:t>PART 1</a:t>
             </a:r>
@@ -17354,9 +17514,9 @@
                 <a:solidFill>
                   <a:srgbClr val="FFFFFF"/>
                 </a:solidFill>
-                <a:latin typeface="Cambria" pitchFamily="34" charset="0"/>
-                <a:ea typeface="Cambria" pitchFamily="34" charset="-122"/>
-                <a:cs typeface="Cambria" pitchFamily="34" charset="-120"/>
+                <a:latin typeface="Adobe Clean" pitchFamily="34" charset="0"/>
+                <a:ea typeface="Adobe Clean" pitchFamily="34" charset="-122"/>
+                <a:cs typeface="Adobe Clean" pitchFamily="34" charset="-120"/>
               </a:rPr>
               <a:t>Foundations</a:t>
             </a:r>
@@ -17393,9 +17553,9 @@
                 <a:solidFill>
                   <a:srgbClr val="CADCFC"/>
                 </a:solidFill>
-                <a:latin typeface="Calibri" pitchFamily="34" charset="0"/>
-                <a:ea typeface="Calibri" pitchFamily="34" charset="-122"/>
-                <a:cs typeface="Calibri" pitchFamily="34" charset="-120"/>
+                <a:latin typeface="Adobe Clean" pitchFamily="34" charset="0"/>
+                <a:ea typeface="Adobe Clean" pitchFamily="34" charset="-122"/>
+                <a:cs typeface="Adobe Clean" pitchFamily="34" charset="-120"/>
               </a:rPr>
               <a:t>The words your team will hear — explained simply, with pictures.</a:t>
             </a:r>
@@ -17462,11 +17622,11 @@
             <a:r>
               <a:rPr lang="en-US" sz="1250" b="1" spc="200" kern="0" dirty="0">
                 <a:solidFill>
-                  <a:srgbClr val="FF5722"/>
-                </a:solidFill>
-                <a:latin typeface="Calibri" pitchFamily="34" charset="0"/>
-                <a:ea typeface="Calibri" pitchFamily="34" charset="-122"/>
-                <a:cs typeface="Calibri" pitchFamily="34" charset="-120"/>
+                  <a:srgbClr val="EB1000"/>
+                </a:solidFill>
+                <a:latin typeface="Adobe Clean" pitchFamily="34" charset="0"/>
+                <a:ea typeface="Adobe Clean" pitchFamily="34" charset="-122"/>
+                <a:cs typeface="Adobe Clean" pitchFamily="34" charset="-120"/>
               </a:rPr>
               <a:t>FOUNDATIONS · 1</a:t>
             </a:r>
@@ -17501,11 +17661,11 @@
             <a:r>
               <a:rPr lang="en-US" sz="3200" b="1" dirty="0">
                 <a:solidFill>
-                  <a:srgbClr val="2B2320"/>
-                </a:solidFill>
-                <a:latin typeface="Cambria" pitchFamily="34" charset="0"/>
-                <a:ea typeface="Cambria" pitchFamily="34" charset="-122"/>
-                <a:cs typeface="Cambria" pitchFamily="34" charset="-120"/>
+                  <a:srgbClr val="1F1F1F"/>
+                </a:solidFill>
+                <a:latin typeface="Adobe Clean" pitchFamily="34" charset="0"/>
+                <a:ea typeface="Adobe Clean" pitchFamily="34" charset="-122"/>
+                <a:cs typeface="Adobe Clean" pitchFamily="34" charset="-120"/>
               </a:rPr>
               <a:t>What is a Tag (Launch) property?</a:t>
             </a:r>
@@ -17540,11 +17700,11 @@
             <a:r>
               <a:rPr lang="en-US" sz="1500" dirty="0">
                 <a:solidFill>
-                  <a:srgbClr val="7D726C"/>
-                </a:solidFill>
-                <a:latin typeface="Calibri" pitchFamily="34" charset="0"/>
-                <a:ea typeface="Calibri" pitchFamily="34" charset="-122"/>
-                <a:cs typeface="Calibri" pitchFamily="34" charset="-120"/>
+                  <a:srgbClr val="6B6B6B"/>
+                </a:solidFill>
+                <a:latin typeface="Adobe Clean" pitchFamily="34" charset="0"/>
+                <a:ea typeface="Adobe Clean" pitchFamily="34" charset="-122"/>
+                <a:cs typeface="Adobe Clean" pitchFamily="34" charset="-120"/>
               </a:rPr>
               <a:t>Your tracking "control room" — one container that holds everything you configure.</a:t>
             </a:r>
@@ -17569,11 +17729,11 @@
             </a:avLst>
           </a:prstGeom>
           <a:solidFill>
-            <a:srgbClr val="FBF4F0"/>
+            <a:srgbClr val="F7F7F7"/>
           </a:solidFill>
           <a:ln w="19050">
             <a:solidFill>
-              <a:srgbClr val="FF5722"/>
+              <a:srgbClr val="EB1000"/>
             </a:solidFill>
             <a:prstDash val="solid"/>
           </a:ln>
@@ -17606,11 +17766,11 @@
             <a:r>
               <a:rPr lang="en-US" sz="1700" b="1" dirty="0">
                 <a:solidFill>
-                  <a:srgbClr val="E64A19"/>
-                </a:solidFill>
-                <a:latin typeface="Calibri" pitchFamily="34" charset="0"/>
-                <a:ea typeface="Calibri" pitchFamily="34" charset="-122"/>
-                <a:cs typeface="Calibri" pitchFamily="34" charset="-120"/>
+                  <a:srgbClr val="B10C00"/>
+                </a:solidFill>
+                <a:latin typeface="Adobe Clean" pitchFamily="34" charset="0"/>
+                <a:ea typeface="Adobe Clean" pitchFamily="34" charset="-122"/>
+                <a:cs typeface="Adobe Clean" pitchFamily="34" charset="-120"/>
               </a:rPr>
               <a:t>🏷️  Tag Property — “Feastly Web”</a:t>
             </a:r>
@@ -17703,11 +17863,11 @@
             <a:r>
               <a:rPr lang="en-US" sz="1450" b="1" dirty="0">
                 <a:solidFill>
-                  <a:srgbClr val="2B2320"/>
-                </a:solidFill>
-                <a:latin typeface="Calibri" pitchFamily="34" charset="0"/>
-                <a:ea typeface="Calibri" pitchFamily="34" charset="-122"/>
-                <a:cs typeface="Calibri" pitchFamily="34" charset="-120"/>
+                  <a:srgbClr val="1F1F1F"/>
+                </a:solidFill>
+                <a:latin typeface="Adobe Clean" pitchFamily="34" charset="0"/>
+                <a:ea typeface="Adobe Clean" pitchFamily="34" charset="-122"/>
+                <a:cs typeface="Adobe Clean" pitchFamily="34" charset="-120"/>
               </a:rPr>
               <a:t>Extensions</a:t>
             </a:r>
@@ -17742,11 +17902,11 @@
             <a:r>
               <a:rPr lang="en-US" sz="1150" dirty="0">
                 <a:solidFill>
-                  <a:srgbClr val="7D726C"/>
-                </a:solidFill>
-                <a:latin typeface="Calibri" pitchFamily="34" charset="0"/>
-                <a:ea typeface="Calibri" pitchFamily="34" charset="-122"/>
-                <a:cs typeface="Calibri" pitchFamily="34" charset="-120"/>
+                  <a:srgbClr val="6B6B6B"/>
+                </a:solidFill>
+                <a:latin typeface="Adobe Clean" pitchFamily="34" charset="0"/>
+                <a:ea typeface="Adobe Clean" pitchFamily="34" charset="-122"/>
+                <a:cs typeface="Adobe Clean" pitchFamily="34" charset="-120"/>
               </a:rPr>
               <a:t>Plug-ins that add powers (Web SDK, Client Data Layer).</a:t>
             </a:r>
@@ -17839,11 +17999,11 @@
             <a:r>
               <a:rPr lang="en-US" sz="1450" b="1" dirty="0">
                 <a:solidFill>
-                  <a:srgbClr val="2B2320"/>
-                </a:solidFill>
-                <a:latin typeface="Calibri" pitchFamily="34" charset="0"/>
-                <a:ea typeface="Calibri" pitchFamily="34" charset="-122"/>
-                <a:cs typeface="Calibri" pitchFamily="34" charset="-120"/>
+                  <a:srgbClr val="1F1F1F"/>
+                </a:solidFill>
+                <a:latin typeface="Adobe Clean" pitchFamily="34" charset="0"/>
+                <a:ea typeface="Adobe Clean" pitchFamily="34" charset="-122"/>
+                <a:cs typeface="Adobe Clean" pitchFamily="34" charset="-120"/>
               </a:rPr>
               <a:t>Data Elements</a:t>
             </a:r>
@@ -17878,11 +18038,11 @@
             <a:r>
               <a:rPr lang="en-US" sz="1150" dirty="0">
                 <a:solidFill>
-                  <a:srgbClr val="7D726C"/>
-                </a:solidFill>
-                <a:latin typeface="Calibri" pitchFamily="34" charset="0"/>
-                <a:ea typeface="Calibri" pitchFamily="34" charset="-122"/>
-                <a:cs typeface="Calibri" pitchFamily="34" charset="-120"/>
+                  <a:srgbClr val="6B6B6B"/>
+                </a:solidFill>
+                <a:latin typeface="Adobe Clean" pitchFamily="34" charset="0"/>
+                <a:ea typeface="Adobe Clean" pitchFamily="34" charset="-122"/>
+                <a:cs typeface="Adobe Clean" pitchFamily="34" charset="-120"/>
               </a:rPr>
               <a:t>Reusable variables that read values from the page.</a:t>
             </a:r>
@@ -17975,11 +18135,11 @@
             <a:r>
               <a:rPr lang="en-US" sz="1450" b="1" dirty="0">
                 <a:solidFill>
-                  <a:srgbClr val="2B2320"/>
-                </a:solidFill>
-                <a:latin typeface="Calibri" pitchFamily="34" charset="0"/>
-                <a:ea typeface="Calibri" pitchFamily="34" charset="-122"/>
-                <a:cs typeface="Calibri" pitchFamily="34" charset="-120"/>
+                  <a:srgbClr val="1F1F1F"/>
+                </a:solidFill>
+                <a:latin typeface="Adobe Clean" pitchFamily="34" charset="0"/>
+                <a:ea typeface="Adobe Clean" pitchFamily="34" charset="-122"/>
+                <a:cs typeface="Adobe Clean" pitchFamily="34" charset="-120"/>
               </a:rPr>
               <a:t>Rules</a:t>
             </a:r>
@@ -18014,11 +18174,11 @@
             <a:r>
               <a:rPr lang="en-US" sz="1150" dirty="0">
                 <a:solidFill>
-                  <a:srgbClr val="7D726C"/>
-                </a:solidFill>
-                <a:latin typeface="Calibri" pitchFamily="34" charset="0"/>
-                <a:ea typeface="Calibri" pitchFamily="34" charset="-122"/>
-                <a:cs typeface="Calibri" pitchFamily="34" charset="-120"/>
+                  <a:srgbClr val="6B6B6B"/>
+                </a:solidFill>
+                <a:latin typeface="Adobe Clean" pitchFamily="34" charset="0"/>
+                <a:ea typeface="Adobe Clean" pitchFamily="34" charset="-122"/>
+                <a:cs typeface="Adobe Clean" pitchFamily="34" charset="-120"/>
               </a:rPr>
               <a:t>When X happens → do Y (send an event).</a:t>
             </a:r>
@@ -18111,11 +18271,11 @@
             <a:r>
               <a:rPr lang="en-US" sz="1450" b="1" dirty="0">
                 <a:solidFill>
-                  <a:srgbClr val="2B2320"/>
-                </a:solidFill>
-                <a:latin typeface="Calibri" pitchFamily="34" charset="0"/>
-                <a:ea typeface="Calibri" pitchFamily="34" charset="-122"/>
-                <a:cs typeface="Calibri" pitchFamily="34" charset="-120"/>
+                  <a:srgbClr val="1F1F1F"/>
+                </a:solidFill>
+                <a:latin typeface="Adobe Clean" pitchFamily="34" charset="0"/>
+                <a:ea typeface="Adobe Clean" pitchFamily="34" charset="-122"/>
+                <a:cs typeface="Adobe Clean" pitchFamily="34" charset="-120"/>
               </a:rPr>
               <a:t>Libraries</a:t>
             </a:r>
@@ -18150,11 +18310,11 @@
             <a:r>
               <a:rPr lang="en-US" sz="1150" dirty="0">
                 <a:solidFill>
-                  <a:srgbClr val="7D726C"/>
-                </a:solidFill>
-                <a:latin typeface="Calibri" pitchFamily="34" charset="0"/>
-                <a:ea typeface="Calibri" pitchFamily="34" charset="-122"/>
-                <a:cs typeface="Calibri" pitchFamily="34" charset="-120"/>
+                  <a:srgbClr val="6B6B6B"/>
+                </a:solidFill>
+                <a:latin typeface="Adobe Clean" pitchFamily="34" charset="0"/>
+                <a:ea typeface="Adobe Clean" pitchFamily="34" charset="-122"/>
+                <a:cs typeface="Adobe Clean" pitchFamily="34" charset="-120"/>
               </a:rPr>
               <a:t>Bundles of changes you build &amp; publish.</a:t>
             </a:r>
@@ -18221,11 +18381,11 @@
             <a:r>
               <a:rPr lang="en-US" sz="1250" b="1" spc="200" kern="0" dirty="0">
                 <a:solidFill>
-                  <a:srgbClr val="FF5722"/>
-                </a:solidFill>
-                <a:latin typeface="Calibri" pitchFamily="34" charset="0"/>
-                <a:ea typeface="Calibri" pitchFamily="34" charset="-122"/>
-                <a:cs typeface="Calibri" pitchFamily="34" charset="-120"/>
+                  <a:srgbClr val="EB1000"/>
+                </a:solidFill>
+                <a:latin typeface="Adobe Clean" pitchFamily="34" charset="0"/>
+                <a:ea typeface="Adobe Clean" pitchFamily="34" charset="-122"/>
+                <a:cs typeface="Adobe Clean" pitchFamily="34" charset="-120"/>
               </a:rPr>
               <a:t>FOUNDATIONS · 2</a:t>
             </a:r>
@@ -18260,11 +18420,11 @@
             <a:r>
               <a:rPr lang="en-US" sz="3200" b="1" dirty="0">
                 <a:solidFill>
-                  <a:srgbClr val="2B2320"/>
-                </a:solidFill>
-                <a:latin typeface="Cambria" pitchFamily="34" charset="0"/>
-                <a:ea typeface="Cambria" pitchFamily="34" charset="-122"/>
-                <a:cs typeface="Cambria" pitchFamily="34" charset="-120"/>
+                  <a:srgbClr val="1F1F1F"/>
+                </a:solidFill>
+                <a:latin typeface="Adobe Clean" pitchFamily="34" charset="0"/>
+                <a:ea typeface="Adobe Clean" pitchFamily="34" charset="-122"/>
+                <a:cs typeface="Adobe Clean" pitchFamily="34" charset="-120"/>
               </a:rPr>
               <a:t>What is an Extension?</a:t>
             </a:r>
@@ -18299,11 +18459,11 @@
             <a:r>
               <a:rPr lang="en-US" sz="1500" dirty="0">
                 <a:solidFill>
-                  <a:srgbClr val="7D726C"/>
-                </a:solidFill>
-                <a:latin typeface="Calibri" pitchFamily="34" charset="0"/>
-                <a:ea typeface="Calibri" pitchFamily="34" charset="-122"/>
-                <a:cs typeface="Calibri" pitchFamily="34" charset="-120"/>
+                  <a:srgbClr val="6B6B6B"/>
+                </a:solidFill>
+                <a:latin typeface="Adobe Clean" pitchFamily="34" charset="0"/>
+                <a:ea typeface="Adobe Clean" pitchFamily="34" charset="-122"/>
+                <a:cs typeface="Adobe Clean" pitchFamily="34" charset="-120"/>
               </a:rPr>
               <a:t>A plug-in that gives the property new capabilities — like installing an app on your phone.</a:t>
             </a:r>
@@ -18328,7 +18488,7 @@
             </a:avLst>
           </a:prstGeom>
           <a:solidFill>
-            <a:srgbClr val="FFF3EE"/>
+            <a:srgbClr val="FDECEA"/>
           </a:solidFill>
           <a:ln/>
         </p:spPr>
@@ -18396,11 +18556,11 @@
             <a:r>
               <a:rPr lang="en-US" sz="1450" b="1" dirty="0">
                 <a:solidFill>
-                  <a:srgbClr val="2B2320"/>
-                </a:solidFill>
-                <a:latin typeface="Calibri" pitchFamily="34" charset="0"/>
-                <a:ea typeface="Calibri" pitchFamily="34" charset="-122"/>
-                <a:cs typeface="Calibri" pitchFamily="34" charset="-120"/>
+                  <a:srgbClr val="1F1F1F"/>
+                </a:solidFill>
+                <a:latin typeface="Adobe Clean" pitchFamily="34" charset="0"/>
+                <a:ea typeface="Adobe Clean" pitchFamily="34" charset="-122"/>
+                <a:cs typeface="Adobe Clean" pitchFamily="34" charset="-120"/>
               </a:rPr>
               <a:t>Core</a:t>
             </a:r>
@@ -18435,11 +18595,11 @@
             <a:r>
               <a:rPr lang="en-US" sz="1150" dirty="0">
                 <a:solidFill>
-                  <a:srgbClr val="7D726C"/>
-                </a:solidFill>
-                <a:latin typeface="Calibri" pitchFamily="34" charset="0"/>
-                <a:ea typeface="Calibri" pitchFamily="34" charset="-122"/>
-                <a:cs typeface="Calibri" pitchFamily="34" charset="-120"/>
+                  <a:srgbClr val="6B6B6B"/>
+                </a:solidFill>
+                <a:latin typeface="Adobe Clean" pitchFamily="34" charset="0"/>
+                <a:ea typeface="Adobe Clean" pitchFamily="34" charset="-122"/>
+                <a:cs typeface="Adobe Clean" pitchFamily="34" charset="-120"/>
               </a:rPr>
               <a:t>Built-in basics: custom code, page-load events.</a:t>
             </a:r>
@@ -18464,7 +18624,7 @@
             </a:avLst>
           </a:prstGeom>
           <a:solidFill>
-            <a:srgbClr val="FFF3EE"/>
+            <a:srgbClr val="FDECEA"/>
           </a:solidFill>
           <a:ln/>
         </p:spPr>
@@ -18532,11 +18692,11 @@
             <a:r>
               <a:rPr lang="en-US" sz="1450" b="1" dirty="0">
                 <a:solidFill>
-                  <a:srgbClr val="2B2320"/>
-                </a:solidFill>
-                <a:latin typeface="Calibri" pitchFamily="34" charset="0"/>
-                <a:ea typeface="Calibri" pitchFamily="34" charset="-122"/>
-                <a:cs typeface="Calibri" pitchFamily="34" charset="-120"/>
+                  <a:srgbClr val="1F1F1F"/>
+                </a:solidFill>
+                <a:latin typeface="Adobe Clean" pitchFamily="34" charset="0"/>
+                <a:ea typeface="Adobe Clean" pitchFamily="34" charset="-122"/>
+                <a:cs typeface="Adobe Clean" pitchFamily="34" charset="-120"/>
               </a:rPr>
               <a:t>AEP Web SDK</a:t>
             </a:r>
@@ -18571,11 +18731,11 @@
             <a:r>
               <a:rPr lang="en-US" sz="1150" dirty="0">
                 <a:solidFill>
-                  <a:srgbClr val="7D726C"/>
-                </a:solidFill>
-                <a:latin typeface="Calibri" pitchFamily="34" charset="0"/>
-                <a:ea typeface="Calibri" pitchFamily="34" charset="-122"/>
-                <a:cs typeface="Calibri" pitchFamily="34" charset="-120"/>
+                  <a:srgbClr val="6B6B6B"/>
+                </a:solidFill>
+                <a:latin typeface="Adobe Clean" pitchFamily="34" charset="0"/>
+                <a:ea typeface="Adobe Clean" pitchFamily="34" charset="-122"/>
+                <a:cs typeface="Adobe Clean" pitchFamily="34" charset="-120"/>
               </a:rPr>
               <a:t>Sends events to the Edge / Datastream.</a:t>
             </a:r>
@@ -18600,7 +18760,7 @@
             </a:avLst>
           </a:prstGeom>
           <a:solidFill>
-            <a:srgbClr val="FFF3EE"/>
+            <a:srgbClr val="FDECEA"/>
           </a:solidFill>
           <a:ln/>
         </p:spPr>
@@ -18668,11 +18828,11 @@
             <a:r>
               <a:rPr lang="en-US" sz="1450" b="1" dirty="0">
                 <a:solidFill>
-                  <a:srgbClr val="2B2320"/>
-                </a:solidFill>
-                <a:latin typeface="Calibri" pitchFamily="34" charset="0"/>
-                <a:ea typeface="Calibri" pitchFamily="34" charset="-122"/>
-                <a:cs typeface="Calibri" pitchFamily="34" charset="-120"/>
+                  <a:srgbClr val="1F1F1F"/>
+                </a:solidFill>
+                <a:latin typeface="Adobe Clean" pitchFamily="34" charset="0"/>
+                <a:ea typeface="Adobe Clean" pitchFamily="34" charset="-122"/>
+                <a:cs typeface="Adobe Clean" pitchFamily="34" charset="-120"/>
               </a:rPr>
               <a:t>Adobe Client Data Layer</a:t>
             </a:r>
@@ -18707,11 +18867,11 @@
             <a:r>
               <a:rPr lang="en-US" sz="1150" dirty="0">
                 <a:solidFill>
-                  <a:srgbClr val="7D726C"/>
-                </a:solidFill>
-                <a:latin typeface="Calibri" pitchFamily="34" charset="0"/>
-                <a:ea typeface="Calibri" pitchFamily="34" charset="-122"/>
-                <a:cs typeface="Calibri" pitchFamily="34" charset="-120"/>
+                  <a:srgbClr val="6B6B6B"/>
+                </a:solidFill>
+                <a:latin typeface="Adobe Clean" pitchFamily="34" charset="0"/>
+                <a:ea typeface="Adobe Clean" pitchFamily="34" charset="-122"/>
+                <a:cs typeface="Adobe Clean" pitchFamily="34" charset="-120"/>
               </a:rPr>
               <a:t>Listens to adobeDataLayer pushes.</a:t>
             </a:r>
@@ -18746,11 +18906,11 @@
             <a:r>
               <a:rPr lang="en-US" sz="1500" b="1" i="1" dirty="0">
                 <a:solidFill>
-                  <a:srgbClr val="E64A19"/>
-                </a:solidFill>
-                <a:latin typeface="Calibri" pitchFamily="34" charset="0"/>
-                <a:ea typeface="Calibri" pitchFamily="34" charset="-122"/>
-                <a:cs typeface="Calibri" pitchFamily="34" charset="-120"/>
+                  <a:srgbClr val="B10C00"/>
+                </a:solidFill>
+                <a:latin typeface="Adobe Clean" pitchFamily="34" charset="0"/>
+                <a:ea typeface="Adobe Clean" pitchFamily="34" charset="-122"/>
+                <a:cs typeface="Adobe Clean" pitchFamily="34" charset="-120"/>
               </a:rPr>
               <a:t>We only need these two ➜ AEP Web SDK  +  Adobe Client Data Layer</a:t>
             </a:r>
@@ -18817,11 +18977,11 @@
             <a:r>
               <a:rPr lang="en-US" sz="1250" b="1" spc="200" kern="0" dirty="0">
                 <a:solidFill>
-                  <a:srgbClr val="FF5722"/>
-                </a:solidFill>
-                <a:latin typeface="Calibri" pitchFamily="34" charset="0"/>
-                <a:ea typeface="Calibri" pitchFamily="34" charset="-122"/>
-                <a:cs typeface="Calibri" pitchFamily="34" charset="-120"/>
+                  <a:srgbClr val="EB1000"/>
+                </a:solidFill>
+                <a:latin typeface="Adobe Clean" pitchFamily="34" charset="0"/>
+                <a:ea typeface="Adobe Clean" pitchFamily="34" charset="-122"/>
+                <a:cs typeface="Adobe Clean" pitchFamily="34" charset="-120"/>
               </a:rPr>
               <a:t>FOUNDATIONS · 3</a:t>
             </a:r>
@@ -18856,11 +19016,11 @@
             <a:r>
               <a:rPr lang="en-US" sz="3200" b="1" dirty="0">
                 <a:solidFill>
-                  <a:srgbClr val="2B2320"/>
-                </a:solidFill>
-                <a:latin typeface="Cambria" pitchFamily="34" charset="0"/>
-                <a:ea typeface="Cambria" pitchFamily="34" charset="-122"/>
-                <a:cs typeface="Cambria" pitchFamily="34" charset="-120"/>
+                  <a:srgbClr val="1F1F1F"/>
+                </a:solidFill>
+                <a:latin typeface="Adobe Clean" pitchFamily="34" charset="0"/>
+                <a:ea typeface="Adobe Clean" pitchFamily="34" charset="-122"/>
+                <a:cs typeface="Adobe Clean" pitchFamily="34" charset="-120"/>
               </a:rPr>
               <a:t>What is a Data Element?</a:t>
             </a:r>
@@ -18895,11 +19055,11 @@
             <a:r>
               <a:rPr lang="en-US" sz="1500" dirty="0">
                 <a:solidFill>
-                  <a:srgbClr val="7D726C"/>
-                </a:solidFill>
-                <a:latin typeface="Calibri" pitchFamily="34" charset="0"/>
-                <a:ea typeface="Calibri" pitchFamily="34" charset="-122"/>
-                <a:cs typeface="Calibri" pitchFamily="34" charset="-120"/>
+                  <a:srgbClr val="6B6B6B"/>
+                </a:solidFill>
+                <a:latin typeface="Adobe Clean" pitchFamily="34" charset="0"/>
+                <a:ea typeface="Adobe Clean" pitchFamily="34" charset="-122"/>
+                <a:cs typeface="Adobe Clean" pitchFamily="34" charset="-120"/>
               </a:rPr>
               <a:t>A named, reusable "variable" that grabs a value once — so every rule can reuse it.</a:t>
             </a:r>
@@ -18924,7 +19084,7 @@
             </a:avLst>
           </a:prstGeom>
           <a:solidFill>
-            <a:srgbClr val="2B2320"/>
+            <a:srgbClr val="1F1F1F"/>
           </a:solidFill>
           <a:ln/>
         </p:spPr>
@@ -18956,11 +19116,11 @@
             <a:r>
               <a:rPr lang="en-US" sz="1400" b="1" dirty="0">
                 <a:solidFill>
-                  <a:srgbClr val="FFB300"/>
-                </a:solidFill>
-                <a:latin typeface="Calibri" pitchFamily="34" charset="0"/>
-                <a:ea typeface="Calibri" pitchFamily="34" charset="-122"/>
-                <a:cs typeface="Calibri" pitchFamily="34" charset="-120"/>
+                  <a:srgbClr val="FFA311"/>
+                </a:solidFill>
+                <a:latin typeface="Adobe Clean" pitchFamily="34" charset="0"/>
+                <a:ea typeface="Adobe Clean" pitchFamily="34" charset="-122"/>
+                <a:cs typeface="Adobe Clean" pitchFamily="34" charset="-120"/>
               </a:rPr>
               <a:t>Data layer</a:t>
             </a:r>
@@ -19068,7 +19228,7 @@
             <a:r>
               <a:rPr lang="en-US" sz="2200" b="1" dirty="0">
                 <a:solidFill>
-                  <a:srgbClr val="FF5722"/>
+                  <a:srgbClr val="EB1000"/>
                 </a:solidFill>
               </a:rPr>
               <a:t>▸</a:t>
@@ -19162,11 +19322,11 @@
             <a:r>
               <a:rPr lang="en-US" sz="1450" b="1" dirty="0">
                 <a:solidFill>
-                  <a:srgbClr val="2B2320"/>
-                </a:solidFill>
-                <a:latin typeface="Calibri" pitchFamily="34" charset="0"/>
-                <a:ea typeface="Calibri" pitchFamily="34" charset="-122"/>
-                <a:cs typeface="Calibri" pitchFamily="34" charset="-120"/>
+                  <a:srgbClr val="1F1F1F"/>
+                </a:solidFill>
+                <a:latin typeface="Adobe Clean" pitchFamily="34" charset="0"/>
+                <a:ea typeface="Adobe Clean" pitchFamily="34" charset="-122"/>
+                <a:cs typeface="Adobe Clean" pitchFamily="34" charset="-120"/>
               </a:rPr>
               <a:t>Data Element</a:t>
             </a:r>
@@ -19201,11 +19361,11 @@
             <a:r>
               <a:rPr lang="en-US" sz="1150" dirty="0">
                 <a:solidFill>
-                  <a:srgbClr val="7D726C"/>
-                </a:solidFill>
-                <a:latin typeface="Calibri" pitchFamily="34" charset="0"/>
-                <a:ea typeface="Calibri" pitchFamily="34" charset="-122"/>
-                <a:cs typeface="Calibri" pitchFamily="34" charset="-120"/>
+                  <a:srgbClr val="6B6B6B"/>
+                </a:solidFill>
+                <a:latin typeface="Adobe Clean" pitchFamily="34" charset="0"/>
+                <a:ea typeface="Adobe Clean" pitchFamily="34" charset="-122"/>
+                <a:cs typeface="Adobe Clean" pitchFamily="34" charset="-120"/>
               </a:rPr>
               <a:t>“Feastly - user”</a:t>
             </a:r>
@@ -19218,11 +19378,11 @@
             <a:r>
               <a:rPr lang="en-US" sz="1150" dirty="0">
                 <a:solidFill>
-                  <a:srgbClr val="7D726C"/>
-                </a:solidFill>
-                <a:latin typeface="Calibri" pitchFamily="34" charset="0"/>
-                <a:ea typeface="Calibri" pitchFamily="34" charset="-122"/>
-                <a:cs typeface="Calibri" pitchFamily="34" charset="-120"/>
+                  <a:srgbClr val="6B6B6B"/>
+                </a:solidFill>
+                <a:latin typeface="Adobe Clean" pitchFamily="34" charset="0"/>
+                <a:ea typeface="Adobe Clean" pitchFamily="34" charset="-122"/>
+                <a:cs typeface="Adobe Clean" pitchFamily="34" charset="-120"/>
               </a:rPr>
               <a:t>reads user from the data layer</a:t>
             </a:r>
@@ -19248,7 +19408,7 @@
           </a:prstGeom>
           <a:ln w="19050">
             <a:solidFill>
-              <a:srgbClr val="FF5722"/>
+              <a:srgbClr val="EB1000"/>
             </a:solidFill>
             <a:prstDash val="solid"/>
           </a:ln>
@@ -19281,7 +19441,7 @@
             <a:r>
               <a:rPr lang="en-US" sz="2200" b="1" dirty="0">
                 <a:solidFill>
-                  <a:srgbClr val="FF5722"/>
+                  <a:srgbClr val="EB1000"/>
                 </a:solidFill>
               </a:rPr>
               <a:t>▸</a:t>
@@ -19307,7 +19467,7 @@
             </a:avLst>
           </a:prstGeom>
           <a:solidFill>
-            <a:srgbClr val="FFF3EE"/>
+            <a:srgbClr val="FDECEA"/>
           </a:solidFill>
           <a:ln/>
         </p:spPr>
@@ -19375,11 +19535,11 @@
             <a:r>
               <a:rPr lang="en-US" sz="1450" b="1" dirty="0">
                 <a:solidFill>
-                  <a:srgbClr val="2B2320"/>
-                </a:solidFill>
-                <a:latin typeface="Calibri" pitchFamily="34" charset="0"/>
-                <a:ea typeface="Calibri" pitchFamily="34" charset="-122"/>
-                <a:cs typeface="Calibri" pitchFamily="34" charset="-120"/>
+                  <a:srgbClr val="1F1F1F"/>
+                </a:solidFill>
+                <a:latin typeface="Adobe Clean" pitchFamily="34" charset="0"/>
+                <a:ea typeface="Adobe Clean" pitchFamily="34" charset="-122"/>
+                <a:cs typeface="Adobe Clean" pitchFamily="34" charset="-120"/>
               </a:rPr>
               <a:t>Reused in Rules</a:t>
             </a:r>
@@ -19414,11 +19574,11 @@
             <a:r>
               <a:rPr lang="en-US" sz="1150" dirty="0">
                 <a:solidFill>
-                  <a:srgbClr val="7D726C"/>
-                </a:solidFill>
-                <a:latin typeface="Calibri" pitchFamily="34" charset="0"/>
-                <a:ea typeface="Calibri" pitchFamily="34" charset="-122"/>
-                <a:cs typeface="Calibri" pitchFamily="34" charset="-120"/>
+                  <a:srgbClr val="6B6B6B"/>
+                </a:solidFill>
+                <a:latin typeface="Adobe Clean" pitchFamily="34" charset="0"/>
+                <a:ea typeface="Adobe Clean" pitchFamily="34" charset="-122"/>
+                <a:cs typeface="Adobe Clean" pitchFamily="34" charset="-120"/>
               </a:rPr>
               <a:t>Every rule references it — define once, use everywhere.</a:t>
             </a:r>
@@ -19453,11 +19613,11 @@
             <a:r>
               <a:rPr lang="en-US" sz="1400" i="1" dirty="0">
                 <a:solidFill>
-                  <a:srgbClr val="7D726C"/>
-                </a:solidFill>
-                <a:latin typeface="Calibri" pitchFamily="34" charset="0"/>
-                <a:ea typeface="Calibri" pitchFamily="34" charset="-122"/>
-                <a:cs typeface="Calibri" pitchFamily="34" charset="-120"/>
+                  <a:srgbClr val="6B6B6B"/>
+                </a:solidFill>
+                <a:latin typeface="Adobe Clean" pitchFamily="34" charset="0"/>
+                <a:ea typeface="Adobe Clean" pitchFamily="34" charset="-122"/>
+                <a:cs typeface="Adobe Clean" pitchFamily="34" charset="-120"/>
               </a:rPr>
               <a:t>Analogy: like a saved contact — set the number once, dial it from anywhere.</a:t>
             </a:r>
@@ -19524,11 +19684,11 @@
             <a:r>
               <a:rPr lang="en-US" sz="1250" b="1" spc="200" kern="0" dirty="0">
                 <a:solidFill>
-                  <a:srgbClr val="FF5722"/>
-                </a:solidFill>
-                <a:latin typeface="Calibri" pitchFamily="34" charset="0"/>
-                <a:ea typeface="Calibri" pitchFamily="34" charset="-122"/>
-                <a:cs typeface="Calibri" pitchFamily="34" charset="-120"/>
+                  <a:srgbClr val="EB1000"/>
+                </a:solidFill>
+                <a:latin typeface="Adobe Clean" pitchFamily="34" charset="0"/>
+                <a:ea typeface="Adobe Clean" pitchFamily="34" charset="-122"/>
+                <a:cs typeface="Adobe Clean" pitchFamily="34" charset="-120"/>
               </a:rPr>
               <a:t>FOUNDATIONS · 4</a:t>
             </a:r>
@@ -19563,11 +19723,11 @@
             <a:r>
               <a:rPr lang="en-US" sz="3200" b="1" dirty="0">
                 <a:solidFill>
-                  <a:srgbClr val="2B2320"/>
-                </a:solidFill>
-                <a:latin typeface="Cambria" pitchFamily="34" charset="0"/>
-                <a:ea typeface="Cambria" pitchFamily="34" charset="-122"/>
-                <a:cs typeface="Cambria" pitchFamily="34" charset="-120"/>
+                  <a:srgbClr val="1F1F1F"/>
+                </a:solidFill>
+                <a:latin typeface="Adobe Clean" pitchFamily="34" charset="0"/>
+                <a:ea typeface="Adobe Clean" pitchFamily="34" charset="-122"/>
+                <a:cs typeface="Adobe Clean" pitchFamily="34" charset="-120"/>
               </a:rPr>
               <a:t>What is a Rule?</a:t>
             </a:r>
@@ -19602,11 +19762,11 @@
             <a:r>
               <a:rPr lang="en-US" sz="1500" dirty="0">
                 <a:solidFill>
-                  <a:srgbClr val="7D726C"/>
-                </a:solidFill>
-                <a:latin typeface="Calibri" pitchFamily="34" charset="0"/>
-                <a:ea typeface="Calibri" pitchFamily="34" charset="-122"/>
-                <a:cs typeface="Calibri" pitchFamily="34" charset="-120"/>
+                  <a:srgbClr val="6B6B6B"/>
+                </a:solidFill>
+                <a:latin typeface="Adobe Clean" pitchFamily="34" charset="0"/>
+                <a:ea typeface="Adobe Clean" pitchFamily="34" charset="-122"/>
+                <a:cs typeface="Adobe Clean" pitchFamily="34" charset="-120"/>
               </a:rPr>
               <a:t>Simple logic: WHEN something happens → (optionally IF a condition) → DO an action.</a:t>
             </a:r>
@@ -19631,7 +19791,7 @@
             </a:avLst>
           </a:prstGeom>
           <a:solidFill>
-            <a:srgbClr val="FF5722"/>
+            <a:srgbClr val="EB1000"/>
           </a:solidFill>
           <a:ln/>
         </p:spPr>
@@ -19665,9 +19825,9 @@
                 <a:solidFill>
                   <a:srgbClr val="FFFFFF"/>
                 </a:solidFill>
-                <a:latin typeface="Calibri" pitchFamily="34" charset="0"/>
-                <a:ea typeface="Calibri" pitchFamily="34" charset="-122"/>
-                <a:cs typeface="Calibri" pitchFamily="34" charset="-120"/>
+                <a:latin typeface="Adobe Clean" pitchFamily="34" charset="0"/>
+                <a:ea typeface="Adobe Clean" pitchFamily="34" charset="-122"/>
+                <a:cs typeface="Adobe Clean" pitchFamily="34" charset="-120"/>
               </a:rPr>
               <a:t>①  EVENT</a:t>
             </a:r>
@@ -19704,9 +19864,9 @@
                 <a:solidFill>
                   <a:srgbClr val="FFFFFF"/>
                 </a:solidFill>
-                <a:latin typeface="Calibri" pitchFamily="34" charset="0"/>
-                <a:ea typeface="Calibri" pitchFamily="34" charset="-122"/>
-                <a:cs typeface="Calibri" pitchFamily="34" charset="-120"/>
+                <a:latin typeface="Adobe Clean" pitchFamily="34" charset="0"/>
+                <a:ea typeface="Adobe Clean" pitchFamily="34" charset="-122"/>
+                <a:cs typeface="Adobe Clean" pitchFamily="34" charset="-120"/>
               </a:rPr>
               <a:t>When…</a:t>
             </a:r>
@@ -19743,9 +19903,9 @@
                 <a:solidFill>
                   <a:srgbClr val="FFFFFF"/>
                 </a:solidFill>
-                <a:latin typeface="Calibri" pitchFamily="34" charset="0"/>
-                <a:ea typeface="Calibri" pitchFamily="34" charset="-122"/>
-                <a:cs typeface="Calibri" pitchFamily="34" charset="-120"/>
+                <a:latin typeface="Adobe Clean" pitchFamily="34" charset="0"/>
+                <a:ea typeface="Adobe Clean" pitchFamily="34" charset="-122"/>
+                <a:cs typeface="Adobe Clean" pitchFamily="34" charset="-120"/>
               </a:rPr>
               <a:t>a “purchase” is pushed to the data layer</a:t>
             </a:r>
@@ -19780,7 +19940,7 @@
             <a:r>
               <a:rPr lang="en-US" sz="2200" b="1" dirty="0">
                 <a:solidFill>
-                  <a:srgbClr val="FF5722"/>
+                  <a:srgbClr val="EB1000"/>
                 </a:solidFill>
               </a:rPr>
               <a:t>▸</a:t>
@@ -19806,7 +19966,7 @@
             </a:avLst>
           </a:prstGeom>
           <a:solidFill>
-            <a:srgbClr val="FFB300"/>
+            <a:srgbClr val="FFA311"/>
           </a:solidFill>
           <a:ln/>
         </p:spPr>
@@ -19838,11 +19998,11 @@
             <a:r>
               <a:rPr lang="en-US" sz="1700" b="1" dirty="0">
                 <a:solidFill>
-                  <a:srgbClr val="2B2320"/>
-                </a:solidFill>
-                <a:latin typeface="Calibri" pitchFamily="34" charset="0"/>
-                <a:ea typeface="Calibri" pitchFamily="34" charset="-122"/>
-                <a:cs typeface="Calibri" pitchFamily="34" charset="-120"/>
+                  <a:srgbClr val="1F1F1F"/>
+                </a:solidFill>
+                <a:latin typeface="Adobe Clean" pitchFamily="34" charset="0"/>
+                <a:ea typeface="Adobe Clean" pitchFamily="34" charset="-122"/>
+                <a:cs typeface="Adobe Clean" pitchFamily="34" charset="-120"/>
               </a:rPr>
               <a:t>②  CONDITION</a:t>
             </a:r>
@@ -19877,11 +20037,11 @@
             <a:r>
               <a:rPr lang="en-US" sz="1400" i="1" dirty="0">
                 <a:solidFill>
-                  <a:srgbClr val="2B2320"/>
-                </a:solidFill>
-                <a:latin typeface="Calibri" pitchFamily="34" charset="0"/>
-                <a:ea typeface="Calibri" pitchFamily="34" charset="-122"/>
-                <a:cs typeface="Calibri" pitchFamily="34" charset="-120"/>
+                  <a:srgbClr val="1F1F1F"/>
+                </a:solidFill>
+                <a:latin typeface="Adobe Clean" pitchFamily="34" charset="0"/>
+                <a:ea typeface="Adobe Clean" pitchFamily="34" charset="-122"/>
+                <a:cs typeface="Adobe Clean" pitchFamily="34" charset="-120"/>
               </a:rPr>
               <a:t>If… (optional)</a:t>
             </a:r>
@@ -19916,11 +20076,11 @@
             <a:r>
               <a:rPr lang="en-US" sz="1300" dirty="0">
                 <a:solidFill>
-                  <a:srgbClr val="2B2320"/>
-                </a:solidFill>
-                <a:latin typeface="Calibri" pitchFamily="34" charset="0"/>
-                <a:ea typeface="Calibri" pitchFamily="34" charset="-122"/>
-                <a:cs typeface="Calibri" pitchFamily="34" charset="-120"/>
+                  <a:srgbClr val="1F1F1F"/>
+                </a:solidFill>
+                <a:latin typeface="Adobe Clean" pitchFamily="34" charset="0"/>
+                <a:ea typeface="Adobe Clean" pitchFamily="34" charset="-122"/>
+                <a:cs typeface="Adobe Clean" pitchFamily="34" charset="-120"/>
               </a:rPr>
               <a:t>e.g. only on the checkout page</a:t>
             </a:r>
@@ -19955,7 +20115,7 @@
             <a:r>
               <a:rPr lang="en-US" sz="2200" b="1" dirty="0">
                 <a:solidFill>
-                  <a:srgbClr val="FF5722"/>
+                  <a:srgbClr val="EB1000"/>
                 </a:solidFill>
               </a:rPr>
               <a:t>▸</a:t>
@@ -19981,7 +20141,7 @@
             </a:avLst>
           </a:prstGeom>
           <a:solidFill>
-            <a:srgbClr val="2B2320"/>
+            <a:srgbClr val="1F1F1F"/>
           </a:solidFill>
           <a:ln/>
         </p:spPr>
@@ -20015,9 +20175,9 @@
                 <a:solidFill>
                   <a:srgbClr val="FFFFFF"/>
                 </a:solidFill>
-                <a:latin typeface="Calibri" pitchFamily="34" charset="0"/>
-                <a:ea typeface="Calibri" pitchFamily="34" charset="-122"/>
-                <a:cs typeface="Calibri" pitchFamily="34" charset="-120"/>
+                <a:latin typeface="Adobe Clean" pitchFamily="34" charset="0"/>
+                <a:ea typeface="Adobe Clean" pitchFamily="34" charset="-122"/>
+                <a:cs typeface="Adobe Clean" pitchFamily="34" charset="-120"/>
               </a:rPr>
               <a:t>③  ACTION</a:t>
             </a:r>
@@ -20054,9 +20214,9 @@
                 <a:solidFill>
                   <a:srgbClr val="FFFFFF"/>
                 </a:solidFill>
-                <a:latin typeface="Calibri" pitchFamily="34" charset="0"/>
-                <a:ea typeface="Calibri" pitchFamily="34" charset="-122"/>
-                <a:cs typeface="Calibri" pitchFamily="34" charset="-120"/>
+                <a:latin typeface="Adobe Clean" pitchFamily="34" charset="0"/>
+                <a:ea typeface="Adobe Clean" pitchFamily="34" charset="-122"/>
+                <a:cs typeface="Adobe Clean" pitchFamily="34" charset="-120"/>
               </a:rPr>
               <a:t>Then do…</a:t>
             </a:r>
@@ -20093,9 +20253,9 @@
                 <a:solidFill>
                   <a:srgbClr val="FFFFFF"/>
                 </a:solidFill>
-                <a:latin typeface="Calibri" pitchFamily="34" charset="0"/>
-                <a:ea typeface="Calibri" pitchFamily="34" charset="-122"/>
-                <a:cs typeface="Calibri" pitchFamily="34" charset="-120"/>
+                <a:latin typeface="Adobe Clean" pitchFamily="34" charset="0"/>
+                <a:ea typeface="Adobe Clean" pitchFamily="34" charset="-122"/>
+                <a:cs typeface="Adobe Clean" pitchFamily="34" charset="-120"/>
               </a:rPr>
               <a:t>Send the event to the Edge (Web SDK)</a:t>
             </a:r>
@@ -20130,11 +20290,11 @@
             <a:r>
               <a:rPr lang="en-US" sz="1350" b="1" dirty="0">
                 <a:solidFill>
-                  <a:srgbClr val="E64A19"/>
-                </a:solidFill>
-                <a:latin typeface="Calibri" pitchFamily="34" charset="0"/>
-                <a:ea typeface="Calibri" pitchFamily="34" charset="-122"/>
-                <a:cs typeface="Calibri" pitchFamily="34" charset="-120"/>
+                  <a:srgbClr val="B10C00"/>
+                </a:solidFill>
+                <a:latin typeface="Adobe Clean" pitchFamily="34" charset="0"/>
+                <a:ea typeface="Adobe Clean" pitchFamily="34" charset="-122"/>
+                <a:cs typeface="Adobe Clean" pitchFamily="34" charset="-120"/>
               </a:rPr>
               <a:t>⚠️  Event listens for the data-layer name (purchase). Action Type = the XDM eventType (commerce.purchases). Don't mix them up!</a:t>
             </a:r>

--- a/presentation/Feastly-DataCollection-to-AEP.pptx
+++ b/presentation/Feastly-DataCollection-to-AEP.pptx
@@ -1492,7 +1492,7 @@
           <a:p>
             <a:r>
               <a:rPr lang="en-US" dirty="0"/>
-              <a:t>Frame it as: you already debug AEP; this gives you the vocabulary and the map of the collection side so you can triage faster.</a:t>
+              <a:t>Reframe: this is NOT about us debugging Data Collection. It is about understanding how data reaches AEP so we can investigate, guide the customer, and decide the right owning team (us / Data Collection / Analytics). The scenarios on the left are exactly the judgement calls we make.</a:t>
             </a:r>
             <a:endParaRPr lang="en-US" dirty="0"/>
           </a:p>
@@ -3044,8 +3044,8 @@
         </p:nvSpPr>
         <p:spPr>
           <a:xfrm>
-            <a:off x="548640" y="5943600"/>
-            <a:ext cx="8229600" cy="365760"/>
+            <a:off x="548640" y="5212080"/>
+            <a:ext cx="8229600" cy="274320"/>
           </a:xfrm>
           <a:prstGeom prst="rect">
             <a:avLst/>
@@ -3061,7 +3061,7 @@
               <a:buNone/>
             </a:pPr>
             <a:r>
-              <a:rPr lang="en-US" sz="1300" i="1" dirty="0">
+              <a:rPr lang="en-US" sz="1200" dirty="0">
                 <a:solidFill>
                   <a:srgbClr val="9B9B9B"/>
                 </a:solidFill>
@@ -3069,9 +3069,165 @@
                 <a:ea typeface="Adobe Clean" pitchFamily="34" charset="-122"/>
                 <a:cs typeface="Adobe Clean" pitchFamily="34" charset="-120"/>
               </a:rPr>
-              <a:t>A hands-on demo for the AEP Support team</a:t>
-            </a:r>
-            <a:endParaRPr lang="en-US" sz="1300" dirty="0"/>
+              <a:t>Presented by</a:t>
+            </a:r>
+            <a:endParaRPr lang="en-US" sz="1200" dirty="0"/>
+          </a:p>
+        </p:txBody>
+      </p:sp>
+      <p:sp>
+        <p:nvSpPr>
+          <p:cNvPr id="9" name="Text 7"/>
+          <p:cNvSpPr txBox="1"/>
+          <p:nvPr/>
+        </p:nvSpPr>
+        <p:spPr>
+          <a:xfrm>
+            <a:off x="548640" y="5468112"/>
+            <a:ext cx="8229600" cy="411480"/>
+          </a:xfrm>
+          <a:prstGeom prst="rect">
+            <a:avLst/>
+          </a:prstGeom>
+          <a:noFill/>
+          <a:ln/>
+        </p:spPr>
+        <p:txBody>
+          <a:bodyPr wrap="square" lIns="0" tIns="0" rIns="0" bIns="0" rtlCol="0" anchor="ctr"/>
+          <a:lstStyle/>
+          <a:p>
+            <a:pPr indent="0" marL="0">
+              <a:buNone/>
+            </a:pPr>
+            <a:r>
+              <a:rPr lang="en-US" sz="2200" b="1" dirty="0">
+                <a:solidFill>
+                  <a:srgbClr val="FFFFFF"/>
+                </a:solidFill>
+                <a:latin typeface="Adobe Clean" pitchFamily="34" charset="0"/>
+                <a:ea typeface="Adobe Clean" pitchFamily="34" charset="-122"/>
+                <a:cs typeface="Adobe Clean" pitchFamily="34" charset="-120"/>
+              </a:rPr>
+              <a:t>Prince Parvat</a:t>
+            </a:r>
+            <a:endParaRPr lang="en-US" sz="2200" dirty="0"/>
+          </a:p>
+        </p:txBody>
+      </p:sp>
+      <p:sp>
+        <p:nvSpPr>
+          <p:cNvPr id="10" name="Text 8"/>
+          <p:cNvSpPr txBox="1"/>
+          <p:nvPr/>
+        </p:nvSpPr>
+        <p:spPr>
+          <a:xfrm>
+            <a:off x="548640" y="5907024"/>
+            <a:ext cx="8229600" cy="320040"/>
+          </a:xfrm>
+          <a:prstGeom prst="rect">
+            <a:avLst/>
+          </a:prstGeom>
+          <a:noFill/>
+          <a:ln/>
+        </p:spPr>
+        <p:txBody>
+          <a:bodyPr wrap="square" lIns="0" tIns="0" rIns="0" bIns="0" rtlCol="0" anchor="ctr"/>
+          <a:lstStyle/>
+          <a:p>
+            <a:pPr indent="0" marL="0">
+              <a:buNone/>
+            </a:pPr>
+            <a:r>
+              <a:rPr lang="en-US" sz="1400" dirty="0">
+                <a:solidFill>
+                  <a:srgbClr val="FFA311"/>
+                </a:solidFill>
+                <a:latin typeface="Adobe Clean" pitchFamily="34" charset="0"/>
+                <a:ea typeface="Adobe Clean" pitchFamily="34" charset="-122"/>
+                <a:cs typeface="Adobe Clean" pitchFamily="34" charset="-120"/>
+              </a:rPr>
+              <a:t>Technical Product Consultant 3</a:t>
+            </a:r>
+            <a:endParaRPr lang="en-US" sz="1400" dirty="0"/>
+          </a:p>
+        </p:txBody>
+      </p:sp>
+      <p:sp>
+        <p:nvSpPr>
+          <p:cNvPr id="12" name="Text 9"/>
+          <p:cNvSpPr txBox="1"/>
+          <p:nvPr/>
+        </p:nvSpPr>
+        <p:spPr>
+          <a:xfrm>
+            <a:off x="457200" y="6473952"/>
+            <a:ext cx="8686800" cy="274320"/>
+          </a:xfrm>
+          <a:prstGeom prst="rect">
+            <a:avLst/>
+          </a:prstGeom>
+          <a:noFill/>
+          <a:ln/>
+        </p:spPr>
+        <p:txBody>
+          <a:bodyPr wrap="square" lIns="0" tIns="0" rIns="0" bIns="0" rtlCol="0" anchor="ctr"/>
+          <a:lstStyle/>
+          <a:p>
+            <a:pPr indent="0" marL="0">
+              <a:buNone/>
+            </a:pPr>
+            <a:r>
+              <a:rPr lang="en-US" sz="900" dirty="0">
+                <a:solidFill>
+                  <a:srgbClr val="8A8A8A"/>
+                </a:solidFill>
+                <a:latin typeface="Adobe Clean" pitchFamily="34" charset="0"/>
+                <a:ea typeface="Adobe Clean" pitchFamily="34" charset="-122"/>
+                <a:cs typeface="Adobe Clean" pitchFamily="34" charset="-120"/>
+              </a:rPr>
+              <a:t>© 2026 Adobe. All Rights Reserved. Adobe Confidential.</a:t>
+            </a:r>
+            <a:endParaRPr lang="en-US" sz="900" dirty="0"/>
+          </a:p>
+        </p:txBody>
+      </p:sp>
+      <p:sp>
+        <p:nvSpPr>
+          <p:cNvPr id="13" name="Text 10"/>
+          <p:cNvSpPr txBox="1"/>
+          <p:nvPr/>
+        </p:nvSpPr>
+        <p:spPr>
+          <a:xfrm>
+            <a:off x="11155680" y="6473952"/>
+            <a:ext cx="640080" cy="274320"/>
+          </a:xfrm>
+          <a:prstGeom prst="rect">
+            <a:avLst/>
+          </a:prstGeom>
+          <a:noFill/>
+          <a:ln/>
+        </p:spPr>
+        <p:txBody>
+          <a:bodyPr wrap="square" lIns="0" tIns="0" rIns="0" bIns="0" rtlCol="0" anchor="ctr"/>
+          <a:lstStyle/>
+          <a:p>
+            <a:pPr algn="r" indent="0" marL="0">
+              <a:buNone/>
+            </a:pPr>
+            <a:r>
+              <a:rPr lang="en-US" sz="900" dirty="0">
+                <a:solidFill>
+                  <a:srgbClr val="8A8A8A"/>
+                </a:solidFill>
+                <a:latin typeface="Adobe Clean" pitchFamily="34" charset="0"/>
+                <a:ea typeface="Adobe Clean" pitchFamily="34" charset="-122"/>
+                <a:cs typeface="Adobe Clean" pitchFamily="34" charset="-120"/>
+              </a:rPr>
+              <a:t>1</a:t>
+            </a:r>
+            <a:endParaRPr lang="en-US" sz="900" dirty="0"/>
           </a:p>
         </p:txBody>
       </p:sp>
@@ -4327,6 +4483,84 @@
           </a:p>
         </p:txBody>
       </p:sp>
+      <p:sp>
+        <p:nvSpPr>
+          <p:cNvPr id="36" name="Text 33"/>
+          <p:cNvSpPr txBox="1"/>
+          <p:nvPr/>
+        </p:nvSpPr>
+        <p:spPr>
+          <a:xfrm>
+            <a:off x="457200" y="6473952"/>
+            <a:ext cx="8686800" cy="274320"/>
+          </a:xfrm>
+          <a:prstGeom prst="rect">
+            <a:avLst/>
+          </a:prstGeom>
+          <a:noFill/>
+          <a:ln/>
+        </p:spPr>
+        <p:txBody>
+          <a:bodyPr wrap="square" lIns="0" tIns="0" rIns="0" bIns="0" rtlCol="0" anchor="ctr"/>
+          <a:lstStyle/>
+          <a:p>
+            <a:pPr indent="0" marL="0">
+              <a:buNone/>
+            </a:pPr>
+            <a:r>
+              <a:rPr lang="en-US" sz="900" dirty="0">
+                <a:solidFill>
+                  <a:srgbClr val="A3A3A3"/>
+                </a:solidFill>
+                <a:latin typeface="Adobe Clean" pitchFamily="34" charset="0"/>
+                <a:ea typeface="Adobe Clean" pitchFamily="34" charset="-122"/>
+                <a:cs typeface="Adobe Clean" pitchFamily="34" charset="-120"/>
+              </a:rPr>
+              <a:t>© 2026 Adobe. All Rights Reserved. Adobe Confidential.</a:t>
+            </a:r>
+            <a:endParaRPr lang="en-US" sz="900" dirty="0"/>
+          </a:p>
+        </p:txBody>
+      </p:sp>
+      <p:sp>
+        <p:nvSpPr>
+          <p:cNvPr id="37" name="Text 34"/>
+          <p:cNvSpPr txBox="1"/>
+          <p:nvPr/>
+        </p:nvSpPr>
+        <p:spPr>
+          <a:xfrm>
+            <a:off x="11155680" y="6473952"/>
+            <a:ext cx="640080" cy="274320"/>
+          </a:xfrm>
+          <a:prstGeom prst="rect">
+            <a:avLst/>
+          </a:prstGeom>
+          <a:noFill/>
+          <a:ln/>
+        </p:spPr>
+        <p:txBody>
+          <a:bodyPr wrap="square" lIns="0" tIns="0" rIns="0" bIns="0" rtlCol="0" anchor="ctr"/>
+          <a:lstStyle/>
+          <a:p>
+            <a:pPr algn="r" indent="0" marL="0">
+              <a:buNone/>
+            </a:pPr>
+            <a:r>
+              <a:rPr lang="en-US" sz="900" dirty="0">
+                <a:solidFill>
+                  <a:srgbClr val="A3A3A3"/>
+                </a:solidFill>
+                <a:latin typeface="Adobe Clean" pitchFamily="34" charset="0"/>
+                <a:ea typeface="Adobe Clean" pitchFamily="34" charset="-122"/>
+                <a:cs typeface="Adobe Clean" pitchFamily="34" charset="-120"/>
+              </a:rPr>
+              <a:t>10</a:t>
+            </a:r>
+            <a:endParaRPr lang="en-US" sz="900" dirty="0"/>
+          </a:p>
+        </p:txBody>
+      </p:sp>
     </p:spTree>
   </p:cSld>
   <p:clrMapOvr>
@@ -5140,6 +5374,84 @@
           </a:p>
         </p:txBody>
       </p:sp>
+      <p:sp>
+        <p:nvSpPr>
+          <p:cNvPr id="24" name="Text 21"/>
+          <p:cNvSpPr txBox="1"/>
+          <p:nvPr/>
+        </p:nvSpPr>
+        <p:spPr>
+          <a:xfrm>
+            <a:off x="457200" y="6473952"/>
+            <a:ext cx="8686800" cy="274320"/>
+          </a:xfrm>
+          <a:prstGeom prst="rect">
+            <a:avLst/>
+          </a:prstGeom>
+          <a:noFill/>
+          <a:ln/>
+        </p:spPr>
+        <p:txBody>
+          <a:bodyPr wrap="square" lIns="0" tIns="0" rIns="0" bIns="0" rtlCol="0" anchor="ctr"/>
+          <a:lstStyle/>
+          <a:p>
+            <a:pPr indent="0" marL="0">
+              <a:buNone/>
+            </a:pPr>
+            <a:r>
+              <a:rPr lang="en-US" sz="900" dirty="0">
+                <a:solidFill>
+                  <a:srgbClr val="8A8A8A"/>
+                </a:solidFill>
+                <a:latin typeface="Adobe Clean" pitchFamily="34" charset="0"/>
+                <a:ea typeface="Adobe Clean" pitchFamily="34" charset="-122"/>
+                <a:cs typeface="Adobe Clean" pitchFamily="34" charset="-120"/>
+              </a:rPr>
+              <a:t>© 2026 Adobe. All Rights Reserved. Adobe Confidential.</a:t>
+            </a:r>
+            <a:endParaRPr lang="en-US" sz="900" dirty="0"/>
+          </a:p>
+        </p:txBody>
+      </p:sp>
+      <p:sp>
+        <p:nvSpPr>
+          <p:cNvPr id="25" name="Text 22"/>
+          <p:cNvSpPr txBox="1"/>
+          <p:nvPr/>
+        </p:nvSpPr>
+        <p:spPr>
+          <a:xfrm>
+            <a:off x="11155680" y="6473952"/>
+            <a:ext cx="640080" cy="274320"/>
+          </a:xfrm>
+          <a:prstGeom prst="rect">
+            <a:avLst/>
+          </a:prstGeom>
+          <a:noFill/>
+          <a:ln/>
+        </p:spPr>
+        <p:txBody>
+          <a:bodyPr wrap="square" lIns="0" tIns="0" rIns="0" bIns="0" rtlCol="0" anchor="ctr"/>
+          <a:lstStyle/>
+          <a:p>
+            <a:pPr algn="r" indent="0" marL="0">
+              <a:buNone/>
+            </a:pPr>
+            <a:r>
+              <a:rPr lang="en-US" sz="900" dirty="0">
+                <a:solidFill>
+                  <a:srgbClr val="8A8A8A"/>
+                </a:solidFill>
+                <a:latin typeface="Adobe Clean" pitchFamily="34" charset="0"/>
+                <a:ea typeface="Adobe Clean" pitchFamily="34" charset="-122"/>
+                <a:cs typeface="Adobe Clean" pitchFamily="34" charset="-120"/>
+              </a:rPr>
+              <a:t>11</a:t>
+            </a:r>
+            <a:endParaRPr lang="en-US" sz="900" dirty="0"/>
+          </a:p>
+        </p:txBody>
+      </p:sp>
     </p:spTree>
   </p:cSld>
   <p:clrMapOvr>
@@ -5911,6 +6223,84 @@
           </a:p>
         </p:txBody>
       </p:sp>
+      <p:sp>
+        <p:nvSpPr>
+          <p:cNvPr id="24" name="Text 21"/>
+          <p:cNvSpPr txBox="1"/>
+          <p:nvPr/>
+        </p:nvSpPr>
+        <p:spPr>
+          <a:xfrm>
+            <a:off x="457200" y="6473952"/>
+            <a:ext cx="8686800" cy="274320"/>
+          </a:xfrm>
+          <a:prstGeom prst="rect">
+            <a:avLst/>
+          </a:prstGeom>
+          <a:noFill/>
+          <a:ln/>
+        </p:spPr>
+        <p:txBody>
+          <a:bodyPr wrap="square" lIns="0" tIns="0" rIns="0" bIns="0" rtlCol="0" anchor="ctr"/>
+          <a:lstStyle/>
+          <a:p>
+            <a:pPr indent="0" marL="0">
+              <a:buNone/>
+            </a:pPr>
+            <a:r>
+              <a:rPr lang="en-US" sz="900" dirty="0">
+                <a:solidFill>
+                  <a:srgbClr val="A3A3A3"/>
+                </a:solidFill>
+                <a:latin typeface="Adobe Clean" pitchFamily="34" charset="0"/>
+                <a:ea typeface="Adobe Clean" pitchFamily="34" charset="-122"/>
+                <a:cs typeface="Adobe Clean" pitchFamily="34" charset="-120"/>
+              </a:rPr>
+              <a:t>© 2026 Adobe. All Rights Reserved. Adobe Confidential.</a:t>
+            </a:r>
+            <a:endParaRPr lang="en-US" sz="900" dirty="0"/>
+          </a:p>
+        </p:txBody>
+      </p:sp>
+      <p:sp>
+        <p:nvSpPr>
+          <p:cNvPr id="25" name="Text 22"/>
+          <p:cNvSpPr txBox="1"/>
+          <p:nvPr/>
+        </p:nvSpPr>
+        <p:spPr>
+          <a:xfrm>
+            <a:off x="11155680" y="6473952"/>
+            <a:ext cx="640080" cy="274320"/>
+          </a:xfrm>
+          <a:prstGeom prst="rect">
+            <a:avLst/>
+          </a:prstGeom>
+          <a:noFill/>
+          <a:ln/>
+        </p:spPr>
+        <p:txBody>
+          <a:bodyPr wrap="square" lIns="0" tIns="0" rIns="0" bIns="0" rtlCol="0" anchor="ctr"/>
+          <a:lstStyle/>
+          <a:p>
+            <a:pPr algn="r" indent="0" marL="0">
+              <a:buNone/>
+            </a:pPr>
+            <a:r>
+              <a:rPr lang="en-US" sz="900" dirty="0">
+                <a:solidFill>
+                  <a:srgbClr val="A3A3A3"/>
+                </a:solidFill>
+                <a:latin typeface="Adobe Clean" pitchFamily="34" charset="0"/>
+                <a:ea typeface="Adobe Clean" pitchFamily="34" charset="-122"/>
+                <a:cs typeface="Adobe Clean" pitchFamily="34" charset="-120"/>
+              </a:rPr>
+              <a:t>12</a:t>
+            </a:r>
+            <a:endParaRPr lang="en-US" sz="900" dirty="0"/>
+          </a:p>
+        </p:txBody>
+      </p:sp>
     </p:spTree>
   </p:cSld>
   <p:clrMapOvr>
@@ -6682,6 +7072,84 @@
           </a:p>
         </p:txBody>
       </p:sp>
+      <p:sp>
+        <p:nvSpPr>
+          <p:cNvPr id="24" name="Text 21"/>
+          <p:cNvSpPr txBox="1"/>
+          <p:nvPr/>
+        </p:nvSpPr>
+        <p:spPr>
+          <a:xfrm>
+            <a:off x="457200" y="6473952"/>
+            <a:ext cx="8686800" cy="274320"/>
+          </a:xfrm>
+          <a:prstGeom prst="rect">
+            <a:avLst/>
+          </a:prstGeom>
+          <a:noFill/>
+          <a:ln/>
+        </p:spPr>
+        <p:txBody>
+          <a:bodyPr wrap="square" lIns="0" tIns="0" rIns="0" bIns="0" rtlCol="0" anchor="ctr"/>
+          <a:lstStyle/>
+          <a:p>
+            <a:pPr indent="0" marL="0">
+              <a:buNone/>
+            </a:pPr>
+            <a:r>
+              <a:rPr lang="en-US" sz="900" dirty="0">
+                <a:solidFill>
+                  <a:srgbClr val="A3A3A3"/>
+                </a:solidFill>
+                <a:latin typeface="Adobe Clean" pitchFamily="34" charset="0"/>
+                <a:ea typeface="Adobe Clean" pitchFamily="34" charset="-122"/>
+                <a:cs typeface="Adobe Clean" pitchFamily="34" charset="-120"/>
+              </a:rPr>
+              <a:t>© 2026 Adobe. All Rights Reserved. Adobe Confidential.</a:t>
+            </a:r>
+            <a:endParaRPr lang="en-US" sz="900" dirty="0"/>
+          </a:p>
+        </p:txBody>
+      </p:sp>
+      <p:sp>
+        <p:nvSpPr>
+          <p:cNvPr id="25" name="Text 22"/>
+          <p:cNvSpPr txBox="1"/>
+          <p:nvPr/>
+        </p:nvSpPr>
+        <p:spPr>
+          <a:xfrm>
+            <a:off x="11155680" y="6473952"/>
+            <a:ext cx="640080" cy="274320"/>
+          </a:xfrm>
+          <a:prstGeom prst="rect">
+            <a:avLst/>
+          </a:prstGeom>
+          <a:noFill/>
+          <a:ln/>
+        </p:spPr>
+        <p:txBody>
+          <a:bodyPr wrap="square" lIns="0" tIns="0" rIns="0" bIns="0" rtlCol="0" anchor="ctr"/>
+          <a:lstStyle/>
+          <a:p>
+            <a:pPr algn="r" indent="0" marL="0">
+              <a:buNone/>
+            </a:pPr>
+            <a:r>
+              <a:rPr lang="en-US" sz="900" dirty="0">
+                <a:solidFill>
+                  <a:srgbClr val="A3A3A3"/>
+                </a:solidFill>
+                <a:latin typeface="Adobe Clean" pitchFamily="34" charset="0"/>
+                <a:ea typeface="Adobe Clean" pitchFamily="34" charset="-122"/>
+                <a:cs typeface="Adobe Clean" pitchFamily="34" charset="-120"/>
+              </a:rPr>
+              <a:t>13</a:t>
+            </a:r>
+            <a:endParaRPr lang="en-US" sz="900" dirty="0"/>
+          </a:p>
+        </p:txBody>
+      </p:sp>
     </p:spTree>
   </p:cSld>
   <p:clrMapOvr>
@@ -7453,6 +7921,84 @@
           </a:p>
         </p:txBody>
       </p:sp>
+      <p:sp>
+        <p:nvSpPr>
+          <p:cNvPr id="24" name="Text 21"/>
+          <p:cNvSpPr txBox="1"/>
+          <p:nvPr/>
+        </p:nvSpPr>
+        <p:spPr>
+          <a:xfrm>
+            <a:off x="457200" y="6473952"/>
+            <a:ext cx="8686800" cy="274320"/>
+          </a:xfrm>
+          <a:prstGeom prst="rect">
+            <a:avLst/>
+          </a:prstGeom>
+          <a:noFill/>
+          <a:ln/>
+        </p:spPr>
+        <p:txBody>
+          <a:bodyPr wrap="square" lIns="0" tIns="0" rIns="0" bIns="0" rtlCol="0" anchor="ctr"/>
+          <a:lstStyle/>
+          <a:p>
+            <a:pPr indent="0" marL="0">
+              <a:buNone/>
+            </a:pPr>
+            <a:r>
+              <a:rPr lang="en-US" sz="900" dirty="0">
+                <a:solidFill>
+                  <a:srgbClr val="A3A3A3"/>
+                </a:solidFill>
+                <a:latin typeface="Adobe Clean" pitchFamily="34" charset="0"/>
+                <a:ea typeface="Adobe Clean" pitchFamily="34" charset="-122"/>
+                <a:cs typeface="Adobe Clean" pitchFamily="34" charset="-120"/>
+              </a:rPr>
+              <a:t>© 2026 Adobe. All Rights Reserved. Adobe Confidential.</a:t>
+            </a:r>
+            <a:endParaRPr lang="en-US" sz="900" dirty="0"/>
+          </a:p>
+        </p:txBody>
+      </p:sp>
+      <p:sp>
+        <p:nvSpPr>
+          <p:cNvPr id="25" name="Text 22"/>
+          <p:cNvSpPr txBox="1"/>
+          <p:nvPr/>
+        </p:nvSpPr>
+        <p:spPr>
+          <a:xfrm>
+            <a:off x="11155680" y="6473952"/>
+            <a:ext cx="640080" cy="274320"/>
+          </a:xfrm>
+          <a:prstGeom prst="rect">
+            <a:avLst/>
+          </a:prstGeom>
+          <a:noFill/>
+          <a:ln/>
+        </p:spPr>
+        <p:txBody>
+          <a:bodyPr wrap="square" lIns="0" tIns="0" rIns="0" bIns="0" rtlCol="0" anchor="ctr"/>
+          <a:lstStyle/>
+          <a:p>
+            <a:pPr algn="r" indent="0" marL="0">
+              <a:buNone/>
+            </a:pPr>
+            <a:r>
+              <a:rPr lang="en-US" sz="900" dirty="0">
+                <a:solidFill>
+                  <a:srgbClr val="A3A3A3"/>
+                </a:solidFill>
+                <a:latin typeface="Adobe Clean" pitchFamily="34" charset="0"/>
+                <a:ea typeface="Adobe Clean" pitchFamily="34" charset="-122"/>
+                <a:cs typeface="Adobe Clean" pitchFamily="34" charset="-120"/>
+              </a:rPr>
+              <a:t>14</a:t>
+            </a:r>
+            <a:endParaRPr lang="en-US" sz="900" dirty="0"/>
+          </a:p>
+        </p:txBody>
+      </p:sp>
     </p:spTree>
   </p:cSld>
   <p:clrMapOvr>
@@ -8425,6 +8971,84 @@
           </a:p>
         </p:txBody>
       </p:sp>
+      <p:sp>
+        <p:nvSpPr>
+          <p:cNvPr id="32" name="Text 29"/>
+          <p:cNvSpPr txBox="1"/>
+          <p:nvPr/>
+        </p:nvSpPr>
+        <p:spPr>
+          <a:xfrm>
+            <a:off x="457200" y="6473952"/>
+            <a:ext cx="8686800" cy="274320"/>
+          </a:xfrm>
+          <a:prstGeom prst="rect">
+            <a:avLst/>
+          </a:prstGeom>
+          <a:noFill/>
+          <a:ln/>
+        </p:spPr>
+        <p:txBody>
+          <a:bodyPr wrap="square" lIns="0" tIns="0" rIns="0" bIns="0" rtlCol="0" anchor="ctr"/>
+          <a:lstStyle/>
+          <a:p>
+            <a:pPr indent="0" marL="0">
+              <a:buNone/>
+            </a:pPr>
+            <a:r>
+              <a:rPr lang="en-US" sz="900" dirty="0">
+                <a:solidFill>
+                  <a:srgbClr val="A3A3A3"/>
+                </a:solidFill>
+                <a:latin typeface="Adobe Clean" pitchFamily="34" charset="0"/>
+                <a:ea typeface="Adobe Clean" pitchFamily="34" charset="-122"/>
+                <a:cs typeface="Adobe Clean" pitchFamily="34" charset="-120"/>
+              </a:rPr>
+              <a:t>© 2026 Adobe. All Rights Reserved. Adobe Confidential.</a:t>
+            </a:r>
+            <a:endParaRPr lang="en-US" sz="900" dirty="0"/>
+          </a:p>
+        </p:txBody>
+      </p:sp>
+      <p:sp>
+        <p:nvSpPr>
+          <p:cNvPr id="33" name="Text 30"/>
+          <p:cNvSpPr txBox="1"/>
+          <p:nvPr/>
+        </p:nvSpPr>
+        <p:spPr>
+          <a:xfrm>
+            <a:off x="11155680" y="6473952"/>
+            <a:ext cx="640080" cy="274320"/>
+          </a:xfrm>
+          <a:prstGeom prst="rect">
+            <a:avLst/>
+          </a:prstGeom>
+          <a:noFill/>
+          <a:ln/>
+        </p:spPr>
+        <p:txBody>
+          <a:bodyPr wrap="square" lIns="0" tIns="0" rIns="0" bIns="0" rtlCol="0" anchor="ctr"/>
+          <a:lstStyle/>
+          <a:p>
+            <a:pPr algn="r" indent="0" marL="0">
+              <a:buNone/>
+            </a:pPr>
+            <a:r>
+              <a:rPr lang="en-US" sz="900" dirty="0">
+                <a:solidFill>
+                  <a:srgbClr val="A3A3A3"/>
+                </a:solidFill>
+                <a:latin typeface="Adobe Clean" pitchFamily="34" charset="0"/>
+                <a:ea typeface="Adobe Clean" pitchFamily="34" charset="-122"/>
+                <a:cs typeface="Adobe Clean" pitchFamily="34" charset="-120"/>
+              </a:rPr>
+              <a:t>15</a:t>
+            </a:r>
+            <a:endParaRPr lang="en-US" sz="900" dirty="0"/>
+          </a:p>
+        </p:txBody>
+      </p:sp>
     </p:spTree>
   </p:cSld>
   <p:clrMapOvr>
@@ -10312,6 +10936,84 @@
           </a:p>
         </p:txBody>
       </p:sp>
+      <p:sp>
+        <p:nvSpPr>
+          <p:cNvPr id="61" name="Text 58"/>
+          <p:cNvSpPr txBox="1"/>
+          <p:nvPr/>
+        </p:nvSpPr>
+        <p:spPr>
+          <a:xfrm>
+            <a:off x="457200" y="6473952"/>
+            <a:ext cx="8686800" cy="274320"/>
+          </a:xfrm>
+          <a:prstGeom prst="rect">
+            <a:avLst/>
+          </a:prstGeom>
+          <a:noFill/>
+          <a:ln/>
+        </p:spPr>
+        <p:txBody>
+          <a:bodyPr wrap="square" lIns="0" tIns="0" rIns="0" bIns="0" rtlCol="0" anchor="ctr"/>
+          <a:lstStyle/>
+          <a:p>
+            <a:pPr indent="0" marL="0">
+              <a:buNone/>
+            </a:pPr>
+            <a:r>
+              <a:rPr lang="en-US" sz="900" dirty="0">
+                <a:solidFill>
+                  <a:srgbClr val="A3A3A3"/>
+                </a:solidFill>
+                <a:latin typeface="Adobe Clean" pitchFamily="34" charset="0"/>
+                <a:ea typeface="Adobe Clean" pitchFamily="34" charset="-122"/>
+                <a:cs typeface="Adobe Clean" pitchFamily="34" charset="-120"/>
+              </a:rPr>
+              <a:t>© 2026 Adobe. All Rights Reserved. Adobe Confidential.</a:t>
+            </a:r>
+            <a:endParaRPr lang="en-US" sz="900" dirty="0"/>
+          </a:p>
+        </p:txBody>
+      </p:sp>
+      <p:sp>
+        <p:nvSpPr>
+          <p:cNvPr id="62" name="Text 59"/>
+          <p:cNvSpPr txBox="1"/>
+          <p:nvPr/>
+        </p:nvSpPr>
+        <p:spPr>
+          <a:xfrm>
+            <a:off x="11155680" y="6473952"/>
+            <a:ext cx="640080" cy="274320"/>
+          </a:xfrm>
+          <a:prstGeom prst="rect">
+            <a:avLst/>
+          </a:prstGeom>
+          <a:noFill/>
+          <a:ln/>
+        </p:spPr>
+        <p:txBody>
+          <a:bodyPr wrap="square" lIns="0" tIns="0" rIns="0" bIns="0" rtlCol="0" anchor="ctr"/>
+          <a:lstStyle/>
+          <a:p>
+            <a:pPr algn="r" indent="0" marL="0">
+              <a:buNone/>
+            </a:pPr>
+            <a:r>
+              <a:rPr lang="en-US" sz="900" dirty="0">
+                <a:solidFill>
+                  <a:srgbClr val="A3A3A3"/>
+                </a:solidFill>
+                <a:latin typeface="Adobe Clean" pitchFamily="34" charset="0"/>
+                <a:ea typeface="Adobe Clean" pitchFamily="34" charset="-122"/>
+                <a:cs typeface="Adobe Clean" pitchFamily="34" charset="-120"/>
+              </a:rPr>
+              <a:t>16</a:t>
+            </a:r>
+            <a:endParaRPr lang="en-US" sz="900" dirty="0"/>
+          </a:p>
+        </p:txBody>
+      </p:sp>
     </p:spTree>
   </p:cSld>
   <p:clrMapOvr>
@@ -10941,6 +11643,84 @@
           </a:p>
         </p:txBody>
       </p:sp>
+      <p:sp>
+        <p:nvSpPr>
+          <p:cNvPr id="19" name="Text 16"/>
+          <p:cNvSpPr txBox="1"/>
+          <p:nvPr/>
+        </p:nvSpPr>
+        <p:spPr>
+          <a:xfrm>
+            <a:off x="457200" y="6473952"/>
+            <a:ext cx="8686800" cy="274320"/>
+          </a:xfrm>
+          <a:prstGeom prst="rect">
+            <a:avLst/>
+          </a:prstGeom>
+          <a:noFill/>
+          <a:ln/>
+        </p:spPr>
+        <p:txBody>
+          <a:bodyPr wrap="square" lIns="0" tIns="0" rIns="0" bIns="0" rtlCol="0" anchor="ctr"/>
+          <a:lstStyle/>
+          <a:p>
+            <a:pPr indent="0" marL="0">
+              <a:buNone/>
+            </a:pPr>
+            <a:r>
+              <a:rPr lang="en-US" sz="900" dirty="0">
+                <a:solidFill>
+                  <a:srgbClr val="8A8A8A"/>
+                </a:solidFill>
+                <a:latin typeface="Adobe Clean" pitchFamily="34" charset="0"/>
+                <a:ea typeface="Adobe Clean" pitchFamily="34" charset="-122"/>
+                <a:cs typeface="Adobe Clean" pitchFamily="34" charset="-120"/>
+              </a:rPr>
+              <a:t>© 2026 Adobe. All Rights Reserved. Adobe Confidential.</a:t>
+            </a:r>
+            <a:endParaRPr lang="en-US" sz="900" dirty="0"/>
+          </a:p>
+        </p:txBody>
+      </p:sp>
+      <p:sp>
+        <p:nvSpPr>
+          <p:cNvPr id="20" name="Text 17"/>
+          <p:cNvSpPr txBox="1"/>
+          <p:nvPr/>
+        </p:nvSpPr>
+        <p:spPr>
+          <a:xfrm>
+            <a:off x="11155680" y="6473952"/>
+            <a:ext cx="640080" cy="274320"/>
+          </a:xfrm>
+          <a:prstGeom prst="rect">
+            <a:avLst/>
+          </a:prstGeom>
+          <a:noFill/>
+          <a:ln/>
+        </p:spPr>
+        <p:txBody>
+          <a:bodyPr wrap="square" lIns="0" tIns="0" rIns="0" bIns="0" rtlCol="0" anchor="ctr"/>
+          <a:lstStyle/>
+          <a:p>
+            <a:pPr algn="r" indent="0" marL="0">
+              <a:buNone/>
+            </a:pPr>
+            <a:r>
+              <a:rPr lang="en-US" sz="900" dirty="0">
+                <a:solidFill>
+                  <a:srgbClr val="8A8A8A"/>
+                </a:solidFill>
+                <a:latin typeface="Adobe Clean" pitchFamily="34" charset="0"/>
+                <a:ea typeface="Adobe Clean" pitchFamily="34" charset="-122"/>
+                <a:cs typeface="Adobe Clean" pitchFamily="34" charset="-120"/>
+              </a:rPr>
+              <a:t>17</a:t>
+            </a:r>
+            <a:endParaRPr lang="en-US" sz="900" dirty="0"/>
+          </a:p>
+        </p:txBody>
+      </p:sp>
     </p:spTree>
   </p:cSld>
   <p:clrMapOvr>
@@ -11316,6 +12096,84 @@
           </a:p>
         </p:txBody>
       </p:sp>
+      <p:sp>
+        <p:nvSpPr>
+          <p:cNvPr id="12" name="Text 9"/>
+          <p:cNvSpPr txBox="1"/>
+          <p:nvPr/>
+        </p:nvSpPr>
+        <p:spPr>
+          <a:xfrm>
+            <a:off x="457200" y="6473952"/>
+            <a:ext cx="8686800" cy="274320"/>
+          </a:xfrm>
+          <a:prstGeom prst="rect">
+            <a:avLst/>
+          </a:prstGeom>
+          <a:noFill/>
+          <a:ln/>
+        </p:spPr>
+        <p:txBody>
+          <a:bodyPr wrap="square" lIns="0" tIns="0" rIns="0" bIns="0" rtlCol="0" anchor="ctr"/>
+          <a:lstStyle/>
+          <a:p>
+            <a:pPr indent="0" marL="0">
+              <a:buNone/>
+            </a:pPr>
+            <a:r>
+              <a:rPr lang="en-US" sz="900" dirty="0">
+                <a:solidFill>
+                  <a:srgbClr val="A3A3A3"/>
+                </a:solidFill>
+                <a:latin typeface="Adobe Clean" pitchFamily="34" charset="0"/>
+                <a:ea typeface="Adobe Clean" pitchFamily="34" charset="-122"/>
+                <a:cs typeface="Adobe Clean" pitchFamily="34" charset="-120"/>
+              </a:rPr>
+              <a:t>© 2026 Adobe. All Rights Reserved. Adobe Confidential.</a:t>
+            </a:r>
+            <a:endParaRPr lang="en-US" sz="900" dirty="0"/>
+          </a:p>
+        </p:txBody>
+      </p:sp>
+      <p:sp>
+        <p:nvSpPr>
+          <p:cNvPr id="13" name="Text 10"/>
+          <p:cNvSpPr txBox="1"/>
+          <p:nvPr/>
+        </p:nvSpPr>
+        <p:spPr>
+          <a:xfrm>
+            <a:off x="11155680" y="6473952"/>
+            <a:ext cx="640080" cy="274320"/>
+          </a:xfrm>
+          <a:prstGeom prst="rect">
+            <a:avLst/>
+          </a:prstGeom>
+          <a:noFill/>
+          <a:ln/>
+        </p:spPr>
+        <p:txBody>
+          <a:bodyPr wrap="square" lIns="0" tIns="0" rIns="0" bIns="0" rtlCol="0" anchor="ctr"/>
+          <a:lstStyle/>
+          <a:p>
+            <a:pPr algn="r" indent="0" marL="0">
+              <a:buNone/>
+            </a:pPr>
+            <a:r>
+              <a:rPr lang="en-US" sz="900" dirty="0">
+                <a:solidFill>
+                  <a:srgbClr val="A3A3A3"/>
+                </a:solidFill>
+                <a:latin typeface="Adobe Clean" pitchFamily="34" charset="0"/>
+                <a:ea typeface="Adobe Clean" pitchFamily="34" charset="-122"/>
+                <a:cs typeface="Adobe Clean" pitchFamily="34" charset="-120"/>
+              </a:rPr>
+              <a:t>18</a:t>
+            </a:r>
+            <a:endParaRPr lang="en-US" sz="900" dirty="0"/>
+          </a:p>
+        </p:txBody>
+      </p:sp>
     </p:spTree>
   </p:cSld>
   <p:clrMapOvr>
@@ -12087,6 +12945,84 @@
           </a:p>
         </p:txBody>
       </p:sp>
+      <p:sp>
+        <p:nvSpPr>
+          <p:cNvPr id="24" name="Text 21"/>
+          <p:cNvSpPr txBox="1"/>
+          <p:nvPr/>
+        </p:nvSpPr>
+        <p:spPr>
+          <a:xfrm>
+            <a:off x="457200" y="6473952"/>
+            <a:ext cx="8686800" cy="274320"/>
+          </a:xfrm>
+          <a:prstGeom prst="rect">
+            <a:avLst/>
+          </a:prstGeom>
+          <a:noFill/>
+          <a:ln/>
+        </p:spPr>
+        <p:txBody>
+          <a:bodyPr wrap="square" lIns="0" tIns="0" rIns="0" bIns="0" rtlCol="0" anchor="ctr"/>
+          <a:lstStyle/>
+          <a:p>
+            <a:pPr indent="0" marL="0">
+              <a:buNone/>
+            </a:pPr>
+            <a:r>
+              <a:rPr lang="en-US" sz="900" dirty="0">
+                <a:solidFill>
+                  <a:srgbClr val="A3A3A3"/>
+                </a:solidFill>
+                <a:latin typeface="Adobe Clean" pitchFamily="34" charset="0"/>
+                <a:ea typeface="Adobe Clean" pitchFamily="34" charset="-122"/>
+                <a:cs typeface="Adobe Clean" pitchFamily="34" charset="-120"/>
+              </a:rPr>
+              <a:t>© 2026 Adobe. All Rights Reserved. Adobe Confidential.</a:t>
+            </a:r>
+            <a:endParaRPr lang="en-US" sz="900" dirty="0"/>
+          </a:p>
+        </p:txBody>
+      </p:sp>
+      <p:sp>
+        <p:nvSpPr>
+          <p:cNvPr id="25" name="Text 22"/>
+          <p:cNvSpPr txBox="1"/>
+          <p:nvPr/>
+        </p:nvSpPr>
+        <p:spPr>
+          <a:xfrm>
+            <a:off x="11155680" y="6473952"/>
+            <a:ext cx="640080" cy="274320"/>
+          </a:xfrm>
+          <a:prstGeom prst="rect">
+            <a:avLst/>
+          </a:prstGeom>
+          <a:noFill/>
+          <a:ln/>
+        </p:spPr>
+        <p:txBody>
+          <a:bodyPr wrap="square" lIns="0" tIns="0" rIns="0" bIns="0" rtlCol="0" anchor="ctr"/>
+          <a:lstStyle/>
+          <a:p>
+            <a:pPr algn="r" indent="0" marL="0">
+              <a:buNone/>
+            </a:pPr>
+            <a:r>
+              <a:rPr lang="en-US" sz="900" dirty="0">
+                <a:solidFill>
+                  <a:srgbClr val="A3A3A3"/>
+                </a:solidFill>
+                <a:latin typeface="Adobe Clean" pitchFamily="34" charset="0"/>
+                <a:ea typeface="Adobe Clean" pitchFamily="34" charset="-122"/>
+                <a:cs typeface="Adobe Clean" pitchFamily="34" charset="-120"/>
+              </a:rPr>
+              <a:t>19</a:t>
+            </a:r>
+            <a:endParaRPr lang="en-US" sz="900" dirty="0"/>
+          </a:p>
+        </p:txBody>
+      </p:sp>
     </p:spTree>
   </p:cSld>
   <p:clrMapOvr>
@@ -12152,7 +13088,7 @@
                 <a:ea typeface="Adobe Clean" pitchFamily="34" charset="-122"/>
                 <a:cs typeface="Adobe Clean" pitchFamily="34" charset="-120"/>
               </a:rPr>
-              <a:t>WHY THIS SESSION</a:t>
+              <a:t>AIM OF THIS SESSION</a:t>
             </a:r>
             <a:endParaRPr lang="en-US" sz="1250" dirty="0"/>
           </a:p>
@@ -12191,7 +13127,7 @@
                 <a:ea typeface="Adobe Clean" pitchFamily="34" charset="-122"/>
                 <a:cs typeface="Adobe Clean" pitchFamily="34" charset="-120"/>
               </a:rPr>
-              <a:t>We know AEP. Today we look one step upstream.</a:t>
+              <a:t>Understand the flow — and route cases with confidence</a:t>
             </a:r>
             <a:endParaRPr lang="en-US" sz="3200" dirty="0"/>
           </a:p>
@@ -12199,56 +13135,95 @@
       </p:sp>
       <p:sp>
         <p:nvSpPr>
-          <p:cNvPr id="4" name="Shape 2"/>
+          <p:cNvPr id="4" name="Text 2"/>
+          <p:cNvSpPr txBox="1"/>
+          <p:nvPr/>
+        </p:nvSpPr>
+        <p:spPr>
+          <a:xfrm>
+            <a:off x="548640" y="1371600"/>
+            <a:ext cx="11091672" cy="640080"/>
+          </a:xfrm>
+          <a:prstGeom prst="rect">
+            <a:avLst/>
+          </a:prstGeom>
+          <a:noFill/>
+          <a:ln/>
+        </p:spPr>
+        <p:txBody>
+          <a:bodyPr wrap="square" lIns="0" tIns="0" rIns="0" bIns="0" rtlCol="0" anchor="ctr"/>
+          <a:lstStyle/>
+          <a:p>
+            <a:pPr indent="0" marL="0">
+              <a:buNone/>
+            </a:pPr>
+            <a:r>
+              <a:rPr lang="en-US" sz="1400" dirty="0">
+                <a:solidFill>
+                  <a:srgbClr val="6B6B6B"/>
+                </a:solidFill>
+                <a:latin typeface="Adobe Clean" pitchFamily="34" charset="0"/>
+                <a:ea typeface="Adobe Clean" pitchFamily="34" charset="-122"/>
+                <a:cs typeface="Adobe Clean" pitchFamily="34" charset="-120"/>
+              </a:rPr>
+              <a:t>We are an AEP support team. We do not build or debug a customer’s Data Collection setup — but we must understand how website data reaches AEP so we can investigate, guide the customer, and route the case to the right team.</a:t>
+            </a:r>
+            <a:endParaRPr lang="en-US" sz="1400" dirty="0"/>
+          </a:p>
+        </p:txBody>
+      </p:sp>
+      <p:sp>
+        <p:nvSpPr>
+          <p:cNvPr id="5" name="Shape 3"/>
           <p:cNvSpPr/>
           <p:nvPr/>
         </p:nvSpPr>
         <p:spPr>
           <a:xfrm>
-            <a:off x="548640" y="1737360"/>
-            <a:ext cx="11091672" cy="1234440"/>
+            <a:off x="548640" y="2148840"/>
+            <a:ext cx="5362956" cy="3200400"/>
           </a:xfrm>
           <a:prstGeom prst="roundRect">
             <a:avLst>
-              <a:gd name="adj" fmla="val 5926"/>
+              <a:gd name="adj" fmla="val 2571"/>
             </a:avLst>
           </a:prstGeom>
           <a:solidFill>
-            <a:srgbClr val="FDECEA"/>
+            <a:srgbClr val="F7F7F7"/>
           </a:solidFill>
           <a:ln/>
         </p:spPr>
       </p:sp>
       <p:sp>
         <p:nvSpPr>
-          <p:cNvPr id="5" name="Shape 3"/>
+          <p:cNvPr id="6" name="Shape 4"/>
           <p:cNvSpPr/>
           <p:nvPr/>
         </p:nvSpPr>
         <p:spPr>
           <a:xfrm>
-            <a:off x="822960" y="2039112"/>
-            <a:ext cx="640080" cy="640080"/>
+            <a:off x="822960" y="2423160"/>
+            <a:ext cx="457200" cy="457200"/>
           </a:xfrm>
           <a:prstGeom prst="ellipse">
             <a:avLst/>
           </a:prstGeom>
           <a:solidFill>
-            <a:srgbClr val="EB1000"/>
+            <a:srgbClr val="0AA35B"/>
           </a:solidFill>
           <a:ln/>
         </p:spPr>
       </p:sp>
       <p:sp>
         <p:nvSpPr>
-          <p:cNvPr id="6" name="Text 4"/>
-          <p:cNvSpPr txBox="1"/>
-          <p:nvPr/>
-        </p:nvSpPr>
-        <p:spPr>
-          <a:xfrm>
-            <a:off x="822960" y="2039112"/>
-            <a:ext cx="640080" cy="640080"/>
+          <p:cNvPr id="7" name="Text 5"/>
+          <p:cNvSpPr txBox="1"/>
+          <p:nvPr/>
+        </p:nvSpPr>
+        <p:spPr>
+          <a:xfrm>
+            <a:off x="822960" y="2423160"/>
+            <a:ext cx="457200" cy="457200"/>
           </a:xfrm>
           <a:prstGeom prst="rect">
             <a:avLst/>
@@ -12264,27 +13239,27 @@
               <a:buNone/>
             </a:pPr>
             <a:r>
-              <a:rPr lang="en-US" sz="2200" dirty="0">
+              <a:rPr lang="en-US" sz="1800" dirty="0">
                 <a:solidFill>
                   <a:srgbClr val="000000"/>
                 </a:solidFill>
               </a:rPr>
-              <a:t>🎯</a:t>
-            </a:r>
-            <a:endParaRPr lang="en-US" sz="2200" dirty="0"/>
-          </a:p>
-        </p:txBody>
-      </p:sp>
-      <p:sp>
-        <p:nvSpPr>
-          <p:cNvPr id="7" name="Text 5"/>
-          <p:cNvSpPr txBox="1"/>
-          <p:nvPr/>
-        </p:nvSpPr>
-        <p:spPr>
-          <a:xfrm>
-            <a:off x="1737360" y="1920240"/>
-            <a:ext cx="2926080" cy="822960"/>
+              <a:t>🔎</a:t>
+            </a:r>
+            <a:endParaRPr lang="en-US" sz="1800" dirty="0"/>
+          </a:p>
+        </p:txBody>
+      </p:sp>
+      <p:sp>
+        <p:nvSpPr>
+          <p:cNvPr id="8" name="Text 6"/>
+          <p:cNvSpPr txBox="1"/>
+          <p:nvPr/>
+        </p:nvSpPr>
+        <p:spPr>
+          <a:xfrm>
+            <a:off x="1417320" y="2441448"/>
+            <a:ext cx="4265676" cy="457200"/>
           </a:xfrm>
           <a:prstGeom prst="rect">
             <a:avLst/>
@@ -12300,7 +13275,7 @@
               <a:buNone/>
             </a:pPr>
             <a:r>
-              <a:rPr lang="en-US" sz="2000" b="1" dirty="0">
+              <a:rPr lang="en-US" sz="1550" b="1" dirty="0">
                 <a:solidFill>
                   <a:srgbClr val="1F1F1F"/>
                 </a:solidFill>
@@ -12308,103 +13283,212 @@
                 <a:ea typeface="Adobe Clean" pitchFamily="34" charset="-122"/>
                 <a:cs typeface="Adobe Clean" pitchFamily="34" charset="-120"/>
               </a:rPr>
-              <a:t>The goal</a:t>
-            </a:r>
-            <a:endParaRPr lang="en-US" sz="2000" dirty="0"/>
-          </a:p>
-        </p:txBody>
-      </p:sp>
-      <p:sp>
-        <p:nvSpPr>
-          <p:cNvPr id="8" name="Text 6"/>
-          <p:cNvSpPr txBox="1"/>
-          <p:nvPr/>
-        </p:nvSpPr>
-        <p:spPr>
-          <a:xfrm>
-            <a:off x="4754880" y="1920240"/>
-            <a:ext cx="6519672" cy="868680"/>
-          </a:xfrm>
-          <a:prstGeom prst="rect">
-            <a:avLst/>
-          </a:prstGeom>
-          <a:noFill/>
-          <a:ln/>
-        </p:spPr>
-        <p:txBody>
-          <a:bodyPr wrap="square" lIns="0" tIns="0" rIns="0" bIns="0" rtlCol="0" anchor="ctr"/>
-          <a:lstStyle/>
-          <a:p>
-            <a:pPr indent="0" marL="0">
-              <a:buNone/>
-            </a:pPr>
-            <a:r>
-              <a:rPr lang="en-US" sz="1500" dirty="0">
-                <a:solidFill>
-                  <a:srgbClr val="6B6B6B"/>
-                </a:solidFill>
-                <a:latin typeface="Adobe Clean" pitchFamily="34" charset="0"/>
-                <a:ea typeface="Adobe Clean" pitchFamily="34" charset="-122"/>
-                <a:cs typeface="Adobe Clean" pitchFamily="34" charset="-120"/>
-              </a:rPr>
-              <a:t>See how website data is collected and shaped before it ever reaches AEP.</a:t>
-            </a:r>
-            <a:endParaRPr lang="en-US" sz="1500" dirty="0"/>
-          </a:p>
-        </p:txBody>
-      </p:sp>
-      <p:sp>
-        <p:nvSpPr>
-          <p:cNvPr id="9" name="Shape 7"/>
+              <a:t>What you’ll be able to reason about</a:t>
+            </a:r>
+            <a:endParaRPr lang="en-US" sz="1550" dirty="0"/>
+          </a:p>
+        </p:txBody>
+      </p:sp>
+      <p:sp>
+        <p:nvSpPr>
+          <p:cNvPr id="9" name="Text 7"/>
+          <p:cNvSpPr txBox="1"/>
+          <p:nvPr/>
+        </p:nvSpPr>
+        <p:spPr>
+          <a:xfrm>
+            <a:off x="914400" y="3063240"/>
+            <a:ext cx="4631436" cy="2103120"/>
+          </a:xfrm>
+          <a:prstGeom prst="rect">
+            <a:avLst/>
+          </a:prstGeom>
+          <a:noFill/>
+          <a:ln/>
+        </p:spPr>
+        <p:txBody>
+          <a:bodyPr wrap="square" lIns="0" tIns="0" rIns="0" bIns="0" rtlCol="0" anchor="ctr"/>
+          <a:lstStyle/>
+          <a:p>
+            <a:pPr marL="342900" indent="-342900">
+              <a:spcAft>
+                <a:spcPts val="700"/>
+              </a:spcAft>
+              <a:buSzPct val="100000"/>
+              <a:buChar char="•"/>
+            </a:pPr>
+            <a:r>
+              <a:rPr lang="en-US" sz="1300" dirty="0">
+                <a:solidFill>
+                  <a:srgbClr val="1F1F1F"/>
+                </a:solidFill>
+                <a:latin typeface="Adobe Clean" pitchFamily="34" charset="0"/>
+                <a:ea typeface="Adobe Clean" pitchFamily="34" charset="-122"/>
+                <a:cs typeface="Adobe Clean" pitchFamily="34" charset="-120"/>
+              </a:rPr>
+              <a:t>Web SDK: a hit is missing, or some data isn’t ingested</a:t>
+            </a:r>
+            <a:endParaRPr lang="en-US" sz="1300" dirty="0"/>
+          </a:p>
+          <a:p>
+            <a:pPr marL="342900" indent="-342900">
+              <a:spcAft>
+                <a:spcPts val="700"/>
+              </a:spcAft>
+              <a:buSzPct val="100000"/>
+              <a:buChar char="•"/>
+            </a:pPr>
+            <a:r>
+              <a:rPr lang="en-US" sz="1300" dirty="0">
+                <a:solidFill>
+                  <a:srgbClr val="1F1F1F"/>
+                </a:solidFill>
+                <a:latin typeface="Adobe Clean" pitchFamily="34" charset="0"/>
+                <a:ea typeface="Adobe Clean" pitchFamily="34" charset="-122"/>
+                <a:cs typeface="Adobe Clean" pitchFamily="34" charset="-120"/>
+              </a:rPr>
+              <a:t>Mobile SDK: how the data flows in</a:t>
+            </a:r>
+            <a:endParaRPr lang="en-US" sz="1300" dirty="0"/>
+          </a:p>
+          <a:p>
+            <a:pPr marL="342900" indent="-342900">
+              <a:spcAft>
+                <a:spcPts val="700"/>
+              </a:spcAft>
+              <a:buSzPct val="100000"/>
+              <a:buChar char="•"/>
+            </a:pPr>
+            <a:r>
+              <a:rPr lang="en-US" sz="1300" dirty="0">
+                <a:solidFill>
+                  <a:srgbClr val="1F1F1F"/>
+                </a:solidFill>
+                <a:latin typeface="Adobe Clean" pitchFamily="34" charset="0"/>
+                <a:ea typeface="Adobe Clean" pitchFamily="34" charset="-122"/>
+                <a:cs typeface="Adobe Clean" pitchFamily="34" charset="-120"/>
+              </a:rPr>
+              <a:t>Using Adobe Assurance to trace an event</a:t>
+            </a:r>
+            <a:endParaRPr lang="en-US" sz="1300" dirty="0"/>
+          </a:p>
+          <a:p>
+            <a:pPr marL="342900" indent="-342900">
+              <a:spcAft>
+                <a:spcPts val="700"/>
+              </a:spcAft>
+              <a:buSzPct val="100000"/>
+              <a:buChar char="•"/>
+            </a:pPr>
+            <a:r>
+              <a:rPr lang="en-US" sz="1300" dirty="0">
+                <a:solidFill>
+                  <a:srgbClr val="1F1F1F"/>
+                </a:solidFill>
+                <a:latin typeface="Adobe Clean" pitchFamily="34" charset="0"/>
+                <a:ea typeface="Adobe Clean" pitchFamily="34" charset="-122"/>
+                <a:cs typeface="Adobe Clean" pitchFamily="34" charset="-120"/>
+              </a:rPr>
+              <a:t>Reading a failed batch / ingestion error</a:t>
+            </a:r>
+            <a:endParaRPr lang="en-US" sz="1300" dirty="0"/>
+          </a:p>
+          <a:p>
+            <a:pPr marL="342900" indent="-342900">
+              <a:spcAft>
+                <a:spcPts val="700"/>
+              </a:spcAft>
+              <a:buSzPct val="100000"/>
+              <a:buChar char="•"/>
+            </a:pPr>
+            <a:r>
+              <a:rPr lang="en-US" sz="1300" dirty="0">
+                <a:solidFill>
+                  <a:srgbClr val="1F1F1F"/>
+                </a:solidFill>
+                <a:latin typeface="Adobe Clean" pitchFamily="34" charset="0"/>
+                <a:ea typeface="Adobe Clean" pitchFamily="34" charset="-122"/>
+                <a:cs typeface="Adobe Clean" pitchFamily="34" charset="-120"/>
+              </a:rPr>
+              <a:t>Guiding the customer to the right next step</a:t>
+            </a:r>
+            <a:endParaRPr lang="en-US" sz="1300" dirty="0"/>
+          </a:p>
+          <a:p>
+            <a:pPr marL="342900" indent="-342900">
+              <a:spcAft>
+                <a:spcPts val="700"/>
+              </a:spcAft>
+              <a:buSzPct val="100000"/>
+              <a:buChar char="•"/>
+            </a:pPr>
+            <a:r>
+              <a:rPr lang="en-US" sz="1300" dirty="0">
+                <a:solidFill>
+                  <a:srgbClr val="1F1F1F"/>
+                </a:solidFill>
+                <a:latin typeface="Adobe Clean" pitchFamily="34" charset="0"/>
+                <a:ea typeface="Adobe Clean" pitchFamily="34" charset="-122"/>
+                <a:cs typeface="Adobe Clean" pitchFamily="34" charset="-120"/>
+              </a:rPr>
+              <a:t>Deciding who owns it: us, Data Collection, or Analytics</a:t>
+            </a:r>
+            <a:endParaRPr lang="en-US" sz="1300" dirty="0"/>
+          </a:p>
+        </p:txBody>
+      </p:sp>
+      <p:sp>
+        <p:nvSpPr>
+          <p:cNvPr id="10" name="Shape 8"/>
           <p:cNvSpPr/>
           <p:nvPr/>
         </p:nvSpPr>
         <p:spPr>
           <a:xfrm>
-            <a:off x="548640" y="3154680"/>
-            <a:ext cx="11091672" cy="1234440"/>
+            <a:off x="6277356" y="2148840"/>
+            <a:ext cx="5362956" cy="3200400"/>
           </a:xfrm>
           <a:prstGeom prst="roundRect">
             <a:avLst>
-              <a:gd name="adj" fmla="val 5926"/>
+              <a:gd name="adj" fmla="val 2571"/>
             </a:avLst>
           </a:prstGeom>
           <a:solidFill>
-            <a:srgbClr val="FDECEA"/>
+            <a:srgbClr val="F7F7F7"/>
           </a:solidFill>
           <a:ln/>
         </p:spPr>
       </p:sp>
       <p:sp>
         <p:nvSpPr>
-          <p:cNvPr id="10" name="Shape 8"/>
+          <p:cNvPr id="11" name="Shape 9"/>
           <p:cNvSpPr/>
           <p:nvPr/>
         </p:nvSpPr>
         <p:spPr>
           <a:xfrm>
-            <a:off x="822960" y="3456432"/>
-            <a:ext cx="640080" cy="640080"/>
+            <a:off x="6551676" y="2423160"/>
+            <a:ext cx="457200" cy="457200"/>
           </a:xfrm>
           <a:prstGeom prst="ellipse">
             <a:avLst/>
           </a:prstGeom>
           <a:solidFill>
-            <a:srgbClr val="EB1000"/>
+            <a:srgbClr val="3A63F9"/>
           </a:solidFill>
           <a:ln/>
         </p:spPr>
       </p:sp>
       <p:sp>
         <p:nvSpPr>
-          <p:cNvPr id="11" name="Text 9"/>
-          <p:cNvSpPr txBox="1"/>
-          <p:nvPr/>
-        </p:nvSpPr>
-        <p:spPr>
-          <a:xfrm>
-            <a:off x="822960" y="3456432"/>
-            <a:ext cx="640080" cy="640080"/>
+          <p:cNvPr id="12" name="Text 10"/>
+          <p:cNvSpPr txBox="1"/>
+          <p:nvPr/>
+        </p:nvSpPr>
+        <p:spPr>
+          <a:xfrm>
+            <a:off x="6551676" y="2423160"/>
+            <a:ext cx="457200" cy="457200"/>
           </a:xfrm>
           <a:prstGeom prst="rect">
             <a:avLst/>
@@ -12420,27 +13504,27 @@
               <a:buNone/>
             </a:pPr>
             <a:r>
-              <a:rPr lang="en-US" sz="2200" dirty="0">
+              <a:rPr lang="en-US" sz="1800" dirty="0">
                 <a:solidFill>
                   <a:srgbClr val="000000"/>
                 </a:solidFill>
               </a:rPr>
-              <a:t>🧩</a:t>
-            </a:r>
-            <a:endParaRPr lang="en-US" sz="2200" dirty="0"/>
-          </a:p>
-        </p:txBody>
-      </p:sp>
-      <p:sp>
-        <p:nvSpPr>
-          <p:cNvPr id="12" name="Text 10"/>
-          <p:cNvSpPr txBox="1"/>
-          <p:nvPr/>
-        </p:nvSpPr>
-        <p:spPr>
-          <a:xfrm>
-            <a:off x="1737360" y="3337560"/>
-            <a:ext cx="2926080" cy="822960"/>
+              <a:t>🎁</a:t>
+            </a:r>
+            <a:endParaRPr lang="en-US" sz="1800" dirty="0"/>
+          </a:p>
+        </p:txBody>
+      </p:sp>
+      <p:sp>
+        <p:nvSpPr>
+          <p:cNvPr id="13" name="Text 11"/>
+          <p:cNvSpPr txBox="1"/>
+          <p:nvPr/>
+        </p:nvSpPr>
+        <p:spPr>
+          <a:xfrm>
+            <a:off x="7146036" y="2441448"/>
+            <a:ext cx="4265676" cy="457200"/>
           </a:xfrm>
           <a:prstGeom prst="rect">
             <a:avLst/>
@@ -12456,7 +13540,7 @@
               <a:buNone/>
             </a:pPr>
             <a:r>
-              <a:rPr lang="en-US" sz="2000" b="1" dirty="0">
+              <a:rPr lang="en-US" sz="1550" b="1" dirty="0">
                 <a:solidFill>
                   <a:srgbClr val="1F1F1F"/>
                 </a:solidFill>
@@ -12464,22 +13548,149 @@
                 <a:ea typeface="Adobe Clean" pitchFamily="34" charset="-122"/>
                 <a:cs typeface="Adobe Clean" pitchFamily="34" charset="-120"/>
               </a:rPr>
-              <a:t>The gap</a:t>
-            </a:r>
-            <a:endParaRPr lang="en-US" sz="2000" dirty="0"/>
-          </a:p>
-        </p:txBody>
-      </p:sp>
-      <p:sp>
-        <p:nvSpPr>
-          <p:cNvPr id="13" name="Text 11"/>
-          <p:cNvSpPr txBox="1"/>
-          <p:nvPr/>
-        </p:nvSpPr>
-        <p:spPr>
-          <a:xfrm>
-            <a:off x="4754880" y="3337560"/>
-            <a:ext cx="6519672" cy="868680"/>
+              <a:t>What this project gives you</a:t>
+            </a:r>
+            <a:endParaRPr lang="en-US" sz="1550" dirty="0"/>
+          </a:p>
+        </p:txBody>
+      </p:sp>
+      <p:sp>
+        <p:nvSpPr>
+          <p:cNvPr id="14" name="Text 12"/>
+          <p:cNvSpPr txBox="1"/>
+          <p:nvPr/>
+        </p:nvSpPr>
+        <p:spPr>
+          <a:xfrm>
+            <a:off x="6643116" y="3063240"/>
+            <a:ext cx="4631436" cy="2103120"/>
+          </a:xfrm>
+          <a:prstGeom prst="rect">
+            <a:avLst/>
+          </a:prstGeom>
+          <a:noFill/>
+          <a:ln/>
+        </p:spPr>
+        <p:txBody>
+          <a:bodyPr wrap="square" lIns="0" tIns="0" rIns="0" bIns="0" rtlCol="0" anchor="ctr"/>
+          <a:lstStyle/>
+          <a:p>
+            <a:pPr marL="342900" indent="-342900">
+              <a:spcAft>
+                <a:spcPts val="700"/>
+              </a:spcAft>
+              <a:buSzPct val="100000"/>
+              <a:buChar char="•"/>
+            </a:pPr>
+            <a:r>
+              <a:rPr lang="en-US" sz="1300" dirty="0">
+                <a:solidFill>
+                  <a:srgbClr val="1F1F1F"/>
+                </a:solidFill>
+                <a:latin typeface="Adobe Clean" pitchFamily="34" charset="0"/>
+                <a:ea typeface="Adobe Clean" pitchFamily="34" charset="-122"/>
+                <a:cs typeface="Adobe Clean" pitchFamily="34" charset="-120"/>
+              </a:rPr>
+              <a:t>Set up Data Collection hands-on (schema, datastream, rules)</a:t>
+            </a:r>
+            <a:endParaRPr lang="en-US" sz="1300" dirty="0"/>
+          </a:p>
+          <a:p>
+            <a:pPr marL="342900" indent="-342900">
+              <a:spcAft>
+                <a:spcPts val="700"/>
+              </a:spcAft>
+              <a:buSzPct val="100000"/>
+              <a:buChar char="•"/>
+            </a:pPr>
+            <a:r>
+              <a:rPr lang="en-US" sz="1300" dirty="0">
+                <a:solidFill>
+                  <a:srgbClr val="1F1F1F"/>
+                </a:solidFill>
+                <a:latin typeface="Adobe Clean" pitchFamily="34" charset="0"/>
+                <a:ea typeface="Adobe Clean" pitchFamily="34" charset="-122"/>
+                <a:cs typeface="Adobe Clean" pitchFamily="34" charset="-120"/>
+              </a:rPr>
+              <a:t>Send streaming data into a real-time AEP profile</a:t>
+            </a:r>
+            <a:endParaRPr lang="en-US" sz="1300" dirty="0"/>
+          </a:p>
+          <a:p>
+            <a:pPr marL="342900" indent="-342900">
+              <a:spcAft>
+                <a:spcPts val="700"/>
+              </a:spcAft>
+              <a:buSzPct val="100000"/>
+              <a:buChar char="•"/>
+            </a:pPr>
+            <a:r>
+              <a:rPr lang="en-US" sz="1300" dirty="0">
+                <a:solidFill>
+                  <a:srgbClr val="1F1F1F"/>
+                </a:solidFill>
+                <a:latin typeface="Adobe Clean" pitchFamily="34" charset="0"/>
+                <a:ea typeface="Adobe Clean" pitchFamily="34" charset="-122"/>
+                <a:cs typeface="Adobe Clean" pitchFamily="34" charset="-120"/>
+              </a:rPr>
+              <a:t>See website data ingested into AEP (and other stores)</a:t>
+            </a:r>
+            <a:endParaRPr lang="en-US" sz="1300" dirty="0"/>
+          </a:p>
+          <a:p>
+            <a:pPr marL="342900" indent="-342900">
+              <a:spcAft>
+                <a:spcPts val="700"/>
+              </a:spcAft>
+              <a:buSzPct val="100000"/>
+              <a:buChar char="•"/>
+            </a:pPr>
+            <a:r>
+              <a:rPr lang="en-US" sz="1300" dirty="0">
+                <a:solidFill>
+                  <a:srgbClr val="1F1F1F"/>
+                </a:solidFill>
+                <a:latin typeface="Adobe Clean" pitchFamily="34" charset="0"/>
+                <a:ea typeface="Adobe Clean" pitchFamily="34" charset="-122"/>
+                <a:cs typeface="Adobe Clean" pitchFamily="34" charset="-120"/>
+              </a:rPr>
+              <a:t>A practical, end-to-end mental model of the pipeline</a:t>
+            </a:r>
+            <a:endParaRPr lang="en-US" sz="1300" dirty="0"/>
+          </a:p>
+          <a:p>
+            <a:pPr marL="342900" indent="-342900">
+              <a:spcAft>
+                <a:spcPts val="700"/>
+              </a:spcAft>
+              <a:buSzPct val="100000"/>
+              <a:buChar char="•"/>
+            </a:pPr>
+            <a:r>
+              <a:rPr lang="en-US" sz="1300" dirty="0">
+                <a:solidFill>
+                  <a:srgbClr val="1F1F1F"/>
+                </a:solidFill>
+                <a:latin typeface="Adobe Clean" pitchFamily="34" charset="0"/>
+                <a:ea typeface="Adobe Clean" pitchFamily="34" charset="-122"/>
+                <a:cs typeface="Adobe Clean" pitchFamily="34" charset="-120"/>
+              </a:rPr>
+              <a:t>Confidence to investigate and route a case correctly</a:t>
+            </a:r>
+            <a:endParaRPr lang="en-US" sz="1300" dirty="0"/>
+          </a:p>
+        </p:txBody>
+      </p:sp>
+      <p:sp>
+        <p:nvSpPr>
+          <p:cNvPr id="15" name="Text 13"/>
+          <p:cNvSpPr txBox="1"/>
+          <p:nvPr/>
+        </p:nvSpPr>
+        <p:spPr>
+          <a:xfrm>
+            <a:off x="548640" y="5623560"/>
+            <a:ext cx="11091672" cy="548640"/>
           </a:xfrm>
           <a:prstGeom prst="rect">
             <a:avLst/>
@@ -12495,7 +13706,21 @@
               <a:buNone/>
             </a:pPr>
             <a:r>
-              <a:rPr lang="en-US" sz="1500" dirty="0">
+              <a:rPr lang="en-US" sz="1250" b="1" dirty="0">
+                <a:solidFill>
+                  <a:srgbClr val="B10C00"/>
+                </a:solidFill>
+                <a:latin typeface="Adobe Clean" pitchFamily="34" charset="0"/>
+                <a:ea typeface="Adobe Clean" pitchFamily="34" charset="-122"/>
+                <a:cs typeface="Adobe Clean" pitchFamily="34" charset="-120"/>
+              </a:rPr>
+              <a:t>Scope:  </a:t>
+            </a:r>
+            <a:pPr indent="0" marL="0">
+              <a:buNone/>
+            </a:pPr>
+            <a:r>
+              <a:rPr lang="en-US" sz="1250" dirty="0">
                 <a:solidFill>
                   <a:srgbClr val="6B6B6B"/>
                 </a:solidFill>
@@ -12503,100 +13728,22 @@
                 <a:ea typeface="Adobe Clean" pitchFamily="34" charset="-122"/>
                 <a:cs typeface="Adobe Clean" pitchFamily="34" charset="-120"/>
               </a:rPr>
-              <a:t>Support lives in AEP, but most "data is missing" issues start in Data Collection.</a:t>
-            </a:r>
-            <a:endParaRPr lang="en-US" sz="1500" dirty="0"/>
-          </a:p>
-        </p:txBody>
-      </p:sp>
-      <p:sp>
-        <p:nvSpPr>
-          <p:cNvPr id="14" name="Shape 12"/>
-          <p:cNvSpPr/>
-          <p:nvPr/>
-        </p:nvSpPr>
-        <p:spPr>
-          <a:xfrm>
-            <a:off x="548640" y="4572000"/>
-            <a:ext cx="11091672" cy="1234440"/>
-          </a:xfrm>
-          <a:prstGeom prst="roundRect">
-            <a:avLst>
-              <a:gd name="adj" fmla="val 5926"/>
-            </a:avLst>
-          </a:prstGeom>
-          <a:solidFill>
-            <a:srgbClr val="FDECEA"/>
-          </a:solidFill>
-          <a:ln/>
-        </p:spPr>
-      </p:sp>
-      <p:sp>
-        <p:nvSpPr>
-          <p:cNvPr id="15" name="Shape 13"/>
-          <p:cNvSpPr/>
-          <p:nvPr/>
-        </p:nvSpPr>
-        <p:spPr>
-          <a:xfrm>
-            <a:off x="822960" y="4873752"/>
-            <a:ext cx="640080" cy="640080"/>
-          </a:xfrm>
-          <a:prstGeom prst="ellipse">
-            <a:avLst/>
-          </a:prstGeom>
-          <a:solidFill>
-            <a:srgbClr val="EB1000"/>
-          </a:solidFill>
-          <a:ln/>
-        </p:spPr>
-      </p:sp>
-      <p:sp>
-        <p:nvSpPr>
-          <p:cNvPr id="16" name="Text 14"/>
-          <p:cNvSpPr txBox="1"/>
-          <p:nvPr/>
-        </p:nvSpPr>
-        <p:spPr>
-          <a:xfrm>
-            <a:off x="822960" y="4873752"/>
-            <a:ext cx="640080" cy="640080"/>
-          </a:xfrm>
-          <a:prstGeom prst="rect">
-            <a:avLst/>
-          </a:prstGeom>
-          <a:noFill/>
-          <a:ln/>
-        </p:spPr>
-        <p:txBody>
-          <a:bodyPr wrap="square" lIns="0" tIns="0" rIns="0" bIns="0" rtlCol="0" anchor="ctr"/>
-          <a:lstStyle/>
-          <a:p>
-            <a:pPr algn="ctr" indent="0" marL="0">
-              <a:buNone/>
-            </a:pPr>
-            <a:r>
-              <a:rPr lang="en-US" sz="2200" dirty="0">
-                <a:solidFill>
-                  <a:srgbClr val="000000"/>
-                </a:solidFill>
-              </a:rPr>
-              <a:t>🛠️</a:t>
-            </a:r>
-            <a:endParaRPr lang="en-US" sz="2200" dirty="0"/>
-          </a:p>
-        </p:txBody>
-      </p:sp>
-      <p:sp>
-        <p:nvSpPr>
-          <p:cNvPr id="17" name="Text 15"/>
-          <p:cNvSpPr txBox="1"/>
-          <p:nvPr/>
-        </p:nvSpPr>
-        <p:spPr>
-          <a:xfrm>
-            <a:off x="1737360" y="4754880"/>
-            <a:ext cx="2926080" cy="822960"/>
+              <a:t>debugging a customer’s Data Collection implementation sits with the Data Collection / Analytics team. Our job is to understand the flow and route the case to the right owner.</a:t>
+            </a:r>
+            <a:endParaRPr lang="en-US" sz="1250" dirty="0"/>
+          </a:p>
+        </p:txBody>
+      </p:sp>
+      <p:sp>
+        <p:nvSpPr>
+          <p:cNvPr id="17" name="Text 14"/>
+          <p:cNvSpPr txBox="1"/>
+          <p:nvPr/>
+        </p:nvSpPr>
+        <p:spPr>
+          <a:xfrm>
+            <a:off x="457200" y="6473952"/>
+            <a:ext cx="8686800" cy="274320"/>
           </a:xfrm>
           <a:prstGeom prst="rect">
             <a:avLst/>
@@ -12612,56 +13759,56 @@
               <a:buNone/>
             </a:pPr>
             <a:r>
-              <a:rPr lang="en-US" sz="2000" b="1" dirty="0">
-                <a:solidFill>
-                  <a:srgbClr val="1F1F1F"/>
-                </a:solidFill>
-                <a:latin typeface="Adobe Clean" pitchFamily="34" charset="0"/>
-                <a:ea typeface="Adobe Clean" pitchFamily="34" charset="-122"/>
-                <a:cs typeface="Adobe Clean" pitchFamily="34" charset="-120"/>
-              </a:rPr>
-              <a:t>The payoff</a:t>
-            </a:r>
-            <a:endParaRPr lang="en-US" sz="2000" dirty="0"/>
-          </a:p>
-        </p:txBody>
-      </p:sp>
-      <p:sp>
-        <p:nvSpPr>
-          <p:cNvPr id="18" name="Text 16"/>
-          <p:cNvSpPr txBox="1"/>
-          <p:nvPr/>
-        </p:nvSpPr>
-        <p:spPr>
-          <a:xfrm>
-            <a:off x="4754880" y="4754880"/>
-            <a:ext cx="6519672" cy="868680"/>
-          </a:xfrm>
-          <a:prstGeom prst="rect">
-            <a:avLst/>
-          </a:prstGeom>
-          <a:noFill/>
-          <a:ln/>
-        </p:spPr>
-        <p:txBody>
-          <a:bodyPr wrap="square" lIns="0" tIns="0" rIns="0" bIns="0" rtlCol="0" anchor="ctr"/>
-          <a:lstStyle/>
-          <a:p>
-            <a:pPr indent="0" marL="0">
-              <a:buNone/>
-            </a:pPr>
-            <a:r>
-              <a:rPr lang="en-US" sz="1500" dirty="0">
-                <a:solidFill>
-                  <a:srgbClr val="6B6B6B"/>
-                </a:solidFill>
-                <a:latin typeface="Adobe Clean" pitchFamily="34" charset="0"/>
-                <a:ea typeface="Adobe Clean" pitchFamily="34" charset="-122"/>
-                <a:cs typeface="Adobe Clean" pitchFamily="34" charset="-120"/>
-              </a:rPr>
-              <a:t>Know where to look — data layer, rules, data elements, datastream — when data is wrong or absent.</a:t>
-            </a:r>
-            <a:endParaRPr lang="en-US" sz="1500" dirty="0"/>
+              <a:rPr lang="en-US" sz="900" dirty="0">
+                <a:solidFill>
+                  <a:srgbClr val="A3A3A3"/>
+                </a:solidFill>
+                <a:latin typeface="Adobe Clean" pitchFamily="34" charset="0"/>
+                <a:ea typeface="Adobe Clean" pitchFamily="34" charset="-122"/>
+                <a:cs typeface="Adobe Clean" pitchFamily="34" charset="-120"/>
+              </a:rPr>
+              <a:t>© 2026 Adobe. All Rights Reserved. Adobe Confidential.</a:t>
+            </a:r>
+            <a:endParaRPr lang="en-US" sz="900" dirty="0"/>
+          </a:p>
+        </p:txBody>
+      </p:sp>
+      <p:sp>
+        <p:nvSpPr>
+          <p:cNvPr id="18" name="Text 15"/>
+          <p:cNvSpPr txBox="1"/>
+          <p:nvPr/>
+        </p:nvSpPr>
+        <p:spPr>
+          <a:xfrm>
+            <a:off x="11155680" y="6473952"/>
+            <a:ext cx="640080" cy="274320"/>
+          </a:xfrm>
+          <a:prstGeom prst="rect">
+            <a:avLst/>
+          </a:prstGeom>
+          <a:noFill/>
+          <a:ln/>
+        </p:spPr>
+        <p:txBody>
+          <a:bodyPr wrap="square" lIns="0" tIns="0" rIns="0" bIns="0" rtlCol="0" anchor="ctr"/>
+          <a:lstStyle/>
+          <a:p>
+            <a:pPr algn="r" indent="0" marL="0">
+              <a:buNone/>
+            </a:pPr>
+            <a:r>
+              <a:rPr lang="en-US" sz="900" dirty="0">
+                <a:solidFill>
+                  <a:srgbClr val="A3A3A3"/>
+                </a:solidFill>
+                <a:latin typeface="Adobe Clean" pitchFamily="34" charset="0"/>
+                <a:ea typeface="Adobe Clean" pitchFamily="34" charset="-122"/>
+                <a:cs typeface="Adobe Clean" pitchFamily="34" charset="-120"/>
+              </a:rPr>
+              <a:t>2</a:t>
+            </a:r>
+            <a:endParaRPr lang="en-US" sz="900" dirty="0"/>
           </a:p>
         </p:txBody>
       </p:sp>
@@ -13436,6 +14583,84 @@
           </a:p>
         </p:txBody>
       </p:sp>
+      <p:sp>
+        <p:nvSpPr>
+          <p:cNvPr id="24" name="Text 21"/>
+          <p:cNvSpPr txBox="1"/>
+          <p:nvPr/>
+        </p:nvSpPr>
+        <p:spPr>
+          <a:xfrm>
+            <a:off x="457200" y="6473952"/>
+            <a:ext cx="8686800" cy="274320"/>
+          </a:xfrm>
+          <a:prstGeom prst="rect">
+            <a:avLst/>
+          </a:prstGeom>
+          <a:noFill/>
+          <a:ln/>
+        </p:spPr>
+        <p:txBody>
+          <a:bodyPr wrap="square" lIns="0" tIns="0" rIns="0" bIns="0" rtlCol="0" anchor="ctr"/>
+          <a:lstStyle/>
+          <a:p>
+            <a:pPr indent="0" marL="0">
+              <a:buNone/>
+            </a:pPr>
+            <a:r>
+              <a:rPr lang="en-US" sz="900" dirty="0">
+                <a:solidFill>
+                  <a:srgbClr val="A3A3A3"/>
+                </a:solidFill>
+                <a:latin typeface="Adobe Clean" pitchFamily="34" charset="0"/>
+                <a:ea typeface="Adobe Clean" pitchFamily="34" charset="-122"/>
+                <a:cs typeface="Adobe Clean" pitchFamily="34" charset="-120"/>
+              </a:rPr>
+              <a:t>© 2026 Adobe. All Rights Reserved. Adobe Confidential.</a:t>
+            </a:r>
+            <a:endParaRPr lang="en-US" sz="900" dirty="0"/>
+          </a:p>
+        </p:txBody>
+      </p:sp>
+      <p:sp>
+        <p:nvSpPr>
+          <p:cNvPr id="25" name="Text 22"/>
+          <p:cNvSpPr txBox="1"/>
+          <p:nvPr/>
+        </p:nvSpPr>
+        <p:spPr>
+          <a:xfrm>
+            <a:off x="11155680" y="6473952"/>
+            <a:ext cx="640080" cy="274320"/>
+          </a:xfrm>
+          <a:prstGeom prst="rect">
+            <a:avLst/>
+          </a:prstGeom>
+          <a:noFill/>
+          <a:ln/>
+        </p:spPr>
+        <p:txBody>
+          <a:bodyPr wrap="square" lIns="0" tIns="0" rIns="0" bIns="0" rtlCol="0" anchor="ctr"/>
+          <a:lstStyle/>
+          <a:p>
+            <a:pPr algn="r" indent="0" marL="0">
+              <a:buNone/>
+            </a:pPr>
+            <a:r>
+              <a:rPr lang="en-US" sz="900" dirty="0">
+                <a:solidFill>
+                  <a:srgbClr val="A3A3A3"/>
+                </a:solidFill>
+                <a:latin typeface="Adobe Clean" pitchFamily="34" charset="0"/>
+                <a:ea typeface="Adobe Clean" pitchFamily="34" charset="-122"/>
+                <a:cs typeface="Adobe Clean" pitchFamily="34" charset="-120"/>
+              </a:rPr>
+              <a:t>20</a:t>
+            </a:r>
+            <a:endParaRPr lang="en-US" sz="900" dirty="0"/>
+          </a:p>
+        </p:txBody>
+      </p:sp>
     </p:spTree>
   </p:cSld>
   <p:clrMapOvr>
@@ -14362,6 +15587,84 @@
           </a:p>
         </p:txBody>
       </p:sp>
+      <p:sp>
+        <p:nvSpPr>
+          <p:cNvPr id="29" name="Text 26"/>
+          <p:cNvSpPr txBox="1"/>
+          <p:nvPr/>
+        </p:nvSpPr>
+        <p:spPr>
+          <a:xfrm>
+            <a:off x="457200" y="6473952"/>
+            <a:ext cx="8686800" cy="274320"/>
+          </a:xfrm>
+          <a:prstGeom prst="rect">
+            <a:avLst/>
+          </a:prstGeom>
+          <a:noFill/>
+          <a:ln/>
+        </p:spPr>
+        <p:txBody>
+          <a:bodyPr wrap="square" lIns="0" tIns="0" rIns="0" bIns="0" rtlCol="0" anchor="ctr"/>
+          <a:lstStyle/>
+          <a:p>
+            <a:pPr indent="0" marL="0">
+              <a:buNone/>
+            </a:pPr>
+            <a:r>
+              <a:rPr lang="en-US" sz="900" dirty="0">
+                <a:solidFill>
+                  <a:srgbClr val="A3A3A3"/>
+                </a:solidFill>
+                <a:latin typeface="Adobe Clean" pitchFamily="34" charset="0"/>
+                <a:ea typeface="Adobe Clean" pitchFamily="34" charset="-122"/>
+                <a:cs typeface="Adobe Clean" pitchFamily="34" charset="-120"/>
+              </a:rPr>
+              <a:t>© 2026 Adobe. All Rights Reserved. Adobe Confidential.</a:t>
+            </a:r>
+            <a:endParaRPr lang="en-US" sz="900" dirty="0"/>
+          </a:p>
+        </p:txBody>
+      </p:sp>
+      <p:sp>
+        <p:nvSpPr>
+          <p:cNvPr id="30" name="Text 27"/>
+          <p:cNvSpPr txBox="1"/>
+          <p:nvPr/>
+        </p:nvSpPr>
+        <p:spPr>
+          <a:xfrm>
+            <a:off x="11155680" y="6473952"/>
+            <a:ext cx="640080" cy="274320"/>
+          </a:xfrm>
+          <a:prstGeom prst="rect">
+            <a:avLst/>
+          </a:prstGeom>
+          <a:noFill/>
+          <a:ln/>
+        </p:spPr>
+        <p:txBody>
+          <a:bodyPr wrap="square" lIns="0" tIns="0" rIns="0" bIns="0" rtlCol="0" anchor="ctr"/>
+          <a:lstStyle/>
+          <a:p>
+            <a:pPr algn="r" indent="0" marL="0">
+              <a:buNone/>
+            </a:pPr>
+            <a:r>
+              <a:rPr lang="en-US" sz="900" dirty="0">
+                <a:solidFill>
+                  <a:srgbClr val="A3A3A3"/>
+                </a:solidFill>
+                <a:latin typeface="Adobe Clean" pitchFamily="34" charset="0"/>
+                <a:ea typeface="Adobe Clean" pitchFamily="34" charset="-122"/>
+                <a:cs typeface="Adobe Clean" pitchFamily="34" charset="-120"/>
+              </a:rPr>
+              <a:t>21</a:t>
+            </a:r>
+            <a:endParaRPr lang="en-US" sz="900" dirty="0"/>
+          </a:p>
+        </p:txBody>
+      </p:sp>
     </p:spTree>
   </p:cSld>
   <p:clrMapOvr>
@@ -14775,6 +16078,84 @@
           </a:p>
         </p:txBody>
       </p:sp>
+      <p:sp>
+        <p:nvSpPr>
+          <p:cNvPr id="14" name="Text 11"/>
+          <p:cNvSpPr txBox="1"/>
+          <p:nvPr/>
+        </p:nvSpPr>
+        <p:spPr>
+          <a:xfrm>
+            <a:off x="457200" y="6473952"/>
+            <a:ext cx="8686800" cy="274320"/>
+          </a:xfrm>
+          <a:prstGeom prst="rect">
+            <a:avLst/>
+          </a:prstGeom>
+          <a:noFill/>
+          <a:ln/>
+        </p:spPr>
+        <p:txBody>
+          <a:bodyPr wrap="square" lIns="0" tIns="0" rIns="0" bIns="0" rtlCol="0" anchor="ctr"/>
+          <a:lstStyle/>
+          <a:p>
+            <a:pPr indent="0" marL="0">
+              <a:buNone/>
+            </a:pPr>
+            <a:r>
+              <a:rPr lang="en-US" sz="900" dirty="0">
+                <a:solidFill>
+                  <a:srgbClr val="8A8A8A"/>
+                </a:solidFill>
+                <a:latin typeface="Adobe Clean" pitchFamily="34" charset="0"/>
+                <a:ea typeface="Adobe Clean" pitchFamily="34" charset="-122"/>
+                <a:cs typeface="Adobe Clean" pitchFamily="34" charset="-120"/>
+              </a:rPr>
+              <a:t>© 2026 Adobe. All Rights Reserved. Adobe Confidential.</a:t>
+            </a:r>
+            <a:endParaRPr lang="en-US" sz="900" dirty="0"/>
+          </a:p>
+        </p:txBody>
+      </p:sp>
+      <p:sp>
+        <p:nvSpPr>
+          <p:cNvPr id="15" name="Text 12"/>
+          <p:cNvSpPr txBox="1"/>
+          <p:nvPr/>
+        </p:nvSpPr>
+        <p:spPr>
+          <a:xfrm>
+            <a:off x="11155680" y="6473952"/>
+            <a:ext cx="640080" cy="274320"/>
+          </a:xfrm>
+          <a:prstGeom prst="rect">
+            <a:avLst/>
+          </a:prstGeom>
+          <a:noFill/>
+          <a:ln/>
+        </p:spPr>
+        <p:txBody>
+          <a:bodyPr wrap="square" lIns="0" tIns="0" rIns="0" bIns="0" rtlCol="0" anchor="ctr"/>
+          <a:lstStyle/>
+          <a:p>
+            <a:pPr algn="r" indent="0" marL="0">
+              <a:buNone/>
+            </a:pPr>
+            <a:r>
+              <a:rPr lang="en-US" sz="900" dirty="0">
+                <a:solidFill>
+                  <a:srgbClr val="8A8A8A"/>
+                </a:solidFill>
+                <a:latin typeface="Adobe Clean" pitchFamily="34" charset="0"/>
+                <a:ea typeface="Adobe Clean" pitchFamily="34" charset="-122"/>
+                <a:cs typeface="Adobe Clean" pitchFamily="34" charset="-120"/>
+              </a:rPr>
+              <a:t>22</a:t>
+            </a:r>
+            <a:endParaRPr lang="en-US" sz="900" dirty="0"/>
+          </a:p>
+        </p:txBody>
+      </p:sp>
     </p:spTree>
   </p:cSld>
   <p:clrMapOvr>
@@ -15080,6 +16461,84 @@
           </a:p>
         </p:txBody>
       </p:sp>
+      <p:sp>
+        <p:nvSpPr>
+          <p:cNvPr id="11" name="Text 8"/>
+          <p:cNvSpPr txBox="1"/>
+          <p:nvPr/>
+        </p:nvSpPr>
+        <p:spPr>
+          <a:xfrm>
+            <a:off x="457200" y="6473952"/>
+            <a:ext cx="8686800" cy="274320"/>
+          </a:xfrm>
+          <a:prstGeom prst="rect">
+            <a:avLst/>
+          </a:prstGeom>
+          <a:noFill/>
+          <a:ln/>
+        </p:spPr>
+        <p:txBody>
+          <a:bodyPr wrap="square" lIns="0" tIns="0" rIns="0" bIns="0" rtlCol="0" anchor="ctr"/>
+          <a:lstStyle/>
+          <a:p>
+            <a:pPr indent="0" marL="0">
+              <a:buNone/>
+            </a:pPr>
+            <a:r>
+              <a:rPr lang="en-US" sz="900" dirty="0">
+                <a:solidFill>
+                  <a:srgbClr val="A3A3A3"/>
+                </a:solidFill>
+                <a:latin typeface="Adobe Clean" pitchFamily="34" charset="0"/>
+                <a:ea typeface="Adobe Clean" pitchFamily="34" charset="-122"/>
+                <a:cs typeface="Adobe Clean" pitchFamily="34" charset="-120"/>
+              </a:rPr>
+              <a:t>© 2026 Adobe. All Rights Reserved. Adobe Confidential.</a:t>
+            </a:r>
+            <a:endParaRPr lang="en-US" sz="900" dirty="0"/>
+          </a:p>
+        </p:txBody>
+      </p:sp>
+      <p:sp>
+        <p:nvSpPr>
+          <p:cNvPr id="12" name="Text 9"/>
+          <p:cNvSpPr txBox="1"/>
+          <p:nvPr/>
+        </p:nvSpPr>
+        <p:spPr>
+          <a:xfrm>
+            <a:off x="11155680" y="6473952"/>
+            <a:ext cx="640080" cy="274320"/>
+          </a:xfrm>
+          <a:prstGeom prst="rect">
+            <a:avLst/>
+          </a:prstGeom>
+          <a:noFill/>
+          <a:ln/>
+        </p:spPr>
+        <p:txBody>
+          <a:bodyPr wrap="square" lIns="0" tIns="0" rIns="0" bIns="0" rtlCol="0" anchor="ctr"/>
+          <a:lstStyle/>
+          <a:p>
+            <a:pPr algn="r" indent="0" marL="0">
+              <a:buNone/>
+            </a:pPr>
+            <a:r>
+              <a:rPr lang="en-US" sz="900" dirty="0">
+                <a:solidFill>
+                  <a:srgbClr val="A3A3A3"/>
+                </a:solidFill>
+                <a:latin typeface="Adobe Clean" pitchFamily="34" charset="0"/>
+                <a:ea typeface="Adobe Clean" pitchFamily="34" charset="-122"/>
+                <a:cs typeface="Adobe Clean" pitchFamily="34" charset="-120"/>
+              </a:rPr>
+              <a:t>23</a:t>
+            </a:r>
+            <a:endParaRPr lang="en-US" sz="900" dirty="0"/>
+          </a:p>
+        </p:txBody>
+      </p:sp>
     </p:spTree>
   </p:cSld>
   <p:clrMapOvr>
@@ -16264,6 +17723,84 @@
           </a:p>
         </p:txBody>
       </p:sp>
+      <p:sp>
+        <p:nvSpPr>
+          <p:cNvPr id="36" name="Text 33"/>
+          <p:cNvSpPr txBox="1"/>
+          <p:nvPr/>
+        </p:nvSpPr>
+        <p:spPr>
+          <a:xfrm>
+            <a:off x="457200" y="6473952"/>
+            <a:ext cx="8686800" cy="274320"/>
+          </a:xfrm>
+          <a:prstGeom prst="rect">
+            <a:avLst/>
+          </a:prstGeom>
+          <a:noFill/>
+          <a:ln/>
+        </p:spPr>
+        <p:txBody>
+          <a:bodyPr wrap="square" lIns="0" tIns="0" rIns="0" bIns="0" rtlCol="0" anchor="ctr"/>
+          <a:lstStyle/>
+          <a:p>
+            <a:pPr indent="0" marL="0">
+              <a:buNone/>
+            </a:pPr>
+            <a:r>
+              <a:rPr lang="en-US" sz="900" dirty="0">
+                <a:solidFill>
+                  <a:srgbClr val="A3A3A3"/>
+                </a:solidFill>
+                <a:latin typeface="Adobe Clean" pitchFamily="34" charset="0"/>
+                <a:ea typeface="Adobe Clean" pitchFamily="34" charset="-122"/>
+                <a:cs typeface="Adobe Clean" pitchFamily="34" charset="-120"/>
+              </a:rPr>
+              <a:t>© 2026 Adobe. All Rights Reserved. Adobe Confidential.</a:t>
+            </a:r>
+            <a:endParaRPr lang="en-US" sz="900" dirty="0"/>
+          </a:p>
+        </p:txBody>
+      </p:sp>
+      <p:sp>
+        <p:nvSpPr>
+          <p:cNvPr id="37" name="Text 34"/>
+          <p:cNvSpPr txBox="1"/>
+          <p:nvPr/>
+        </p:nvSpPr>
+        <p:spPr>
+          <a:xfrm>
+            <a:off x="11155680" y="6473952"/>
+            <a:ext cx="640080" cy="274320"/>
+          </a:xfrm>
+          <a:prstGeom prst="rect">
+            <a:avLst/>
+          </a:prstGeom>
+          <a:noFill/>
+          <a:ln/>
+        </p:spPr>
+        <p:txBody>
+          <a:bodyPr wrap="square" lIns="0" tIns="0" rIns="0" bIns="0" rtlCol="0" anchor="ctr"/>
+          <a:lstStyle/>
+          <a:p>
+            <a:pPr algn="r" indent="0" marL="0">
+              <a:buNone/>
+            </a:pPr>
+            <a:r>
+              <a:rPr lang="en-US" sz="900" dirty="0">
+                <a:solidFill>
+                  <a:srgbClr val="A3A3A3"/>
+                </a:solidFill>
+                <a:latin typeface="Adobe Clean" pitchFamily="34" charset="0"/>
+                <a:ea typeface="Adobe Clean" pitchFamily="34" charset="-122"/>
+                <a:cs typeface="Adobe Clean" pitchFamily="34" charset="-120"/>
+              </a:rPr>
+              <a:t>3</a:t>
+            </a:r>
+            <a:endParaRPr lang="en-US" sz="900" dirty="0"/>
+          </a:p>
+        </p:txBody>
+      </p:sp>
     </p:spTree>
   </p:cSld>
   <p:clrMapOvr>
@@ -17374,6 +18911,84 @@
           </a:p>
         </p:txBody>
       </p:sp>
+      <p:sp>
+        <p:nvSpPr>
+          <p:cNvPr id="37" name="Text 34"/>
+          <p:cNvSpPr txBox="1"/>
+          <p:nvPr/>
+        </p:nvSpPr>
+        <p:spPr>
+          <a:xfrm>
+            <a:off x="457200" y="6473952"/>
+            <a:ext cx="8686800" cy="274320"/>
+          </a:xfrm>
+          <a:prstGeom prst="rect">
+            <a:avLst/>
+          </a:prstGeom>
+          <a:noFill/>
+          <a:ln/>
+        </p:spPr>
+        <p:txBody>
+          <a:bodyPr wrap="square" lIns="0" tIns="0" rIns="0" bIns="0" rtlCol="0" anchor="ctr"/>
+          <a:lstStyle/>
+          <a:p>
+            <a:pPr indent="0" marL="0">
+              <a:buNone/>
+            </a:pPr>
+            <a:r>
+              <a:rPr lang="en-US" sz="900" dirty="0">
+                <a:solidFill>
+                  <a:srgbClr val="A3A3A3"/>
+                </a:solidFill>
+                <a:latin typeface="Adobe Clean" pitchFamily="34" charset="0"/>
+                <a:ea typeface="Adobe Clean" pitchFamily="34" charset="-122"/>
+                <a:cs typeface="Adobe Clean" pitchFamily="34" charset="-120"/>
+              </a:rPr>
+              <a:t>© 2026 Adobe. All Rights Reserved. Adobe Confidential.</a:t>
+            </a:r>
+            <a:endParaRPr lang="en-US" sz="900" dirty="0"/>
+          </a:p>
+        </p:txBody>
+      </p:sp>
+      <p:sp>
+        <p:nvSpPr>
+          <p:cNvPr id="38" name="Text 35"/>
+          <p:cNvSpPr txBox="1"/>
+          <p:nvPr/>
+        </p:nvSpPr>
+        <p:spPr>
+          <a:xfrm>
+            <a:off x="11155680" y="6473952"/>
+            <a:ext cx="640080" cy="274320"/>
+          </a:xfrm>
+          <a:prstGeom prst="rect">
+            <a:avLst/>
+          </a:prstGeom>
+          <a:noFill/>
+          <a:ln/>
+        </p:spPr>
+        <p:txBody>
+          <a:bodyPr wrap="square" lIns="0" tIns="0" rIns="0" bIns="0" rtlCol="0" anchor="ctr"/>
+          <a:lstStyle/>
+          <a:p>
+            <a:pPr algn="r" indent="0" marL="0">
+              <a:buNone/>
+            </a:pPr>
+            <a:r>
+              <a:rPr lang="en-US" sz="900" dirty="0">
+                <a:solidFill>
+                  <a:srgbClr val="A3A3A3"/>
+                </a:solidFill>
+                <a:latin typeface="Adobe Clean" pitchFamily="34" charset="0"/>
+                <a:ea typeface="Adobe Clean" pitchFamily="34" charset="-122"/>
+                <a:cs typeface="Adobe Clean" pitchFamily="34" charset="-120"/>
+              </a:rPr>
+              <a:t>4</a:t>
+            </a:r>
+            <a:endParaRPr lang="en-US" sz="900" dirty="0"/>
+          </a:p>
+        </p:txBody>
+      </p:sp>
     </p:spTree>
   </p:cSld>
   <p:clrMapOvr>
@@ -17563,6 +19178,84 @@
           </a:p>
         </p:txBody>
       </p:sp>
+      <p:sp>
+        <p:nvSpPr>
+          <p:cNvPr id="8" name="Text 5"/>
+          <p:cNvSpPr txBox="1"/>
+          <p:nvPr/>
+        </p:nvSpPr>
+        <p:spPr>
+          <a:xfrm>
+            <a:off x="457200" y="6473952"/>
+            <a:ext cx="8686800" cy="274320"/>
+          </a:xfrm>
+          <a:prstGeom prst="rect">
+            <a:avLst/>
+          </a:prstGeom>
+          <a:noFill/>
+          <a:ln/>
+        </p:spPr>
+        <p:txBody>
+          <a:bodyPr wrap="square" lIns="0" tIns="0" rIns="0" bIns="0" rtlCol="0" anchor="ctr"/>
+          <a:lstStyle/>
+          <a:p>
+            <a:pPr indent="0" marL="0">
+              <a:buNone/>
+            </a:pPr>
+            <a:r>
+              <a:rPr lang="en-US" sz="900" dirty="0">
+                <a:solidFill>
+                  <a:srgbClr val="8A8A8A"/>
+                </a:solidFill>
+                <a:latin typeface="Adobe Clean" pitchFamily="34" charset="0"/>
+                <a:ea typeface="Adobe Clean" pitchFamily="34" charset="-122"/>
+                <a:cs typeface="Adobe Clean" pitchFamily="34" charset="-120"/>
+              </a:rPr>
+              <a:t>© 2026 Adobe. All Rights Reserved. Adobe Confidential.</a:t>
+            </a:r>
+            <a:endParaRPr lang="en-US" sz="900" dirty="0"/>
+          </a:p>
+        </p:txBody>
+      </p:sp>
+      <p:sp>
+        <p:nvSpPr>
+          <p:cNvPr id="9" name="Text 6"/>
+          <p:cNvSpPr txBox="1"/>
+          <p:nvPr/>
+        </p:nvSpPr>
+        <p:spPr>
+          <a:xfrm>
+            <a:off x="11155680" y="6473952"/>
+            <a:ext cx="640080" cy="274320"/>
+          </a:xfrm>
+          <a:prstGeom prst="rect">
+            <a:avLst/>
+          </a:prstGeom>
+          <a:noFill/>
+          <a:ln/>
+        </p:spPr>
+        <p:txBody>
+          <a:bodyPr wrap="square" lIns="0" tIns="0" rIns="0" bIns="0" rtlCol="0" anchor="ctr"/>
+          <a:lstStyle/>
+          <a:p>
+            <a:pPr algn="r" indent="0" marL="0">
+              <a:buNone/>
+            </a:pPr>
+            <a:r>
+              <a:rPr lang="en-US" sz="900" dirty="0">
+                <a:solidFill>
+                  <a:srgbClr val="8A8A8A"/>
+                </a:solidFill>
+                <a:latin typeface="Adobe Clean" pitchFamily="34" charset="0"/>
+                <a:ea typeface="Adobe Clean" pitchFamily="34" charset="-122"/>
+                <a:cs typeface="Adobe Clean" pitchFamily="34" charset="-120"/>
+              </a:rPr>
+              <a:t>5</a:t>
+            </a:r>
+            <a:endParaRPr lang="en-US" sz="900" dirty="0"/>
+          </a:p>
+        </p:txBody>
+      </p:sp>
     </p:spTree>
   </p:cSld>
   <p:clrMapOvr>
@@ -18322,6 +20015,84 @@
           </a:p>
         </p:txBody>
       </p:sp>
+      <p:sp>
+        <p:nvSpPr>
+          <p:cNvPr id="24" name="Text 21"/>
+          <p:cNvSpPr txBox="1"/>
+          <p:nvPr/>
+        </p:nvSpPr>
+        <p:spPr>
+          <a:xfrm>
+            <a:off x="457200" y="6473952"/>
+            <a:ext cx="8686800" cy="274320"/>
+          </a:xfrm>
+          <a:prstGeom prst="rect">
+            <a:avLst/>
+          </a:prstGeom>
+          <a:noFill/>
+          <a:ln/>
+        </p:spPr>
+        <p:txBody>
+          <a:bodyPr wrap="square" lIns="0" tIns="0" rIns="0" bIns="0" rtlCol="0" anchor="ctr"/>
+          <a:lstStyle/>
+          <a:p>
+            <a:pPr indent="0" marL="0">
+              <a:buNone/>
+            </a:pPr>
+            <a:r>
+              <a:rPr lang="en-US" sz="900" dirty="0">
+                <a:solidFill>
+                  <a:srgbClr val="A3A3A3"/>
+                </a:solidFill>
+                <a:latin typeface="Adobe Clean" pitchFamily="34" charset="0"/>
+                <a:ea typeface="Adobe Clean" pitchFamily="34" charset="-122"/>
+                <a:cs typeface="Adobe Clean" pitchFamily="34" charset="-120"/>
+              </a:rPr>
+              <a:t>© 2026 Adobe. All Rights Reserved. Adobe Confidential.</a:t>
+            </a:r>
+            <a:endParaRPr lang="en-US" sz="900" dirty="0"/>
+          </a:p>
+        </p:txBody>
+      </p:sp>
+      <p:sp>
+        <p:nvSpPr>
+          <p:cNvPr id="25" name="Text 22"/>
+          <p:cNvSpPr txBox="1"/>
+          <p:nvPr/>
+        </p:nvSpPr>
+        <p:spPr>
+          <a:xfrm>
+            <a:off x="11155680" y="6473952"/>
+            <a:ext cx="640080" cy="274320"/>
+          </a:xfrm>
+          <a:prstGeom prst="rect">
+            <a:avLst/>
+          </a:prstGeom>
+          <a:noFill/>
+          <a:ln/>
+        </p:spPr>
+        <p:txBody>
+          <a:bodyPr wrap="square" lIns="0" tIns="0" rIns="0" bIns="0" rtlCol="0" anchor="ctr"/>
+          <a:lstStyle/>
+          <a:p>
+            <a:pPr algn="r" indent="0" marL="0">
+              <a:buNone/>
+            </a:pPr>
+            <a:r>
+              <a:rPr lang="en-US" sz="900" dirty="0">
+                <a:solidFill>
+                  <a:srgbClr val="A3A3A3"/>
+                </a:solidFill>
+                <a:latin typeface="Adobe Clean" pitchFamily="34" charset="0"/>
+                <a:ea typeface="Adobe Clean" pitchFamily="34" charset="-122"/>
+                <a:cs typeface="Adobe Clean" pitchFamily="34" charset="-120"/>
+              </a:rPr>
+              <a:t>6</a:t>
+            </a:r>
+            <a:endParaRPr lang="en-US" sz="900" dirty="0"/>
+          </a:p>
+        </p:txBody>
+      </p:sp>
     </p:spTree>
   </p:cSld>
   <p:clrMapOvr>
@@ -18918,6 +20689,84 @@
           </a:p>
         </p:txBody>
       </p:sp>
+      <p:sp>
+        <p:nvSpPr>
+          <p:cNvPr id="19" name="Text 16"/>
+          <p:cNvSpPr txBox="1"/>
+          <p:nvPr/>
+        </p:nvSpPr>
+        <p:spPr>
+          <a:xfrm>
+            <a:off x="457200" y="6473952"/>
+            <a:ext cx="8686800" cy="274320"/>
+          </a:xfrm>
+          <a:prstGeom prst="rect">
+            <a:avLst/>
+          </a:prstGeom>
+          <a:noFill/>
+          <a:ln/>
+        </p:spPr>
+        <p:txBody>
+          <a:bodyPr wrap="square" lIns="0" tIns="0" rIns="0" bIns="0" rtlCol="0" anchor="ctr"/>
+          <a:lstStyle/>
+          <a:p>
+            <a:pPr indent="0" marL="0">
+              <a:buNone/>
+            </a:pPr>
+            <a:r>
+              <a:rPr lang="en-US" sz="900" dirty="0">
+                <a:solidFill>
+                  <a:srgbClr val="A3A3A3"/>
+                </a:solidFill>
+                <a:latin typeface="Adobe Clean" pitchFamily="34" charset="0"/>
+                <a:ea typeface="Adobe Clean" pitchFamily="34" charset="-122"/>
+                <a:cs typeface="Adobe Clean" pitchFamily="34" charset="-120"/>
+              </a:rPr>
+              <a:t>© 2026 Adobe. All Rights Reserved. Adobe Confidential.</a:t>
+            </a:r>
+            <a:endParaRPr lang="en-US" sz="900" dirty="0"/>
+          </a:p>
+        </p:txBody>
+      </p:sp>
+      <p:sp>
+        <p:nvSpPr>
+          <p:cNvPr id="20" name="Text 17"/>
+          <p:cNvSpPr txBox="1"/>
+          <p:nvPr/>
+        </p:nvSpPr>
+        <p:spPr>
+          <a:xfrm>
+            <a:off x="11155680" y="6473952"/>
+            <a:ext cx="640080" cy="274320"/>
+          </a:xfrm>
+          <a:prstGeom prst="rect">
+            <a:avLst/>
+          </a:prstGeom>
+          <a:noFill/>
+          <a:ln/>
+        </p:spPr>
+        <p:txBody>
+          <a:bodyPr wrap="square" lIns="0" tIns="0" rIns="0" bIns="0" rtlCol="0" anchor="ctr"/>
+          <a:lstStyle/>
+          <a:p>
+            <a:pPr algn="r" indent="0" marL="0">
+              <a:buNone/>
+            </a:pPr>
+            <a:r>
+              <a:rPr lang="en-US" sz="900" dirty="0">
+                <a:solidFill>
+                  <a:srgbClr val="A3A3A3"/>
+                </a:solidFill>
+                <a:latin typeface="Adobe Clean" pitchFamily="34" charset="0"/>
+                <a:ea typeface="Adobe Clean" pitchFamily="34" charset="-122"/>
+                <a:cs typeface="Adobe Clean" pitchFamily="34" charset="-120"/>
+              </a:rPr>
+              <a:t>7</a:t>
+            </a:r>
+            <a:endParaRPr lang="en-US" sz="900" dirty="0"/>
+          </a:p>
+        </p:txBody>
+      </p:sp>
     </p:spTree>
   </p:cSld>
   <p:clrMapOvr>
@@ -19625,6 +21474,84 @@
           </a:p>
         </p:txBody>
       </p:sp>
+      <p:sp>
+        <p:nvSpPr>
+          <p:cNvPr id="21" name="Text 18"/>
+          <p:cNvSpPr txBox="1"/>
+          <p:nvPr/>
+        </p:nvSpPr>
+        <p:spPr>
+          <a:xfrm>
+            <a:off x="457200" y="6473952"/>
+            <a:ext cx="8686800" cy="274320"/>
+          </a:xfrm>
+          <a:prstGeom prst="rect">
+            <a:avLst/>
+          </a:prstGeom>
+          <a:noFill/>
+          <a:ln/>
+        </p:spPr>
+        <p:txBody>
+          <a:bodyPr wrap="square" lIns="0" tIns="0" rIns="0" bIns="0" rtlCol="0" anchor="ctr"/>
+          <a:lstStyle/>
+          <a:p>
+            <a:pPr indent="0" marL="0">
+              <a:buNone/>
+            </a:pPr>
+            <a:r>
+              <a:rPr lang="en-US" sz="900" dirty="0">
+                <a:solidFill>
+                  <a:srgbClr val="A3A3A3"/>
+                </a:solidFill>
+                <a:latin typeface="Adobe Clean" pitchFamily="34" charset="0"/>
+                <a:ea typeface="Adobe Clean" pitchFamily="34" charset="-122"/>
+                <a:cs typeface="Adobe Clean" pitchFamily="34" charset="-120"/>
+              </a:rPr>
+              <a:t>© 2026 Adobe. All Rights Reserved. Adobe Confidential.</a:t>
+            </a:r>
+            <a:endParaRPr lang="en-US" sz="900" dirty="0"/>
+          </a:p>
+        </p:txBody>
+      </p:sp>
+      <p:sp>
+        <p:nvSpPr>
+          <p:cNvPr id="22" name="Text 19"/>
+          <p:cNvSpPr txBox="1"/>
+          <p:nvPr/>
+        </p:nvSpPr>
+        <p:spPr>
+          <a:xfrm>
+            <a:off x="11155680" y="6473952"/>
+            <a:ext cx="640080" cy="274320"/>
+          </a:xfrm>
+          <a:prstGeom prst="rect">
+            <a:avLst/>
+          </a:prstGeom>
+          <a:noFill/>
+          <a:ln/>
+        </p:spPr>
+        <p:txBody>
+          <a:bodyPr wrap="square" lIns="0" tIns="0" rIns="0" bIns="0" rtlCol="0" anchor="ctr"/>
+          <a:lstStyle/>
+          <a:p>
+            <a:pPr algn="r" indent="0" marL="0">
+              <a:buNone/>
+            </a:pPr>
+            <a:r>
+              <a:rPr lang="en-US" sz="900" dirty="0">
+                <a:solidFill>
+                  <a:srgbClr val="A3A3A3"/>
+                </a:solidFill>
+                <a:latin typeface="Adobe Clean" pitchFamily="34" charset="0"/>
+                <a:ea typeface="Adobe Clean" pitchFamily="34" charset="-122"/>
+                <a:cs typeface="Adobe Clean" pitchFamily="34" charset="-120"/>
+              </a:rPr>
+              <a:t>8</a:t>
+            </a:r>
+            <a:endParaRPr lang="en-US" sz="900" dirty="0"/>
+          </a:p>
+        </p:txBody>
+      </p:sp>
     </p:spTree>
   </p:cSld>
   <p:clrMapOvr>
@@ -20299,6 +22226,84 @@
               <a:t>⚠️  Event listens for the data-layer name (purchase). Action Type = the XDM eventType (commerce.purchases). Don't mix them up!</a:t>
             </a:r>
             <a:endParaRPr lang="en-US" sz="1350" dirty="0"/>
+          </a:p>
+        </p:txBody>
+      </p:sp>
+      <p:sp>
+        <p:nvSpPr>
+          <p:cNvPr id="21" name="Text 18"/>
+          <p:cNvSpPr txBox="1"/>
+          <p:nvPr/>
+        </p:nvSpPr>
+        <p:spPr>
+          <a:xfrm>
+            <a:off x="457200" y="6473952"/>
+            <a:ext cx="8686800" cy="274320"/>
+          </a:xfrm>
+          <a:prstGeom prst="rect">
+            <a:avLst/>
+          </a:prstGeom>
+          <a:noFill/>
+          <a:ln/>
+        </p:spPr>
+        <p:txBody>
+          <a:bodyPr wrap="square" lIns="0" tIns="0" rIns="0" bIns="0" rtlCol="0" anchor="ctr"/>
+          <a:lstStyle/>
+          <a:p>
+            <a:pPr indent="0" marL="0">
+              <a:buNone/>
+            </a:pPr>
+            <a:r>
+              <a:rPr lang="en-US" sz="900" dirty="0">
+                <a:solidFill>
+                  <a:srgbClr val="A3A3A3"/>
+                </a:solidFill>
+                <a:latin typeface="Adobe Clean" pitchFamily="34" charset="0"/>
+                <a:ea typeface="Adobe Clean" pitchFamily="34" charset="-122"/>
+                <a:cs typeface="Adobe Clean" pitchFamily="34" charset="-120"/>
+              </a:rPr>
+              <a:t>© 2026 Adobe. All Rights Reserved. Adobe Confidential.</a:t>
+            </a:r>
+            <a:endParaRPr lang="en-US" sz="900" dirty="0"/>
+          </a:p>
+        </p:txBody>
+      </p:sp>
+      <p:sp>
+        <p:nvSpPr>
+          <p:cNvPr id="22" name="Text 19"/>
+          <p:cNvSpPr txBox="1"/>
+          <p:nvPr/>
+        </p:nvSpPr>
+        <p:spPr>
+          <a:xfrm>
+            <a:off x="11155680" y="6473952"/>
+            <a:ext cx="640080" cy="274320"/>
+          </a:xfrm>
+          <a:prstGeom prst="rect">
+            <a:avLst/>
+          </a:prstGeom>
+          <a:noFill/>
+          <a:ln/>
+        </p:spPr>
+        <p:txBody>
+          <a:bodyPr wrap="square" lIns="0" tIns="0" rIns="0" bIns="0" rtlCol="0" anchor="ctr"/>
+          <a:lstStyle/>
+          <a:p>
+            <a:pPr algn="r" indent="0" marL="0">
+              <a:buNone/>
+            </a:pPr>
+            <a:r>
+              <a:rPr lang="en-US" sz="900" dirty="0">
+                <a:solidFill>
+                  <a:srgbClr val="A3A3A3"/>
+                </a:solidFill>
+                <a:latin typeface="Adobe Clean" pitchFamily="34" charset="0"/>
+                <a:ea typeface="Adobe Clean" pitchFamily="34" charset="-122"/>
+                <a:cs typeface="Adobe Clean" pitchFamily="34" charset="-120"/>
+              </a:rPr>
+              <a:t>9</a:t>
+            </a:r>
+            <a:endParaRPr lang="en-US" sz="900" dirty="0"/>
           </a:p>
         </p:txBody>
       </p:sp>
